--- a/site/downloads/pixan-bank-deck-medium-fi.pptx
+++ b/site/downloads/pixan-bank-deck-medium-fi.pptx
@@ -3368,7 +3368,7 @@
                 </a:solidFill>
                 <a:latin typeface="Aptos"/>
               </a:rPr>
-              <a:t>2026.07.22-7</a:t>
+              <a:t>2026.07.22-8</a:t>
             </a:r>
           </a:p>
         </p:txBody>
@@ -3757,7 +3757,7 @@
                 </a:solidFill>
                 <a:latin typeface="Aptos"/>
               </a:rPr>
-              <a:t>Julkinen riippumaton evidenssikooste · 2026.07.22-7 · 2026-07-22 · Lähteet: WIPO licensing; dispute resolution; IPscore</a:t>
+              <a:t>Julkinen riippumaton evidenssikooste · 2026.07.22-8 · 2026-07-22 · Lähteet: WIPO licensing; dispute resolution; IPscore</a:t>
             </a:r>
           </a:p>
         </p:txBody>
@@ -4648,7 +4648,7 @@
                 </a:solidFill>
                 <a:latin typeface="Aptos"/>
               </a:rPr>
-              <a:t>Julkinen riippumaton evidenssikooste · 2026.07.22-7 · 2026-07-22 · Lähteet: WIPO IP valuation; Market-values</a:t>
+              <a:t>Julkinen riippumaton evidenssikooste · 2026.07.22-8 · 2026-07-22 · Lähteet: WIPO IP valuation; Market-values</a:t>
             </a:r>
           </a:p>
         </p:txBody>
@@ -5438,7 +5438,7 @@
                 </a:solidFill>
                 <a:latin typeface="Aptos"/>
               </a:rPr>
-              <a:t>Versio 2026.07.22-7 · 2026-07-22 · 12 / 12</a:t>
+              <a:t>Versio 2026.07.22-8 · 2026-07-22 · 12 / 12</a:t>
             </a:r>
           </a:p>
         </p:txBody>
@@ -5686,7 +5686,7 @@
                 </a:solidFill>
                 <a:latin typeface="Aptos"/>
               </a:rPr>
-              <a:t>Julkinen riippumaton evidenssikooste · 2026.07.22-7 · 2026-07-22 · Lähteet: Atlas readiness; WIPO</a:t>
+              <a:t>Julkinen riippumaton evidenssikooste · 2026.07.22-8 · 2026-07-22 · Lähteet: Atlas readiness; WIPO</a:t>
             </a:r>
           </a:p>
         </p:txBody>
@@ -6166,7 +6166,7 @@
                 </a:solidFill>
                 <a:latin typeface="Aptos"/>
               </a:rPr>
-              <a:t>Julkinen riippumaton evidenssikooste · 2026.07.22-7 · 2026-07-22 · Lähteet: EP3032975B2</a:t>
+              <a:t>Julkinen riippumaton evidenssikooste · 2026.07.22-8 · 2026-07-22 · Lähteet: EP3032975B2</a:t>
             </a:r>
           </a:p>
         </p:txBody>
@@ -6646,7 +6646,7 @@
                 </a:solidFill>
                 <a:latin typeface="Aptos"/>
               </a:rPr>
-              <a:t>Julkinen riippumaton evidenssikooste · 2026.07.22-7 · 2026-07-22 · Lähteet: EPO Register; EP3032975B2</a:t>
+              <a:t>Julkinen riippumaton evidenssikooste · 2026.07.22-8 · 2026-07-22 · Lähteet: EPO Register; EP3032975B2</a:t>
             </a:r>
           </a:p>
         </p:txBody>
@@ -7067,7 +7067,7 @@
                 </a:solidFill>
                 <a:latin typeface="Aptos"/>
               </a:rPr>
-              <a:t>EPO pysytti patentin muutettuna; B2 julkaistiin 24.4.2024.</a:t>
+              <a:t>EPO-rekisteri: patentti pysytetty muutettuna väitemenettelyn jälkeen; B2-patenttijulkaisu julkaistu. B2 julkaistiin 24.4.2024.</a:t>
             </a:r>
           </a:p>
         </p:txBody>
@@ -7184,7 +7184,7 @@
                 </a:solidFill>
                 <a:latin typeface="Aptos"/>
               </a:rPr>
-              <a:t>Julkinen rekisteri nimeää Pixan Oy:n haltijaksi. Koko perheen nykyistä kansallista voimassaoloa, maksuja ja rasitteita ei ole vielä varmennettu.</a:t>
+              <a:t>Julkisen rekisterin kirjattu haltija: Pixan Oy. Koko perheen nykyistä kansallista voimassaoloa, maksuja ja rasitteita ei ole vielä varmennettu.</a:t>
             </a:r>
           </a:p>
         </p:txBody>
@@ -7397,7 +7397,7 @@
                 </a:solidFill>
                 <a:latin typeface="Aptos"/>
               </a:rPr>
-              <a:t>Julkinen riippumaton evidenssikooste · 2026.07.22-7 · 2026-07-22 · Lähteet: EP3032975B2; DE 7 O 3341/24</a:t>
+              <a:t>Julkinen riippumaton evidenssikooste · 2026.07.22-8 · 2026-07-22 · Lähteet: EP3032975B2; 7 O 3341/24</a:t>
             </a:r>
           </a:p>
         </p:txBody>
@@ -7528,7 +7528,7 @@
               </a:defRPr>
             </a:pPr>
             <a:r>
-              <a:t>•  Saksan ratkaisu tukee tiettyjen tuotteiden ja vaatimusten 1 sekä 6 kytkentää.</a:t>
+              <a:t>•  Saksa: ratkaisu tukee tiettyjen tuotteiden ja vaatimusten 1 ja 6 kytkentää.</a:t>
             </a:r>
           </a:p>
           <a:p>
@@ -7877,7 +7877,7 @@
                 </a:solidFill>
                 <a:latin typeface="Aptos"/>
               </a:rPr>
-              <a:t>Julkinen riippumaton evidenssikooste · 2026.07.22-7 · 2026-07-22 · Lähteet: Market-values; IMARC; GVR; Fortune</a:t>
+              <a:t>Julkinen riippumaton evidenssikooste · 2026.07.22-8 · 2026-07-22 · Lähteet: Market-values; IMARC; GVR; Fortune</a:t>
             </a:r>
           </a:p>
         </p:txBody>
@@ -8228,7 +8228,7 @@
                 </a:solidFill>
                 <a:latin typeface="Aptos"/>
               </a:rPr>
-              <a:t>$26,0–46,32 mrd</a:t>
+              <a:t>26,0–46,32 mrd USD</a:t>
             </a:r>
           </a:p>
         </p:txBody>
@@ -8298,7 +8298,7 @@
                 </a:solidFill>
                 <a:latin typeface="Aptos"/>
               </a:rPr>
-              <a:t>Saksan matalan luottamuksen nestemalli on 667.9 M€–1 654.6 M€; sitä ei saa esittää havaittuna myyntinä.</a:t>
+              <a:t>Saksa: nestemallin luottamustaso on matala ja vaihteluväli 667,92 milj. EUR–1 654,62 milj. EUR; sitä ei saa esittää havaittuna myyntinä.</a:t>
             </a:r>
           </a:p>
         </p:txBody>
@@ -8628,7 +8628,7 @@
                 </a:solidFill>
                 <a:latin typeface="Aptos"/>
               </a:rPr>
-              <a:t>Julkinen riippumaton evidenssikooste · 2026.07.22-7 · 2026-07-22 · Lähteet: WIPO licensing; WIPO IP Finance</a:t>
+              <a:t>Julkinen riippumaton evidenssikooste · 2026.07.22-8 · 2026-07-22 · Lähteet: WIPO licensing; WIPO IP Finance</a:t>
             </a:r>
           </a:p>
         </p:txBody>
@@ -9108,7 +9108,7 @@
                 </a:solidFill>
                 <a:latin typeface="Aptos"/>
               </a:rPr>
-              <a:t>Julkinen riippumaton evidenssikooste · 2026.07.22-7 · 2026-07-22 · Lähteet: Evidence Register; EPO; WIPO</a:t>
+              <a:t>Julkinen riippumaton evidenssikooste · 2026.07.22-8 · 2026-07-22 · Lähteet: Evidence Register; EPO; WIPO</a:t>
             </a:r>
           </a:p>
         </p:txBody>
@@ -9788,7 +9788,7 @@
                 </a:solidFill>
                 <a:latin typeface="Aptos"/>
               </a:rPr>
-              <a:t>Julkinen riippumaton evidenssikooste · 2026.07.22-7 · 2026-07-22 · Lähteet: Evidence Register</a:t>
+              <a:t>Julkinen riippumaton evidenssikooste · 2026.07.22-8 · 2026-07-22 · Lähteet: Evidence Register</a:t>
             </a:r>
           </a:p>
         </p:txBody>

--- a/site/downloads/pixan-bank-deck-medium-fi.pptx
+++ b/site/downloads/pixan-bank-deck-medium-fi.pptx
@@ -3368,7 +3368,7 @@
                 </a:solidFill>
                 <a:latin typeface="Aptos"/>
               </a:rPr>
-              <a:t>2026.07.22-8</a:t>
+              <a:t>2026.07.22-9</a:t>
             </a:r>
           </a:p>
         </p:txBody>
@@ -3757,7 +3757,7 @@
                 </a:solidFill>
                 <a:latin typeface="Aptos"/>
               </a:rPr>
-              <a:t>Julkinen riippumaton evidenssikooste · 2026.07.22-8 · 2026-07-22 · Lähteet: WIPO licensing; dispute resolution; IPscore</a:t>
+              <a:t>Julkinen riippumaton evidenssikooste · 2026.07.22-9 · 2026-07-22 · Lähteet: WIPO licensing; dispute resolution; IPscore</a:t>
             </a:r>
           </a:p>
         </p:txBody>
@@ -4648,7 +4648,7 @@
                 </a:solidFill>
                 <a:latin typeface="Aptos"/>
               </a:rPr>
-              <a:t>Julkinen riippumaton evidenssikooste · 2026.07.22-8 · 2026-07-22 · Lähteet: WIPO IP valuation; Market-values</a:t>
+              <a:t>Julkinen riippumaton evidenssikooste · 2026.07.22-9 · 2026-07-22 · Lähteet: WIPO IP valuation; Market-values</a:t>
             </a:r>
           </a:p>
         </p:txBody>
@@ -5438,7 +5438,7 @@
                 </a:solidFill>
                 <a:latin typeface="Aptos"/>
               </a:rPr>
-              <a:t>Versio 2026.07.22-8 · 2026-07-22 · 12 / 12</a:t>
+              <a:t>Versio 2026.07.22-9 · 2026-07-22 · 12 / 12</a:t>
             </a:r>
           </a:p>
         </p:txBody>
@@ -5686,7 +5686,7 @@
                 </a:solidFill>
                 <a:latin typeface="Aptos"/>
               </a:rPr>
-              <a:t>Julkinen riippumaton evidenssikooste · 2026.07.22-8 · 2026-07-22 · Lähteet: Atlas readiness; WIPO</a:t>
+              <a:t>Julkinen riippumaton evidenssikooste · 2026.07.22-9 · 2026-07-22 · Lähteet: Atlas readiness; WIPO</a:t>
             </a:r>
           </a:p>
         </p:txBody>
@@ -6166,7 +6166,7 @@
                 </a:solidFill>
                 <a:latin typeface="Aptos"/>
               </a:rPr>
-              <a:t>Julkinen riippumaton evidenssikooste · 2026.07.22-8 · 2026-07-22 · Lähteet: EP3032975B2</a:t>
+              <a:t>Julkinen riippumaton evidenssikooste · 2026.07.22-9 · 2026-07-22 · Lähteet: EP3032975B2</a:t>
             </a:r>
           </a:p>
         </p:txBody>
@@ -6646,7 +6646,7 @@
                 </a:solidFill>
                 <a:latin typeface="Aptos"/>
               </a:rPr>
-              <a:t>Julkinen riippumaton evidenssikooste · 2026.07.22-8 · 2026-07-22 · Lähteet: EPO Register; EP3032975B2</a:t>
+              <a:t>Julkinen riippumaton evidenssikooste · 2026.07.22-9 · 2026-07-22 · Lähteet: EPO Register; EP3032975B2</a:t>
             </a:r>
           </a:p>
         </p:txBody>
@@ -7397,7 +7397,7 @@
                 </a:solidFill>
                 <a:latin typeface="Aptos"/>
               </a:rPr>
-              <a:t>Julkinen riippumaton evidenssikooste · 2026.07.22-8 · 2026-07-22 · Lähteet: EP3032975B2; 7 O 3341/24</a:t>
+              <a:t>Julkinen riippumaton evidenssikooste · 2026.07.22-9 · 2026-07-22 · Lähteet: EP3032975B2; 7 O 3341/24</a:t>
             </a:r>
           </a:p>
         </p:txBody>
@@ -7877,7 +7877,7 @@
                 </a:solidFill>
                 <a:latin typeface="Aptos"/>
               </a:rPr>
-              <a:t>Julkinen riippumaton evidenssikooste · 2026.07.22-8 · 2026-07-22 · Lähteet: Market-values; IMARC; GVR; Fortune</a:t>
+              <a:t>Julkinen riippumaton evidenssikooste · 2026.07.22-9 · 2026-07-22 · Lähteet: Market-values; IMARC; GVR; Fortune</a:t>
             </a:r>
           </a:p>
         </p:txBody>
@@ -8628,7 +8628,7 @@
                 </a:solidFill>
                 <a:latin typeface="Aptos"/>
               </a:rPr>
-              <a:t>Julkinen riippumaton evidenssikooste · 2026.07.22-8 · 2026-07-22 · Lähteet: WIPO licensing; WIPO IP Finance</a:t>
+              <a:t>Julkinen riippumaton evidenssikooste · 2026.07.22-9 · 2026-07-22 · Lähteet: WIPO licensing; WIPO IP Finance</a:t>
             </a:r>
           </a:p>
         </p:txBody>
@@ -9108,7 +9108,7 @@
                 </a:solidFill>
                 <a:latin typeface="Aptos"/>
               </a:rPr>
-              <a:t>Julkinen riippumaton evidenssikooste · 2026.07.22-8 · 2026-07-22 · Lähteet: Evidence Register; EPO; WIPO</a:t>
+              <a:t>Julkinen riippumaton evidenssikooste · 2026.07.22-9 · 2026-07-22 · Lähteet: Evidence Register; EPO; WIPO</a:t>
             </a:r>
           </a:p>
         </p:txBody>
@@ -9788,7 +9788,7 @@
                 </a:solidFill>
                 <a:latin typeface="Aptos"/>
               </a:rPr>
-              <a:t>Julkinen riippumaton evidenssikooste · 2026.07.22-8 · 2026-07-22 · Lähteet: Evidence Register</a:t>
+              <a:t>Julkinen riippumaton evidenssikooste · 2026.07.22-9 · 2026-07-22 · Lähteet: Evidence Register</a:t>
             </a:r>
           </a:p>
         </p:txBody>

--- a/site/downloads/pixan-bank-deck-medium-fi.pptx
+++ b/site/downloads/pixan-bank-deck-medium-fi.pptx
@@ -3368,7 +3368,7 @@
                 </a:solidFill>
                 <a:latin typeface="Aptos"/>
               </a:rPr>
-              <a:t>2026.07.22-9</a:t>
+              <a:t>2026.07.23-10</a:t>
             </a:r>
           </a:p>
         </p:txBody>
@@ -3757,7 +3757,7 @@
                 </a:solidFill>
                 <a:latin typeface="Aptos"/>
               </a:rPr>
-              <a:t>Julkinen riippumaton evidenssikooste · 2026.07.22-9 · 2026-07-22 · Lähteet: WIPO licensing; dispute resolution; IPscore</a:t>
+              <a:t>Julkinen riippumaton evidenssikooste · 2026.07.23-10 · 2026-07-22 · Lähteet: WIPO licensing; dispute resolution; IPscore</a:t>
             </a:r>
           </a:p>
         </p:txBody>
@@ -4648,7 +4648,7 @@
                 </a:solidFill>
                 <a:latin typeface="Aptos"/>
               </a:rPr>
-              <a:t>Julkinen riippumaton evidenssikooste · 2026.07.22-9 · 2026-07-22 · Lähteet: WIPO IP valuation; Market-values</a:t>
+              <a:t>Julkinen riippumaton evidenssikooste · 2026.07.23-10 · 2026-07-22 · Lähteet: WIPO IP valuation; Market-values</a:t>
             </a:r>
           </a:p>
         </p:txBody>
@@ -5438,7 +5438,7 @@
                 </a:solidFill>
                 <a:latin typeface="Aptos"/>
               </a:rPr>
-              <a:t>Versio 2026.07.22-9 · 2026-07-22 · 12 / 12</a:t>
+              <a:t>Versio 2026.07.23-10 · 2026-07-22 · 12 / 12</a:t>
             </a:r>
           </a:p>
         </p:txBody>
@@ -5686,7 +5686,7 @@
                 </a:solidFill>
                 <a:latin typeface="Aptos"/>
               </a:rPr>
-              <a:t>Julkinen riippumaton evidenssikooste · 2026.07.22-9 · 2026-07-22 · Lähteet: Atlas readiness; WIPO</a:t>
+              <a:t>Julkinen riippumaton evidenssikooste · 2026.07.23-10 · 2026-07-22 · Lähteet: Atlas readiness; WIPO</a:t>
             </a:r>
           </a:p>
         </p:txBody>
@@ -6166,7 +6166,7 @@
                 </a:solidFill>
                 <a:latin typeface="Aptos"/>
               </a:rPr>
-              <a:t>Julkinen riippumaton evidenssikooste · 2026.07.22-9 · 2026-07-22 · Lähteet: EP3032975B2</a:t>
+              <a:t>Julkinen riippumaton evidenssikooste · 2026.07.23-10 · 2026-07-22 · Lähteet: EP3032975B2</a:t>
             </a:r>
           </a:p>
         </p:txBody>
@@ -6646,7 +6646,7 @@
                 </a:solidFill>
                 <a:latin typeface="Aptos"/>
               </a:rPr>
-              <a:t>Julkinen riippumaton evidenssikooste · 2026.07.22-9 · 2026-07-22 · Lähteet: EPO Register; EP3032975B2</a:t>
+              <a:t>Julkinen riippumaton evidenssikooste · 2026.07.23-10 · 2026-07-22 · Lähteet: EPO Register; EP3032975B2</a:t>
             </a:r>
           </a:p>
         </p:txBody>
@@ -7397,7 +7397,7 @@
                 </a:solidFill>
                 <a:latin typeface="Aptos"/>
               </a:rPr>
-              <a:t>Julkinen riippumaton evidenssikooste · 2026.07.22-9 · 2026-07-22 · Lähteet: EP3032975B2; 7 O 3341/24</a:t>
+              <a:t>Julkinen riippumaton evidenssikooste · 2026.07.23-10 · 2026-07-22 · Lähteet: EP3032975B2; 7 O 3341/24</a:t>
             </a:r>
           </a:p>
         </p:txBody>
@@ -7877,7 +7877,7 @@
                 </a:solidFill>
                 <a:latin typeface="Aptos"/>
               </a:rPr>
-              <a:t>Julkinen riippumaton evidenssikooste · 2026.07.22-9 · 2026-07-22 · Lähteet: Market-values; IMARC; GVR; Fortune</a:t>
+              <a:t>Julkinen riippumaton evidenssikooste · 2026.07.23-10 · 2026-07-22 · Lähteet: Market-values; IMARC; GVR; Fortune</a:t>
             </a:r>
           </a:p>
         </p:txBody>
@@ -8628,7 +8628,7 @@
                 </a:solidFill>
                 <a:latin typeface="Aptos"/>
               </a:rPr>
-              <a:t>Julkinen riippumaton evidenssikooste · 2026.07.22-9 · 2026-07-22 · Lähteet: WIPO licensing; WIPO IP Finance</a:t>
+              <a:t>Julkinen riippumaton evidenssikooste · 2026.07.23-10 · 2026-07-22 · Lähteet: WIPO licensing; WIPO IP Finance</a:t>
             </a:r>
           </a:p>
         </p:txBody>
@@ -9108,7 +9108,7 @@
                 </a:solidFill>
                 <a:latin typeface="Aptos"/>
               </a:rPr>
-              <a:t>Julkinen riippumaton evidenssikooste · 2026.07.22-9 · 2026-07-22 · Lähteet: Evidence Register; EPO; WIPO</a:t>
+              <a:t>Julkinen riippumaton evidenssikooste · 2026.07.23-10 · 2026-07-22 · Lähteet: Evidence Register; EPO; WIPO</a:t>
             </a:r>
           </a:p>
         </p:txBody>
@@ -9788,7 +9788,7 @@
                 </a:solidFill>
                 <a:latin typeface="Aptos"/>
               </a:rPr>
-              <a:t>Julkinen riippumaton evidenssikooste · 2026.07.22-9 · 2026-07-22 · Lähteet: Evidence Register</a:t>
+              <a:t>Julkinen riippumaton evidenssikooste · 2026.07.23-10 · 2026-07-22 · Lähteet: Evidence Register</a:t>
             </a:r>
           </a:p>
         </p:txBody>

--- a/site/downloads/pixan-bank-deck-medium-fi.pptx
+++ b/site/downloads/pixan-bank-deck-medium-fi.pptx
@@ -3368,7 +3368,7 @@
                 </a:solidFill>
                 <a:latin typeface="Aptos"/>
               </a:rPr>
-              <a:t>2026.07.23-10</a:t>
+              <a:t>2026.07.23-11</a:t>
             </a:r>
           </a:p>
         </p:txBody>
@@ -3757,7 +3757,7 @@
                 </a:solidFill>
                 <a:latin typeface="Aptos"/>
               </a:rPr>
-              <a:t>Julkinen riippumaton evidenssikooste · 2026.07.23-10 · 2026-07-22 · Lähteet: WIPO licensing; dispute resolution; IPscore</a:t>
+              <a:t>Julkinen riippumaton evidenssikooste · 2026.07.23-11 · 2026-07-22 · Lähteet: WIPO licensing; dispute resolution; IPscore</a:t>
             </a:r>
           </a:p>
         </p:txBody>
@@ -4648,7 +4648,7 @@
                 </a:solidFill>
                 <a:latin typeface="Aptos"/>
               </a:rPr>
-              <a:t>Julkinen riippumaton evidenssikooste · 2026.07.23-10 · 2026-07-22 · Lähteet: WIPO IP valuation; Market-values</a:t>
+              <a:t>Julkinen riippumaton evidenssikooste · 2026.07.23-11 · 2026-07-22 · Lähteet: WIPO IP valuation; Market-values</a:t>
             </a:r>
           </a:p>
         </p:txBody>
@@ -5438,7 +5438,7 @@
                 </a:solidFill>
                 <a:latin typeface="Aptos"/>
               </a:rPr>
-              <a:t>Versio 2026.07.23-10 · 2026-07-22 · 12 / 12</a:t>
+              <a:t>Versio 2026.07.23-11 · 2026-07-22 · 12 / 12</a:t>
             </a:r>
           </a:p>
         </p:txBody>
@@ -5686,7 +5686,7 @@
                 </a:solidFill>
                 <a:latin typeface="Aptos"/>
               </a:rPr>
-              <a:t>Julkinen riippumaton evidenssikooste · 2026.07.23-10 · 2026-07-22 · Lähteet: Atlas readiness; WIPO</a:t>
+              <a:t>Julkinen riippumaton evidenssikooste · 2026.07.23-11 · 2026-07-22 · Lähteet: Atlas readiness; WIPO</a:t>
             </a:r>
           </a:p>
         </p:txBody>
@@ -6166,7 +6166,7 @@
                 </a:solidFill>
                 <a:latin typeface="Aptos"/>
               </a:rPr>
-              <a:t>Julkinen riippumaton evidenssikooste · 2026.07.23-10 · 2026-07-22 · Lähteet: EP3032975B2</a:t>
+              <a:t>Julkinen riippumaton evidenssikooste · 2026.07.23-11 · 2026-07-22 · Lähteet: EP3032975B2</a:t>
             </a:r>
           </a:p>
         </p:txBody>
@@ -6646,7 +6646,7 @@
                 </a:solidFill>
                 <a:latin typeface="Aptos"/>
               </a:rPr>
-              <a:t>Julkinen riippumaton evidenssikooste · 2026.07.23-10 · 2026-07-22 · Lähteet: EPO Register; EP3032975B2</a:t>
+              <a:t>Julkinen riippumaton evidenssikooste · 2026.07.23-11 · 2026-07-22 · Lähteet: EPO Register; EP3032975B2</a:t>
             </a:r>
           </a:p>
         </p:txBody>
@@ -7397,7 +7397,7 @@
                 </a:solidFill>
                 <a:latin typeface="Aptos"/>
               </a:rPr>
-              <a:t>Julkinen riippumaton evidenssikooste · 2026.07.23-10 · 2026-07-22 · Lähteet: EP3032975B2; 7 O 3341/24</a:t>
+              <a:t>Julkinen riippumaton evidenssikooste · 2026.07.23-11 · 2026-07-22 · Lähteet: EP3032975B2; 7 O 3341/24</a:t>
             </a:r>
           </a:p>
         </p:txBody>
@@ -7877,7 +7877,7 @@
                 </a:solidFill>
                 <a:latin typeface="Aptos"/>
               </a:rPr>
-              <a:t>Julkinen riippumaton evidenssikooste · 2026.07.23-10 · 2026-07-22 · Lähteet: Market-values; IMARC; GVR; Fortune</a:t>
+              <a:t>Julkinen riippumaton evidenssikooste · 2026.07.23-11 · 2026-07-22 · Lähteet: Market-values; IMARC; GVR; Fortune</a:t>
             </a:r>
           </a:p>
         </p:txBody>
@@ -8628,7 +8628,7 @@
                 </a:solidFill>
                 <a:latin typeface="Aptos"/>
               </a:rPr>
-              <a:t>Julkinen riippumaton evidenssikooste · 2026.07.23-10 · 2026-07-22 · Lähteet: WIPO licensing; WIPO IP Finance</a:t>
+              <a:t>Julkinen riippumaton evidenssikooste · 2026.07.23-11 · 2026-07-22 · Lähteet: WIPO licensing; WIPO IP Finance</a:t>
             </a:r>
           </a:p>
         </p:txBody>
@@ -9108,7 +9108,7 @@
                 </a:solidFill>
                 <a:latin typeface="Aptos"/>
               </a:rPr>
-              <a:t>Julkinen riippumaton evidenssikooste · 2026.07.23-10 · 2026-07-22 · Lähteet: Evidence Register; EPO; WIPO</a:t>
+              <a:t>Julkinen riippumaton evidenssikooste · 2026.07.23-11 · 2026-07-22 · Lähteet: Evidence Register; EPO; WIPO</a:t>
             </a:r>
           </a:p>
         </p:txBody>
@@ -9788,7 +9788,7 @@
                 </a:solidFill>
                 <a:latin typeface="Aptos"/>
               </a:rPr>
-              <a:t>Julkinen riippumaton evidenssikooste · 2026.07.23-10 · 2026-07-22 · Lähteet: Evidence Register</a:t>
+              <a:t>Julkinen riippumaton evidenssikooste · 2026.07.23-11 · 2026-07-22 · Lähteet: Evidence Register</a:t>
             </a:r>
           </a:p>
         </p:txBody>

--- a/site/downloads/pixan-bank-deck-medium-fi.pptx
+++ b/site/downloads/pixan-bank-deck-medium-fi.pptx
@@ -3368,7 +3368,7 @@
                 </a:solidFill>
                 <a:latin typeface="Aptos"/>
               </a:rPr>
-              <a:t>2026.07.23-11</a:t>
+              <a:t>2026.07.23-12</a:t>
             </a:r>
           </a:p>
         </p:txBody>
@@ -3757,7 +3757,7 @@
                 </a:solidFill>
                 <a:latin typeface="Aptos"/>
               </a:rPr>
-              <a:t>Julkinen riippumaton evidenssikooste · 2026.07.23-11 · 2026-07-22 · Lähteet: WIPO licensing; dispute resolution; IPscore</a:t>
+              <a:t>Julkinen riippumaton evidenssikooste · 2026.07.23-12 · 2026-07-22 · Lähteet: WIPO licensing; dispute resolution; IPscore</a:t>
             </a:r>
           </a:p>
         </p:txBody>
@@ -4648,7 +4648,7 @@
                 </a:solidFill>
                 <a:latin typeface="Aptos"/>
               </a:rPr>
-              <a:t>Julkinen riippumaton evidenssikooste · 2026.07.23-11 · 2026-07-22 · Lähteet: WIPO IP valuation; Market-values</a:t>
+              <a:t>Julkinen riippumaton evidenssikooste · 2026.07.23-12 · 2026-07-22 · Lähteet: WIPO IP valuation; Market-values</a:t>
             </a:r>
           </a:p>
         </p:txBody>
@@ -5438,7 +5438,7 @@
                 </a:solidFill>
                 <a:latin typeface="Aptos"/>
               </a:rPr>
-              <a:t>Versio 2026.07.23-11 · 2026-07-22 · 12 / 12</a:t>
+              <a:t>Versio 2026.07.23-12 · 2026-07-22 · 12 / 12</a:t>
             </a:r>
           </a:p>
         </p:txBody>
@@ -5686,7 +5686,7 @@
                 </a:solidFill>
                 <a:latin typeface="Aptos"/>
               </a:rPr>
-              <a:t>Julkinen riippumaton evidenssikooste · 2026.07.23-11 · 2026-07-22 · Lähteet: Atlas readiness; WIPO</a:t>
+              <a:t>Julkinen riippumaton evidenssikooste · 2026.07.23-12 · 2026-07-22 · Lähteet: Atlas readiness; WIPO</a:t>
             </a:r>
           </a:p>
         </p:txBody>
@@ -6166,7 +6166,7 @@
                 </a:solidFill>
                 <a:latin typeface="Aptos"/>
               </a:rPr>
-              <a:t>Julkinen riippumaton evidenssikooste · 2026.07.23-11 · 2026-07-22 · Lähteet: EP3032975B2</a:t>
+              <a:t>Julkinen riippumaton evidenssikooste · 2026.07.23-12 · 2026-07-22 · Lähteet: EP3032975B2</a:t>
             </a:r>
           </a:p>
         </p:txBody>
@@ -6646,7 +6646,7 @@
                 </a:solidFill>
                 <a:latin typeface="Aptos"/>
               </a:rPr>
-              <a:t>Julkinen riippumaton evidenssikooste · 2026.07.23-11 · 2026-07-22 · Lähteet: EPO Register; EP3032975B2</a:t>
+              <a:t>Julkinen riippumaton evidenssikooste · 2026.07.23-12 · 2026-07-22 · Lähteet: EPO Register; EP3032975B2</a:t>
             </a:r>
           </a:p>
         </p:txBody>
@@ -7397,7 +7397,7 @@
                 </a:solidFill>
                 <a:latin typeface="Aptos"/>
               </a:rPr>
-              <a:t>Julkinen riippumaton evidenssikooste · 2026.07.23-11 · 2026-07-22 · Lähteet: EP3032975B2; 7 O 3341/24</a:t>
+              <a:t>Julkinen riippumaton evidenssikooste · 2026.07.23-12 · 2026-07-22 · Lähteet: EP3032975B2; 7 O 3341/24</a:t>
             </a:r>
           </a:p>
         </p:txBody>
@@ -7877,7 +7877,7 @@
                 </a:solidFill>
                 <a:latin typeface="Aptos"/>
               </a:rPr>
-              <a:t>Julkinen riippumaton evidenssikooste · 2026.07.23-11 · 2026-07-22 · Lähteet: Market-values; IMARC; GVR; Fortune</a:t>
+              <a:t>Julkinen riippumaton evidenssikooste · 2026.07.23-12 · 2026-07-22 · Lähteet: Market-values; IMARC; GVR; Fortune</a:t>
             </a:r>
           </a:p>
         </p:txBody>
@@ -8628,7 +8628,7 @@
                 </a:solidFill>
                 <a:latin typeface="Aptos"/>
               </a:rPr>
-              <a:t>Julkinen riippumaton evidenssikooste · 2026.07.23-11 · 2026-07-22 · Lähteet: WIPO licensing; WIPO IP Finance</a:t>
+              <a:t>Julkinen riippumaton evidenssikooste · 2026.07.23-12 · 2026-07-22 · Lähteet: WIPO licensing; WIPO IP Finance</a:t>
             </a:r>
           </a:p>
         </p:txBody>
@@ -9108,7 +9108,7 @@
                 </a:solidFill>
                 <a:latin typeface="Aptos"/>
               </a:rPr>
-              <a:t>Julkinen riippumaton evidenssikooste · 2026.07.23-11 · 2026-07-22 · Lähteet: Evidence Register; EPO; WIPO</a:t>
+              <a:t>Julkinen riippumaton evidenssikooste · 2026.07.23-12 · 2026-07-22 · Lähteet: Evidence Register; EPO; WIPO</a:t>
             </a:r>
           </a:p>
         </p:txBody>
@@ -9788,7 +9788,7 @@
                 </a:solidFill>
                 <a:latin typeface="Aptos"/>
               </a:rPr>
-              <a:t>Julkinen riippumaton evidenssikooste · 2026.07.23-11 · 2026-07-22 · Lähteet: Evidence Register</a:t>
+              <a:t>Julkinen riippumaton evidenssikooste · 2026.07.23-12 · 2026-07-22 · Lähteet: Evidence Register</a:t>
             </a:r>
           </a:p>
         </p:txBody>

--- a/site/downloads/pixan-bank-deck-medium-fi.pptx
+++ b/site/downloads/pixan-bank-deck-medium-fi.pptx
@@ -3368,7 +3368,7 @@
                 </a:solidFill>
                 <a:latin typeface="Aptos"/>
               </a:rPr>
-              <a:t>2026.07.23-12</a:t>
+              <a:t>2026.07.23-13</a:t>
             </a:r>
           </a:p>
         </p:txBody>
@@ -3757,7 +3757,7 @@
                 </a:solidFill>
                 <a:latin typeface="Aptos"/>
               </a:rPr>
-              <a:t>Julkinen riippumaton evidenssikooste · 2026.07.23-12 · 2026-07-22 · Lähteet: WIPO licensing; dispute resolution; IPscore</a:t>
+              <a:t>Julkinen riippumaton evidenssikooste · 2026.07.23-13 · 2026-07-22 · Lähteet: WIPO licensing; dispute resolution; IPscore</a:t>
             </a:r>
           </a:p>
         </p:txBody>
@@ -4648,7 +4648,7 @@
                 </a:solidFill>
                 <a:latin typeface="Aptos"/>
               </a:rPr>
-              <a:t>Julkinen riippumaton evidenssikooste · 2026.07.23-12 · 2026-07-22 · Lähteet: WIPO IP valuation; Market-values</a:t>
+              <a:t>Julkinen riippumaton evidenssikooste · 2026.07.23-13 · 2026-07-22 · Lähteet: WIPO IP valuation; Market-values</a:t>
             </a:r>
           </a:p>
         </p:txBody>
@@ -5438,7 +5438,7 @@
                 </a:solidFill>
                 <a:latin typeface="Aptos"/>
               </a:rPr>
-              <a:t>Versio 2026.07.23-12 · 2026-07-22 · 12 / 12</a:t>
+              <a:t>Versio 2026.07.23-13 · 2026-07-22 · 12 / 12</a:t>
             </a:r>
           </a:p>
         </p:txBody>
@@ -5686,7 +5686,7 @@
                 </a:solidFill>
                 <a:latin typeface="Aptos"/>
               </a:rPr>
-              <a:t>Julkinen riippumaton evidenssikooste · 2026.07.23-12 · 2026-07-22 · Lähteet: Atlas readiness; WIPO</a:t>
+              <a:t>Julkinen riippumaton evidenssikooste · 2026.07.23-13 · 2026-07-22 · Lähteet: Atlas readiness; WIPO</a:t>
             </a:r>
           </a:p>
         </p:txBody>
@@ -6166,7 +6166,7 @@
                 </a:solidFill>
                 <a:latin typeface="Aptos"/>
               </a:rPr>
-              <a:t>Julkinen riippumaton evidenssikooste · 2026.07.23-12 · 2026-07-22 · Lähteet: EP3032975B2</a:t>
+              <a:t>Julkinen riippumaton evidenssikooste · 2026.07.23-13 · 2026-07-22 · Lähteet: EP3032975B2</a:t>
             </a:r>
           </a:p>
         </p:txBody>
@@ -6646,7 +6646,7 @@
                 </a:solidFill>
                 <a:latin typeface="Aptos"/>
               </a:rPr>
-              <a:t>Julkinen riippumaton evidenssikooste · 2026.07.23-12 · 2026-07-22 · Lähteet: EPO Register; EP3032975B2</a:t>
+              <a:t>Julkinen riippumaton evidenssikooste · 2026.07.23-13 · 2026-07-22 · Lähteet: EPO Register; EP3032975B2</a:t>
             </a:r>
           </a:p>
         </p:txBody>
@@ -7397,7 +7397,7 @@
                 </a:solidFill>
                 <a:latin typeface="Aptos"/>
               </a:rPr>
-              <a:t>Julkinen riippumaton evidenssikooste · 2026.07.23-12 · 2026-07-22 · Lähteet: EP3032975B2; 7 O 3341/24</a:t>
+              <a:t>Julkinen riippumaton evidenssikooste · 2026.07.23-13 · 2026-07-22 · Lähteet: EP3032975B2; 7 O 3341/24</a:t>
             </a:r>
           </a:p>
         </p:txBody>
@@ -7877,7 +7877,7 @@
                 </a:solidFill>
                 <a:latin typeface="Aptos"/>
               </a:rPr>
-              <a:t>Julkinen riippumaton evidenssikooste · 2026.07.23-12 · 2026-07-22 · Lähteet: Market-values; IMARC; GVR; Fortune</a:t>
+              <a:t>Julkinen riippumaton evidenssikooste · 2026.07.23-13 · 2026-07-22 · Lähteet: Market-values; IMARC; GVR; Fortune</a:t>
             </a:r>
           </a:p>
         </p:txBody>
@@ -8628,7 +8628,7 @@
                 </a:solidFill>
                 <a:latin typeface="Aptos"/>
               </a:rPr>
-              <a:t>Julkinen riippumaton evidenssikooste · 2026.07.23-12 · 2026-07-22 · Lähteet: WIPO licensing; WIPO IP Finance</a:t>
+              <a:t>Julkinen riippumaton evidenssikooste · 2026.07.23-13 · 2026-07-22 · Lähteet: WIPO licensing; WIPO IP Finance</a:t>
             </a:r>
           </a:p>
         </p:txBody>
@@ -9108,7 +9108,7 @@
                 </a:solidFill>
                 <a:latin typeface="Aptos"/>
               </a:rPr>
-              <a:t>Julkinen riippumaton evidenssikooste · 2026.07.23-12 · 2026-07-22 · Lähteet: Evidence Register; EPO; WIPO</a:t>
+              <a:t>Julkinen riippumaton evidenssikooste · 2026.07.23-13 · 2026-07-22 · Lähteet: Evidence Register; EPO; WIPO</a:t>
             </a:r>
           </a:p>
         </p:txBody>
@@ -9788,7 +9788,7 @@
                 </a:solidFill>
                 <a:latin typeface="Aptos"/>
               </a:rPr>
-              <a:t>Julkinen riippumaton evidenssikooste · 2026.07.23-12 · 2026-07-22 · Lähteet: Evidence Register</a:t>
+              <a:t>Julkinen riippumaton evidenssikooste · 2026.07.23-13 · 2026-07-22 · Lähteet: Evidence Register</a:t>
             </a:r>
           </a:p>
         </p:txBody>

--- a/site/downloads/pixan-bank-deck-medium-fi.pptx
+++ b/site/downloads/pixan-bank-deck-medium-fi.pptx
@@ -3368,7 +3368,7 @@
                 </a:solidFill>
                 <a:latin typeface="Aptos"/>
               </a:rPr>
-              <a:t>2026.07.23-13</a:t>
+              <a:t>2026.07.23-14</a:t>
             </a:r>
           </a:p>
         </p:txBody>
@@ -3757,7 +3757,7 @@
                 </a:solidFill>
                 <a:latin typeface="Aptos"/>
               </a:rPr>
-              <a:t>Julkinen riippumaton evidenssikooste · 2026.07.23-13 · 2026-07-22 · Lähteet: WIPO licensing; dispute resolution; IPscore</a:t>
+              <a:t>Julkinen riippumaton evidenssikooste · 2026.07.23-14 · 2026-07-22 · Lähteet: WIPO licensing; dispute resolution; IPscore</a:t>
             </a:r>
           </a:p>
         </p:txBody>
@@ -4502,7 +4502,7 @@
         <p:spPr>
           <a:xfrm>
             <a:off x="502920" y="621792"/>
-            <a:ext cx="11109960" cy="548640"/>
+            <a:ext cx="11109960" cy="804672"/>
           </a:xfrm>
           <a:prstGeom prst="rect">
             <a:avLst/>
@@ -4517,7 +4517,7 @@
           <a:p>
             <a:pPr algn="l"/>
             <a:r>
-              <a:rPr sz="3400" b="1">
+              <a:rPr sz="3000" b="1">
                 <a:solidFill>
                   <a:srgbClr val="071A2B"/>
                 </a:solidFill>
@@ -4536,7 +4536,7 @@
         </p:nvSpPr>
         <p:spPr>
           <a:xfrm>
-            <a:off x="502920" y="1225296"/>
+            <a:off x="502920" y="1444752"/>
             <a:ext cx="960120" cy="50292"/>
           </a:xfrm>
           <a:prstGeom prst="rect">
@@ -4648,7 +4648,7 @@
                 </a:solidFill>
                 <a:latin typeface="Aptos"/>
               </a:rPr>
-              <a:t>Julkinen riippumaton evidenssikooste · 2026.07.23-13 · 2026-07-22 · Lähteet: WIPO IP valuation; Market-values</a:t>
+              <a:t>Julkinen riippumaton evidenssikooste · 2026.07.23-14 · 2026-07-22 · Lähteet: WIPO IP valuation; Market-values</a:t>
             </a:r>
           </a:p>
         </p:txBody>
@@ -4697,8 +4697,8 @@
           <p:nvPr/>
         </p:nvGraphicFramePr>
         <p:xfrm>
-          <a:off x="530352" y="1536192"/>
-          <a:ext cx="11109959" cy="3977637"/>
+          <a:off x="530352" y="1719072"/>
+          <a:ext cx="11109959" cy="3794757"/>
         </p:xfrm>
         <a:graphic>
           <a:graphicData uri="http://schemas.openxmlformats.org/drawingml/2006/table">
@@ -4785,7 +4785,7 @@
                   </a:tcPr>
                 </a:tc>
               </a:tr>
-              <a:tr h="707745">
+              <a:tr h="671169">
                 <a:tc>
                   <a:txBody>
                     <a:bodyPr/>
@@ -4859,7 +4859,7 @@
                   </a:tcPr>
                 </a:tc>
               </a:tr>
-              <a:tr h="707745">
+              <a:tr h="671169">
                 <a:tc>
                   <a:txBody>
                     <a:bodyPr/>
@@ -4933,7 +4933,7 @@
                   </a:tcPr>
                 </a:tc>
               </a:tr>
-              <a:tr h="707745">
+              <a:tr h="671169">
                 <a:tc>
                   <a:txBody>
                     <a:bodyPr/>
@@ -5007,7 +5007,7 @@
                   </a:tcPr>
                 </a:tc>
               </a:tr>
-              <a:tr h="707745">
+              <a:tr h="671169">
                 <a:tc>
                   <a:txBody>
                     <a:bodyPr/>
@@ -5081,7 +5081,7 @@
                   </a:tcPr>
                 </a:tc>
               </a:tr>
-              <a:tr h="707745">
+              <a:tr h="671169">
                 <a:tc>
                   <a:txBody>
                     <a:bodyPr/>
@@ -5438,7 +5438,7 @@
                 </a:solidFill>
                 <a:latin typeface="Aptos"/>
               </a:rPr>
-              <a:t>Versio 2026.07.23-13 · 2026-07-22 · 12 / 12</a:t>
+              <a:t>Versio 2026.07.23-14 · 2026-07-22 · 12 / 12</a:t>
             </a:r>
           </a:p>
         </p:txBody>
@@ -5686,7 +5686,7 @@
                 </a:solidFill>
                 <a:latin typeface="Aptos"/>
               </a:rPr>
-              <a:t>Julkinen riippumaton evidenssikooste · 2026.07.23-13 · 2026-07-22 · Lähteet: Atlas readiness; WIPO</a:t>
+              <a:t>Julkinen riippumaton evidenssikooste · 2026.07.23-14 · 2026-07-22 · Lähteet: Atlas readiness; WIPO</a:t>
             </a:r>
           </a:p>
         </p:txBody>
@@ -6166,7 +6166,7 @@
                 </a:solidFill>
                 <a:latin typeface="Aptos"/>
               </a:rPr>
-              <a:t>Julkinen riippumaton evidenssikooste · 2026.07.23-13 · 2026-07-22 · Lähteet: EP3032975B2</a:t>
+              <a:t>Julkinen riippumaton evidenssikooste · 2026.07.23-14 · 2026-07-22 · Lähteet: EP3032975B2</a:t>
             </a:r>
           </a:p>
         </p:txBody>
@@ -6646,7 +6646,7 @@
                 </a:solidFill>
                 <a:latin typeface="Aptos"/>
               </a:rPr>
-              <a:t>Julkinen riippumaton evidenssikooste · 2026.07.23-13 · 2026-07-22 · Lähteet: EPO Register; EP3032975B2</a:t>
+              <a:t>Julkinen riippumaton evidenssikooste · 2026.07.23-14 · 2026-07-22 · Lähteet: EPO Register; EP3032975B2</a:t>
             </a:r>
           </a:p>
         </p:txBody>
@@ -7397,7 +7397,7 @@
                 </a:solidFill>
                 <a:latin typeface="Aptos"/>
               </a:rPr>
-              <a:t>Julkinen riippumaton evidenssikooste · 2026.07.23-13 · 2026-07-22 · Lähteet: EP3032975B2; 7 O 3341/24</a:t>
+              <a:t>Julkinen riippumaton evidenssikooste · 2026.07.23-14 · 2026-07-22 · Lähteet: EP3032975B2; 7 O 3341/24</a:t>
             </a:r>
           </a:p>
         </p:txBody>
@@ -7877,7 +7877,7 @@
                 </a:solidFill>
                 <a:latin typeface="Aptos"/>
               </a:rPr>
-              <a:t>Julkinen riippumaton evidenssikooste · 2026.07.23-13 · 2026-07-22 · Lähteet: Market-values; IMARC; GVR; Fortune</a:t>
+              <a:t>Julkinen riippumaton evidenssikooste · 2026.07.23-14 · 2026-07-22 · Lähteet: Market-values; IMARC; GVR; Fortune</a:t>
             </a:r>
           </a:p>
         </p:txBody>
@@ -8222,7 +8222,7 @@
           <a:p>
             <a:pPr algn="l"/>
             <a:r>
-              <a:rPr sz="2700" b="1">
+              <a:rPr sz="2250" b="1">
                 <a:solidFill>
                   <a:srgbClr val="F4B942"/>
                 </a:solidFill>
@@ -8628,7 +8628,7 @@
                 </a:solidFill>
                 <a:latin typeface="Aptos"/>
               </a:rPr>
-              <a:t>Julkinen riippumaton evidenssikooste · 2026.07.23-13 · 2026-07-22 · Lähteet: WIPO licensing; WIPO IP Finance</a:t>
+              <a:t>Julkinen riippumaton evidenssikooste · 2026.07.23-14 · 2026-07-22 · Lähteet: WIPO licensing; WIPO IP Finance</a:t>
             </a:r>
           </a:p>
         </p:txBody>
@@ -9108,7 +9108,7 @@
                 </a:solidFill>
                 <a:latin typeface="Aptos"/>
               </a:rPr>
-              <a:t>Julkinen riippumaton evidenssikooste · 2026.07.23-13 · 2026-07-22 · Lähteet: Evidence Register; EPO; WIPO</a:t>
+              <a:t>Julkinen riippumaton evidenssikooste · 2026.07.23-14 · 2026-07-22 · Lähteet: Evidence Register; EPO; WIPO</a:t>
             </a:r>
           </a:p>
         </p:txBody>
@@ -9788,7 +9788,7 @@
                 </a:solidFill>
                 <a:latin typeface="Aptos"/>
               </a:rPr>
-              <a:t>Julkinen riippumaton evidenssikooste · 2026.07.23-13 · 2026-07-22 · Lähteet: Evidence Register</a:t>
+              <a:t>Julkinen riippumaton evidenssikooste · 2026.07.23-14 · 2026-07-22 · Lähteet: Evidence Register</a:t>
             </a:r>
           </a:p>
         </p:txBody>

--- a/site/downloads/pixan-bank-deck-medium-fi.pptx
+++ b/site/downloads/pixan-bank-deck-medium-fi.pptx
@@ -3368,7 +3368,7 @@
                 </a:solidFill>
                 <a:latin typeface="Aptos"/>
               </a:rPr>
-              <a:t>2026.07.23-14</a:t>
+              <a:t>2026.07.23-15</a:t>
             </a:r>
           </a:p>
         </p:txBody>
@@ -3757,7 +3757,7 @@
                 </a:solidFill>
                 <a:latin typeface="Aptos"/>
               </a:rPr>
-              <a:t>Julkinen riippumaton evidenssikooste · 2026.07.23-14 · 2026-07-22 · Lähteet: WIPO licensing; dispute resolution; IPscore</a:t>
+              <a:t>Julkinen riippumaton evidenssikooste · 2026.07.23-15 · 2026-07-22 · Lähteet: WIPO licensing; dispute resolution; IPscore</a:t>
             </a:r>
           </a:p>
         </p:txBody>
@@ -4648,7 +4648,7 @@
                 </a:solidFill>
                 <a:latin typeface="Aptos"/>
               </a:rPr>
-              <a:t>Julkinen riippumaton evidenssikooste · 2026.07.23-14 · 2026-07-22 · Lähteet: WIPO IP valuation; Market-values</a:t>
+              <a:t>Julkinen riippumaton evidenssikooste · 2026.07.23-15 · 2026-07-22 · Lähteet: WIPO IP valuation; Market-values</a:t>
             </a:r>
           </a:p>
         </p:txBody>
@@ -5438,7 +5438,7 @@
                 </a:solidFill>
                 <a:latin typeface="Aptos"/>
               </a:rPr>
-              <a:t>Versio 2026.07.23-14 · 2026-07-22 · 12 / 12</a:t>
+              <a:t>Versio 2026.07.23-15 · 2026-07-22 · 12 / 12</a:t>
             </a:r>
           </a:p>
         </p:txBody>
@@ -5686,7 +5686,7 @@
                 </a:solidFill>
                 <a:latin typeface="Aptos"/>
               </a:rPr>
-              <a:t>Julkinen riippumaton evidenssikooste · 2026.07.23-14 · 2026-07-22 · Lähteet: Atlas readiness; WIPO</a:t>
+              <a:t>Julkinen riippumaton evidenssikooste · 2026.07.23-15 · 2026-07-22 · Lähteet: Atlas readiness; WIPO</a:t>
             </a:r>
           </a:p>
         </p:txBody>
@@ -6166,7 +6166,7 @@
                 </a:solidFill>
                 <a:latin typeface="Aptos"/>
               </a:rPr>
-              <a:t>Julkinen riippumaton evidenssikooste · 2026.07.23-14 · 2026-07-22 · Lähteet: EP3032975B2</a:t>
+              <a:t>Julkinen riippumaton evidenssikooste · 2026.07.23-15 · 2026-07-22 · Lähteet: EP3032975B2</a:t>
             </a:r>
           </a:p>
         </p:txBody>
@@ -6646,7 +6646,7 @@
                 </a:solidFill>
                 <a:latin typeface="Aptos"/>
               </a:rPr>
-              <a:t>Julkinen riippumaton evidenssikooste · 2026.07.23-14 · 2026-07-22 · Lähteet: EPO Register; EP3032975B2</a:t>
+              <a:t>Julkinen riippumaton evidenssikooste · 2026.07.23-15 · 2026-07-22 · Lähteet: EPO Register; EP3032975B2</a:t>
             </a:r>
           </a:p>
         </p:txBody>
@@ -7397,7 +7397,7 @@
                 </a:solidFill>
                 <a:latin typeface="Aptos"/>
               </a:rPr>
-              <a:t>Julkinen riippumaton evidenssikooste · 2026.07.23-14 · 2026-07-22 · Lähteet: EP3032975B2; 7 O 3341/24</a:t>
+              <a:t>Julkinen riippumaton evidenssikooste · 2026.07.23-15 · 2026-07-22 · Lähteet: EP3032975B2; 7 O 3341/24</a:t>
             </a:r>
           </a:p>
         </p:txBody>
@@ -7877,7 +7877,7 @@
                 </a:solidFill>
                 <a:latin typeface="Aptos"/>
               </a:rPr>
-              <a:t>Julkinen riippumaton evidenssikooste · 2026.07.23-14 · 2026-07-22 · Lähteet: Market-values; IMARC; GVR; Fortune</a:t>
+              <a:t>Julkinen riippumaton evidenssikooste · 2026.07.23-15 · 2026-07-22 · Lähteet: Market-values; IMARC; GVR; Fortune</a:t>
             </a:r>
           </a:p>
         </p:txBody>
@@ -8628,7 +8628,7 @@
                 </a:solidFill>
                 <a:latin typeface="Aptos"/>
               </a:rPr>
-              <a:t>Julkinen riippumaton evidenssikooste · 2026.07.23-14 · 2026-07-22 · Lähteet: WIPO licensing; WIPO IP Finance</a:t>
+              <a:t>Julkinen riippumaton evidenssikooste · 2026.07.23-15 · 2026-07-22 · Lähteet: WIPO licensing; WIPO IP Finance</a:t>
             </a:r>
           </a:p>
         </p:txBody>
@@ -8962,7 +8962,7 @@
         <p:spPr>
           <a:xfrm>
             <a:off x="502920" y="621792"/>
-            <a:ext cx="11109960" cy="548640"/>
+            <a:ext cx="11109960" cy="804672"/>
           </a:xfrm>
           <a:prstGeom prst="rect">
             <a:avLst/>
@@ -8977,7 +8977,7 @@
           <a:p>
             <a:pPr algn="l"/>
             <a:r>
-              <a:rPr sz="3400" b="1">
+              <a:rPr sz="3000" b="1">
                 <a:solidFill>
                   <a:srgbClr val="071A2B"/>
                 </a:solidFill>
@@ -8996,7 +8996,7 @@
         </p:nvSpPr>
         <p:spPr>
           <a:xfrm>
-            <a:off x="502920" y="1225296"/>
+            <a:off x="502920" y="1444752"/>
             <a:ext cx="960120" cy="50292"/>
           </a:xfrm>
           <a:prstGeom prst="rect">
@@ -9108,7 +9108,7 @@
                 </a:solidFill>
                 <a:latin typeface="Aptos"/>
               </a:rPr>
-              <a:t>Julkinen riippumaton evidenssikooste · 2026.07.23-14 · 2026-07-22 · Lähteet: Evidence Register; EPO; WIPO</a:t>
+              <a:t>Julkinen riippumaton evidenssikooste · 2026.07.23-15 · 2026-07-22 · Lähteet: Evidence Register; EPO; WIPO</a:t>
             </a:r>
           </a:p>
         </p:txBody>
@@ -9157,8 +9157,8 @@
           <p:nvPr/>
         </p:nvGraphicFramePr>
         <p:xfrm>
-          <a:off x="530352" y="1536192"/>
-          <a:ext cx="11109958" cy="3977636"/>
+          <a:off x="530352" y="1719072"/>
+          <a:ext cx="11109958" cy="3794760"/>
         </p:xfrm>
         <a:graphic>
           <a:graphicData uri="http://schemas.openxmlformats.org/drawingml/2006/table">
@@ -9245,7 +9245,7 @@
                   </a:tcPr>
                 </a:tc>
               </a:tr>
-              <a:tr h="884681">
+              <a:tr h="838962">
                 <a:tc>
                   <a:txBody>
                     <a:bodyPr/>
@@ -9319,7 +9319,7 @@
                   </a:tcPr>
                 </a:tc>
               </a:tr>
-              <a:tr h="884681">
+              <a:tr h="838962">
                 <a:tc>
                   <a:txBody>
                     <a:bodyPr/>
@@ -9393,7 +9393,7 @@
                   </a:tcPr>
                 </a:tc>
               </a:tr>
-              <a:tr h="884681">
+              <a:tr h="838962">
                 <a:tc>
                   <a:txBody>
                     <a:bodyPr/>
@@ -9467,7 +9467,7 @@
                   </a:tcPr>
                 </a:tc>
               </a:tr>
-              <a:tr h="884681">
+              <a:tr h="838962">
                 <a:tc>
                   <a:txBody>
                     <a:bodyPr/>
@@ -9642,7 +9642,7 @@
         <p:spPr>
           <a:xfrm>
             <a:off x="502920" y="621792"/>
-            <a:ext cx="11109960" cy="548640"/>
+            <a:ext cx="11109960" cy="804672"/>
           </a:xfrm>
           <a:prstGeom prst="rect">
             <a:avLst/>
@@ -9657,7 +9657,7 @@
           <a:p>
             <a:pPr algn="l"/>
             <a:r>
-              <a:rPr sz="3400" b="1">
+              <a:rPr sz="3000" b="1">
                 <a:solidFill>
                   <a:srgbClr val="071A2B"/>
                 </a:solidFill>
@@ -9676,7 +9676,7 @@
         </p:nvSpPr>
         <p:spPr>
           <a:xfrm>
-            <a:off x="502920" y="1225296"/>
+            <a:off x="502920" y="1444752"/>
             <a:ext cx="960120" cy="50292"/>
           </a:xfrm>
           <a:prstGeom prst="rect">
@@ -9788,7 +9788,7 @@
                 </a:solidFill>
                 <a:latin typeface="Aptos"/>
               </a:rPr>
-              <a:t>Julkinen riippumaton evidenssikooste · 2026.07.23-14 · 2026-07-22 · Lähteet: Evidence Register</a:t>
+              <a:t>Julkinen riippumaton evidenssikooste · 2026.07.23-15 · 2026-07-22 · Lähteet: Evidence Register</a:t>
             </a:r>
           </a:p>
         </p:txBody>
@@ -9837,8 +9837,8 @@
           <p:nvPr/>
         </p:nvGraphicFramePr>
         <p:xfrm>
-          <a:off x="530352" y="1536192"/>
-          <a:ext cx="11109958" cy="3977637"/>
+          <a:off x="530352" y="1719072"/>
+          <a:ext cx="11109958" cy="3794757"/>
         </p:xfrm>
         <a:graphic>
           <a:graphicData uri="http://schemas.openxmlformats.org/drawingml/2006/table">
@@ -9950,7 +9950,7 @@
                   </a:tcPr>
                 </a:tc>
               </a:tr>
-              <a:tr h="707745">
+              <a:tr h="671169">
                 <a:tc>
                   <a:txBody>
                     <a:bodyPr/>
@@ -10048,7 +10048,7 @@
                   </a:tcPr>
                 </a:tc>
               </a:tr>
-              <a:tr h="707745">
+              <a:tr h="671169">
                 <a:tc>
                   <a:txBody>
                     <a:bodyPr/>
@@ -10146,7 +10146,7 @@
                   </a:tcPr>
                 </a:tc>
               </a:tr>
-              <a:tr h="707745">
+              <a:tr h="671169">
                 <a:tc>
                   <a:txBody>
                     <a:bodyPr/>
@@ -10244,7 +10244,7 @@
                   </a:tcPr>
                 </a:tc>
               </a:tr>
-              <a:tr h="707745">
+              <a:tr h="671169">
                 <a:tc>
                   <a:txBody>
                     <a:bodyPr/>
@@ -10342,7 +10342,7 @@
                   </a:tcPr>
                 </a:tc>
               </a:tr>
-              <a:tr h="707745">
+              <a:tr h="671169">
                 <a:tc>
                   <a:txBody>
                     <a:bodyPr/>

--- a/site/downloads/pixan-bank-deck-medium-fi.pptx
+++ b/site/downloads/pixan-bank-deck-medium-fi.pptx
@@ -3368,7 +3368,7 @@
                 </a:solidFill>
                 <a:latin typeface="Aptos"/>
               </a:rPr>
-              <a:t>2026.07.23-15</a:t>
+              <a:t>2026.07.23-16</a:t>
             </a:r>
           </a:p>
         </p:txBody>
@@ -3757,7 +3757,7 @@
                 </a:solidFill>
                 <a:latin typeface="Aptos"/>
               </a:rPr>
-              <a:t>Julkinen riippumaton evidenssikooste · 2026.07.23-15 · 2026-07-22 · Lähteet: WIPO licensing; dispute resolution; IPscore</a:t>
+              <a:t>Julkinen riippumaton evidenssikooste · 2026.07.23-16 · 2026-07-22 · Lähteet: WIPO licensing; dispute resolution; IPscore</a:t>
             </a:r>
           </a:p>
         </p:txBody>
@@ -4648,7 +4648,7 @@
                 </a:solidFill>
                 <a:latin typeface="Aptos"/>
               </a:rPr>
-              <a:t>Julkinen riippumaton evidenssikooste · 2026.07.23-15 · 2026-07-22 · Lähteet: WIPO IP valuation; Market-values</a:t>
+              <a:t>Julkinen riippumaton evidenssikooste · 2026.07.23-16 · 2026-07-22 · Lähteet: WIPO IP valuation; Market-values</a:t>
             </a:r>
           </a:p>
         </p:txBody>
@@ -5438,7 +5438,7 @@
                 </a:solidFill>
                 <a:latin typeface="Aptos"/>
               </a:rPr>
-              <a:t>Versio 2026.07.23-15 · 2026-07-22 · 12 / 12</a:t>
+              <a:t>Versio 2026.07.23-16 · 2026-07-22 · 12 / 12</a:t>
             </a:r>
           </a:p>
         </p:txBody>
@@ -5686,7 +5686,7 @@
                 </a:solidFill>
                 <a:latin typeface="Aptos"/>
               </a:rPr>
-              <a:t>Julkinen riippumaton evidenssikooste · 2026.07.23-15 · 2026-07-22 · Lähteet: Atlas readiness; WIPO</a:t>
+              <a:t>Julkinen riippumaton evidenssikooste · 2026.07.23-16 · 2026-07-22 · Lähteet: Atlas readiness; WIPO</a:t>
             </a:r>
           </a:p>
         </p:txBody>
@@ -6166,7 +6166,7 @@
                 </a:solidFill>
                 <a:latin typeface="Aptos"/>
               </a:rPr>
-              <a:t>Julkinen riippumaton evidenssikooste · 2026.07.23-15 · 2026-07-22 · Lähteet: EP3032975B2</a:t>
+              <a:t>Julkinen riippumaton evidenssikooste · 2026.07.23-16 · 2026-07-22 · Lähteet: EP3032975B2</a:t>
             </a:r>
           </a:p>
         </p:txBody>
@@ -6646,7 +6646,7 @@
                 </a:solidFill>
                 <a:latin typeface="Aptos"/>
               </a:rPr>
-              <a:t>Julkinen riippumaton evidenssikooste · 2026.07.23-15 · 2026-07-22 · Lähteet: EPO Register; EP3032975B2</a:t>
+              <a:t>Julkinen riippumaton evidenssikooste · 2026.07.23-16 · 2026-07-22 · Lähteet: EPO Register; EP3032975B2</a:t>
             </a:r>
           </a:p>
         </p:txBody>
@@ -7397,7 +7397,7 @@
                 </a:solidFill>
                 <a:latin typeface="Aptos"/>
               </a:rPr>
-              <a:t>Julkinen riippumaton evidenssikooste · 2026.07.23-15 · 2026-07-22 · Lähteet: EP3032975B2; 7 O 3341/24</a:t>
+              <a:t>Julkinen riippumaton evidenssikooste · 2026.07.23-16 · 2026-07-22 · Lähteet: EP3032975B2; 7 O 3341/24</a:t>
             </a:r>
           </a:p>
         </p:txBody>
@@ -7877,7 +7877,7 @@
                 </a:solidFill>
                 <a:latin typeface="Aptos"/>
               </a:rPr>
-              <a:t>Julkinen riippumaton evidenssikooste · 2026.07.23-15 · 2026-07-22 · Lähteet: Market-values; IMARC; GVR; Fortune</a:t>
+              <a:t>Julkinen riippumaton evidenssikooste · 2026.07.23-16 · 2026-07-22 · Lähteet: Market-values; IMARC; GVR; Fortune</a:t>
             </a:r>
           </a:p>
         </p:txBody>
@@ -8628,7 +8628,7 @@
                 </a:solidFill>
                 <a:latin typeface="Aptos"/>
               </a:rPr>
-              <a:t>Julkinen riippumaton evidenssikooste · 2026.07.23-15 · 2026-07-22 · Lähteet: WIPO licensing; WIPO IP Finance</a:t>
+              <a:t>Julkinen riippumaton evidenssikooste · 2026.07.23-16 · 2026-07-22 · Lähteet: WIPO licensing; WIPO IP Finance</a:t>
             </a:r>
           </a:p>
         </p:txBody>
@@ -9108,7 +9108,7 @@
                 </a:solidFill>
                 <a:latin typeface="Aptos"/>
               </a:rPr>
-              <a:t>Julkinen riippumaton evidenssikooste · 2026.07.23-15 · 2026-07-22 · Lähteet: Evidence Register; EPO; WIPO</a:t>
+              <a:t>Julkinen riippumaton evidenssikooste · 2026.07.23-16 · 2026-07-22 · Lähteet: Evidence Register; EPO; WIPO</a:t>
             </a:r>
           </a:p>
         </p:txBody>
@@ -9788,7 +9788,7 @@
                 </a:solidFill>
                 <a:latin typeface="Aptos"/>
               </a:rPr>
-              <a:t>Julkinen riippumaton evidenssikooste · 2026.07.23-15 · 2026-07-22 · Lähteet: Evidence Register</a:t>
+              <a:t>Julkinen riippumaton evidenssikooste · 2026.07.23-16 · 2026-07-22 · Lähteet: Evidence Register</a:t>
             </a:r>
           </a:p>
         </p:txBody>

--- a/site/downloads/pixan-bank-deck-medium-fi.pptx
+++ b/site/downloads/pixan-bank-deck-medium-fi.pptx
@@ -3368,7 +3368,7 @@
                 </a:solidFill>
                 <a:latin typeface="Aptos"/>
               </a:rPr>
-              <a:t>2026.07.23-16</a:t>
+              <a:t>2026.07.24-17</a:t>
             </a:r>
           </a:p>
         </p:txBody>
@@ -3403,7 +3403,7 @@
                 </a:solidFill>
                 <a:latin typeface="Aptos"/>
               </a:rPr>
-              <a:t>Päivitetty 2026-07-22
+              <a:t>Päivitetty 2026-07-24
 12 diaa · suomeksi</a:t>
             </a:r>
           </a:p>
@@ -3757,7 +3757,7 @@
                 </a:solidFill>
                 <a:latin typeface="Aptos"/>
               </a:rPr>
-              <a:t>Julkinen riippumaton evidenssikooste · 2026.07.23-16 · 2026-07-22 · Lähteet: WIPO licensing; dispute resolution; IPscore</a:t>
+              <a:t>Julkinen riippumaton evidenssikooste · 2026.07.24-17 · 2026-07-24 · Lähteet: WIPO licensing; dispute resolution; IPscore</a:t>
             </a:r>
           </a:p>
         </p:txBody>
@@ -4536,7 +4536,7 @@
         </p:nvSpPr>
         <p:spPr>
           <a:xfrm>
-            <a:off x="502920" y="1444752"/>
+            <a:off x="502920" y="1554480"/>
             <a:ext cx="960120" cy="50292"/>
           </a:xfrm>
           <a:prstGeom prst="rect">
@@ -4648,7 +4648,7 @@
                 </a:solidFill>
                 <a:latin typeface="Aptos"/>
               </a:rPr>
-              <a:t>Julkinen riippumaton evidenssikooste · 2026.07.23-16 · 2026-07-22 · Lähteet: WIPO IP valuation; Market-values</a:t>
+              <a:t>Julkinen riippumaton evidenssikooste · 2026.07.24-17 · 2026-07-24 · Lähteet: WIPO IP valuation; Market-values</a:t>
             </a:r>
           </a:p>
         </p:txBody>
@@ -4848,7 +4848,7 @@
                         </a:defRPr>
                       </a:pPr>
                       <a:r>
-                        <a:t>0 retail-luovuttajaa</a:t>
+                        <a:t>0/3 retail-luovuttajaa; 4 ehdokasta hylätty D1–D10</a:t>
                       </a:r>
                     </a:p>
                   </a:txBody>
@@ -5438,7 +5438,7 @@
                 </a:solidFill>
                 <a:latin typeface="Aptos"/>
               </a:rPr>
-              <a:t>Versio 2026.07.23-16 · 2026-07-22 · 12 / 12</a:t>
+              <a:t>Versio 2026.07.24-17 · 2026-07-24 · 12 / 12</a:t>
             </a:r>
           </a:p>
         </p:txBody>
@@ -5686,7 +5686,7 @@
                 </a:solidFill>
                 <a:latin typeface="Aptos"/>
               </a:rPr>
-              <a:t>Julkinen riippumaton evidenssikooste · 2026.07.23-16 · 2026-07-22 · Lähteet: Atlas readiness; WIPO</a:t>
+              <a:t>Julkinen riippumaton evidenssikooste · 2026.07.24-17 · 2026-07-24 · Lähteet: Atlas readiness; WIPO</a:t>
             </a:r>
           </a:p>
         </p:txBody>
@@ -6166,7 +6166,7 @@
                 </a:solidFill>
                 <a:latin typeface="Aptos"/>
               </a:rPr>
-              <a:t>Julkinen riippumaton evidenssikooste · 2026.07.23-16 · 2026-07-22 · Lähteet: EP3032975B2</a:t>
+              <a:t>Julkinen riippumaton evidenssikooste · 2026.07.24-17 · 2026-07-24 · Lähteet: EP3032975B2</a:t>
             </a:r>
           </a:p>
         </p:txBody>
@@ -6646,7 +6646,7 @@
                 </a:solidFill>
                 <a:latin typeface="Aptos"/>
               </a:rPr>
-              <a:t>Julkinen riippumaton evidenssikooste · 2026.07.23-16 · 2026-07-22 · Lähteet: EPO Register; EP3032975B2</a:t>
+              <a:t>Julkinen riippumaton evidenssikooste · 2026.07.24-17 · 2026-07-24 · Lähteet: EPO Register; EP3032975B2</a:t>
             </a:r>
           </a:p>
         </p:txBody>
@@ -7397,7 +7397,7 @@
                 </a:solidFill>
                 <a:latin typeface="Aptos"/>
               </a:rPr>
-              <a:t>Julkinen riippumaton evidenssikooste · 2026.07.23-16 · 2026-07-22 · Lähteet: EP3032975B2; 7 O 3341/24</a:t>
+              <a:t>Julkinen riippumaton evidenssikooste · 2026.07.24-17 · 2026-07-24 · Lähteet: EP3032975B2; 7 O 3341/24</a:t>
             </a:r>
           </a:p>
         </p:txBody>
@@ -7877,7 +7877,7 @@
                 </a:solidFill>
                 <a:latin typeface="Aptos"/>
               </a:rPr>
-              <a:t>Julkinen riippumaton evidenssikooste · 2026.07.23-16 · 2026-07-22 · Lähteet: Market-values; IMARC; GVR; Fortune</a:t>
+              <a:t>Julkinen riippumaton evidenssikooste · 2026.07.24-17 · 2026-07-24 · Lähteet: Market-values; IMARC; GVR; Fortune; European Commission</a:t>
             </a:r>
           </a:p>
         </p:txBody>
@@ -7994,7 +7994,7 @@
                 </a:solidFill>
                 <a:latin typeface="Aptos"/>
               </a:rPr>
-              <a:t>195</a:t>
+              <a:t>20</a:t>
             </a:r>
           </a:p>
         </p:txBody>
@@ -8029,7 +8029,7 @@
                 </a:solidFill>
                 <a:latin typeface="Aptos"/>
               </a:rPr>
-              <a:t>maan tutkimusrivit</a:t>
+              <a:t>virallista vuosihavaintoa 6 maasta</a:t>
             </a:r>
           </a:p>
         </p:txBody>
@@ -8105,13 +8105,13 @@
           <a:p>
             <a:pPr algn="l"/>
             <a:r>
-              <a:rPr sz="2700" b="1">
+              <a:rPr sz="2250" b="1">
                 <a:solidFill>
                   <a:srgbClr val="0D5F86"/>
                 </a:solidFill>
                 <a:latin typeface="Aptos"/>
               </a:rPr>
-              <a:t>5</a:t>
+              <a:t>280,685 milj. NZD</a:t>
             </a:r>
           </a:p>
         </p:txBody>
@@ -8146,7 +8146,7 @@
                 </a:solidFill>
                 <a:latin typeface="Aptos"/>
               </a:rPr>
-              <a:t>maata vuosihavainnoilla</a:t>
+              <a:t>Uusi-Seelanti 2024: 29 tiedoston raakasumma</a:t>
             </a:r>
           </a:p>
         </p:txBody>
@@ -8222,13 +8222,13 @@
           <a:p>
             <a:pPr algn="l"/>
             <a:r>
-              <a:rPr sz="2250" b="1">
+              <a:rPr sz="2700" b="1">
                 <a:solidFill>
                   <a:srgbClr val="F4B942"/>
                 </a:solidFill>
                 <a:latin typeface="Aptos"/>
               </a:rPr>
-              <a:t>26,0–46,32 mrd USD</a:t>
+              <a:t>4,99 mrd EUR</a:t>
             </a:r>
           </a:p>
         </p:txBody>
@@ -8263,7 +8263,7 @@
                 </a:solidFill>
                 <a:latin typeface="Aptos"/>
               </a:rPr>
-              <a:t>kaupallinen globaali 2025 haarukka</a:t>
+              <a:t>EU 2023: komission julkaisema vertailuarvo</a:t>
             </a:r>
           </a:p>
         </p:txBody>
@@ -8298,7 +8298,7 @@
                 </a:solidFill>
                 <a:latin typeface="Aptos"/>
               </a:rPr>
-              <a:t>Saksa: nestemallin luottamustaso on matala ja vaihteluväli 667,92 milj. EUR–1 654,62 milj. EUR; sitä ei saa esittää havaittuna myyntinä.</a:t>
+              <a:t>4/4 ehdokasta ei läpäissyt D1–D10-protokollaa; hyväksytty donor-portti on 0/3.</a:t>
             </a:r>
           </a:p>
         </p:txBody>
@@ -8415,7 +8415,7 @@
                 </a:solidFill>
                 <a:latin typeface="Aptos"/>
               </a:rPr>
-              <a:t>Hyväksyttyjä virallisia kansallisia consumer-retail-arvoja on 0. Atlas ei julkaise omaa maailmanestimaattia ennen metodisten porttien täyttymistä.</a:t>
+              <a:t>Uuden-Seelannin raakasumma täsmää viralliseen ≥280 milj. NZD otsikkoon; 264,561 milj. NZD toistoriviherkkyys ei ole korjattu estimaatti ja tunnistettu vaping-raakasumma on 274,18 milj. NZD. EU-luku on kaupalliseen Euromonitor 2025 -aineistoon perustuva tuettu institutionaalinen vertailuarvo; Kypros, Luxemburg ja Malta puuttuvat. Kaupallinen 26,0–46,32 mrd USD haarukka ja Saksan 667,92 milj. EUR–1 654,62 milj. EUR nestemalli ovat ristiintarkistuksia, eivät atlaksen maailmanestimaatti.</a:t>
             </a:r>
           </a:p>
         </p:txBody>
@@ -8628,7 +8628,7 @@
                 </a:solidFill>
                 <a:latin typeface="Aptos"/>
               </a:rPr>
-              <a:t>Julkinen riippumaton evidenssikooste · 2026.07.23-16 · 2026-07-22 · Lähteet: WIPO licensing; WIPO IP Finance</a:t>
+              <a:t>Julkinen riippumaton evidenssikooste · 2026.07.24-17 · 2026-07-24 · Lähteet: WIPO licensing; WIPO IP Finance</a:t>
             </a:r>
           </a:p>
         </p:txBody>
@@ -8996,7 +8996,7 @@
         </p:nvSpPr>
         <p:spPr>
           <a:xfrm>
-            <a:off x="502920" y="1444752"/>
+            <a:off x="502920" y="1554480"/>
             <a:ext cx="960120" cy="50292"/>
           </a:xfrm>
           <a:prstGeom prst="rect">
@@ -9108,7 +9108,7 @@
                 </a:solidFill>
                 <a:latin typeface="Aptos"/>
               </a:rPr>
-              <a:t>Julkinen riippumaton evidenssikooste · 2026.07.23-16 · 2026-07-22 · Lähteet: Evidence Register; EPO; WIPO</a:t>
+              <a:t>Julkinen riippumaton evidenssikooste · 2026.07.24-17 · 2026-07-24 · Lähteet: Evidence Register; EPO; WIPO</a:t>
             </a:r>
           </a:p>
         </p:txBody>
@@ -9676,7 +9676,7 @@
         </p:nvSpPr>
         <p:spPr>
           <a:xfrm>
-            <a:off x="502920" y="1444752"/>
+            <a:off x="502920" y="1554480"/>
             <a:ext cx="960120" cy="50292"/>
           </a:xfrm>
           <a:prstGeom prst="rect">
@@ -9788,7 +9788,7 @@
                 </a:solidFill>
                 <a:latin typeface="Aptos"/>
               </a:rPr>
-              <a:t>Julkinen riippumaton evidenssikooste · 2026.07.23-16 · 2026-07-22 · Lähteet: Evidence Register</a:t>
+              <a:t>Julkinen riippumaton evidenssikooste · 2026.07.24-17 · 2026-07-24 · Lähteet: Evidence Register</a:t>
             </a:r>
           </a:p>
         </p:txBody>
@@ -10209,7 +10209,7 @@
                         </a:defRPr>
                       </a:pPr>
                       <a:r>
-                        <a:t>5 maan viralliset luvut</a:t>
+                        <a:t>6 maan viralliset luvut</a:t>
                       </a:r>
                     </a:p>
                   </a:txBody>

--- a/site/downloads/pixan-bank-deck-medium-fi.pptx
+++ b/site/downloads/pixan-bank-deck-medium-fi.pptx
@@ -2,24 +2,24 @@
 <file path=ppt/presentation.xml><?xml version="1.0" encoding="utf-8"?>
 <p:presentation xmlns:p="http://schemas.openxmlformats.org/presentationml/2006/main">
   <p:sldMasterIdLst>
-    <p:sldMasterId xmlns:r="http://schemas.openxmlformats.org/officeDocument/2006/relationships" id="2147483648" r:id="R84f6b8d8a7be4d89"/>
+    <p:sldMasterId xmlns:r="http://schemas.openxmlformats.org/officeDocument/2006/relationships" id="2147483648" r:id="Rf3f7121d0b3340d2"/>
   </p:sldMasterIdLst>
   <p:notesMasterIdLst>
-    <p:notesMasterId xmlns:r="http://schemas.openxmlformats.org/officeDocument/2006/relationships" r:id="R3e744877506c433b"/>
+    <p:notesMasterId xmlns:r="http://schemas.openxmlformats.org/officeDocument/2006/relationships" r:id="Rdb8e5a3f73c24f24"/>
   </p:notesMasterIdLst>
   <p:sldIdLst>
-    <p:sldId xmlns:r="http://schemas.openxmlformats.org/officeDocument/2006/relationships" id="256" r:id="R9c05e12ef8864a25"/>
-    <p:sldId xmlns:r="http://schemas.openxmlformats.org/officeDocument/2006/relationships" id="257" r:id="R5a3f1cb5dbce4237"/>
-    <p:sldId xmlns:r="http://schemas.openxmlformats.org/officeDocument/2006/relationships" id="258" r:id="Ra2114922dee3447f"/>
-    <p:sldId xmlns:r="http://schemas.openxmlformats.org/officeDocument/2006/relationships" id="259" r:id="Rbf3a09f2566b474e"/>
-    <p:sldId xmlns:r="http://schemas.openxmlformats.org/officeDocument/2006/relationships" id="260" r:id="R42f83fdfaac34c04"/>
-    <p:sldId xmlns:r="http://schemas.openxmlformats.org/officeDocument/2006/relationships" id="261" r:id="Rb21c2419e05d431f"/>
-    <p:sldId xmlns:r="http://schemas.openxmlformats.org/officeDocument/2006/relationships" id="262" r:id="R393845db89d0452d"/>
-    <p:sldId xmlns:r="http://schemas.openxmlformats.org/officeDocument/2006/relationships" id="263" r:id="Rf934e480affa4350"/>
-    <p:sldId xmlns:r="http://schemas.openxmlformats.org/officeDocument/2006/relationships" id="264" r:id="Rce5427360bb74f86"/>
-    <p:sldId xmlns:r="http://schemas.openxmlformats.org/officeDocument/2006/relationships" id="265" r:id="R267a95f303574356"/>
-    <p:sldId xmlns:r="http://schemas.openxmlformats.org/officeDocument/2006/relationships" id="266" r:id="R5857f5009a3a42a5"/>
-    <p:sldId xmlns:r="http://schemas.openxmlformats.org/officeDocument/2006/relationships" id="267" r:id="R061544fa9319461c"/>
+    <p:sldId xmlns:r="http://schemas.openxmlformats.org/officeDocument/2006/relationships" id="256" r:id="R169dd20462d44617"/>
+    <p:sldId xmlns:r="http://schemas.openxmlformats.org/officeDocument/2006/relationships" id="257" r:id="R49ac1b24b2624ed9"/>
+    <p:sldId xmlns:r="http://schemas.openxmlformats.org/officeDocument/2006/relationships" id="258" r:id="Rf59b3fa4b78e471a"/>
+    <p:sldId xmlns:r="http://schemas.openxmlformats.org/officeDocument/2006/relationships" id="259" r:id="Rc7be289f3fef4cce"/>
+    <p:sldId xmlns:r="http://schemas.openxmlformats.org/officeDocument/2006/relationships" id="260" r:id="R1c072db8df0e4ae3"/>
+    <p:sldId xmlns:r="http://schemas.openxmlformats.org/officeDocument/2006/relationships" id="261" r:id="R767c39c0429d4e44"/>
+    <p:sldId xmlns:r="http://schemas.openxmlformats.org/officeDocument/2006/relationships" id="262" r:id="R0a072b797b4146fa"/>
+    <p:sldId xmlns:r="http://schemas.openxmlformats.org/officeDocument/2006/relationships" id="263" r:id="R1e3598d24cfe4c6e"/>
+    <p:sldId xmlns:r="http://schemas.openxmlformats.org/officeDocument/2006/relationships" id="264" r:id="Rce0f60a53dd44e50"/>
+    <p:sldId xmlns:r="http://schemas.openxmlformats.org/officeDocument/2006/relationships" id="265" r:id="R6b9cbb3c6db24772"/>
+    <p:sldId xmlns:r="http://schemas.openxmlformats.org/officeDocument/2006/relationships" id="266" r:id="R62700f83d44d4c37"/>
+    <p:sldId xmlns:r="http://schemas.openxmlformats.org/officeDocument/2006/relationships" id="267" r:id="Re1cee33ef5b94b66"/>
   </p:sldIdLst>
   <p:sldSz cx="12191999" cy="6858000"/>
   <p:notesSz cx="6858000" cy="9144000"/>
@@ -506,6 +506,11 @@
           </a:p>
           <a:p xmlns:a="http://schemas.openxmlformats.org/drawingml/2006/main">
             <a:r>
+              <a:t>- https://www150.statcan.gc.ca/t1/tbl1/en/tv.action?pid=2010007101</a:t>
+            </a:r>
+          </a:p>
+          <a:p xmlns:a="http://schemas.openxmlformats.org/drawingml/2006/main">
+            <a:r>
               <a:t>- https://www.ftc.gov/reports/e-cigarette-report-2021</a:t>
             </a:r>
           </a:p>
@@ -536,6 +541,11 @@
           </a:p>
           <a:p xmlns:a="http://schemas.openxmlformats.org/drawingml/2006/main">
             <a:r>
+              <a:t>- https://data-api.ecb.europa.eu/service/data/EXR/A.CAD.EUR.SP00.A?startPeriod=2024&amp;endPeriod=2024&amp;format=csvdata</a:t>
+            </a:r>
+          </a:p>
+          <a:p xmlns:a="http://schemas.openxmlformats.org/drawingml/2006/main">
+            <a:r>
               <a:t/>
             </a:r>
           </a:p>
@@ -562,6 +572,11 @@
           <a:p xmlns:a="http://schemas.openxmlformats.org/drawingml/2006/main">
             <a:r>
               <a:t>- USD 2021: ECB-EXR-A-USD-EUR-SP00-A-2021 · 1.1827403100775 currency units per EUR</a:t>
+            </a:r>
+          </a:p>
+          <a:p xmlns:a="http://schemas.openxmlformats.org/drawingml/2006/main">
+            <a:r>
+              <a:t>- CAD 2024: ECB-EXR-A-CAD-EUR-SP00-A-2024 · 1.482110546875 currency units per EUR</a:t>
             </a:r>
           </a:p>
         </p:txBody>
@@ -661,6 +676,11 @@
           </a:p>
           <a:p xmlns:a="http://schemas.openxmlformats.org/drawingml/2006/main">
             <a:r>
+              <a:t>- https://www150.statcan.gc.ca/t1/tbl1/en/tv.action?pid=2010007101</a:t>
+            </a:r>
+          </a:p>
+          <a:p xmlns:a="http://schemas.openxmlformats.org/drawingml/2006/main">
+            <a:r>
               <a:t>- https://www.ftc.gov/reports/e-cigarette-report-2021</a:t>
             </a:r>
           </a:p>
@@ -691,6 +711,11 @@
           </a:p>
           <a:p xmlns:a="http://schemas.openxmlformats.org/drawingml/2006/main">
             <a:r>
+              <a:t>- https://data-api.ecb.europa.eu/service/data/EXR/A.CAD.EUR.SP00.A?startPeriod=2024&amp;endPeriod=2024&amp;format=csvdata</a:t>
+            </a:r>
+          </a:p>
+          <a:p xmlns:a="http://schemas.openxmlformats.org/drawingml/2006/main">
+            <a:r>
               <a:t/>
             </a:r>
           </a:p>
@@ -717,6 +742,11 @@
           <a:p xmlns:a="http://schemas.openxmlformats.org/drawingml/2006/main">
             <a:r>
               <a:t>- USD 2021: ECB-EXR-A-USD-EUR-SP00-A-2021 · 1.1827403100775 currency units per EUR</a:t>
+            </a:r>
+          </a:p>
+          <a:p xmlns:a="http://schemas.openxmlformats.org/drawingml/2006/main">
+            <a:r>
+              <a:t>- CAD 2024: ECB-EXR-A-CAD-EUR-SP00-A-2024 · 1.482110546875 currency units per EUR</a:t>
             </a:r>
           </a:p>
         </p:txBody>
@@ -816,6 +846,11 @@
           </a:p>
           <a:p xmlns:a="http://schemas.openxmlformats.org/drawingml/2006/main">
             <a:r>
+              <a:t>- https://www150.statcan.gc.ca/t1/tbl1/en/tv.action?pid=2010007101</a:t>
+            </a:r>
+          </a:p>
+          <a:p xmlns:a="http://schemas.openxmlformats.org/drawingml/2006/main">
+            <a:r>
               <a:t>- https://www.ftc.gov/reports/e-cigarette-report-2021</a:t>
             </a:r>
           </a:p>
@@ -846,6 +881,11 @@
           </a:p>
           <a:p xmlns:a="http://schemas.openxmlformats.org/drawingml/2006/main">
             <a:r>
+              <a:t>- https://data-api.ecb.europa.eu/service/data/EXR/A.CAD.EUR.SP00.A?startPeriod=2024&amp;endPeriod=2024&amp;format=csvdata</a:t>
+            </a:r>
+          </a:p>
+          <a:p xmlns:a="http://schemas.openxmlformats.org/drawingml/2006/main">
+            <a:r>
               <a:t/>
             </a:r>
           </a:p>
@@ -872,6 +912,11 @@
           <a:p xmlns:a="http://schemas.openxmlformats.org/drawingml/2006/main">
             <a:r>
               <a:t>- USD 2021: ECB-EXR-A-USD-EUR-SP00-A-2021 · 1.1827403100775 currency units per EUR</a:t>
+            </a:r>
+          </a:p>
+          <a:p xmlns:a="http://schemas.openxmlformats.org/drawingml/2006/main">
+            <a:r>
+              <a:t>- CAD 2024: ECB-EXR-A-CAD-EUR-SP00-A-2024 · 1.482110546875 currency units per EUR</a:t>
             </a:r>
           </a:p>
         </p:txBody>
@@ -971,6 +1016,11 @@
           </a:p>
           <a:p xmlns:a="http://schemas.openxmlformats.org/drawingml/2006/main">
             <a:r>
+              <a:t>- https://www150.statcan.gc.ca/t1/tbl1/en/tv.action?pid=2010007101</a:t>
+            </a:r>
+          </a:p>
+          <a:p xmlns:a="http://schemas.openxmlformats.org/drawingml/2006/main">
+            <a:r>
               <a:t>- https://www.ftc.gov/reports/e-cigarette-report-2021</a:t>
             </a:r>
           </a:p>
@@ -1001,6 +1051,11 @@
           </a:p>
           <a:p xmlns:a="http://schemas.openxmlformats.org/drawingml/2006/main">
             <a:r>
+              <a:t>- https://data-api.ecb.europa.eu/service/data/EXR/A.CAD.EUR.SP00.A?startPeriod=2024&amp;endPeriod=2024&amp;format=csvdata</a:t>
+            </a:r>
+          </a:p>
+          <a:p xmlns:a="http://schemas.openxmlformats.org/drawingml/2006/main">
+            <a:r>
               <a:t/>
             </a:r>
           </a:p>
@@ -1027,6 +1082,11 @@
           <a:p xmlns:a="http://schemas.openxmlformats.org/drawingml/2006/main">
             <a:r>
               <a:t>- USD 2021: ECB-EXR-A-USD-EUR-SP00-A-2021 · 1.1827403100775 currency units per EUR</a:t>
+            </a:r>
+          </a:p>
+          <a:p xmlns:a="http://schemas.openxmlformats.org/drawingml/2006/main">
+            <a:r>
+              <a:t>- CAD 2024: ECB-EXR-A-CAD-EUR-SP00-A-2024 · 1.482110546875 currency units per EUR</a:t>
             </a:r>
           </a:p>
         </p:txBody>
@@ -1126,6 +1186,11 @@
           </a:p>
           <a:p xmlns:a="http://schemas.openxmlformats.org/drawingml/2006/main">
             <a:r>
+              <a:t>- https://www150.statcan.gc.ca/t1/tbl1/en/tv.action?pid=2010007101</a:t>
+            </a:r>
+          </a:p>
+          <a:p xmlns:a="http://schemas.openxmlformats.org/drawingml/2006/main">
+            <a:r>
               <a:t>- https://www.ftc.gov/reports/e-cigarette-report-2021</a:t>
             </a:r>
           </a:p>
@@ -1156,6 +1221,11 @@
           </a:p>
           <a:p xmlns:a="http://schemas.openxmlformats.org/drawingml/2006/main">
             <a:r>
+              <a:t>- https://data-api.ecb.europa.eu/service/data/EXR/A.CAD.EUR.SP00.A?startPeriod=2024&amp;endPeriod=2024&amp;format=csvdata</a:t>
+            </a:r>
+          </a:p>
+          <a:p xmlns:a="http://schemas.openxmlformats.org/drawingml/2006/main">
+            <a:r>
               <a:t/>
             </a:r>
           </a:p>
@@ -1182,6 +1252,11 @@
           <a:p xmlns:a="http://schemas.openxmlformats.org/drawingml/2006/main">
             <a:r>
               <a:t>- USD 2021: ECB-EXR-A-USD-EUR-SP00-A-2021 · 1.1827403100775 currency units per EUR</a:t>
+            </a:r>
+          </a:p>
+          <a:p xmlns:a="http://schemas.openxmlformats.org/drawingml/2006/main">
+            <a:r>
+              <a:t>- CAD 2024: ECB-EXR-A-CAD-EUR-SP00-A-2024 · 1.482110546875 currency units per EUR</a:t>
             </a:r>
           </a:p>
         </p:txBody>
@@ -1281,6 +1356,11 @@
           </a:p>
           <a:p xmlns:a="http://schemas.openxmlformats.org/drawingml/2006/main">
             <a:r>
+              <a:t>- https://www150.statcan.gc.ca/t1/tbl1/en/tv.action?pid=2010007101</a:t>
+            </a:r>
+          </a:p>
+          <a:p xmlns:a="http://schemas.openxmlformats.org/drawingml/2006/main">
+            <a:r>
               <a:t>- https://www.ftc.gov/reports/e-cigarette-report-2021</a:t>
             </a:r>
           </a:p>
@@ -1311,6 +1391,11 @@
           </a:p>
           <a:p xmlns:a="http://schemas.openxmlformats.org/drawingml/2006/main">
             <a:r>
+              <a:t>- https://data-api.ecb.europa.eu/service/data/EXR/A.CAD.EUR.SP00.A?startPeriod=2024&amp;endPeriod=2024&amp;format=csvdata</a:t>
+            </a:r>
+          </a:p>
+          <a:p xmlns:a="http://schemas.openxmlformats.org/drawingml/2006/main">
+            <a:r>
               <a:t/>
             </a:r>
           </a:p>
@@ -1337,6 +1422,11 @@
           <a:p xmlns:a="http://schemas.openxmlformats.org/drawingml/2006/main">
             <a:r>
               <a:t>- USD 2021: ECB-EXR-A-USD-EUR-SP00-A-2021 · 1.1827403100775 currency units per EUR</a:t>
+            </a:r>
+          </a:p>
+          <a:p xmlns:a="http://schemas.openxmlformats.org/drawingml/2006/main">
+            <a:r>
+              <a:t>- CAD 2024: ECB-EXR-A-CAD-EUR-SP00-A-2024 · 1.482110546875 currency units per EUR</a:t>
             </a:r>
           </a:p>
         </p:txBody>
@@ -1436,6 +1526,11 @@
           </a:p>
           <a:p xmlns:a="http://schemas.openxmlformats.org/drawingml/2006/main">
             <a:r>
+              <a:t>- https://www150.statcan.gc.ca/t1/tbl1/en/tv.action?pid=2010007101</a:t>
+            </a:r>
+          </a:p>
+          <a:p xmlns:a="http://schemas.openxmlformats.org/drawingml/2006/main">
+            <a:r>
               <a:t>- https://www.ftc.gov/reports/e-cigarette-report-2021</a:t>
             </a:r>
           </a:p>
@@ -1466,6 +1561,11 @@
           </a:p>
           <a:p xmlns:a="http://schemas.openxmlformats.org/drawingml/2006/main">
             <a:r>
+              <a:t>- https://data-api.ecb.europa.eu/service/data/EXR/A.CAD.EUR.SP00.A?startPeriod=2024&amp;endPeriod=2024&amp;format=csvdata</a:t>
+            </a:r>
+          </a:p>
+          <a:p xmlns:a="http://schemas.openxmlformats.org/drawingml/2006/main">
+            <a:r>
               <a:t/>
             </a:r>
           </a:p>
@@ -1492,6 +1592,11 @@
           <a:p xmlns:a="http://schemas.openxmlformats.org/drawingml/2006/main">
             <a:r>
               <a:t>- USD 2021: ECB-EXR-A-USD-EUR-SP00-A-2021 · 1.1827403100775 currency units per EUR</a:t>
+            </a:r>
+          </a:p>
+          <a:p xmlns:a="http://schemas.openxmlformats.org/drawingml/2006/main">
+            <a:r>
+              <a:t>- CAD 2024: ECB-EXR-A-CAD-EUR-SP00-A-2024 · 1.482110546875 currency units per EUR</a:t>
             </a:r>
           </a:p>
         </p:txBody>
@@ -1591,6 +1696,11 @@
           </a:p>
           <a:p xmlns:a="http://schemas.openxmlformats.org/drawingml/2006/main">
             <a:r>
+              <a:t>- https://www150.statcan.gc.ca/t1/tbl1/en/tv.action?pid=2010007101</a:t>
+            </a:r>
+          </a:p>
+          <a:p xmlns:a="http://schemas.openxmlformats.org/drawingml/2006/main">
+            <a:r>
               <a:t>- https://www.ftc.gov/reports/e-cigarette-report-2021</a:t>
             </a:r>
           </a:p>
@@ -1621,6 +1731,11 @@
           </a:p>
           <a:p xmlns:a="http://schemas.openxmlformats.org/drawingml/2006/main">
             <a:r>
+              <a:t>- https://data-api.ecb.europa.eu/service/data/EXR/A.CAD.EUR.SP00.A?startPeriod=2024&amp;endPeriod=2024&amp;format=csvdata</a:t>
+            </a:r>
+          </a:p>
+          <a:p xmlns:a="http://schemas.openxmlformats.org/drawingml/2006/main">
+            <a:r>
               <a:t/>
             </a:r>
           </a:p>
@@ -1647,6 +1762,11 @@
           <a:p xmlns:a="http://schemas.openxmlformats.org/drawingml/2006/main">
             <a:r>
               <a:t>- USD 2021: ECB-EXR-A-USD-EUR-SP00-A-2021 · 1.1827403100775 currency units per EUR</a:t>
+            </a:r>
+          </a:p>
+          <a:p xmlns:a="http://schemas.openxmlformats.org/drawingml/2006/main">
+            <a:r>
+              <a:t>- CAD 2024: ECB-EXR-A-CAD-EUR-SP00-A-2024 · 1.482110546875 currency units per EUR</a:t>
             </a:r>
           </a:p>
         </p:txBody>
@@ -1746,6 +1866,11 @@
           </a:p>
           <a:p xmlns:a="http://schemas.openxmlformats.org/drawingml/2006/main">
             <a:r>
+              <a:t>- https://www150.statcan.gc.ca/t1/tbl1/en/tv.action?pid=2010007101</a:t>
+            </a:r>
+          </a:p>
+          <a:p xmlns:a="http://schemas.openxmlformats.org/drawingml/2006/main">
+            <a:r>
               <a:t>- https://www.ftc.gov/reports/e-cigarette-report-2021</a:t>
             </a:r>
           </a:p>
@@ -1776,6 +1901,11 @@
           </a:p>
           <a:p xmlns:a="http://schemas.openxmlformats.org/drawingml/2006/main">
             <a:r>
+              <a:t>- https://data-api.ecb.europa.eu/service/data/EXR/A.CAD.EUR.SP00.A?startPeriod=2024&amp;endPeriod=2024&amp;format=csvdata</a:t>
+            </a:r>
+          </a:p>
+          <a:p xmlns:a="http://schemas.openxmlformats.org/drawingml/2006/main">
+            <a:r>
               <a:t/>
             </a:r>
           </a:p>
@@ -1802,6 +1932,11 @@
           <a:p xmlns:a="http://schemas.openxmlformats.org/drawingml/2006/main">
             <a:r>
               <a:t>- USD 2021: ECB-EXR-A-USD-EUR-SP00-A-2021 · 1.1827403100775 currency units per EUR</a:t>
+            </a:r>
+          </a:p>
+          <a:p xmlns:a="http://schemas.openxmlformats.org/drawingml/2006/main">
+            <a:r>
+              <a:t>- CAD 2024: ECB-EXR-A-CAD-EUR-SP00-A-2024 · 1.482110546875 currency units per EUR</a:t>
             </a:r>
           </a:p>
         </p:txBody>
@@ -1901,6 +2036,11 @@
           </a:p>
           <a:p xmlns:a="http://schemas.openxmlformats.org/drawingml/2006/main">
             <a:r>
+              <a:t>- https://www150.statcan.gc.ca/t1/tbl1/en/tv.action?pid=2010007101</a:t>
+            </a:r>
+          </a:p>
+          <a:p xmlns:a="http://schemas.openxmlformats.org/drawingml/2006/main">
+            <a:r>
               <a:t>- https://www.ftc.gov/reports/e-cigarette-report-2021</a:t>
             </a:r>
           </a:p>
@@ -1931,6 +2071,11 @@
           </a:p>
           <a:p xmlns:a="http://schemas.openxmlformats.org/drawingml/2006/main">
             <a:r>
+              <a:t>- https://data-api.ecb.europa.eu/service/data/EXR/A.CAD.EUR.SP00.A?startPeriod=2024&amp;endPeriod=2024&amp;format=csvdata</a:t>
+            </a:r>
+          </a:p>
+          <a:p xmlns:a="http://schemas.openxmlformats.org/drawingml/2006/main">
+            <a:r>
               <a:t/>
             </a:r>
           </a:p>
@@ -1957,6 +2102,11 @@
           <a:p xmlns:a="http://schemas.openxmlformats.org/drawingml/2006/main">
             <a:r>
               <a:t>- USD 2021: ECB-EXR-A-USD-EUR-SP00-A-2021 · 1.1827403100775 currency units per EUR</a:t>
+            </a:r>
+          </a:p>
+          <a:p xmlns:a="http://schemas.openxmlformats.org/drawingml/2006/main">
+            <a:r>
+              <a:t>- CAD 2024: ECB-EXR-A-CAD-EUR-SP00-A-2024 · 1.482110546875 currency units per EUR</a:t>
             </a:r>
           </a:p>
         </p:txBody>
@@ -2056,6 +2206,11 @@
           </a:p>
           <a:p xmlns:a="http://schemas.openxmlformats.org/drawingml/2006/main">
             <a:r>
+              <a:t>- https://www150.statcan.gc.ca/t1/tbl1/en/tv.action?pid=2010007101</a:t>
+            </a:r>
+          </a:p>
+          <a:p xmlns:a="http://schemas.openxmlformats.org/drawingml/2006/main">
+            <a:r>
               <a:t>- https://www.ftc.gov/reports/e-cigarette-report-2021</a:t>
             </a:r>
           </a:p>
@@ -2086,6 +2241,11 @@
           </a:p>
           <a:p xmlns:a="http://schemas.openxmlformats.org/drawingml/2006/main">
             <a:r>
+              <a:t>- https://data-api.ecb.europa.eu/service/data/EXR/A.CAD.EUR.SP00.A?startPeriod=2024&amp;endPeriod=2024&amp;format=csvdata</a:t>
+            </a:r>
+          </a:p>
+          <a:p xmlns:a="http://schemas.openxmlformats.org/drawingml/2006/main">
+            <a:r>
               <a:t/>
             </a:r>
           </a:p>
@@ -2112,6 +2272,11 @@
           <a:p xmlns:a="http://schemas.openxmlformats.org/drawingml/2006/main">
             <a:r>
               <a:t>- USD 2021: ECB-EXR-A-USD-EUR-SP00-A-2021 · 1.1827403100775 currency units per EUR</a:t>
+            </a:r>
+          </a:p>
+          <a:p xmlns:a="http://schemas.openxmlformats.org/drawingml/2006/main">
+            <a:r>
+              <a:t>- CAD 2024: ECB-EXR-A-CAD-EUR-SP00-A-2024 · 1.482110546875 currency units per EUR</a:t>
             </a:r>
           </a:p>
         </p:txBody>
@@ -2211,6 +2376,11 @@
           </a:p>
           <a:p xmlns:a="http://schemas.openxmlformats.org/drawingml/2006/main">
             <a:r>
+              <a:t>- https://www150.statcan.gc.ca/t1/tbl1/en/tv.action?pid=2010007101</a:t>
+            </a:r>
+          </a:p>
+          <a:p xmlns:a="http://schemas.openxmlformats.org/drawingml/2006/main">
+            <a:r>
               <a:t>- https://www.ftc.gov/reports/e-cigarette-report-2021</a:t>
             </a:r>
           </a:p>
@@ -2241,6 +2411,11 @@
           </a:p>
           <a:p xmlns:a="http://schemas.openxmlformats.org/drawingml/2006/main">
             <a:r>
+              <a:t>- https://data-api.ecb.europa.eu/service/data/EXR/A.CAD.EUR.SP00.A?startPeriod=2024&amp;endPeriod=2024&amp;format=csvdata</a:t>
+            </a:r>
+          </a:p>
+          <a:p xmlns:a="http://schemas.openxmlformats.org/drawingml/2006/main">
+            <a:r>
               <a:t/>
             </a:r>
           </a:p>
@@ -2267,6 +2442,11 @@
           <a:p xmlns:a="http://schemas.openxmlformats.org/drawingml/2006/main">
             <a:r>
               <a:t>- USD 2021: ECB-EXR-A-USD-EUR-SP00-A-2021 · 1.1827403100775 currency units per EUR</a:t>
+            </a:r>
+          </a:p>
+          <a:p xmlns:a="http://schemas.openxmlformats.org/drawingml/2006/main">
+            <a:r>
+              <a:t>- CAD 2024: ECB-EXR-A-CAD-EUR-SP00-A-2024 · 1.482110546875 currency units per EUR</a:t>
             </a:r>
           </a:p>
         </p:txBody>
@@ -2313,7 +2493,7 @@
           <p:cNvPr id="2" name="Title 1">
             <a:extLst xmlns:a="http://schemas.openxmlformats.org/drawingml/2006/main">
               <a:ext uri="{FF2B5EF4-FFF2-40B4-BE49-F238E27FC236}">
-                <a16:creationId xmlns:a16="http://schemas.microsoft.com/office/drawing/2014/main" id="{857B7D5E-B458-4A99-B01D-42AC4B71C064}"/>
+                <a16:creationId xmlns:a16="http://schemas.microsoft.com/office/drawing/2014/main" id="{15DAB6E5-907E-411D-9FA4-947154F1282E}"/>
               </a:ext>
             </a:extLst>
           </p:cNvPr>
@@ -2345,7 +2525,7 @@
           <p:cNvPr id="3" name="Subtitle 2">
             <a:extLst xmlns:a="http://schemas.openxmlformats.org/drawingml/2006/main">
               <a:ext uri="{FF2B5EF4-FFF2-40B4-BE49-F238E27FC236}">
-                <a16:creationId xmlns:a16="http://schemas.microsoft.com/office/drawing/2014/main" id="{33CF2F2C-5627-40E4-9580-5CB53DD45DC2}"/>
+                <a16:creationId xmlns:a16="http://schemas.microsoft.com/office/drawing/2014/main" id="{6CEA4B3B-70E7-4C67-BB6E-0CFA84B29887}"/>
               </a:ext>
             </a:extLst>
           </p:cNvPr>
@@ -2468,7 +2648,7 @@
           <p:cNvPr id="4" name="Date Placeholder 3">
             <a:extLst xmlns:a="http://schemas.openxmlformats.org/drawingml/2006/main">
               <a:ext uri="{FF2B5EF4-FFF2-40B4-BE49-F238E27FC236}">
-                <a16:creationId xmlns:a16="http://schemas.microsoft.com/office/drawing/2014/main" id="{E27CADA3-93FC-4986-8052-C21C98804136}"/>
+                <a16:creationId xmlns:a16="http://schemas.microsoft.com/office/drawing/2014/main" id="{0E0E2D9E-8AC8-4838-81B8-3C55D1DBE258}"/>
               </a:ext>
             </a:extLst>
           </p:cNvPr>
@@ -2495,7 +2675,7 @@
           <p:cNvPr id="5" name="Footer Placeholder 4">
             <a:extLst xmlns:a="http://schemas.openxmlformats.org/drawingml/2006/main">
               <a:ext uri="{FF2B5EF4-FFF2-40B4-BE49-F238E27FC236}">
-                <a16:creationId xmlns:a16="http://schemas.microsoft.com/office/drawing/2014/main" id="{A1558499-8A96-44AB-A75C-66D2DFA83473}"/>
+                <a16:creationId xmlns:a16="http://schemas.microsoft.com/office/drawing/2014/main" id="{A17D8D6D-E3F9-46D8-AFA7-A0E29F9EB217}"/>
               </a:ext>
             </a:extLst>
           </p:cNvPr>
@@ -2518,7 +2698,7 @@
           <p:cNvPr id="6" name="Slide Number Placeholder 5">
             <a:extLst xmlns:a="http://schemas.openxmlformats.org/drawingml/2006/main">
               <a:ext uri="{FF2B5EF4-FFF2-40B4-BE49-F238E27FC236}">
-                <a16:creationId xmlns:a16="http://schemas.microsoft.com/office/drawing/2014/main" id="{EA87F403-EC2D-4590-9EA4-5204D80D927B}"/>
+                <a16:creationId xmlns:a16="http://schemas.microsoft.com/office/drawing/2014/main" id="{18BB375F-49BA-46DC-A0AC-46D0D2F096F9}"/>
               </a:ext>
             </a:extLst>
           </p:cNvPr>
@@ -2562,7 +2742,7 @@
           <p:cNvPr id="2" name="Title 1">
             <a:extLst xmlns:a="http://schemas.openxmlformats.org/drawingml/2006/main">
               <a:ext uri="{FF2B5EF4-FFF2-40B4-BE49-F238E27FC236}">
-                <a16:creationId xmlns:a16="http://schemas.microsoft.com/office/drawing/2014/main" id="{5FF69507-3CB6-445F-84BF-98B7FF4D40B2}"/>
+                <a16:creationId xmlns:a16="http://schemas.microsoft.com/office/drawing/2014/main" id="{46DD337B-C46C-444F-9B62-AE975C32F89B}"/>
               </a:ext>
             </a:extLst>
           </p:cNvPr>
@@ -2589,7 +2769,7 @@
           <p:cNvPr id="3" name="Vertical Text Placeholder 2">
             <a:extLst xmlns:a="http://schemas.openxmlformats.org/drawingml/2006/main">
               <a:ext uri="{FF2B5EF4-FFF2-40B4-BE49-F238E27FC236}">
-                <a16:creationId xmlns:a16="http://schemas.microsoft.com/office/drawing/2014/main" id="{6EA51884-5684-4173-97DE-BA6CA17EDCB2}"/>
+                <a16:creationId xmlns:a16="http://schemas.microsoft.com/office/drawing/2014/main" id="{59299474-E96B-4680-B3EC-0E396F43BE1F}"/>
               </a:ext>
             </a:extLst>
           </p:cNvPr>
@@ -2651,7 +2831,7 @@
           <p:cNvPr id="4" name="Date Placeholder 3">
             <a:extLst xmlns:a="http://schemas.openxmlformats.org/drawingml/2006/main">
               <a:ext uri="{FF2B5EF4-FFF2-40B4-BE49-F238E27FC236}">
-                <a16:creationId xmlns:a16="http://schemas.microsoft.com/office/drawing/2014/main" id="{6E19A0B8-B508-47AD-B083-20E1B70C238D}"/>
+                <a16:creationId xmlns:a16="http://schemas.microsoft.com/office/drawing/2014/main" id="{03617643-0F82-479F-8F21-1826724423E0}"/>
               </a:ext>
             </a:extLst>
           </p:cNvPr>
@@ -2678,7 +2858,7 @@
           <p:cNvPr id="5" name="Footer Placeholder 4">
             <a:extLst xmlns:a="http://schemas.openxmlformats.org/drawingml/2006/main">
               <a:ext uri="{FF2B5EF4-FFF2-40B4-BE49-F238E27FC236}">
-                <a16:creationId xmlns:a16="http://schemas.microsoft.com/office/drawing/2014/main" id="{099B5619-0FE8-40A0-A88E-F65B4D77920D}"/>
+                <a16:creationId xmlns:a16="http://schemas.microsoft.com/office/drawing/2014/main" id="{5E28B5CB-B853-494D-A3BE-91C7A1637CA4}"/>
               </a:ext>
             </a:extLst>
           </p:cNvPr>
@@ -2701,7 +2881,7 @@
           <p:cNvPr id="6" name="Slide Number Placeholder 5">
             <a:extLst xmlns:a="http://schemas.openxmlformats.org/drawingml/2006/main">
               <a:ext uri="{FF2B5EF4-FFF2-40B4-BE49-F238E27FC236}">
-                <a16:creationId xmlns:a16="http://schemas.microsoft.com/office/drawing/2014/main" id="{8BBC4695-28B0-4E28-BF44-E57F1E1ED699}"/>
+                <a16:creationId xmlns:a16="http://schemas.microsoft.com/office/drawing/2014/main" id="{098D2226-60CA-4314-84AE-D823BDA378BB}"/>
               </a:ext>
             </a:extLst>
           </p:cNvPr>
@@ -2745,7 +2925,7 @@
           <p:cNvPr id="2" name="Vertical Title 1">
             <a:extLst xmlns:a="http://schemas.openxmlformats.org/drawingml/2006/main">
               <a:ext uri="{FF2B5EF4-FFF2-40B4-BE49-F238E27FC236}">
-                <a16:creationId xmlns:a16="http://schemas.microsoft.com/office/drawing/2014/main" id="{F45C0545-AA55-4EF6-9601-ED8389C43CA0}"/>
+                <a16:creationId xmlns:a16="http://schemas.microsoft.com/office/drawing/2014/main" id="{EB09D50A-7456-41F2-B6AD-32978CA7B1C2}"/>
               </a:ext>
             </a:extLst>
           </p:cNvPr>
@@ -2777,7 +2957,7 @@
           <p:cNvPr id="3" name="Vertical Text Placeholder 2">
             <a:extLst xmlns:a="http://schemas.openxmlformats.org/drawingml/2006/main">
               <a:ext uri="{FF2B5EF4-FFF2-40B4-BE49-F238E27FC236}">
-                <a16:creationId xmlns:a16="http://schemas.microsoft.com/office/drawing/2014/main" id="{AB878BFF-2DCE-4BA4-AAF6-C2D0BB330CEC}"/>
+                <a16:creationId xmlns:a16="http://schemas.microsoft.com/office/drawing/2014/main" id="{53CC1859-BB0C-4F91-8CC1-8ED50B03AC63}"/>
               </a:ext>
             </a:extLst>
           </p:cNvPr>
@@ -2844,7 +3024,7 @@
           <p:cNvPr id="4" name="Date Placeholder 3">
             <a:extLst xmlns:a="http://schemas.openxmlformats.org/drawingml/2006/main">
               <a:ext uri="{FF2B5EF4-FFF2-40B4-BE49-F238E27FC236}">
-                <a16:creationId xmlns:a16="http://schemas.microsoft.com/office/drawing/2014/main" id="{5C2B6488-1112-46A8-B10B-B3E0871FAE4E}"/>
+                <a16:creationId xmlns:a16="http://schemas.microsoft.com/office/drawing/2014/main" id="{EB5B887B-1AF3-4F27-B5CD-791713502548}"/>
               </a:ext>
             </a:extLst>
           </p:cNvPr>
@@ -2871,7 +3051,7 @@
           <p:cNvPr id="5" name="Footer Placeholder 4">
             <a:extLst xmlns:a="http://schemas.openxmlformats.org/drawingml/2006/main">
               <a:ext uri="{FF2B5EF4-FFF2-40B4-BE49-F238E27FC236}">
-                <a16:creationId xmlns:a16="http://schemas.microsoft.com/office/drawing/2014/main" id="{C9D6F744-F01D-4043-95E4-40A67E627B19}"/>
+                <a16:creationId xmlns:a16="http://schemas.microsoft.com/office/drawing/2014/main" id="{1B007154-71B5-4FBA-B931-A8E3236E476F}"/>
               </a:ext>
             </a:extLst>
           </p:cNvPr>
@@ -2894,7 +3074,7 @@
           <p:cNvPr id="6" name="Slide Number Placeholder 5">
             <a:extLst xmlns:a="http://schemas.openxmlformats.org/drawingml/2006/main">
               <a:ext uri="{FF2B5EF4-FFF2-40B4-BE49-F238E27FC236}">
-                <a16:creationId xmlns:a16="http://schemas.microsoft.com/office/drawing/2014/main" id="{BACF4D0C-B0D8-438A-9266-7B1A6C058B4D}"/>
+                <a16:creationId xmlns:a16="http://schemas.microsoft.com/office/drawing/2014/main" id="{E0FC5CF6-9933-48A4-90F6-BFD6D6077A48}"/>
               </a:ext>
             </a:extLst>
           </p:cNvPr>
@@ -2938,7 +3118,7 @@
           <p:cNvPr id="2" name="Title 1">
             <a:extLst xmlns:a="http://schemas.openxmlformats.org/drawingml/2006/main">
               <a:ext uri="{FF2B5EF4-FFF2-40B4-BE49-F238E27FC236}">
-                <a16:creationId xmlns:a16="http://schemas.microsoft.com/office/drawing/2014/main" id="{F7017EF9-3F77-4978-B8B5-374293794A0C}"/>
+                <a16:creationId xmlns:a16="http://schemas.microsoft.com/office/drawing/2014/main" id="{594D6D7B-DD58-4F54-9933-02F2FED82463}"/>
               </a:ext>
             </a:extLst>
           </p:cNvPr>
@@ -2965,7 +3145,7 @@
           <p:cNvPr id="3" name="Content Placeholder 2">
             <a:extLst xmlns:a="http://schemas.openxmlformats.org/drawingml/2006/main">
               <a:ext uri="{FF2B5EF4-FFF2-40B4-BE49-F238E27FC236}">
-                <a16:creationId xmlns:a16="http://schemas.microsoft.com/office/drawing/2014/main" id="{5D449902-A653-4A84-A098-ABD18083F44D}"/>
+                <a16:creationId xmlns:a16="http://schemas.microsoft.com/office/drawing/2014/main" id="{A73FBEE8-E7A9-40F6-9C8E-50177005E726}"/>
               </a:ext>
             </a:extLst>
           </p:cNvPr>
@@ -3027,7 +3207,7 @@
           <p:cNvPr id="4" name="Date Placeholder 3">
             <a:extLst xmlns:a="http://schemas.openxmlformats.org/drawingml/2006/main">
               <a:ext uri="{FF2B5EF4-FFF2-40B4-BE49-F238E27FC236}">
-                <a16:creationId xmlns:a16="http://schemas.microsoft.com/office/drawing/2014/main" id="{FC402EA4-FC48-47D4-A45C-B6C66F39A411}"/>
+                <a16:creationId xmlns:a16="http://schemas.microsoft.com/office/drawing/2014/main" id="{0104886C-9971-4283-8F84-AF5BFF031E76}"/>
               </a:ext>
             </a:extLst>
           </p:cNvPr>
@@ -3054,7 +3234,7 @@
           <p:cNvPr id="5" name="Footer Placeholder 4">
             <a:extLst xmlns:a="http://schemas.openxmlformats.org/drawingml/2006/main">
               <a:ext uri="{FF2B5EF4-FFF2-40B4-BE49-F238E27FC236}">
-                <a16:creationId xmlns:a16="http://schemas.microsoft.com/office/drawing/2014/main" id="{6368CB30-E419-4C56-A701-C6794EDDE226}"/>
+                <a16:creationId xmlns:a16="http://schemas.microsoft.com/office/drawing/2014/main" id="{C035AF33-E04A-4378-8D6F-492AE3989AC1}"/>
               </a:ext>
             </a:extLst>
           </p:cNvPr>
@@ -3077,7 +3257,7 @@
           <p:cNvPr id="6" name="Slide Number Placeholder 5">
             <a:extLst xmlns:a="http://schemas.openxmlformats.org/drawingml/2006/main">
               <a:ext uri="{FF2B5EF4-FFF2-40B4-BE49-F238E27FC236}">
-                <a16:creationId xmlns:a16="http://schemas.microsoft.com/office/drawing/2014/main" id="{2CBAE6E3-A6D2-40A2-909D-BC56EA61E265}"/>
+                <a16:creationId xmlns:a16="http://schemas.microsoft.com/office/drawing/2014/main" id="{0B536A6B-6E65-4CED-9E59-8A5844EE78C9}"/>
               </a:ext>
             </a:extLst>
           </p:cNvPr>
@@ -3121,7 +3301,7 @@
           <p:cNvPr id="2" name="Title 1">
             <a:extLst xmlns:a="http://schemas.openxmlformats.org/drawingml/2006/main">
               <a:ext uri="{FF2B5EF4-FFF2-40B4-BE49-F238E27FC236}">
-                <a16:creationId xmlns:a16="http://schemas.microsoft.com/office/drawing/2014/main" id="{A0DA7BFB-0BE0-4848-B397-773C2E2FCD03}"/>
+                <a16:creationId xmlns:a16="http://schemas.microsoft.com/office/drawing/2014/main" id="{927D73D5-910E-4097-8DB6-91FAA4D3E49D}"/>
               </a:ext>
             </a:extLst>
           </p:cNvPr>
@@ -3158,7 +3338,7 @@
           <p:cNvPr id="3" name="Text Placeholder 2">
             <a:extLst xmlns:a="http://schemas.openxmlformats.org/drawingml/2006/main">
               <a:ext uri="{FF2B5EF4-FFF2-40B4-BE49-F238E27FC236}">
-                <a16:creationId xmlns:a16="http://schemas.microsoft.com/office/drawing/2014/main" id="{32CF37C7-6325-401C-BE7F-AFD48A91CCEC}"/>
+                <a16:creationId xmlns:a16="http://schemas.microsoft.com/office/drawing/2014/main" id="{E7A9AD68-3693-46E7-99A4-7A731E602593}"/>
               </a:ext>
             </a:extLst>
           </p:cNvPr>
@@ -3284,7 +3464,7 @@
           <p:cNvPr id="4" name="Date Placeholder 3">
             <a:extLst xmlns:a="http://schemas.openxmlformats.org/drawingml/2006/main">
               <a:ext uri="{FF2B5EF4-FFF2-40B4-BE49-F238E27FC236}">
-                <a16:creationId xmlns:a16="http://schemas.microsoft.com/office/drawing/2014/main" id="{7E86F557-8157-4673-8B19-A30AC9C91A1C}"/>
+                <a16:creationId xmlns:a16="http://schemas.microsoft.com/office/drawing/2014/main" id="{F41D7BFE-93DB-41C9-871E-5852158FF52C}"/>
               </a:ext>
             </a:extLst>
           </p:cNvPr>
@@ -3311,7 +3491,7 @@
           <p:cNvPr id="5" name="Footer Placeholder 4">
             <a:extLst xmlns:a="http://schemas.openxmlformats.org/drawingml/2006/main">
               <a:ext uri="{FF2B5EF4-FFF2-40B4-BE49-F238E27FC236}">
-                <a16:creationId xmlns:a16="http://schemas.microsoft.com/office/drawing/2014/main" id="{5BFBF380-0145-424E-A874-30D833C26A30}"/>
+                <a16:creationId xmlns:a16="http://schemas.microsoft.com/office/drawing/2014/main" id="{B750B963-44C1-4110-8F83-9D34D885311A}"/>
               </a:ext>
             </a:extLst>
           </p:cNvPr>
@@ -3334,7 +3514,7 @@
           <p:cNvPr id="6" name="Slide Number Placeholder 5">
             <a:extLst xmlns:a="http://schemas.openxmlformats.org/drawingml/2006/main">
               <a:ext uri="{FF2B5EF4-FFF2-40B4-BE49-F238E27FC236}">
-                <a16:creationId xmlns:a16="http://schemas.microsoft.com/office/drawing/2014/main" id="{B5F770BC-A32C-465B-A8DE-CA88E03242FB}"/>
+                <a16:creationId xmlns:a16="http://schemas.microsoft.com/office/drawing/2014/main" id="{8A3CE8C1-F867-4F9D-B7BF-21EF37351C5A}"/>
               </a:ext>
             </a:extLst>
           </p:cNvPr>
@@ -3378,7 +3558,7 @@
           <p:cNvPr id="2" name="Title 1">
             <a:extLst xmlns:a="http://schemas.openxmlformats.org/drawingml/2006/main">
               <a:ext uri="{FF2B5EF4-FFF2-40B4-BE49-F238E27FC236}">
-                <a16:creationId xmlns:a16="http://schemas.microsoft.com/office/drawing/2014/main" id="{0DFB3D67-FFE1-4E5F-9A33-6C1CE2BA8B0C}"/>
+                <a16:creationId xmlns:a16="http://schemas.microsoft.com/office/drawing/2014/main" id="{7119EDA0-7C4F-4275-9048-C0C456E7E8BF}"/>
               </a:ext>
             </a:extLst>
           </p:cNvPr>
@@ -3405,7 +3585,7 @@
           <p:cNvPr id="3" name="Content Placeholder 2">
             <a:extLst xmlns:a="http://schemas.openxmlformats.org/drawingml/2006/main">
               <a:ext uri="{FF2B5EF4-FFF2-40B4-BE49-F238E27FC236}">
-                <a16:creationId xmlns:a16="http://schemas.microsoft.com/office/drawing/2014/main" id="{D3C5B64D-42C7-4130-A2C2-43292B5B0335}"/>
+                <a16:creationId xmlns:a16="http://schemas.microsoft.com/office/drawing/2014/main" id="{791AB51B-92A6-47BA-94F9-3319F31676C7}"/>
               </a:ext>
             </a:extLst>
           </p:cNvPr>
@@ -3509,7 +3689,7 @@
           <p:cNvPr id="4" name="Content Placeholder 3">
             <a:extLst xmlns:a="http://schemas.openxmlformats.org/drawingml/2006/main">
               <a:ext uri="{FF2B5EF4-FFF2-40B4-BE49-F238E27FC236}">
-                <a16:creationId xmlns:a16="http://schemas.microsoft.com/office/drawing/2014/main" id="{C0CDDA38-6B67-4FCE-92B1-C97799A087E5}"/>
+                <a16:creationId xmlns:a16="http://schemas.microsoft.com/office/drawing/2014/main" id="{22172674-4601-4E96-BAB2-C7E8BECC9E78}"/>
               </a:ext>
             </a:extLst>
           </p:cNvPr>
@@ -3613,7 +3793,7 @@
           <p:cNvPr id="5" name="Date Placeholder 4">
             <a:extLst xmlns:a="http://schemas.openxmlformats.org/drawingml/2006/main">
               <a:ext uri="{FF2B5EF4-FFF2-40B4-BE49-F238E27FC236}">
-                <a16:creationId xmlns:a16="http://schemas.microsoft.com/office/drawing/2014/main" id="{937A3F18-6D71-4ADB-84F3-10D44CBC3F71}"/>
+                <a16:creationId xmlns:a16="http://schemas.microsoft.com/office/drawing/2014/main" id="{192D3AEB-1C0B-42C7-A217-E7DC85542197}"/>
               </a:ext>
             </a:extLst>
           </p:cNvPr>
@@ -3640,7 +3820,7 @@
           <p:cNvPr id="6" name="Footer Placeholder 5">
             <a:extLst xmlns:a="http://schemas.openxmlformats.org/drawingml/2006/main">
               <a:ext uri="{FF2B5EF4-FFF2-40B4-BE49-F238E27FC236}">
-                <a16:creationId xmlns:a16="http://schemas.microsoft.com/office/drawing/2014/main" id="{4D324D32-F5CB-41FA-AA5F-061A52CF9EB5}"/>
+                <a16:creationId xmlns:a16="http://schemas.microsoft.com/office/drawing/2014/main" id="{AFBEFD68-C091-484C-B4EA-EFE778227BB2}"/>
               </a:ext>
             </a:extLst>
           </p:cNvPr>
@@ -3663,7 +3843,7 @@
           <p:cNvPr id="7" name="Slide Number Placeholder 6">
             <a:extLst xmlns:a="http://schemas.openxmlformats.org/drawingml/2006/main">
               <a:ext uri="{FF2B5EF4-FFF2-40B4-BE49-F238E27FC236}">
-                <a16:creationId xmlns:a16="http://schemas.microsoft.com/office/drawing/2014/main" id="{735D8A4D-480C-4F5E-80E1-6AB9957ADD8D}"/>
+                <a16:creationId xmlns:a16="http://schemas.microsoft.com/office/drawing/2014/main" id="{22A161F1-D265-4132-B12B-F58BCB2E82B5}"/>
               </a:ext>
             </a:extLst>
           </p:cNvPr>
@@ -3707,7 +3887,7 @@
           <p:cNvPr id="2" name="Title 1">
             <a:extLst xmlns:a="http://schemas.openxmlformats.org/drawingml/2006/main">
               <a:ext uri="{FF2B5EF4-FFF2-40B4-BE49-F238E27FC236}">
-                <a16:creationId xmlns:a16="http://schemas.microsoft.com/office/drawing/2014/main" id="{29F062A9-F4F9-4316-AA15-FFE186633341}"/>
+                <a16:creationId xmlns:a16="http://schemas.microsoft.com/office/drawing/2014/main" id="{54C61F18-93CD-4001-8869-839E1475B6FC}"/>
               </a:ext>
             </a:extLst>
           </p:cNvPr>
@@ -3739,7 +3919,7 @@
           <p:cNvPr id="3" name="Text Placeholder 2">
             <a:extLst xmlns:a="http://schemas.openxmlformats.org/drawingml/2006/main">
               <a:ext uri="{FF2B5EF4-FFF2-40B4-BE49-F238E27FC236}">
-                <a16:creationId xmlns:a16="http://schemas.microsoft.com/office/drawing/2014/main" id="{63A4E4BB-F6C9-4DC9-A993-4331FBF65779}"/>
+                <a16:creationId xmlns:a16="http://schemas.microsoft.com/office/drawing/2014/main" id="{12ACB7F8-5947-4D25-9D29-F225553EDC5F}"/>
               </a:ext>
             </a:extLst>
           </p:cNvPr>
@@ -3811,7 +3991,7 @@
           <p:cNvPr id="4" name="Content Placeholder 3">
             <a:extLst xmlns:a="http://schemas.openxmlformats.org/drawingml/2006/main">
               <a:ext uri="{FF2B5EF4-FFF2-40B4-BE49-F238E27FC236}">
-                <a16:creationId xmlns:a16="http://schemas.microsoft.com/office/drawing/2014/main" id="{43BBB804-FD9D-4368-93FE-D770638A12F3}"/>
+                <a16:creationId xmlns:a16="http://schemas.microsoft.com/office/drawing/2014/main" id="{7FDFEAEC-6512-4CAA-B3B5-FF16FADBE564}"/>
               </a:ext>
             </a:extLst>
           </p:cNvPr>
@@ -3915,7 +4095,7 @@
           <p:cNvPr id="5" name="Text Placeholder 4">
             <a:extLst xmlns:a="http://schemas.openxmlformats.org/drawingml/2006/main">
               <a:ext uri="{FF2B5EF4-FFF2-40B4-BE49-F238E27FC236}">
-                <a16:creationId xmlns:a16="http://schemas.microsoft.com/office/drawing/2014/main" id="{6D699DDA-9566-4A48-B9B1-4F4D9D5116AF}"/>
+                <a16:creationId xmlns:a16="http://schemas.microsoft.com/office/drawing/2014/main" id="{8F53036C-7399-44B4-80E9-032DDF35F8DE}"/>
               </a:ext>
             </a:extLst>
           </p:cNvPr>
@@ -3987,7 +4167,7 @@
           <p:cNvPr id="6" name="Content Placeholder 5">
             <a:extLst xmlns:a="http://schemas.openxmlformats.org/drawingml/2006/main">
               <a:ext uri="{FF2B5EF4-FFF2-40B4-BE49-F238E27FC236}">
-                <a16:creationId xmlns:a16="http://schemas.microsoft.com/office/drawing/2014/main" id="{BBF76503-F4EF-42BC-9E05-7987BE4E2452}"/>
+                <a16:creationId xmlns:a16="http://schemas.microsoft.com/office/drawing/2014/main" id="{32240855-BD86-4508-81AE-E22EB947251A}"/>
               </a:ext>
             </a:extLst>
           </p:cNvPr>
@@ -4091,7 +4271,7 @@
           <p:cNvPr id="7" name="Date Placeholder 6">
             <a:extLst xmlns:a="http://schemas.openxmlformats.org/drawingml/2006/main">
               <a:ext uri="{FF2B5EF4-FFF2-40B4-BE49-F238E27FC236}">
-                <a16:creationId xmlns:a16="http://schemas.microsoft.com/office/drawing/2014/main" id="{0AE2C33A-A987-4751-A4FA-98F6FD3FF19F}"/>
+                <a16:creationId xmlns:a16="http://schemas.microsoft.com/office/drawing/2014/main" id="{78ADD114-C7E3-4580-A288-F17932FD4EAC}"/>
               </a:ext>
             </a:extLst>
           </p:cNvPr>
@@ -4118,7 +4298,7 @@
           <p:cNvPr id="8" name="Footer Placeholder 7">
             <a:extLst xmlns:a="http://schemas.openxmlformats.org/drawingml/2006/main">
               <a:ext uri="{FF2B5EF4-FFF2-40B4-BE49-F238E27FC236}">
-                <a16:creationId xmlns:a16="http://schemas.microsoft.com/office/drawing/2014/main" id="{27865950-9D67-460A-86F9-71251DAB6032}"/>
+                <a16:creationId xmlns:a16="http://schemas.microsoft.com/office/drawing/2014/main" id="{1C3D1889-B9F5-4077-B426-96236232D950}"/>
               </a:ext>
             </a:extLst>
           </p:cNvPr>
@@ -4141,7 +4321,7 @@
           <p:cNvPr id="9" name="Slide Number Placeholder 8">
             <a:extLst xmlns:a="http://schemas.openxmlformats.org/drawingml/2006/main">
               <a:ext uri="{FF2B5EF4-FFF2-40B4-BE49-F238E27FC236}">
-                <a16:creationId xmlns:a16="http://schemas.microsoft.com/office/drawing/2014/main" id="{12FBD9BE-0027-4F90-A99A-206BCC9BFCC0}"/>
+                <a16:creationId xmlns:a16="http://schemas.microsoft.com/office/drawing/2014/main" id="{C4BC1CDB-1785-4265-8C0B-CC8C2768A92B}"/>
               </a:ext>
             </a:extLst>
           </p:cNvPr>
@@ -4185,7 +4365,7 @@
           <p:cNvPr id="2" name="Title 1">
             <a:extLst xmlns:a="http://schemas.openxmlformats.org/drawingml/2006/main">
               <a:ext uri="{FF2B5EF4-FFF2-40B4-BE49-F238E27FC236}">
-                <a16:creationId xmlns:a16="http://schemas.microsoft.com/office/drawing/2014/main" id="{45717E6B-2456-4824-A596-0176DB4B7900}"/>
+                <a16:creationId xmlns:a16="http://schemas.microsoft.com/office/drawing/2014/main" id="{100E5616-B205-42D1-97E7-9AF314A75D8A}"/>
               </a:ext>
             </a:extLst>
           </p:cNvPr>
@@ -4212,7 +4392,7 @@
           <p:cNvPr id="3" name="Date Placeholder 2">
             <a:extLst xmlns:a="http://schemas.openxmlformats.org/drawingml/2006/main">
               <a:ext uri="{FF2B5EF4-FFF2-40B4-BE49-F238E27FC236}">
-                <a16:creationId xmlns:a16="http://schemas.microsoft.com/office/drawing/2014/main" id="{9461C265-D484-4FB1-ADC5-8D965389D306}"/>
+                <a16:creationId xmlns:a16="http://schemas.microsoft.com/office/drawing/2014/main" id="{32B6E38E-B59C-47D4-B30F-410BD0A8B1AF}"/>
               </a:ext>
             </a:extLst>
           </p:cNvPr>
@@ -4239,7 +4419,7 @@
           <p:cNvPr id="4" name="Footer Placeholder 3">
             <a:extLst xmlns:a="http://schemas.openxmlformats.org/drawingml/2006/main">
               <a:ext uri="{FF2B5EF4-FFF2-40B4-BE49-F238E27FC236}">
-                <a16:creationId xmlns:a16="http://schemas.microsoft.com/office/drawing/2014/main" id="{0623E3E3-6B5F-4AAE-8D57-157CD5CBC93A}"/>
+                <a16:creationId xmlns:a16="http://schemas.microsoft.com/office/drawing/2014/main" id="{DF483516-CEF5-49E8-82FE-59C462DFFB66}"/>
               </a:ext>
             </a:extLst>
           </p:cNvPr>
@@ -4262,7 +4442,7 @@
           <p:cNvPr id="5" name="Slide Number Placeholder 4">
             <a:extLst xmlns:a="http://schemas.openxmlformats.org/drawingml/2006/main">
               <a:ext uri="{FF2B5EF4-FFF2-40B4-BE49-F238E27FC236}">
-                <a16:creationId xmlns:a16="http://schemas.microsoft.com/office/drawing/2014/main" id="{F71286BF-8FBD-4C3E-A484-909059BE4947}"/>
+                <a16:creationId xmlns:a16="http://schemas.microsoft.com/office/drawing/2014/main" id="{C317C193-66A4-403B-9750-B5543A48DC42}"/>
               </a:ext>
             </a:extLst>
           </p:cNvPr>
@@ -4306,7 +4486,7 @@
           <p:cNvPr id="2" name="Date Placeholder 1">
             <a:extLst xmlns:a="http://schemas.openxmlformats.org/drawingml/2006/main">
               <a:ext uri="{FF2B5EF4-FFF2-40B4-BE49-F238E27FC236}">
-                <a16:creationId xmlns:a16="http://schemas.microsoft.com/office/drawing/2014/main" id="{BF5897D7-0C72-4659-BBB0-9DD611B01DFA}"/>
+                <a16:creationId xmlns:a16="http://schemas.microsoft.com/office/drawing/2014/main" id="{D3B53D39-7AE2-4812-8B41-FC74CE5031EA}"/>
               </a:ext>
             </a:extLst>
           </p:cNvPr>
@@ -4333,7 +4513,7 @@
           <p:cNvPr id="3" name="Footer Placeholder 2">
             <a:extLst xmlns:a="http://schemas.openxmlformats.org/drawingml/2006/main">
               <a:ext uri="{FF2B5EF4-FFF2-40B4-BE49-F238E27FC236}">
-                <a16:creationId xmlns:a16="http://schemas.microsoft.com/office/drawing/2014/main" id="{91568CC5-9A90-4A97-829D-21C514063CB7}"/>
+                <a16:creationId xmlns:a16="http://schemas.microsoft.com/office/drawing/2014/main" id="{5308F087-2D31-4BFA-B683-039CD6077F5D}"/>
               </a:ext>
             </a:extLst>
           </p:cNvPr>
@@ -4356,7 +4536,7 @@
           <p:cNvPr id="4" name="Slide Number Placeholder 3">
             <a:extLst xmlns:a="http://schemas.openxmlformats.org/drawingml/2006/main">
               <a:ext uri="{FF2B5EF4-FFF2-40B4-BE49-F238E27FC236}">
-                <a16:creationId xmlns:a16="http://schemas.microsoft.com/office/drawing/2014/main" id="{FBE3CA7C-9587-4521-A29A-9CD3812AEC7E}"/>
+                <a16:creationId xmlns:a16="http://schemas.microsoft.com/office/drawing/2014/main" id="{654CF787-9F6E-48C7-A2F5-CAD6B080363E}"/>
               </a:ext>
             </a:extLst>
           </p:cNvPr>
@@ -4400,7 +4580,7 @@
           <p:cNvPr id="2" name="Title 1">
             <a:extLst xmlns:a="http://schemas.openxmlformats.org/drawingml/2006/main">
               <a:ext uri="{FF2B5EF4-FFF2-40B4-BE49-F238E27FC236}">
-                <a16:creationId xmlns:a16="http://schemas.microsoft.com/office/drawing/2014/main" id="{23D5F888-D401-45DC-93DC-B029507A3169}"/>
+                <a16:creationId xmlns:a16="http://schemas.microsoft.com/office/drawing/2014/main" id="{858F6DC6-7D7D-4A1C-9194-560049A179B2}"/>
               </a:ext>
             </a:extLst>
           </p:cNvPr>
@@ -4437,7 +4617,7 @@
           <p:cNvPr id="3" name="Content Placeholder 2">
             <a:extLst xmlns:a="http://schemas.openxmlformats.org/drawingml/2006/main">
               <a:ext uri="{FF2B5EF4-FFF2-40B4-BE49-F238E27FC236}">
-                <a16:creationId xmlns:a16="http://schemas.microsoft.com/office/drawing/2014/main" id="{2F562431-C30C-43C5-8898-B4ED808EB220}"/>
+                <a16:creationId xmlns:a16="http://schemas.microsoft.com/office/drawing/2014/main" id="{3BE5A593-33CA-4213-9CDB-41D84536886D}"/>
               </a:ext>
             </a:extLst>
           </p:cNvPr>
@@ -4541,7 +4721,7 @@
           <p:cNvPr id="4" name="Text Placeholder 3">
             <a:extLst xmlns:a="http://schemas.openxmlformats.org/drawingml/2006/main">
               <a:ext uri="{FF2B5EF4-FFF2-40B4-BE49-F238E27FC236}">
-                <a16:creationId xmlns:a16="http://schemas.microsoft.com/office/drawing/2014/main" id="{8449408C-8E22-4CBB-84A1-856A3B5DFA83}"/>
+                <a16:creationId xmlns:a16="http://schemas.microsoft.com/office/drawing/2014/main" id="{3032118F-9296-4330-ADCF-53F3180457BC}"/>
               </a:ext>
             </a:extLst>
           </p:cNvPr>
@@ -4613,7 +4793,7 @@
           <p:cNvPr id="5" name="Date Placeholder 4">
             <a:extLst xmlns:a="http://schemas.openxmlformats.org/drawingml/2006/main">
               <a:ext uri="{FF2B5EF4-FFF2-40B4-BE49-F238E27FC236}">
-                <a16:creationId xmlns:a16="http://schemas.microsoft.com/office/drawing/2014/main" id="{63848402-07FF-472E-8C1F-ADB92649C62C}"/>
+                <a16:creationId xmlns:a16="http://schemas.microsoft.com/office/drawing/2014/main" id="{8509072D-7658-41AE-B9B2-F830AA9AA3D5}"/>
               </a:ext>
             </a:extLst>
           </p:cNvPr>
@@ -4640,7 +4820,7 @@
           <p:cNvPr id="6" name="Footer Placeholder 5">
             <a:extLst xmlns:a="http://schemas.openxmlformats.org/drawingml/2006/main">
               <a:ext uri="{FF2B5EF4-FFF2-40B4-BE49-F238E27FC236}">
-                <a16:creationId xmlns:a16="http://schemas.microsoft.com/office/drawing/2014/main" id="{0E8BF6B5-B699-4B4B-B725-4A62BDA9E783}"/>
+                <a16:creationId xmlns:a16="http://schemas.microsoft.com/office/drawing/2014/main" id="{DA596687-403B-4C23-81C6-B85A25D44F7D}"/>
               </a:ext>
             </a:extLst>
           </p:cNvPr>
@@ -4663,7 +4843,7 @@
           <p:cNvPr id="7" name="Slide Number Placeholder 6">
             <a:extLst xmlns:a="http://schemas.openxmlformats.org/drawingml/2006/main">
               <a:ext uri="{FF2B5EF4-FFF2-40B4-BE49-F238E27FC236}">
-                <a16:creationId xmlns:a16="http://schemas.microsoft.com/office/drawing/2014/main" id="{776A6CFA-5076-4110-9C5A-72E9D13572D8}"/>
+                <a16:creationId xmlns:a16="http://schemas.microsoft.com/office/drawing/2014/main" id="{4C8740FB-A871-41BE-8F1E-9E6D49B50682}"/>
               </a:ext>
             </a:extLst>
           </p:cNvPr>
@@ -4707,7 +4887,7 @@
           <p:cNvPr id="2" name="Title 1">
             <a:extLst xmlns:a="http://schemas.openxmlformats.org/drawingml/2006/main">
               <a:ext uri="{FF2B5EF4-FFF2-40B4-BE49-F238E27FC236}">
-                <a16:creationId xmlns:a16="http://schemas.microsoft.com/office/drawing/2014/main" id="{51979243-9668-494E-B41A-39B89108EDE8}"/>
+                <a16:creationId xmlns:a16="http://schemas.microsoft.com/office/drawing/2014/main" id="{6951B2A4-EB5D-437D-8FBC-38181A8F33A1}"/>
               </a:ext>
             </a:extLst>
           </p:cNvPr>
@@ -4744,7 +4924,7 @@
           <p:cNvPr id="3" name="Picture Placeholder 2">
             <a:extLst xmlns:a="http://schemas.openxmlformats.org/drawingml/2006/main">
               <a:ext uri="{FF2B5EF4-FFF2-40B4-BE49-F238E27FC236}">
-                <a16:creationId xmlns:a16="http://schemas.microsoft.com/office/drawing/2014/main" id="{6FE1F52F-39A8-4CC6-8B2D-DB5DCD223480}"/>
+                <a16:creationId xmlns:a16="http://schemas.microsoft.com/office/drawing/2014/main" id="{735C33CA-4A5A-4413-8F2E-74EC8DA09EB5}"/>
               </a:ext>
             </a:extLst>
           </p:cNvPr>
@@ -4809,7 +4989,7 @@
           <p:cNvPr id="4" name="Text Placeholder 3">
             <a:extLst xmlns:a="http://schemas.openxmlformats.org/drawingml/2006/main">
               <a:ext uri="{FF2B5EF4-FFF2-40B4-BE49-F238E27FC236}">
-                <a16:creationId xmlns:a16="http://schemas.microsoft.com/office/drawing/2014/main" id="{FD5BB00E-2EE5-4DDC-90EE-7A63490E9CC2}"/>
+                <a16:creationId xmlns:a16="http://schemas.microsoft.com/office/drawing/2014/main" id="{9EB5B42C-08EA-48DA-8A3F-763B1AB357B0}"/>
               </a:ext>
             </a:extLst>
           </p:cNvPr>
@@ -4881,7 +5061,7 @@
           <p:cNvPr id="5" name="Date Placeholder 4">
             <a:extLst xmlns:a="http://schemas.openxmlformats.org/drawingml/2006/main">
               <a:ext uri="{FF2B5EF4-FFF2-40B4-BE49-F238E27FC236}">
-                <a16:creationId xmlns:a16="http://schemas.microsoft.com/office/drawing/2014/main" id="{EB9B44F2-9B50-4A5B-A778-8523D9CB8ABB}"/>
+                <a16:creationId xmlns:a16="http://schemas.microsoft.com/office/drawing/2014/main" id="{29343385-179B-4A61-89B1-CCD04434F0EF}"/>
               </a:ext>
             </a:extLst>
           </p:cNvPr>
@@ -4908,7 +5088,7 @@
           <p:cNvPr id="6" name="Footer Placeholder 5">
             <a:extLst xmlns:a="http://schemas.openxmlformats.org/drawingml/2006/main">
               <a:ext uri="{FF2B5EF4-FFF2-40B4-BE49-F238E27FC236}">
-                <a16:creationId xmlns:a16="http://schemas.microsoft.com/office/drawing/2014/main" id="{1FDC8E33-54CF-40D0-97FE-ACD8811B37EE}"/>
+                <a16:creationId xmlns:a16="http://schemas.microsoft.com/office/drawing/2014/main" id="{B89E8517-DD2E-4CEF-9F27-910C9E685CBC}"/>
               </a:ext>
             </a:extLst>
           </p:cNvPr>
@@ -4931,7 +5111,7 @@
           <p:cNvPr id="7" name="Slide Number Placeholder 6">
             <a:extLst xmlns:a="http://schemas.openxmlformats.org/drawingml/2006/main">
               <a:ext uri="{FF2B5EF4-FFF2-40B4-BE49-F238E27FC236}">
-                <a16:creationId xmlns:a16="http://schemas.microsoft.com/office/drawing/2014/main" id="{006261D8-176D-4BB5-97D1-5121CB730547}"/>
+                <a16:creationId xmlns:a16="http://schemas.microsoft.com/office/drawing/2014/main" id="{743BDD9C-F989-4310-8F1B-828C4B27EEB6}"/>
               </a:ext>
             </a:extLst>
           </p:cNvPr>
@@ -4980,7 +5160,7 @@
           <p:cNvPr id="2" name="Title Placeholder 1">
             <a:extLst xmlns:a="http://schemas.openxmlformats.org/drawingml/2006/main">
               <a:ext uri="{FF2B5EF4-FFF2-40B4-BE49-F238E27FC236}">
-                <a16:creationId xmlns:a16="http://schemas.microsoft.com/office/drawing/2014/main" id="{118967D1-7222-49CD-879C-C32A55BDC51E}"/>
+                <a16:creationId xmlns:a16="http://schemas.microsoft.com/office/drawing/2014/main" id="{BCD45043-624D-4134-83E9-EF8ECE30E881}"/>
               </a:ext>
             </a:extLst>
           </p:cNvPr>
@@ -5017,7 +5197,7 @@
           <p:cNvPr id="3" name="Text Placeholder 2">
             <a:extLst xmlns:a="http://schemas.openxmlformats.org/drawingml/2006/main">
               <a:ext uri="{FF2B5EF4-FFF2-40B4-BE49-F238E27FC236}">
-                <a16:creationId xmlns:a16="http://schemas.microsoft.com/office/drawing/2014/main" id="{3BB088CD-BABA-414C-8074-6283F4E1617F}"/>
+                <a16:creationId xmlns:a16="http://schemas.microsoft.com/office/drawing/2014/main" id="{F19450BE-7F72-4DF3-8CEF-053948EF6DC5}"/>
               </a:ext>
             </a:extLst>
           </p:cNvPr>
@@ -5089,7 +5269,7 @@
           <p:cNvPr id="4" name="Date Placeholder 3">
             <a:extLst xmlns:a="http://schemas.openxmlformats.org/drawingml/2006/main">
               <a:ext uri="{FF2B5EF4-FFF2-40B4-BE49-F238E27FC236}">
-                <a16:creationId xmlns:a16="http://schemas.microsoft.com/office/drawing/2014/main" id="{19047074-DFAD-43B4-9A06-F6E695FB4D56}"/>
+                <a16:creationId xmlns:a16="http://schemas.microsoft.com/office/drawing/2014/main" id="{852194C8-BE47-4089-9A2D-3E1DD7C14886}"/>
               </a:ext>
             </a:extLst>
           </p:cNvPr>
@@ -5135,7 +5315,7 @@
           <p:cNvPr id="5" name="Footer Placeholder 4">
             <a:extLst xmlns:a="http://schemas.openxmlformats.org/drawingml/2006/main">
               <a:ext uri="{FF2B5EF4-FFF2-40B4-BE49-F238E27FC236}">
-                <a16:creationId xmlns:a16="http://schemas.microsoft.com/office/drawing/2014/main" id="{C6DBA399-17B3-4E85-A336-548A4C99BFEA}"/>
+                <a16:creationId xmlns:a16="http://schemas.microsoft.com/office/drawing/2014/main" id="{4ECC2920-88F2-41BA-950A-ED0D0BD0BE97}"/>
               </a:ext>
             </a:extLst>
           </p:cNvPr>
@@ -5177,7 +5357,7 @@
           <p:cNvPr id="6" name="Slide Number Placeholder 5">
             <a:extLst xmlns:a="http://schemas.openxmlformats.org/drawingml/2006/main">
               <a:ext uri="{FF2B5EF4-FFF2-40B4-BE49-F238E27FC236}">
-                <a16:creationId xmlns:a16="http://schemas.microsoft.com/office/drawing/2014/main" id="{867200AA-7345-4F28-B9A4-9F8C65B0CA63}"/>
+                <a16:creationId xmlns:a16="http://schemas.microsoft.com/office/drawing/2014/main" id="{B5F5A9E4-0685-4AE1-8AC4-680BF660A7BF}"/>
               </a:ext>
             </a:extLst>
           </p:cNvPr>
@@ -5222,17 +5402,17 @@
   </p:cSld>
   <p:clrMap bg1="lt1" tx1="dk1" bg2="lt2" tx2="dk2" accent1="accent1" accent2="accent2" accent3="accent3" accent4="accent4" accent5="accent5" accent6="accent6" hlink="hlink" folHlink="folHlink"/>
   <p:sldLayoutIdLst>
-    <p:sldLayoutId xmlns:r="http://schemas.openxmlformats.org/officeDocument/2006/relationships" id="2147483649" r:id="Reebea81ff5694280"/>
-    <p:sldLayoutId xmlns:r="http://schemas.openxmlformats.org/officeDocument/2006/relationships" id="2147483650" r:id="Rac9e01d8fb1c456c"/>
-    <p:sldLayoutId xmlns:r="http://schemas.openxmlformats.org/officeDocument/2006/relationships" id="2147483651" r:id="R1e018e7c6d3546f6"/>
-    <p:sldLayoutId xmlns:r="http://schemas.openxmlformats.org/officeDocument/2006/relationships" id="2147483652" r:id="Reae81c5381514d0c"/>
-    <p:sldLayoutId xmlns:r="http://schemas.openxmlformats.org/officeDocument/2006/relationships" id="2147483653" r:id="Rc5e8b0c8a76e4a9c"/>
-    <p:sldLayoutId xmlns:r="http://schemas.openxmlformats.org/officeDocument/2006/relationships" id="2147483654" r:id="Rca33e0bbd75b43f5"/>
-    <p:sldLayoutId xmlns:r="http://schemas.openxmlformats.org/officeDocument/2006/relationships" id="2147483655" r:id="R30360e325f2543d4"/>
-    <p:sldLayoutId xmlns:r="http://schemas.openxmlformats.org/officeDocument/2006/relationships" id="2147483656" r:id="R6c55c361203946ea"/>
-    <p:sldLayoutId xmlns:r="http://schemas.openxmlformats.org/officeDocument/2006/relationships" id="2147483657" r:id="R9d74fce5d2424fdf"/>
-    <p:sldLayoutId xmlns:r="http://schemas.openxmlformats.org/officeDocument/2006/relationships" id="2147483658" r:id="R4aafb39ff78a42bb"/>
-    <p:sldLayoutId xmlns:r="http://schemas.openxmlformats.org/officeDocument/2006/relationships" id="2147483659" r:id="R9a21b9b7dd2a43bf"/>
+    <p:sldLayoutId xmlns:r="http://schemas.openxmlformats.org/officeDocument/2006/relationships" id="2147483649" r:id="Rfd4910a4dd8f4f93"/>
+    <p:sldLayoutId xmlns:r="http://schemas.openxmlformats.org/officeDocument/2006/relationships" id="2147483650" r:id="R314a477a0cb04ae5"/>
+    <p:sldLayoutId xmlns:r="http://schemas.openxmlformats.org/officeDocument/2006/relationships" id="2147483651" r:id="R7374ac7ada9949b2"/>
+    <p:sldLayoutId xmlns:r="http://schemas.openxmlformats.org/officeDocument/2006/relationships" id="2147483652" r:id="R4176e67858a54b87"/>
+    <p:sldLayoutId xmlns:r="http://schemas.openxmlformats.org/officeDocument/2006/relationships" id="2147483653" r:id="R4a0ef159e27b4eaa"/>
+    <p:sldLayoutId xmlns:r="http://schemas.openxmlformats.org/officeDocument/2006/relationships" id="2147483654" r:id="R823a982437d0482a"/>
+    <p:sldLayoutId xmlns:r="http://schemas.openxmlformats.org/officeDocument/2006/relationships" id="2147483655" r:id="R9da1b0202a284606"/>
+    <p:sldLayoutId xmlns:r="http://schemas.openxmlformats.org/officeDocument/2006/relationships" id="2147483656" r:id="R928d7785d7bd4d21"/>
+    <p:sldLayoutId xmlns:r="http://schemas.openxmlformats.org/officeDocument/2006/relationships" id="2147483657" r:id="R95f435bb8aad4c83"/>
+    <p:sldLayoutId xmlns:r="http://schemas.openxmlformats.org/officeDocument/2006/relationships" id="2147483658" r:id="R8ccbcc27175e4072"/>
+    <p:sldLayoutId xmlns:r="http://schemas.openxmlformats.org/officeDocument/2006/relationships" id="2147483659" r:id="R9129885c422a40ed"/>
   </p:sldLayoutIdLst>
   <p:txStyles>
     <p:titleStyle>
@@ -5785,7 +5965,7 @@
           <p:cNvPr id="2" name="Rectangle 1">
             <a:extLst xmlns:a="http://schemas.openxmlformats.org/drawingml/2006/main">
               <a:ext uri="{FF2B5EF4-FFF2-40B4-BE49-F238E27FC236}">
-                <a16:creationId xmlns:a16="http://schemas.microsoft.com/office/drawing/2014/main" id="{6C7B19FC-D6C7-4E82-8968-9346D5D06085}"/>
+                <a16:creationId xmlns:a16="http://schemas.microsoft.com/office/drawing/2014/main" id="{A491A51A-2B2B-40FF-BE97-BFD5E0F9001B}"/>
               </a:ext>
             </a:extLst>
           </p:cNvPr>
@@ -5840,7 +6020,7 @@
           <p:cNvPr id="3" name="TextBox 2">
             <a:extLst xmlns:a="http://schemas.openxmlformats.org/drawingml/2006/main">
               <a:ext uri="{FF2B5EF4-FFF2-40B4-BE49-F238E27FC236}">
-                <a16:creationId xmlns:a16="http://schemas.microsoft.com/office/drawing/2014/main" id="{389B2591-FD71-49CE-B251-8014B61C288C}"/>
+                <a16:creationId xmlns:a16="http://schemas.microsoft.com/office/drawing/2014/main" id="{E8E1EF4A-2A43-46E3-9638-71C76EC4F9AC}"/>
               </a:ext>
             </a:extLst>
           </p:cNvPr>
@@ -5887,7 +6067,7 @@
           <p:cNvPr id="4" name="TextBox 3">
             <a:extLst xmlns:a="http://schemas.openxmlformats.org/drawingml/2006/main">
               <a:ext uri="{FF2B5EF4-FFF2-40B4-BE49-F238E27FC236}">
-                <a16:creationId xmlns:a16="http://schemas.microsoft.com/office/drawing/2014/main" id="{4116B002-2BF7-4620-A73D-A15B1DD4383A}"/>
+                <a16:creationId xmlns:a16="http://schemas.microsoft.com/office/drawing/2014/main" id="{F0DDC594-8B6E-48F7-AE20-D193E8D4F809}"/>
               </a:ext>
             </a:extLst>
           </p:cNvPr>
@@ -5935,7 +6115,7 @@
           <p:cNvPr id="5" name="TextBox 4">
             <a:extLst xmlns:a="http://schemas.openxmlformats.org/drawingml/2006/main">
               <a:ext uri="{FF2B5EF4-FFF2-40B4-BE49-F238E27FC236}">
-                <a16:creationId xmlns:a16="http://schemas.microsoft.com/office/drawing/2014/main" id="{9F7B865D-FA8F-480C-818E-B6A6966B9476}"/>
+                <a16:creationId xmlns:a16="http://schemas.microsoft.com/office/drawing/2014/main" id="{0A8A771D-4A64-46C8-B67B-2D3B5CEE203D}"/>
               </a:ext>
             </a:extLst>
           </p:cNvPr>
@@ -5982,7 +6162,7 @@
           <p:cNvPr id="6" name="Rectangle 5">
             <a:extLst xmlns:a="http://schemas.openxmlformats.org/drawingml/2006/main">
               <a:ext uri="{FF2B5EF4-FFF2-40B4-BE49-F238E27FC236}">
-                <a16:creationId xmlns:a16="http://schemas.microsoft.com/office/drawing/2014/main" id="{AFFF1BF7-1CD5-4893-BFF5-A545C861AB80}"/>
+                <a16:creationId xmlns:a16="http://schemas.microsoft.com/office/drawing/2014/main" id="{C5014030-F40E-447B-A7D0-A6DF7CB5933E}"/>
               </a:ext>
             </a:extLst>
           </p:cNvPr>
@@ -6037,7 +6217,7 @@
           <p:cNvPr id="7" name="TextBox 6">
             <a:extLst xmlns:a="http://schemas.openxmlformats.org/drawingml/2006/main">
               <a:ext uri="{FF2B5EF4-FFF2-40B4-BE49-F238E27FC236}">
-                <a16:creationId xmlns:a16="http://schemas.microsoft.com/office/drawing/2014/main" id="{E0D3FD09-09B0-42AB-A7C2-A6C39E338B20}"/>
+                <a16:creationId xmlns:a16="http://schemas.microsoft.com/office/drawing/2014/main" id="{04962486-A390-4B31-84EE-FDCDBB06B7E6}"/>
               </a:ext>
             </a:extLst>
           </p:cNvPr>
@@ -6084,7 +6264,7 @@
           <p:cNvPr id="8" name="TextBox 7">
             <a:extLst xmlns:a="http://schemas.openxmlformats.org/drawingml/2006/main">
               <a:ext uri="{FF2B5EF4-FFF2-40B4-BE49-F238E27FC236}">
-                <a16:creationId xmlns:a16="http://schemas.microsoft.com/office/drawing/2014/main" id="{0A12CD69-82A4-4633-8F85-550817FD37E8}"/>
+                <a16:creationId xmlns:a16="http://schemas.microsoft.com/office/drawing/2014/main" id="{18382014-FDC2-4EB5-9338-9BEF53DD35FE}"/>
               </a:ext>
             </a:extLst>
           </p:cNvPr>
@@ -6121,7 +6301,7 @@
                 <a:ea typeface="Aptos"/>
                 <a:cs typeface="Aptos"/>
               </a:rPr>
-              <a:t>2026.07.24-18</a:t>
+              <a:t>2026.07.24-19</a:t>
             </a:r>
           </a:p>
         </p:txBody>
@@ -6131,7 +6311,7 @@
           <p:cNvPr id="9" name="TextBox 8">
             <a:extLst xmlns:a="http://schemas.openxmlformats.org/drawingml/2006/main">
               <a:ext uri="{FF2B5EF4-FFF2-40B4-BE49-F238E27FC236}">
-                <a16:creationId xmlns:a16="http://schemas.microsoft.com/office/drawing/2014/main" id="{7BFDC8DC-0ADC-46B6-B087-3082269C8F8F}"/>
+                <a16:creationId xmlns:a16="http://schemas.microsoft.com/office/drawing/2014/main" id="{6B4EDC56-3539-4EC3-9DC2-38FE855134C3}"/>
               </a:ext>
             </a:extLst>
           </p:cNvPr>
@@ -6179,7 +6359,7 @@
           <p:cNvPr id="10" name="TextBox 9">
             <a:extLst xmlns:a="http://schemas.openxmlformats.org/drawingml/2006/main">
               <a:ext uri="{FF2B5EF4-FFF2-40B4-BE49-F238E27FC236}">
-                <a16:creationId xmlns:a16="http://schemas.microsoft.com/office/drawing/2014/main" id="{B8DFE25C-FEF1-4FC1-B9E5-4C2D46E2B460}"/>
+                <a16:creationId xmlns:a16="http://schemas.microsoft.com/office/drawing/2014/main" id="{A16E284B-C6FD-4DED-9190-20DC4D8D60BA}"/>
               </a:ext>
             </a:extLst>
           </p:cNvPr>
@@ -6226,7 +6406,7 @@
           <p:cNvPr id="11" name="TextBox 10">
             <a:extLst xmlns:a="http://schemas.openxmlformats.org/drawingml/2006/main">
               <a:ext uri="{FF2B5EF4-FFF2-40B4-BE49-F238E27FC236}">
-                <a16:creationId xmlns:a16="http://schemas.microsoft.com/office/drawing/2014/main" id="{000A4152-CC53-4DED-92E3-247495911589}"/>
+                <a16:creationId xmlns:a16="http://schemas.microsoft.com/office/drawing/2014/main" id="{B3D2979F-56B9-4D5F-982C-09EBCC756F35}"/>
               </a:ext>
             </a:extLst>
           </p:cNvPr>
@@ -6273,7 +6453,7 @@
           <p:cNvPr id="12" name="TextBox 11">
             <a:extLst xmlns:a="http://schemas.openxmlformats.org/drawingml/2006/main">
               <a:ext uri="{FF2B5EF4-FFF2-40B4-BE49-F238E27FC236}">
-                <a16:creationId xmlns:a16="http://schemas.microsoft.com/office/drawing/2014/main" id="{370684C0-DA49-461F-B64E-6A6773B927AF}"/>
+                <a16:creationId xmlns:a16="http://schemas.microsoft.com/office/drawing/2014/main" id="{534D502D-4838-43AC-AB3B-392D5E247FC7}"/>
               </a:ext>
             </a:extLst>
           </p:cNvPr>
@@ -6320,7 +6500,7 @@
           <p:cNvPr id="13" name="TextBox 12">
             <a:extLst xmlns:a="http://schemas.openxmlformats.org/drawingml/2006/main">
               <a:ext uri="{FF2B5EF4-FFF2-40B4-BE49-F238E27FC236}">
-                <a16:creationId xmlns:a16="http://schemas.microsoft.com/office/drawing/2014/main" id="{2EFA167C-E68D-41B7-AD56-A313B817D79D}"/>
+                <a16:creationId xmlns:a16="http://schemas.microsoft.com/office/drawing/2014/main" id="{68121853-2DEC-49D1-A988-553A44308DCB}"/>
               </a:ext>
             </a:extLst>
           </p:cNvPr>
@@ -6365,7 +6545,7 @@
     </p:spTree>
     <p:extLst>
       <p:ext uri="{BB962C8B-B14F-4D97-AF65-F5344CB8AC3E}">
-        <p14:creationId xmlns:p14="http://schemas.microsoft.com/office/powerpoint/2010/main" val="2087791572"/>
+        <p14:creationId xmlns:p14="http://schemas.microsoft.com/office/powerpoint/2010/main" val="768706212"/>
       </p:ext>
     </p:extLst>
   </p:cSld>
@@ -6389,7 +6569,7 @@
           <p:cNvPr id="2" name="TextBox 1">
             <a:extLst xmlns:a="http://schemas.openxmlformats.org/drawingml/2006/main">
               <a:ext uri="{FF2B5EF4-FFF2-40B4-BE49-F238E27FC236}">
-                <a16:creationId xmlns:a16="http://schemas.microsoft.com/office/drawing/2014/main" id="{668F9063-D04A-4B47-949B-4648D892EAD0}"/>
+                <a16:creationId xmlns:a16="http://schemas.microsoft.com/office/drawing/2014/main" id="{9155C3C5-B0B4-4755-932D-E6274B75BC77}"/>
               </a:ext>
             </a:extLst>
           </p:cNvPr>
@@ -6436,7 +6616,7 @@
           <p:cNvPr id="3" name="TextBox 2">
             <a:extLst xmlns:a="http://schemas.openxmlformats.org/drawingml/2006/main">
               <a:ext uri="{FF2B5EF4-FFF2-40B4-BE49-F238E27FC236}">
-                <a16:creationId xmlns:a16="http://schemas.microsoft.com/office/drawing/2014/main" id="{B7946164-5140-4D8C-A9DE-266C3623E45E}"/>
+                <a16:creationId xmlns:a16="http://schemas.microsoft.com/office/drawing/2014/main" id="{6FA7B210-17A4-4FA9-ACFC-187EF27DFF0B}"/>
               </a:ext>
             </a:extLst>
           </p:cNvPr>
@@ -6448,7 +6628,7 @@
         <p:spPr>
           <a:xfrm xmlns:a="http://schemas.openxmlformats.org/drawingml/2006/main">
             <a:off x="502920" y="621792"/>
-            <a:ext cx="11109960" cy="548640"/>
+            <a:ext cx="11109960" cy="591312"/>
           </a:xfrm>
           <a:prstGeom xmlns:a="http://schemas.openxmlformats.org/drawingml/2006/main" prst="rect">
             <a:avLst/>
@@ -6456,8 +6636,8 @@
           <a:noFill xmlns:a="http://schemas.openxmlformats.org/drawingml/2006/main"/>
         </p:spPr>
         <p:txBody>
-          <a:bodyPr xmlns:a="http://schemas.openxmlformats.org/drawingml/2006/main" wrap="square" lIns="36576" tIns="36576" rIns="36576" bIns="36576" anchor="t">
-            <a:spAutoFit/>
+          <a:bodyPr xmlns:a="http://schemas.openxmlformats.org/drawingml/2006/main" wrap="none" lIns="36576" tIns="36576" rIns="36576" bIns="36576" anchor="t">
+            <a:normAutofit fontScale="100000"/>
           </a:bodyPr>
           <a:lstStyle xmlns:a="http://schemas.openxmlformats.org/drawingml/2006/main"/>
           <a:p xmlns:a="http://schemas.openxmlformats.org/drawingml/2006/main">
@@ -6465,7 +6645,7 @@
               <a:buNone/>
             </a:pPr>
             <a:r>
-              <a:rPr sz="3400" b="1">
+              <a:rPr sz="2400" b="1">
                 <a:solidFill>
                   <a:srgbClr val="071A2B"/>
                 </a:solidFill>
@@ -6473,7 +6653,7 @@
                 <a:ea typeface="Aptos"/>
                 <a:cs typeface="Aptos"/>
               </a:rPr>
-              <a:t>Kaupallistaminen etenee porttien kautta, ei massaväitteillä</a:t>
+              <a:t>Kaupallistaminen etenee näyttöporttien kautta</a:t>
             </a:r>
           </a:p>
         </p:txBody>
@@ -6483,7 +6663,7 @@
           <p:cNvPr id="4" name="Rectangle 3">
             <a:extLst xmlns:a="http://schemas.openxmlformats.org/drawingml/2006/main">
               <a:ext uri="{FF2B5EF4-FFF2-40B4-BE49-F238E27FC236}">
-                <a16:creationId xmlns:a16="http://schemas.microsoft.com/office/drawing/2014/main" id="{40D99D47-D47F-4CCE-AE99-3F52B991F152}"/>
+                <a16:creationId xmlns:a16="http://schemas.microsoft.com/office/drawing/2014/main" id="{12D1C097-AF0D-4B0C-A8EA-F519C85F4E42}"/>
               </a:ext>
             </a:extLst>
           </p:cNvPr>
@@ -6538,7 +6718,7 @@
           <p:cNvPr id="5" name="Rectangle 4">
             <a:extLst xmlns:a="http://schemas.openxmlformats.org/drawingml/2006/main">
               <a:ext uri="{FF2B5EF4-FFF2-40B4-BE49-F238E27FC236}">
-                <a16:creationId xmlns:a16="http://schemas.microsoft.com/office/drawing/2014/main" id="{ADC90536-796B-4D05-B440-96361EC5020F}"/>
+                <a16:creationId xmlns:a16="http://schemas.microsoft.com/office/drawing/2014/main" id="{9AA830B8-2470-4545-965B-156FF2F89114}"/>
               </a:ext>
             </a:extLst>
           </p:cNvPr>
@@ -6593,7 +6773,7 @@
           <p:cNvPr id="6" name="TextBox 5">
             <a:extLst xmlns:a="http://schemas.openxmlformats.org/drawingml/2006/main">
               <a:ext uri="{FF2B5EF4-FFF2-40B4-BE49-F238E27FC236}">
-                <a16:creationId xmlns:a16="http://schemas.microsoft.com/office/drawing/2014/main" id="{2CB4567E-4DCF-4321-8870-ED2CA24015C2}"/>
+                <a16:creationId xmlns:a16="http://schemas.microsoft.com/office/drawing/2014/main" id="{76F9BF21-777F-42F7-9BF8-21EC179278BB}"/>
               </a:ext>
             </a:extLst>
           </p:cNvPr>
@@ -6630,7 +6810,7 @@
                 <a:ea typeface="Aptos"/>
                 <a:cs typeface="Aptos"/>
               </a:rPr>
-              <a:t>Julkinen riippumaton evidenssikooste · 2026.07.24-18 · 2026-07-24 · Lähteet: WIPO licensing; dispute resolution; IPscore</a:t>
+              <a:t>Julkinen riippumaton evidenssikooste · 2026.07.24-19 · 2026-07-24 · Lähteet: WIPO licensing; dispute resolution; IPscore</a:t>
             </a:r>
           </a:p>
         </p:txBody>
@@ -6640,7 +6820,7 @@
           <p:cNvPr id="7" name="TextBox 6">
             <a:extLst xmlns:a="http://schemas.openxmlformats.org/drawingml/2006/main">
               <a:ext uri="{FF2B5EF4-FFF2-40B4-BE49-F238E27FC236}">
-                <a16:creationId xmlns:a16="http://schemas.microsoft.com/office/drawing/2014/main" id="{1BE33A18-C7D1-48C8-948E-92542570127B}"/>
+                <a16:creationId xmlns:a16="http://schemas.microsoft.com/office/drawing/2014/main" id="{BB474620-03FC-4BEA-B0A2-FB8F08681F56}"/>
               </a:ext>
             </a:extLst>
           </p:cNvPr>
@@ -6687,7 +6867,7 @@
           <p:cNvPr id="8" name="Rounded Rectangle 7">
             <a:extLst xmlns:a="http://schemas.openxmlformats.org/drawingml/2006/main">
               <a:ext uri="{FF2B5EF4-FFF2-40B4-BE49-F238E27FC236}">
-                <a16:creationId xmlns:a16="http://schemas.microsoft.com/office/drawing/2014/main" id="{1B60F70B-7A23-4F8E-92C6-54CF7C5C20F5}"/>
+                <a16:creationId xmlns:a16="http://schemas.microsoft.com/office/drawing/2014/main" id="{FC8D5AC4-D135-47AC-8881-9133AFC2CF37}"/>
               </a:ext>
             </a:extLst>
           </p:cNvPr>
@@ -6744,7 +6924,7 @@
           <p:cNvPr id="9" name="TextBox 8">
             <a:extLst xmlns:a="http://schemas.openxmlformats.org/drawingml/2006/main">
               <a:ext uri="{FF2B5EF4-FFF2-40B4-BE49-F238E27FC236}">
-                <a16:creationId xmlns:a16="http://schemas.microsoft.com/office/drawing/2014/main" id="{FED9EC56-5CFE-476A-AA8B-15862656CB61}"/>
+                <a16:creationId xmlns:a16="http://schemas.microsoft.com/office/drawing/2014/main" id="{9627F357-88C5-4D85-A62D-63921F55CFA6}"/>
               </a:ext>
             </a:extLst>
           </p:cNvPr>
@@ -6791,7 +6971,7 @@
           <p:cNvPr id="10" name="TextBox 9">
             <a:extLst xmlns:a="http://schemas.openxmlformats.org/drawingml/2006/main">
               <a:ext uri="{FF2B5EF4-FFF2-40B4-BE49-F238E27FC236}">
-                <a16:creationId xmlns:a16="http://schemas.microsoft.com/office/drawing/2014/main" id="{1725EDF0-3140-42D0-8CA3-85A318B5C9F1}"/>
+                <a16:creationId xmlns:a16="http://schemas.microsoft.com/office/drawing/2014/main" id="{B7C74545-38C3-4C75-9ECE-FBD341F2F44C}"/>
               </a:ext>
             </a:extLst>
           </p:cNvPr>
@@ -6838,7 +7018,7 @@
           <p:cNvPr id="11" name="TextBox 10">
             <a:extLst xmlns:a="http://schemas.openxmlformats.org/drawingml/2006/main">
               <a:ext uri="{FF2B5EF4-FFF2-40B4-BE49-F238E27FC236}">
-                <a16:creationId xmlns:a16="http://schemas.microsoft.com/office/drawing/2014/main" id="{2E3C40FA-6628-4D8B-BB39-F0B922DF040B}"/>
+                <a16:creationId xmlns:a16="http://schemas.microsoft.com/office/drawing/2014/main" id="{06DCA7F9-CECA-4682-882C-41110BDAA33D}"/>
               </a:ext>
             </a:extLst>
           </p:cNvPr>
@@ -6885,7 +7065,7 @@
           <p:cNvPr id="12" name="Rounded Rectangle 11">
             <a:extLst xmlns:a="http://schemas.openxmlformats.org/drawingml/2006/main">
               <a:ext uri="{FF2B5EF4-FFF2-40B4-BE49-F238E27FC236}">
-                <a16:creationId xmlns:a16="http://schemas.microsoft.com/office/drawing/2014/main" id="{848B2DF9-4FA8-4A42-A30F-CD0426ECB795}"/>
+                <a16:creationId xmlns:a16="http://schemas.microsoft.com/office/drawing/2014/main" id="{B639B614-8878-4E85-A12A-61E3F8888401}"/>
               </a:ext>
             </a:extLst>
           </p:cNvPr>
@@ -6942,7 +7122,7 @@
           <p:cNvPr id="13" name="TextBox 12">
             <a:extLst xmlns:a="http://schemas.openxmlformats.org/drawingml/2006/main">
               <a:ext uri="{FF2B5EF4-FFF2-40B4-BE49-F238E27FC236}">
-                <a16:creationId xmlns:a16="http://schemas.microsoft.com/office/drawing/2014/main" id="{E6B49036-C7A1-4617-9534-8E0E6AD927B1}"/>
+                <a16:creationId xmlns:a16="http://schemas.microsoft.com/office/drawing/2014/main" id="{891C9C3F-9C9D-49C5-8139-D92AAC7E931D}"/>
               </a:ext>
             </a:extLst>
           </p:cNvPr>
@@ -6989,7 +7169,7 @@
           <p:cNvPr id="14" name="TextBox 13">
             <a:extLst xmlns:a="http://schemas.openxmlformats.org/drawingml/2006/main">
               <a:ext uri="{FF2B5EF4-FFF2-40B4-BE49-F238E27FC236}">
-                <a16:creationId xmlns:a16="http://schemas.microsoft.com/office/drawing/2014/main" id="{A43C5B39-AE18-462A-BCFF-8F83D6080A79}"/>
+                <a16:creationId xmlns:a16="http://schemas.microsoft.com/office/drawing/2014/main" id="{2CDA2A9B-58F5-4F1A-B3F6-DD5B8FE7813A}"/>
               </a:ext>
             </a:extLst>
           </p:cNvPr>
@@ -7036,7 +7216,7 @@
           <p:cNvPr id="15" name="TextBox 14">
             <a:extLst xmlns:a="http://schemas.openxmlformats.org/drawingml/2006/main">
               <a:ext uri="{FF2B5EF4-FFF2-40B4-BE49-F238E27FC236}">
-                <a16:creationId xmlns:a16="http://schemas.microsoft.com/office/drawing/2014/main" id="{76A1BA06-9A3F-4375-90E0-F3E8A2CF1E70}"/>
+                <a16:creationId xmlns:a16="http://schemas.microsoft.com/office/drawing/2014/main" id="{E352FEC9-5502-4A2F-BA7E-D9F8491B518F}"/>
               </a:ext>
             </a:extLst>
           </p:cNvPr>
@@ -7083,7 +7263,7 @@
           <p:cNvPr id="16" name="Rounded Rectangle 15">
             <a:extLst xmlns:a="http://schemas.openxmlformats.org/drawingml/2006/main">
               <a:ext uri="{FF2B5EF4-FFF2-40B4-BE49-F238E27FC236}">
-                <a16:creationId xmlns:a16="http://schemas.microsoft.com/office/drawing/2014/main" id="{3870B20C-D5E5-42D2-B48A-364AD73F60CA}"/>
+                <a16:creationId xmlns:a16="http://schemas.microsoft.com/office/drawing/2014/main" id="{21BFC533-3ECF-4A23-8A05-59B9F5C700E8}"/>
               </a:ext>
             </a:extLst>
           </p:cNvPr>
@@ -7140,7 +7320,7 @@
           <p:cNvPr id="17" name="TextBox 16">
             <a:extLst xmlns:a="http://schemas.openxmlformats.org/drawingml/2006/main">
               <a:ext uri="{FF2B5EF4-FFF2-40B4-BE49-F238E27FC236}">
-                <a16:creationId xmlns:a16="http://schemas.microsoft.com/office/drawing/2014/main" id="{C7065B7A-ACDB-410E-8490-4195F0ADF06C}"/>
+                <a16:creationId xmlns:a16="http://schemas.microsoft.com/office/drawing/2014/main" id="{1ED369A5-C143-4120-87D8-F4D9BB750FAB}"/>
               </a:ext>
             </a:extLst>
           </p:cNvPr>
@@ -7187,7 +7367,7 @@
           <p:cNvPr id="18" name="TextBox 17">
             <a:extLst xmlns:a="http://schemas.openxmlformats.org/drawingml/2006/main">
               <a:ext uri="{FF2B5EF4-FFF2-40B4-BE49-F238E27FC236}">
-                <a16:creationId xmlns:a16="http://schemas.microsoft.com/office/drawing/2014/main" id="{68FED6B9-A364-47B1-9A83-E3CE76676B39}"/>
+                <a16:creationId xmlns:a16="http://schemas.microsoft.com/office/drawing/2014/main" id="{759011D4-1005-45BC-BB8A-D53D8AF92CBC}"/>
               </a:ext>
             </a:extLst>
           </p:cNvPr>
@@ -7234,7 +7414,7 @@
           <p:cNvPr id="19" name="TextBox 18">
             <a:extLst xmlns:a="http://schemas.openxmlformats.org/drawingml/2006/main">
               <a:ext uri="{FF2B5EF4-FFF2-40B4-BE49-F238E27FC236}">
-                <a16:creationId xmlns:a16="http://schemas.microsoft.com/office/drawing/2014/main" id="{C80E9BA7-7044-4FE0-B0CD-F153B619F6A9}"/>
+                <a16:creationId xmlns:a16="http://schemas.microsoft.com/office/drawing/2014/main" id="{D76F008E-3325-4FDC-B08C-801FEED8E44E}"/>
               </a:ext>
             </a:extLst>
           </p:cNvPr>
@@ -7281,7 +7461,7 @@
           <p:cNvPr id="20" name="Rounded Rectangle 19">
             <a:extLst xmlns:a="http://schemas.openxmlformats.org/drawingml/2006/main">
               <a:ext uri="{FF2B5EF4-FFF2-40B4-BE49-F238E27FC236}">
-                <a16:creationId xmlns:a16="http://schemas.microsoft.com/office/drawing/2014/main" id="{9966804F-ED42-4CC9-BDF5-49F3A8DB79BD}"/>
+                <a16:creationId xmlns:a16="http://schemas.microsoft.com/office/drawing/2014/main" id="{2EEF270E-4E1D-4D47-9882-1ADBD56CDD5C}"/>
               </a:ext>
             </a:extLst>
           </p:cNvPr>
@@ -7338,7 +7518,7 @@
           <p:cNvPr id="21" name="TextBox 20">
             <a:extLst xmlns:a="http://schemas.openxmlformats.org/drawingml/2006/main">
               <a:ext uri="{FF2B5EF4-FFF2-40B4-BE49-F238E27FC236}">
-                <a16:creationId xmlns:a16="http://schemas.microsoft.com/office/drawing/2014/main" id="{381DC5B7-A5CC-41AD-BAD0-A5A62164A2AA}"/>
+                <a16:creationId xmlns:a16="http://schemas.microsoft.com/office/drawing/2014/main" id="{3CE81F42-4B9B-4C53-BEC4-534322F9DB19}"/>
               </a:ext>
             </a:extLst>
           </p:cNvPr>
@@ -7385,7 +7565,7 @@
           <p:cNvPr id="22" name="TextBox 21">
             <a:extLst xmlns:a="http://schemas.openxmlformats.org/drawingml/2006/main">
               <a:ext uri="{FF2B5EF4-FFF2-40B4-BE49-F238E27FC236}">
-                <a16:creationId xmlns:a16="http://schemas.microsoft.com/office/drawing/2014/main" id="{B277FC99-B592-41FF-87BF-30C0ACD13915}"/>
+                <a16:creationId xmlns:a16="http://schemas.microsoft.com/office/drawing/2014/main" id="{FF3A6044-06C5-44C8-9EC4-0DBD9A45303B}"/>
               </a:ext>
             </a:extLst>
           </p:cNvPr>
@@ -7432,7 +7612,7 @@
           <p:cNvPr id="23" name="TextBox 22">
             <a:extLst xmlns:a="http://schemas.openxmlformats.org/drawingml/2006/main">
               <a:ext uri="{FF2B5EF4-FFF2-40B4-BE49-F238E27FC236}">
-                <a16:creationId xmlns:a16="http://schemas.microsoft.com/office/drawing/2014/main" id="{F7388600-57D1-4CB5-ABDB-75AD40D7B7D4}"/>
+                <a16:creationId xmlns:a16="http://schemas.microsoft.com/office/drawing/2014/main" id="{8954A087-FEAD-4256-89B8-24F438762215}"/>
               </a:ext>
             </a:extLst>
           </p:cNvPr>
@@ -7479,7 +7659,7 @@
           <p:cNvPr id="24" name="TextBox 23">
             <a:extLst xmlns:a="http://schemas.openxmlformats.org/drawingml/2006/main">
               <a:ext uri="{FF2B5EF4-FFF2-40B4-BE49-F238E27FC236}">
-                <a16:creationId xmlns:a16="http://schemas.microsoft.com/office/drawing/2014/main" id="{4FC99634-21A9-4074-AD6B-49E4A0C8A8A3}"/>
+                <a16:creationId xmlns:a16="http://schemas.microsoft.com/office/drawing/2014/main" id="{CB4A2568-8830-4A29-AB0B-748DD0FD027B}"/>
               </a:ext>
             </a:extLst>
           </p:cNvPr>
@@ -7524,7 +7704,7 @@
     </p:spTree>
     <p:extLst>
       <p:ext uri="{BB962C8B-B14F-4D97-AF65-F5344CB8AC3E}">
-        <p14:creationId xmlns:p14="http://schemas.microsoft.com/office/powerpoint/2010/main" val="1279476257"/>
+        <p14:creationId xmlns:p14="http://schemas.microsoft.com/office/powerpoint/2010/main" val="1665325916"/>
       </p:ext>
     </p:extLst>
   </p:cSld>
@@ -7548,7 +7728,7 @@
           <p:cNvPr id="2" name="TextBox 1">
             <a:extLst xmlns:a="http://schemas.openxmlformats.org/drawingml/2006/main">
               <a:ext uri="{FF2B5EF4-FFF2-40B4-BE49-F238E27FC236}">
-                <a16:creationId xmlns:a16="http://schemas.microsoft.com/office/drawing/2014/main" id="{6FFF54C7-A6BA-45A5-B949-9AE1361FF656}"/>
+                <a16:creationId xmlns:a16="http://schemas.microsoft.com/office/drawing/2014/main" id="{0160EEC1-1CB6-4B04-A8F0-833901596611}"/>
               </a:ext>
             </a:extLst>
           </p:cNvPr>
@@ -7595,7 +7775,7 @@
           <p:cNvPr id="3" name="TextBox 2">
             <a:extLst xmlns:a="http://schemas.openxmlformats.org/drawingml/2006/main">
               <a:ext uri="{FF2B5EF4-FFF2-40B4-BE49-F238E27FC236}">
-                <a16:creationId xmlns:a16="http://schemas.microsoft.com/office/drawing/2014/main" id="{C0A146FD-A579-499A-B7AD-CC8630E28A0B}"/>
+                <a16:creationId xmlns:a16="http://schemas.microsoft.com/office/drawing/2014/main" id="{CDC2FA44-1393-4D50-975F-A95BD44D3276}"/>
               </a:ext>
             </a:extLst>
           </p:cNvPr>
@@ -7642,7 +7822,7 @@
           <p:cNvPr id="4" name="Rectangle 3">
             <a:extLst xmlns:a="http://schemas.openxmlformats.org/drawingml/2006/main">
               <a:ext uri="{FF2B5EF4-FFF2-40B4-BE49-F238E27FC236}">
-                <a16:creationId xmlns:a16="http://schemas.microsoft.com/office/drawing/2014/main" id="{79F233EA-14BE-45FA-B889-CE6D612BDA12}"/>
+                <a16:creationId xmlns:a16="http://schemas.microsoft.com/office/drawing/2014/main" id="{86BD743C-DCD6-4ACB-B935-E6CF6DC4BD17}"/>
               </a:ext>
             </a:extLst>
           </p:cNvPr>
@@ -7697,7 +7877,7 @@
           <p:cNvPr id="5" name="Rectangle 4">
             <a:extLst xmlns:a="http://schemas.openxmlformats.org/drawingml/2006/main">
               <a:ext uri="{FF2B5EF4-FFF2-40B4-BE49-F238E27FC236}">
-                <a16:creationId xmlns:a16="http://schemas.microsoft.com/office/drawing/2014/main" id="{9713D87F-7907-470A-A55F-51B6FA7B7AE8}"/>
+                <a16:creationId xmlns:a16="http://schemas.microsoft.com/office/drawing/2014/main" id="{0E38E830-5406-4A24-A8A6-CDF8AA377DB1}"/>
               </a:ext>
             </a:extLst>
           </p:cNvPr>
@@ -7752,7 +7932,7 @@
           <p:cNvPr id="6" name="TextBox 5">
             <a:extLst xmlns:a="http://schemas.openxmlformats.org/drawingml/2006/main">
               <a:ext uri="{FF2B5EF4-FFF2-40B4-BE49-F238E27FC236}">
-                <a16:creationId xmlns:a16="http://schemas.microsoft.com/office/drawing/2014/main" id="{A68A6969-32E4-4505-A221-D1091D9B4127}"/>
+                <a16:creationId xmlns:a16="http://schemas.microsoft.com/office/drawing/2014/main" id="{22A286C8-56C0-45B3-BD63-F99EBF116888}"/>
               </a:ext>
             </a:extLst>
           </p:cNvPr>
@@ -7789,7 +7969,7 @@
                 <a:ea typeface="Aptos"/>
                 <a:cs typeface="Aptos"/>
               </a:rPr>
-              <a:t>Julkinen riippumaton evidenssikooste · 2026.07.24-18 · 2026-07-24 · Lähteet: WIPO IP valuation; Market-values</a:t>
+              <a:t>Julkinen riippumaton evidenssikooste · 2026.07.24-19 · 2026-07-24 · Lähteet: WIPO IP valuation; Market-values</a:t>
             </a:r>
           </a:p>
         </p:txBody>
@@ -7799,7 +7979,7 @@
           <p:cNvPr id="7" name="TextBox 6">
             <a:extLst xmlns:a="http://schemas.openxmlformats.org/drawingml/2006/main">
               <a:ext uri="{FF2B5EF4-FFF2-40B4-BE49-F238E27FC236}">
-                <a16:creationId xmlns:a16="http://schemas.microsoft.com/office/drawing/2014/main" id="{E9E00296-16D7-4C13-87D2-BF372CDEDF2A}"/>
+                <a16:creationId xmlns:a16="http://schemas.microsoft.com/office/drawing/2014/main" id="{5E519554-98CE-4B56-8084-FCBE3CCAC4D1}"/>
               </a:ext>
             </a:extLst>
           </p:cNvPr>
@@ -8369,7 +8549,7 @@
           <p:cNvPr id="9" name="TextBox 8">
             <a:extLst xmlns:a="http://schemas.openxmlformats.org/drawingml/2006/main">
               <a:ext uri="{FF2B5EF4-FFF2-40B4-BE49-F238E27FC236}">
-                <a16:creationId xmlns:a16="http://schemas.microsoft.com/office/drawing/2014/main" id="{2424EADC-59A8-4B27-842A-EAE0420A07F5}"/>
+                <a16:creationId xmlns:a16="http://schemas.microsoft.com/office/drawing/2014/main" id="{0689D57B-AD57-4FF1-A251-44C28BD4353E}"/>
               </a:ext>
             </a:extLst>
           </p:cNvPr>
@@ -8414,7 +8594,7 @@
     </p:spTree>
     <p:extLst>
       <p:ext uri="{BB962C8B-B14F-4D97-AF65-F5344CB8AC3E}">
-        <p14:creationId xmlns:p14="http://schemas.microsoft.com/office/powerpoint/2010/main" val="1175064586"/>
+        <p14:creationId xmlns:p14="http://schemas.microsoft.com/office/powerpoint/2010/main" val="1492757109"/>
       </p:ext>
     </p:extLst>
   </p:cSld>
@@ -8445,7 +8625,7 @@
           <p:cNvPr id="2" name="TextBox 1">
             <a:extLst xmlns:a="http://schemas.openxmlformats.org/drawingml/2006/main">
               <a:ext uri="{FF2B5EF4-FFF2-40B4-BE49-F238E27FC236}">
-                <a16:creationId xmlns:a16="http://schemas.microsoft.com/office/drawing/2014/main" id="{0203D402-E34A-4C28-82A3-70EEFF80054A}"/>
+                <a16:creationId xmlns:a16="http://schemas.microsoft.com/office/drawing/2014/main" id="{C69BB9E9-8B18-4DC4-B2FF-FE82B9A859ED}"/>
               </a:ext>
             </a:extLst>
           </p:cNvPr>
@@ -8492,7 +8672,7 @@
           <p:cNvPr id="3" name="TextBox 2">
             <a:extLst xmlns:a="http://schemas.openxmlformats.org/drawingml/2006/main">
               <a:ext uri="{FF2B5EF4-FFF2-40B4-BE49-F238E27FC236}">
-                <a16:creationId xmlns:a16="http://schemas.microsoft.com/office/drawing/2014/main" id="{7AB8A3D8-96A3-4DBD-97CA-6CF39091DA12}"/>
+                <a16:creationId xmlns:a16="http://schemas.microsoft.com/office/drawing/2014/main" id="{EE18C452-8267-4066-B470-6F620CD25CDF}"/>
               </a:ext>
             </a:extLst>
           </p:cNvPr>
@@ -8539,7 +8719,7 @@
           <p:cNvPr id="4" name="TextBox 3">
             <a:extLst xmlns:a="http://schemas.openxmlformats.org/drawingml/2006/main">
               <a:ext uri="{FF2B5EF4-FFF2-40B4-BE49-F238E27FC236}">
-                <a16:creationId xmlns:a16="http://schemas.microsoft.com/office/drawing/2014/main" id="{86981224-C2D1-4DD5-823F-761E2027C7DF}"/>
+                <a16:creationId xmlns:a16="http://schemas.microsoft.com/office/drawing/2014/main" id="{659C6BAE-AE3F-432B-B2B0-DB3F2A66F440}"/>
               </a:ext>
             </a:extLst>
           </p:cNvPr>
@@ -8680,7 +8860,7 @@
           <p:cNvPr id="5" name="TextBox 4">
             <a:extLst xmlns:a="http://schemas.openxmlformats.org/drawingml/2006/main">
               <a:ext uri="{FF2B5EF4-FFF2-40B4-BE49-F238E27FC236}">
-                <a16:creationId xmlns:a16="http://schemas.microsoft.com/office/drawing/2014/main" id="{214DEE50-FADF-4D64-94A4-C421E0493E1D}"/>
+                <a16:creationId xmlns:a16="http://schemas.microsoft.com/office/drawing/2014/main" id="{19431EC9-EF20-46D7-B931-8F6861DC7224}"/>
               </a:ext>
             </a:extLst>
           </p:cNvPr>
@@ -8717,7 +8897,7 @@
                 <a:ea typeface="Aptos"/>
                 <a:cs typeface="Aptos"/>
               </a:rPr>
-              <a:t>Versio 2026.07.24-18 · 2026-07-24 · 12 / 12</a:t>
+              <a:t>Versio 2026.07.24-19 · 2026-07-24 · 12 / 12</a:t>
             </a:r>
           </a:p>
         </p:txBody>
@@ -8727,7 +8907,7 @@
           <p:cNvPr id="6" name="TextBox 5">
             <a:extLst xmlns:a="http://schemas.openxmlformats.org/drawingml/2006/main">
               <a:ext uri="{FF2B5EF4-FFF2-40B4-BE49-F238E27FC236}">
-                <a16:creationId xmlns:a16="http://schemas.microsoft.com/office/drawing/2014/main" id="{3B82FF99-598E-4450-B421-6712F27E9157}"/>
+                <a16:creationId xmlns:a16="http://schemas.microsoft.com/office/drawing/2014/main" id="{5D142969-3527-4283-8C89-40EF37855945}"/>
               </a:ext>
             </a:extLst>
           </p:cNvPr>
@@ -8772,7 +8952,7 @@
     </p:spTree>
     <p:extLst>
       <p:ext uri="{BB962C8B-B14F-4D97-AF65-F5344CB8AC3E}">
-        <p14:creationId xmlns:p14="http://schemas.microsoft.com/office/powerpoint/2010/main" val="1325674889"/>
+        <p14:creationId xmlns:p14="http://schemas.microsoft.com/office/powerpoint/2010/main" val="1451591129"/>
       </p:ext>
     </p:extLst>
   </p:cSld>
@@ -8796,7 +8976,7 @@
           <p:cNvPr id="2" name="TextBox 1">
             <a:extLst xmlns:a="http://schemas.openxmlformats.org/drawingml/2006/main">
               <a:ext uri="{FF2B5EF4-FFF2-40B4-BE49-F238E27FC236}">
-                <a16:creationId xmlns:a16="http://schemas.microsoft.com/office/drawing/2014/main" id="{D75AF2DF-7D9A-4AD1-B4C0-C94155263D18}"/>
+                <a16:creationId xmlns:a16="http://schemas.microsoft.com/office/drawing/2014/main" id="{F4EBB72F-DD85-4868-A412-863AB856535E}"/>
               </a:ext>
             </a:extLst>
           </p:cNvPr>
@@ -8843,7 +9023,7 @@
           <p:cNvPr id="3" name="TextBox 2">
             <a:extLst xmlns:a="http://schemas.openxmlformats.org/drawingml/2006/main">
               <a:ext uri="{FF2B5EF4-FFF2-40B4-BE49-F238E27FC236}">
-                <a16:creationId xmlns:a16="http://schemas.microsoft.com/office/drawing/2014/main" id="{895E903A-6004-41B7-AF1C-C8951EDF34C1}"/>
+                <a16:creationId xmlns:a16="http://schemas.microsoft.com/office/drawing/2014/main" id="{AEA0F0E4-E5B2-4837-96FF-A302393DDEF6}"/>
               </a:ext>
             </a:extLst>
           </p:cNvPr>
@@ -8855,7 +9035,7 @@
         <p:spPr>
           <a:xfrm xmlns:a="http://schemas.openxmlformats.org/drawingml/2006/main">
             <a:off x="502920" y="621792"/>
-            <a:ext cx="11109960" cy="548640"/>
+            <a:ext cx="11109960" cy="591312"/>
           </a:xfrm>
           <a:prstGeom xmlns:a="http://schemas.openxmlformats.org/drawingml/2006/main" prst="rect">
             <a:avLst/>
@@ -8863,8 +9043,8 @@
           <a:noFill xmlns:a="http://schemas.openxmlformats.org/drawingml/2006/main"/>
         </p:spPr>
         <p:txBody>
-          <a:bodyPr xmlns:a="http://schemas.openxmlformats.org/drawingml/2006/main" wrap="square" lIns="36576" tIns="36576" rIns="36576" bIns="36576" anchor="t">
-            <a:spAutoFit/>
+          <a:bodyPr xmlns:a="http://schemas.openxmlformats.org/drawingml/2006/main" wrap="none" lIns="36576" tIns="36576" rIns="36576" bIns="36576" anchor="t">
+            <a:normAutofit fontScale="100000"/>
           </a:bodyPr>
           <a:lstStyle xmlns:a="http://schemas.openxmlformats.org/drawingml/2006/main"/>
           <a:p xmlns:a="http://schemas.openxmlformats.org/drawingml/2006/main">
@@ -8872,7 +9052,7 @@
               <a:buNone/>
             </a:pPr>
             <a:r>
-              <a:rPr sz="3400" b="1">
+              <a:rPr sz="2400" b="1">
                 <a:solidFill>
                   <a:srgbClr val="071A2B"/>
                 </a:solidFill>
@@ -8880,7 +9060,7 @@
                 <a:ea typeface="Aptos"/>
                 <a:cs typeface="Aptos"/>
               </a:rPr>
-              <a:t>Ongelma on yhtä paljon evidenssissä kuin teknologiassa</a:t>
+              <a:t>Ongelma on evidenssissä ja teknologiassa</a:t>
             </a:r>
           </a:p>
         </p:txBody>
@@ -8890,7 +9070,7 @@
           <p:cNvPr id="4" name="Rectangle 3">
             <a:extLst xmlns:a="http://schemas.openxmlformats.org/drawingml/2006/main">
               <a:ext uri="{FF2B5EF4-FFF2-40B4-BE49-F238E27FC236}">
-                <a16:creationId xmlns:a16="http://schemas.microsoft.com/office/drawing/2014/main" id="{4257FADF-F8D3-44DD-8386-6C8B0CA04CFC}"/>
+                <a16:creationId xmlns:a16="http://schemas.microsoft.com/office/drawing/2014/main" id="{7C4C7F52-8F88-47A8-9F8C-3A8A210C782E}"/>
               </a:ext>
             </a:extLst>
           </p:cNvPr>
@@ -8945,7 +9125,7 @@
           <p:cNvPr id="5" name="Rectangle 4">
             <a:extLst xmlns:a="http://schemas.openxmlformats.org/drawingml/2006/main">
               <a:ext uri="{FF2B5EF4-FFF2-40B4-BE49-F238E27FC236}">
-                <a16:creationId xmlns:a16="http://schemas.microsoft.com/office/drawing/2014/main" id="{874883F5-BF52-4A7B-BB79-CE3C53DDE056}"/>
+                <a16:creationId xmlns:a16="http://schemas.microsoft.com/office/drawing/2014/main" id="{515655D1-531B-4649-BD3F-8982D12B6219}"/>
               </a:ext>
             </a:extLst>
           </p:cNvPr>
@@ -9000,7 +9180,7 @@
           <p:cNvPr id="6" name="TextBox 5">
             <a:extLst xmlns:a="http://schemas.openxmlformats.org/drawingml/2006/main">
               <a:ext uri="{FF2B5EF4-FFF2-40B4-BE49-F238E27FC236}">
-                <a16:creationId xmlns:a16="http://schemas.microsoft.com/office/drawing/2014/main" id="{97729D2A-4AC1-4013-A03B-A2F8E2BE5CDE}"/>
+                <a16:creationId xmlns:a16="http://schemas.microsoft.com/office/drawing/2014/main" id="{9AC33421-B17A-4E57-AF17-25B45739BDF3}"/>
               </a:ext>
             </a:extLst>
           </p:cNvPr>
@@ -9037,7 +9217,7 @@
                 <a:ea typeface="Aptos"/>
                 <a:cs typeface="Aptos"/>
               </a:rPr>
-              <a:t>Julkinen riippumaton evidenssikooste · 2026.07.24-18 · 2026-07-24 · Lähteet: Atlas readiness; WIPO</a:t>
+              <a:t>Julkinen riippumaton evidenssikooste · 2026.07.24-19 · 2026-07-24 · Lähteet: Atlas readiness; WIPO</a:t>
             </a:r>
           </a:p>
         </p:txBody>
@@ -9047,7 +9227,7 @@
           <p:cNvPr id="7" name="TextBox 6">
             <a:extLst xmlns:a="http://schemas.openxmlformats.org/drawingml/2006/main">
               <a:ext uri="{FF2B5EF4-FFF2-40B4-BE49-F238E27FC236}">
-                <a16:creationId xmlns:a16="http://schemas.microsoft.com/office/drawing/2014/main" id="{66FA8175-52A8-4E58-9C61-682FCC1A4141}"/>
+                <a16:creationId xmlns:a16="http://schemas.microsoft.com/office/drawing/2014/main" id="{82993244-A276-43DD-A560-06C0AF88CE2F}"/>
               </a:ext>
             </a:extLst>
           </p:cNvPr>
@@ -9094,7 +9274,7 @@
           <p:cNvPr id="8" name="TextBox 7">
             <a:extLst xmlns:a="http://schemas.openxmlformats.org/drawingml/2006/main">
               <a:ext uri="{FF2B5EF4-FFF2-40B4-BE49-F238E27FC236}">
-                <a16:creationId xmlns:a16="http://schemas.microsoft.com/office/drawing/2014/main" id="{E16EC14A-2EBD-4EB0-93A7-AC40CAC7A1E4}"/>
+                <a16:creationId xmlns:a16="http://schemas.microsoft.com/office/drawing/2014/main" id="{E6EAEBF5-E566-487C-874D-D27931AD1E0F}"/>
               </a:ext>
             </a:extLst>
           </p:cNvPr>
@@ -9141,7 +9321,7 @@
           <p:cNvPr id="9" name="TextBox 8">
             <a:extLst xmlns:a="http://schemas.openxmlformats.org/drawingml/2006/main">
               <a:ext uri="{FF2B5EF4-FFF2-40B4-BE49-F238E27FC236}">
-                <a16:creationId xmlns:a16="http://schemas.microsoft.com/office/drawing/2014/main" id="{0CE5A573-D98B-46B7-B722-E9B1F10E9FA8}"/>
+                <a16:creationId xmlns:a16="http://schemas.microsoft.com/office/drawing/2014/main" id="{AE5395B4-3DE7-4E35-A16C-3D2A28799541}"/>
               </a:ext>
             </a:extLst>
           </p:cNvPr>
@@ -9238,7 +9418,7 @@
           <p:cNvPr id="10" name="Rounded Rectangle 9">
             <a:extLst xmlns:a="http://schemas.openxmlformats.org/drawingml/2006/main">
               <a:ext uri="{FF2B5EF4-FFF2-40B4-BE49-F238E27FC236}">
-                <a16:creationId xmlns:a16="http://schemas.microsoft.com/office/drawing/2014/main" id="{327BB962-06E7-421C-8973-351459B20811}"/>
+                <a16:creationId xmlns:a16="http://schemas.microsoft.com/office/drawing/2014/main" id="{4A12F4FB-E5AE-4FAB-A08E-50A6D7382802}"/>
               </a:ext>
             </a:extLst>
           </p:cNvPr>
@@ -9295,7 +9475,7 @@
           <p:cNvPr id="11" name="TextBox 10">
             <a:extLst xmlns:a="http://schemas.openxmlformats.org/drawingml/2006/main">
               <a:ext uri="{FF2B5EF4-FFF2-40B4-BE49-F238E27FC236}">
-                <a16:creationId xmlns:a16="http://schemas.microsoft.com/office/drawing/2014/main" id="{418E1F14-2F5B-42E0-AC1A-FCDB535EE034}"/>
+                <a16:creationId xmlns:a16="http://schemas.microsoft.com/office/drawing/2014/main" id="{6473916E-6AB3-4C9F-9F2E-70CC4B1E62B0}"/>
               </a:ext>
             </a:extLst>
           </p:cNvPr>
@@ -9342,7 +9522,7 @@
           <p:cNvPr id="12" name="TextBox 11">
             <a:extLst xmlns:a="http://schemas.openxmlformats.org/drawingml/2006/main">
               <a:ext uri="{FF2B5EF4-FFF2-40B4-BE49-F238E27FC236}">
-                <a16:creationId xmlns:a16="http://schemas.microsoft.com/office/drawing/2014/main" id="{CC76D4B1-CFE0-4BF0-8B11-666115D66E00}"/>
+                <a16:creationId xmlns:a16="http://schemas.microsoft.com/office/drawing/2014/main" id="{F2BBD832-AA33-47BB-997C-8152505DAB3A}"/>
               </a:ext>
             </a:extLst>
           </p:cNvPr>
@@ -9387,7 +9567,7 @@
     </p:spTree>
     <p:extLst>
       <p:ext uri="{BB962C8B-B14F-4D97-AF65-F5344CB8AC3E}">
-        <p14:creationId xmlns:p14="http://schemas.microsoft.com/office/powerpoint/2010/main" val="465388274"/>
+        <p14:creationId xmlns:p14="http://schemas.microsoft.com/office/powerpoint/2010/main" val="1324756831"/>
       </p:ext>
     </p:extLst>
   </p:cSld>
@@ -9411,7 +9591,7 @@
           <p:cNvPr id="2" name="TextBox 1">
             <a:extLst xmlns:a="http://schemas.openxmlformats.org/drawingml/2006/main">
               <a:ext uri="{FF2B5EF4-FFF2-40B4-BE49-F238E27FC236}">
-                <a16:creationId xmlns:a16="http://schemas.microsoft.com/office/drawing/2014/main" id="{87B06427-3D8E-4925-A309-E830AE6524AB}"/>
+                <a16:creationId xmlns:a16="http://schemas.microsoft.com/office/drawing/2014/main" id="{CAD93E1D-43C9-4CB1-86EC-F0B150A6773A}"/>
               </a:ext>
             </a:extLst>
           </p:cNvPr>
@@ -9458,7 +9638,7 @@
           <p:cNvPr id="3" name="TextBox 2">
             <a:extLst xmlns:a="http://schemas.openxmlformats.org/drawingml/2006/main">
               <a:ext uri="{FF2B5EF4-FFF2-40B4-BE49-F238E27FC236}">
-                <a16:creationId xmlns:a16="http://schemas.microsoft.com/office/drawing/2014/main" id="{C15B0837-ED1B-48DB-AAEB-3D58A71B2866}"/>
+                <a16:creationId xmlns:a16="http://schemas.microsoft.com/office/drawing/2014/main" id="{968878CD-7B6D-400A-A748-B4BF728D1CA7}"/>
               </a:ext>
             </a:extLst>
           </p:cNvPr>
@@ -9470,7 +9650,7 @@
         <p:spPr>
           <a:xfrm xmlns:a="http://schemas.openxmlformats.org/drawingml/2006/main">
             <a:off x="502920" y="621792"/>
-            <a:ext cx="11109960" cy="548640"/>
+            <a:ext cx="11109960" cy="591312"/>
           </a:xfrm>
           <a:prstGeom xmlns:a="http://schemas.openxmlformats.org/drawingml/2006/main" prst="rect">
             <a:avLst/>
@@ -9478,8 +9658,8 @@
           <a:noFill xmlns:a="http://schemas.openxmlformats.org/drawingml/2006/main"/>
         </p:spPr>
         <p:txBody>
-          <a:bodyPr xmlns:a="http://schemas.openxmlformats.org/drawingml/2006/main" wrap="square" lIns="36576" tIns="36576" rIns="36576" bIns="36576" anchor="t">
-            <a:spAutoFit/>
+          <a:bodyPr xmlns:a="http://schemas.openxmlformats.org/drawingml/2006/main" wrap="none" lIns="36576" tIns="36576" rIns="36576" bIns="36576" anchor="t">
+            <a:normAutofit fontScale="100000"/>
           </a:bodyPr>
           <a:lstStyle xmlns:a="http://schemas.openxmlformats.org/drawingml/2006/main"/>
           <a:p xmlns:a="http://schemas.openxmlformats.org/drawingml/2006/main">
@@ -9487,7 +9667,7 @@
               <a:buNone/>
             </a:pPr>
             <a:r>
-              <a:rPr sz="3400" b="1">
+              <a:rPr sz="2400" b="1">
                 <a:solidFill>
                   <a:srgbClr val="071A2B"/>
                 </a:solidFill>
@@ -9495,7 +9675,7 @@
                 <a:ea typeface="Aptos"/>
                 <a:cs typeface="Aptos"/>
               </a:rPr>
-              <a:t>Ratkaisu ohjaa höyrystimen tehoa mitatun resistanssin perusteella</a:t>
+              <a:t>Ratkaisu ohjaa tehoa resistanssin perusteella</a:t>
             </a:r>
           </a:p>
         </p:txBody>
@@ -9505,7 +9685,7 @@
           <p:cNvPr id="4" name="Rectangle 3">
             <a:extLst xmlns:a="http://schemas.openxmlformats.org/drawingml/2006/main">
               <a:ext uri="{FF2B5EF4-FFF2-40B4-BE49-F238E27FC236}">
-                <a16:creationId xmlns:a16="http://schemas.microsoft.com/office/drawing/2014/main" id="{DDD32CEA-AEDA-44FA-918D-F1B59E669C57}"/>
+                <a16:creationId xmlns:a16="http://schemas.microsoft.com/office/drawing/2014/main" id="{C13969FB-FD4D-4967-BD7F-969A4C65813C}"/>
               </a:ext>
             </a:extLst>
           </p:cNvPr>
@@ -9560,7 +9740,7 @@
           <p:cNvPr id="5" name="Rectangle 4">
             <a:extLst xmlns:a="http://schemas.openxmlformats.org/drawingml/2006/main">
               <a:ext uri="{FF2B5EF4-FFF2-40B4-BE49-F238E27FC236}">
-                <a16:creationId xmlns:a16="http://schemas.microsoft.com/office/drawing/2014/main" id="{15460A71-5139-42AB-9100-014F9835808F}"/>
+                <a16:creationId xmlns:a16="http://schemas.microsoft.com/office/drawing/2014/main" id="{FBF166F1-8E54-4E68-B7F2-3CF183087948}"/>
               </a:ext>
             </a:extLst>
           </p:cNvPr>
@@ -9615,7 +9795,7 @@
           <p:cNvPr id="6" name="TextBox 5">
             <a:extLst xmlns:a="http://schemas.openxmlformats.org/drawingml/2006/main">
               <a:ext uri="{FF2B5EF4-FFF2-40B4-BE49-F238E27FC236}">
-                <a16:creationId xmlns:a16="http://schemas.microsoft.com/office/drawing/2014/main" id="{9F88BEEC-9308-4D87-9D8D-546D0B6CEB28}"/>
+                <a16:creationId xmlns:a16="http://schemas.microsoft.com/office/drawing/2014/main" id="{C028A101-5667-4B74-BE65-46B1F3D25638}"/>
               </a:ext>
             </a:extLst>
           </p:cNvPr>
@@ -9652,7 +9832,7 @@
                 <a:ea typeface="Aptos"/>
                 <a:cs typeface="Aptos"/>
               </a:rPr>
-              <a:t>Julkinen riippumaton evidenssikooste · 2026.07.24-18 · 2026-07-24 · Lähteet: EP3032975B2</a:t>
+              <a:t>Julkinen riippumaton evidenssikooste · 2026.07.24-19 · 2026-07-24 · Lähteet: EP3032975B2</a:t>
             </a:r>
           </a:p>
         </p:txBody>
@@ -9662,7 +9842,7 @@
           <p:cNvPr id="7" name="TextBox 6">
             <a:extLst xmlns:a="http://schemas.openxmlformats.org/drawingml/2006/main">
               <a:ext uri="{FF2B5EF4-FFF2-40B4-BE49-F238E27FC236}">
-                <a16:creationId xmlns:a16="http://schemas.microsoft.com/office/drawing/2014/main" id="{04ED3FB0-2577-436B-82B0-66B076B45D79}"/>
+                <a16:creationId xmlns:a16="http://schemas.microsoft.com/office/drawing/2014/main" id="{CFD1805F-4E04-4118-B77A-6BC76C0A35B0}"/>
               </a:ext>
             </a:extLst>
           </p:cNvPr>
@@ -9709,7 +9889,7 @@
           <p:cNvPr id="8" name="TextBox 7">
             <a:extLst xmlns:a="http://schemas.openxmlformats.org/drawingml/2006/main">
               <a:ext uri="{FF2B5EF4-FFF2-40B4-BE49-F238E27FC236}">
-                <a16:creationId xmlns:a16="http://schemas.microsoft.com/office/drawing/2014/main" id="{9E234BE1-37A2-45A2-B43B-99E8C0B44D18}"/>
+                <a16:creationId xmlns:a16="http://schemas.microsoft.com/office/drawing/2014/main" id="{A3010DFA-6D3A-4CF0-B8A0-4AD4E0B7A0B1}"/>
               </a:ext>
             </a:extLst>
           </p:cNvPr>
@@ -9756,7 +9936,7 @@
           <p:cNvPr id="9" name="TextBox 8">
             <a:extLst xmlns:a="http://schemas.openxmlformats.org/drawingml/2006/main">
               <a:ext uri="{FF2B5EF4-FFF2-40B4-BE49-F238E27FC236}">
-                <a16:creationId xmlns:a16="http://schemas.microsoft.com/office/drawing/2014/main" id="{495B7FE8-142B-407D-B7E5-E78E1245B528}"/>
+                <a16:creationId xmlns:a16="http://schemas.microsoft.com/office/drawing/2014/main" id="{1F254CF7-3A03-45A7-ACF5-CA5E410E11F9}"/>
               </a:ext>
             </a:extLst>
           </p:cNvPr>
@@ -9853,7 +10033,7 @@
           <p:cNvPr id="10" name="Rounded Rectangle 9">
             <a:extLst xmlns:a="http://schemas.openxmlformats.org/drawingml/2006/main">
               <a:ext uri="{FF2B5EF4-FFF2-40B4-BE49-F238E27FC236}">
-                <a16:creationId xmlns:a16="http://schemas.microsoft.com/office/drawing/2014/main" id="{DC8B4AF7-06F4-4909-8BA8-35219E1E342B}"/>
+                <a16:creationId xmlns:a16="http://schemas.microsoft.com/office/drawing/2014/main" id="{DC827F76-B509-40A2-BCE5-3DDAA760372C}"/>
               </a:ext>
             </a:extLst>
           </p:cNvPr>
@@ -9910,7 +10090,7 @@
           <p:cNvPr id="11" name="TextBox 10">
             <a:extLst xmlns:a="http://schemas.openxmlformats.org/drawingml/2006/main">
               <a:ext uri="{FF2B5EF4-FFF2-40B4-BE49-F238E27FC236}">
-                <a16:creationId xmlns:a16="http://schemas.microsoft.com/office/drawing/2014/main" id="{9D8F6D29-309E-4ADA-9D3E-035359A60F7D}"/>
+                <a16:creationId xmlns:a16="http://schemas.microsoft.com/office/drawing/2014/main" id="{9D51C04A-D3A7-4142-9BE7-40BF9C6AC8C8}"/>
               </a:ext>
             </a:extLst>
           </p:cNvPr>
@@ -9957,7 +10137,7 @@
           <p:cNvPr id="12" name="TextBox 11">
             <a:extLst xmlns:a="http://schemas.openxmlformats.org/drawingml/2006/main">
               <a:ext uri="{FF2B5EF4-FFF2-40B4-BE49-F238E27FC236}">
-                <a16:creationId xmlns:a16="http://schemas.microsoft.com/office/drawing/2014/main" id="{A533A467-347F-4770-85B4-01DD4C481012}"/>
+                <a16:creationId xmlns:a16="http://schemas.microsoft.com/office/drawing/2014/main" id="{4D1CC7BA-DDFA-4572-BEFB-D02963A70656}"/>
               </a:ext>
             </a:extLst>
           </p:cNvPr>
@@ -10002,7 +10182,7 @@
     </p:spTree>
     <p:extLst>
       <p:ext uri="{BB962C8B-B14F-4D97-AF65-F5344CB8AC3E}">
-        <p14:creationId xmlns:p14="http://schemas.microsoft.com/office/powerpoint/2010/main" val="2106242099"/>
+        <p14:creationId xmlns:p14="http://schemas.microsoft.com/office/powerpoint/2010/main" val="1812476189"/>
       </p:ext>
     </p:extLst>
   </p:cSld>
@@ -10026,7 +10206,7 @@
           <p:cNvPr id="2" name="TextBox 1">
             <a:extLst xmlns:a="http://schemas.openxmlformats.org/drawingml/2006/main">
               <a:ext uri="{FF2B5EF4-FFF2-40B4-BE49-F238E27FC236}">
-                <a16:creationId xmlns:a16="http://schemas.microsoft.com/office/drawing/2014/main" id="{AE618FB1-F190-40D1-A387-7467993970D4}"/>
+                <a16:creationId xmlns:a16="http://schemas.microsoft.com/office/drawing/2014/main" id="{D9051D42-C879-4DB0-A86D-75889F875A85}"/>
               </a:ext>
             </a:extLst>
           </p:cNvPr>
@@ -10073,7 +10253,7 @@
           <p:cNvPr id="3" name="TextBox 2">
             <a:extLst xmlns:a="http://schemas.openxmlformats.org/drawingml/2006/main">
               <a:ext uri="{FF2B5EF4-FFF2-40B4-BE49-F238E27FC236}">
-                <a16:creationId xmlns:a16="http://schemas.microsoft.com/office/drawing/2014/main" id="{F9269DA9-7170-44CA-8F48-50E30267B45D}"/>
+                <a16:creationId xmlns:a16="http://schemas.microsoft.com/office/drawing/2014/main" id="{094E9004-007B-45E9-B32F-799C16EC4D6F}"/>
               </a:ext>
             </a:extLst>
           </p:cNvPr>
@@ -10085,7 +10265,7 @@
         <p:spPr>
           <a:xfrm xmlns:a="http://schemas.openxmlformats.org/drawingml/2006/main">
             <a:off x="502920" y="621792"/>
-            <a:ext cx="11109960" cy="548640"/>
+            <a:ext cx="11109960" cy="591312"/>
           </a:xfrm>
           <a:prstGeom xmlns:a="http://schemas.openxmlformats.org/drawingml/2006/main" prst="rect">
             <a:avLst/>
@@ -10093,8 +10273,8 @@
           <a:noFill xmlns:a="http://schemas.openxmlformats.org/drawingml/2006/main"/>
         </p:spPr>
         <p:txBody>
-          <a:bodyPr xmlns:a="http://schemas.openxmlformats.org/drawingml/2006/main" wrap="square" lIns="36576" tIns="36576" rIns="36576" bIns="36576" anchor="t">
-            <a:spAutoFit/>
+          <a:bodyPr xmlns:a="http://schemas.openxmlformats.org/drawingml/2006/main" wrap="none" lIns="36576" tIns="36576" rIns="36576" bIns="36576" anchor="t">
+            <a:normAutofit fontScale="100000"/>
           </a:bodyPr>
           <a:lstStyle xmlns:a="http://schemas.openxmlformats.org/drawingml/2006/main"/>
           <a:p xmlns:a="http://schemas.openxmlformats.org/drawingml/2006/main">
@@ -10102,7 +10282,7 @@
               <a:buNone/>
             </a:pPr>
             <a:r>
-              <a:rPr sz="3400" b="1">
+              <a:rPr sz="2400" b="1">
                 <a:solidFill>
                   <a:srgbClr val="071A2B"/>
                 </a:solidFill>
@@ -10110,7 +10290,7 @@
                 <a:ea typeface="Aptos"/>
                 <a:cs typeface="Aptos"/>
               </a:rPr>
-              <a:t>IP-ydin on dokumentoitu; maakohtainen käyttökelpoisuus on vielä täsmäytettävä</a:t>
+              <a:t>IP-ydin on dokumentoitu; maapeitto avoin</a:t>
             </a:r>
           </a:p>
         </p:txBody>
@@ -10120,7 +10300,7 @@
           <p:cNvPr id="4" name="Rectangle 3">
             <a:extLst xmlns:a="http://schemas.openxmlformats.org/drawingml/2006/main">
               <a:ext uri="{FF2B5EF4-FFF2-40B4-BE49-F238E27FC236}">
-                <a16:creationId xmlns:a16="http://schemas.microsoft.com/office/drawing/2014/main" id="{5675D626-0030-47A6-B2A5-B1B6ABF4C959}"/>
+                <a16:creationId xmlns:a16="http://schemas.microsoft.com/office/drawing/2014/main" id="{CB2347AB-2A8E-4056-A895-C93F7F55A377}"/>
               </a:ext>
             </a:extLst>
           </p:cNvPr>
@@ -10175,7 +10355,7 @@
           <p:cNvPr id="5" name="Rectangle 4">
             <a:extLst xmlns:a="http://schemas.openxmlformats.org/drawingml/2006/main">
               <a:ext uri="{FF2B5EF4-FFF2-40B4-BE49-F238E27FC236}">
-                <a16:creationId xmlns:a16="http://schemas.microsoft.com/office/drawing/2014/main" id="{428A0BA3-2FF2-4A87-9D68-34827F6D9EE1}"/>
+                <a16:creationId xmlns:a16="http://schemas.microsoft.com/office/drawing/2014/main" id="{F7FD1A55-7592-486E-8736-7A6CF16B38F4}"/>
               </a:ext>
             </a:extLst>
           </p:cNvPr>
@@ -10230,7 +10410,7 @@
           <p:cNvPr id="6" name="TextBox 5">
             <a:extLst xmlns:a="http://schemas.openxmlformats.org/drawingml/2006/main">
               <a:ext uri="{FF2B5EF4-FFF2-40B4-BE49-F238E27FC236}">
-                <a16:creationId xmlns:a16="http://schemas.microsoft.com/office/drawing/2014/main" id="{CC8756DE-196C-4AFE-8FAB-3DC80BA1D577}"/>
+                <a16:creationId xmlns:a16="http://schemas.microsoft.com/office/drawing/2014/main" id="{2A03E4E2-4BAF-46B0-B555-420AFBE385D2}"/>
               </a:ext>
             </a:extLst>
           </p:cNvPr>
@@ -10267,7 +10447,7 @@
                 <a:ea typeface="Aptos"/>
                 <a:cs typeface="Aptos"/>
               </a:rPr>
-              <a:t>Julkinen riippumaton evidenssikooste · 2026.07.24-18 · 2026-07-24 · Lähteet: EPO Register; EP3032975B2</a:t>
+              <a:t>Julkinen riippumaton evidenssikooste · 2026.07.24-19 · 2026-07-24 · Lähteet: EPO Register; EP3032975B2</a:t>
             </a:r>
           </a:p>
         </p:txBody>
@@ -10277,7 +10457,7 @@
           <p:cNvPr id="7" name="TextBox 6">
             <a:extLst xmlns:a="http://schemas.openxmlformats.org/drawingml/2006/main">
               <a:ext uri="{FF2B5EF4-FFF2-40B4-BE49-F238E27FC236}">
-                <a16:creationId xmlns:a16="http://schemas.microsoft.com/office/drawing/2014/main" id="{083C8228-07CB-4827-A515-3AB4D212EBE7}"/>
+                <a16:creationId xmlns:a16="http://schemas.microsoft.com/office/drawing/2014/main" id="{61D78ABC-F41F-407C-9015-70D50336DE03}"/>
               </a:ext>
             </a:extLst>
           </p:cNvPr>
@@ -10324,7 +10504,7 @@
           <p:cNvPr id="8" name="Rounded Rectangle 7">
             <a:extLst xmlns:a="http://schemas.openxmlformats.org/drawingml/2006/main">
               <a:ext uri="{FF2B5EF4-FFF2-40B4-BE49-F238E27FC236}">
-                <a16:creationId xmlns:a16="http://schemas.microsoft.com/office/drawing/2014/main" id="{AC60FFDB-FA41-43BD-958A-26DDB6D42E5E}"/>
+                <a16:creationId xmlns:a16="http://schemas.microsoft.com/office/drawing/2014/main" id="{80EFC1D3-D8AB-45B0-85CB-B7BE0D1ABA49}"/>
               </a:ext>
             </a:extLst>
           </p:cNvPr>
@@ -10381,7 +10561,7 @@
           <p:cNvPr id="9" name="TextBox 8">
             <a:extLst xmlns:a="http://schemas.openxmlformats.org/drawingml/2006/main">
               <a:ext uri="{FF2B5EF4-FFF2-40B4-BE49-F238E27FC236}">
-                <a16:creationId xmlns:a16="http://schemas.microsoft.com/office/drawing/2014/main" id="{A9C101A2-FEFF-423D-A055-04D355D42B9A}"/>
+                <a16:creationId xmlns:a16="http://schemas.microsoft.com/office/drawing/2014/main" id="{CF5BB20B-9653-4471-86BA-446E6A7C3C4D}"/>
               </a:ext>
             </a:extLst>
           </p:cNvPr>
@@ -10428,7 +10608,7 @@
           <p:cNvPr id="10" name="TextBox 9">
             <a:extLst xmlns:a="http://schemas.openxmlformats.org/drawingml/2006/main">
               <a:ext uri="{FF2B5EF4-FFF2-40B4-BE49-F238E27FC236}">
-                <a16:creationId xmlns:a16="http://schemas.microsoft.com/office/drawing/2014/main" id="{0E2CE67F-06E4-4DA6-8818-378939129A55}"/>
+                <a16:creationId xmlns:a16="http://schemas.microsoft.com/office/drawing/2014/main" id="{1C4A48CC-55AD-4F51-87BE-35A03C5BFC58}"/>
               </a:ext>
             </a:extLst>
           </p:cNvPr>
@@ -10475,7 +10655,7 @@
           <p:cNvPr id="11" name="Rounded Rectangle 10">
             <a:extLst xmlns:a="http://schemas.openxmlformats.org/drawingml/2006/main">
               <a:ext uri="{FF2B5EF4-FFF2-40B4-BE49-F238E27FC236}">
-                <a16:creationId xmlns:a16="http://schemas.microsoft.com/office/drawing/2014/main" id="{DC54E7F5-8C9D-469F-9033-553DD666916E}"/>
+                <a16:creationId xmlns:a16="http://schemas.microsoft.com/office/drawing/2014/main" id="{CA4BE9A7-24DB-43D1-B641-9A6480FA992B}"/>
               </a:ext>
             </a:extLst>
           </p:cNvPr>
@@ -10532,7 +10712,7 @@
           <p:cNvPr id="12" name="TextBox 11">
             <a:extLst xmlns:a="http://schemas.openxmlformats.org/drawingml/2006/main">
               <a:ext uri="{FF2B5EF4-FFF2-40B4-BE49-F238E27FC236}">
-                <a16:creationId xmlns:a16="http://schemas.microsoft.com/office/drawing/2014/main" id="{AF62B1CB-0BEF-4E17-AE47-2E4BEB2AB416}"/>
+                <a16:creationId xmlns:a16="http://schemas.microsoft.com/office/drawing/2014/main" id="{BE337DA7-101C-4409-88A6-AB03078A7C1D}"/>
               </a:ext>
             </a:extLst>
           </p:cNvPr>
@@ -10579,7 +10759,7 @@
           <p:cNvPr id="13" name="TextBox 12">
             <a:extLst xmlns:a="http://schemas.openxmlformats.org/drawingml/2006/main">
               <a:ext uri="{FF2B5EF4-FFF2-40B4-BE49-F238E27FC236}">
-                <a16:creationId xmlns:a16="http://schemas.microsoft.com/office/drawing/2014/main" id="{6B409AA6-95E9-4C86-89FA-730F42A7A558}"/>
+                <a16:creationId xmlns:a16="http://schemas.microsoft.com/office/drawing/2014/main" id="{93361235-CF82-4EAC-A12F-4B5C3C94EDB7}"/>
               </a:ext>
             </a:extLst>
           </p:cNvPr>
@@ -10626,7 +10806,7 @@
           <p:cNvPr id="14" name="Rounded Rectangle 13">
             <a:extLst xmlns:a="http://schemas.openxmlformats.org/drawingml/2006/main">
               <a:ext uri="{FF2B5EF4-FFF2-40B4-BE49-F238E27FC236}">
-                <a16:creationId xmlns:a16="http://schemas.microsoft.com/office/drawing/2014/main" id="{4CDC0CBB-F55F-4988-A8FF-7921F1210017}"/>
+                <a16:creationId xmlns:a16="http://schemas.microsoft.com/office/drawing/2014/main" id="{4D778509-BBDC-4000-BD43-137FA8FB246B}"/>
               </a:ext>
             </a:extLst>
           </p:cNvPr>
@@ -10683,7 +10863,7 @@
           <p:cNvPr id="15" name="TextBox 14">
             <a:extLst xmlns:a="http://schemas.openxmlformats.org/drawingml/2006/main">
               <a:ext uri="{FF2B5EF4-FFF2-40B4-BE49-F238E27FC236}">
-                <a16:creationId xmlns:a16="http://schemas.microsoft.com/office/drawing/2014/main" id="{9FF05FE5-0B6D-4E14-BFA5-9E1C0031E5B2}"/>
+                <a16:creationId xmlns:a16="http://schemas.microsoft.com/office/drawing/2014/main" id="{42B8FD22-29BF-4320-BBC3-0E77072A827C}"/>
               </a:ext>
             </a:extLst>
           </p:cNvPr>
@@ -10730,7 +10910,7 @@
           <p:cNvPr id="16" name="TextBox 15">
             <a:extLst xmlns:a="http://schemas.openxmlformats.org/drawingml/2006/main">
               <a:ext uri="{FF2B5EF4-FFF2-40B4-BE49-F238E27FC236}">
-                <a16:creationId xmlns:a16="http://schemas.microsoft.com/office/drawing/2014/main" id="{BC9F1DD4-8F04-4A73-ADDD-303F3CF536FD}"/>
+                <a16:creationId xmlns:a16="http://schemas.microsoft.com/office/drawing/2014/main" id="{7BCE00AA-8669-4E54-953E-2B066E9511C2}"/>
               </a:ext>
             </a:extLst>
           </p:cNvPr>
@@ -10777,7 +10957,7 @@
           <p:cNvPr id="17" name="TextBox 16">
             <a:extLst xmlns:a="http://schemas.openxmlformats.org/drawingml/2006/main">
               <a:ext uri="{FF2B5EF4-FFF2-40B4-BE49-F238E27FC236}">
-                <a16:creationId xmlns:a16="http://schemas.microsoft.com/office/drawing/2014/main" id="{FDE42905-E70B-4D28-ADBB-55D5CE861946}"/>
+                <a16:creationId xmlns:a16="http://schemas.microsoft.com/office/drawing/2014/main" id="{058AC2E2-DBB9-40EC-A418-832736A6DF50}"/>
               </a:ext>
             </a:extLst>
           </p:cNvPr>
@@ -10824,7 +11004,7 @@
           <p:cNvPr id="18" name="Rounded Rectangle 17">
             <a:extLst xmlns:a="http://schemas.openxmlformats.org/drawingml/2006/main">
               <a:ext uri="{FF2B5EF4-FFF2-40B4-BE49-F238E27FC236}">
-                <a16:creationId xmlns:a16="http://schemas.microsoft.com/office/drawing/2014/main" id="{C6EB5275-C2E3-46C5-8770-5D4620043CAC}"/>
+                <a16:creationId xmlns:a16="http://schemas.microsoft.com/office/drawing/2014/main" id="{8C65E008-F4AF-4762-8F2C-076DA623FE4B}"/>
               </a:ext>
             </a:extLst>
           </p:cNvPr>
@@ -10881,7 +11061,7 @@
           <p:cNvPr id="19" name="TextBox 18">
             <a:extLst xmlns:a="http://schemas.openxmlformats.org/drawingml/2006/main">
               <a:ext uri="{FF2B5EF4-FFF2-40B4-BE49-F238E27FC236}">
-                <a16:creationId xmlns:a16="http://schemas.microsoft.com/office/drawing/2014/main" id="{39099163-9DBD-4637-BE32-D2A2A9A14FDA}"/>
+                <a16:creationId xmlns:a16="http://schemas.microsoft.com/office/drawing/2014/main" id="{38EA6086-007F-4248-A845-A66B2D86A667}"/>
               </a:ext>
             </a:extLst>
           </p:cNvPr>
@@ -10928,7 +11108,7 @@
           <p:cNvPr id="20" name="TextBox 19">
             <a:extLst xmlns:a="http://schemas.openxmlformats.org/drawingml/2006/main">
               <a:ext uri="{FF2B5EF4-FFF2-40B4-BE49-F238E27FC236}">
-                <a16:creationId xmlns:a16="http://schemas.microsoft.com/office/drawing/2014/main" id="{A272111B-2093-46F6-AB28-06B9A05ED02D}"/>
+                <a16:creationId xmlns:a16="http://schemas.microsoft.com/office/drawing/2014/main" id="{4E3E90BA-D1CE-468A-8B44-9497DB1A85BE}"/>
               </a:ext>
             </a:extLst>
           </p:cNvPr>
@@ -10973,7 +11153,7 @@
     </p:spTree>
     <p:extLst>
       <p:ext uri="{BB962C8B-B14F-4D97-AF65-F5344CB8AC3E}">
-        <p14:creationId xmlns:p14="http://schemas.microsoft.com/office/powerpoint/2010/main" val="262379731"/>
+        <p14:creationId xmlns:p14="http://schemas.microsoft.com/office/powerpoint/2010/main" val="2094598331"/>
       </p:ext>
     </p:extLst>
   </p:cSld>
@@ -10997,7 +11177,7 @@
           <p:cNvPr id="2" name="TextBox 1">
             <a:extLst xmlns:a="http://schemas.openxmlformats.org/drawingml/2006/main">
               <a:ext uri="{FF2B5EF4-FFF2-40B4-BE49-F238E27FC236}">
-                <a16:creationId xmlns:a16="http://schemas.microsoft.com/office/drawing/2014/main" id="{04361198-121B-4FF3-9623-47BFE5451FA0}"/>
+                <a16:creationId xmlns:a16="http://schemas.microsoft.com/office/drawing/2014/main" id="{63BFABCC-856E-4D21-AD24-DFBF1C71748C}"/>
               </a:ext>
             </a:extLst>
           </p:cNvPr>
@@ -11044,7 +11224,7 @@
           <p:cNvPr id="3" name="TextBox 2">
             <a:extLst xmlns:a="http://schemas.openxmlformats.org/drawingml/2006/main">
               <a:ext uri="{FF2B5EF4-FFF2-40B4-BE49-F238E27FC236}">
-                <a16:creationId xmlns:a16="http://schemas.microsoft.com/office/drawing/2014/main" id="{E218AED0-F1FA-479E-843F-3AD0EE3910E4}"/>
+                <a16:creationId xmlns:a16="http://schemas.microsoft.com/office/drawing/2014/main" id="{06F6D9B1-A8B4-4F8F-804E-D8BD37089B46}"/>
               </a:ext>
             </a:extLst>
           </p:cNvPr>
@@ -11056,7 +11236,7 @@
         <p:spPr>
           <a:xfrm xmlns:a="http://schemas.openxmlformats.org/drawingml/2006/main">
             <a:off x="502920" y="621792"/>
-            <a:ext cx="11109960" cy="548640"/>
+            <a:ext cx="11109960" cy="591312"/>
           </a:xfrm>
           <a:prstGeom xmlns:a="http://schemas.openxmlformats.org/drawingml/2006/main" prst="rect">
             <a:avLst/>
@@ -11064,8 +11244,8 @@
           <a:noFill xmlns:a="http://schemas.openxmlformats.org/drawingml/2006/main"/>
         </p:spPr>
         <p:txBody>
-          <a:bodyPr xmlns:a="http://schemas.openxmlformats.org/drawingml/2006/main" wrap="square" lIns="36576" tIns="36576" rIns="36576" bIns="36576" anchor="t">
-            <a:spAutoFit/>
+          <a:bodyPr xmlns:a="http://schemas.openxmlformats.org/drawingml/2006/main" wrap="none" lIns="36576" tIns="36576" rIns="36576" bIns="36576" anchor="t">
+            <a:normAutofit fontScale="100000"/>
           </a:bodyPr>
           <a:lstStyle xmlns:a="http://schemas.openxmlformats.org/drawingml/2006/main"/>
           <a:p xmlns:a="http://schemas.openxmlformats.org/drawingml/2006/main">
@@ -11073,7 +11253,7 @@
               <a:buNone/>
             </a:pPr>
             <a:r>
-              <a:rPr sz="3400" b="1">
+              <a:rPr sz="2400" b="1">
                 <a:solidFill>
                   <a:srgbClr val="071A2B"/>
                 </a:solidFill>
@@ -11081,7 +11261,7 @@
                 <a:ea typeface="Aptos"/>
                 <a:cs typeface="Aptos"/>
               </a:rPr>
-              <a:t>Tekninen erottautuminen on vaatimuksissa — ei tuotteen ulkonäössä</a:t>
+              <a:t>Tekninen ero on patenttivaatimuksissa</a:t>
             </a:r>
           </a:p>
         </p:txBody>
@@ -11091,7 +11271,7 @@
           <p:cNvPr id="4" name="Rectangle 3">
             <a:extLst xmlns:a="http://schemas.openxmlformats.org/drawingml/2006/main">
               <a:ext uri="{FF2B5EF4-FFF2-40B4-BE49-F238E27FC236}">
-                <a16:creationId xmlns:a16="http://schemas.microsoft.com/office/drawing/2014/main" id="{87FD2384-EE33-47B3-82F0-E200B4B48707}"/>
+                <a16:creationId xmlns:a16="http://schemas.microsoft.com/office/drawing/2014/main" id="{4DD42E6C-B07E-45E0-80BF-BFAC5062F396}"/>
               </a:ext>
             </a:extLst>
           </p:cNvPr>
@@ -11146,7 +11326,7 @@
           <p:cNvPr id="5" name="Rectangle 4">
             <a:extLst xmlns:a="http://schemas.openxmlformats.org/drawingml/2006/main">
               <a:ext uri="{FF2B5EF4-FFF2-40B4-BE49-F238E27FC236}">
-                <a16:creationId xmlns:a16="http://schemas.microsoft.com/office/drawing/2014/main" id="{ECC9B796-CB1E-4439-AC8B-1EBE1F35B0EC}"/>
+                <a16:creationId xmlns:a16="http://schemas.microsoft.com/office/drawing/2014/main" id="{10AE60EB-849D-45DA-87E5-E295D037D277}"/>
               </a:ext>
             </a:extLst>
           </p:cNvPr>
@@ -11201,7 +11381,7 @@
           <p:cNvPr id="6" name="TextBox 5">
             <a:extLst xmlns:a="http://schemas.openxmlformats.org/drawingml/2006/main">
               <a:ext uri="{FF2B5EF4-FFF2-40B4-BE49-F238E27FC236}">
-                <a16:creationId xmlns:a16="http://schemas.microsoft.com/office/drawing/2014/main" id="{9711BF38-489D-4A7A-B898-9F1F4D141F65}"/>
+                <a16:creationId xmlns:a16="http://schemas.microsoft.com/office/drawing/2014/main" id="{036EF38A-DF5D-48B5-8120-1F7F066343CF}"/>
               </a:ext>
             </a:extLst>
           </p:cNvPr>
@@ -11238,7 +11418,7 @@
                 <a:ea typeface="Aptos"/>
                 <a:cs typeface="Aptos"/>
               </a:rPr>
-              <a:t>Julkinen riippumaton evidenssikooste · 2026.07.24-18 · 2026-07-24 · Lähteet: EP3032975B2; 7 O 3341/24</a:t>
+              <a:t>Julkinen riippumaton evidenssikooste · 2026.07.24-19 · 2026-07-24 · Lähteet: EP3032975B2; 7 O 3341/24</a:t>
             </a:r>
           </a:p>
         </p:txBody>
@@ -11248,7 +11428,7 @@
           <p:cNvPr id="7" name="TextBox 6">
             <a:extLst xmlns:a="http://schemas.openxmlformats.org/drawingml/2006/main">
               <a:ext uri="{FF2B5EF4-FFF2-40B4-BE49-F238E27FC236}">
-                <a16:creationId xmlns:a16="http://schemas.microsoft.com/office/drawing/2014/main" id="{AD89DB0B-9DA4-47A1-BE06-63A33C1787E9}"/>
+                <a16:creationId xmlns:a16="http://schemas.microsoft.com/office/drawing/2014/main" id="{FDAB5260-3981-4047-AA7D-F101102A7CD8}"/>
               </a:ext>
             </a:extLst>
           </p:cNvPr>
@@ -11295,7 +11475,7 @@
           <p:cNvPr id="8" name="TextBox 7">
             <a:extLst xmlns:a="http://schemas.openxmlformats.org/drawingml/2006/main">
               <a:ext uri="{FF2B5EF4-FFF2-40B4-BE49-F238E27FC236}">
-                <a16:creationId xmlns:a16="http://schemas.microsoft.com/office/drawing/2014/main" id="{EEA019FF-F2EB-4A84-9799-1491C4401949}"/>
+                <a16:creationId xmlns:a16="http://schemas.microsoft.com/office/drawing/2014/main" id="{3213B528-EDB5-4BE0-A2FF-2C96F72AA137}"/>
               </a:ext>
             </a:extLst>
           </p:cNvPr>
@@ -11342,7 +11522,7 @@
           <p:cNvPr id="9" name="TextBox 8">
             <a:extLst xmlns:a="http://schemas.openxmlformats.org/drawingml/2006/main">
               <a:ext uri="{FF2B5EF4-FFF2-40B4-BE49-F238E27FC236}">
-                <a16:creationId xmlns:a16="http://schemas.microsoft.com/office/drawing/2014/main" id="{37B068B3-B810-44C6-914D-3946A6DE0DD8}"/>
+                <a16:creationId xmlns:a16="http://schemas.microsoft.com/office/drawing/2014/main" id="{59DB0B5F-E986-4107-A95C-87FC3837F85B}"/>
               </a:ext>
             </a:extLst>
           </p:cNvPr>
@@ -11439,7 +11619,7 @@
           <p:cNvPr id="10" name="Rounded Rectangle 9">
             <a:extLst xmlns:a="http://schemas.openxmlformats.org/drawingml/2006/main">
               <a:ext uri="{FF2B5EF4-FFF2-40B4-BE49-F238E27FC236}">
-                <a16:creationId xmlns:a16="http://schemas.microsoft.com/office/drawing/2014/main" id="{A84142C3-DB84-4ED9-B51D-92955DDCBA02}"/>
+                <a16:creationId xmlns:a16="http://schemas.microsoft.com/office/drawing/2014/main" id="{60132A45-92BF-42C8-B901-93519BE9A2A8}"/>
               </a:ext>
             </a:extLst>
           </p:cNvPr>
@@ -11496,7 +11676,7 @@
           <p:cNvPr id="11" name="TextBox 10">
             <a:extLst xmlns:a="http://schemas.openxmlformats.org/drawingml/2006/main">
               <a:ext uri="{FF2B5EF4-FFF2-40B4-BE49-F238E27FC236}">
-                <a16:creationId xmlns:a16="http://schemas.microsoft.com/office/drawing/2014/main" id="{BD427F1D-CF5A-4B8B-AB87-6284B0C7ECF7}"/>
+                <a16:creationId xmlns:a16="http://schemas.microsoft.com/office/drawing/2014/main" id="{458AD612-145A-42D4-AE69-9644B0FEB172}"/>
               </a:ext>
             </a:extLst>
           </p:cNvPr>
@@ -11543,7 +11723,7 @@
           <p:cNvPr id="12" name="TextBox 11">
             <a:extLst xmlns:a="http://schemas.openxmlformats.org/drawingml/2006/main">
               <a:ext uri="{FF2B5EF4-FFF2-40B4-BE49-F238E27FC236}">
-                <a16:creationId xmlns:a16="http://schemas.microsoft.com/office/drawing/2014/main" id="{795172B0-94F5-4644-84B3-0EC403F736BB}"/>
+                <a16:creationId xmlns:a16="http://schemas.microsoft.com/office/drawing/2014/main" id="{A75CF0F5-A289-456B-BB45-9C4A6D44F947}"/>
               </a:ext>
             </a:extLst>
           </p:cNvPr>
@@ -11588,7 +11768,7 @@
     </p:spTree>
     <p:extLst>
       <p:ext uri="{BB962C8B-B14F-4D97-AF65-F5344CB8AC3E}">
-        <p14:creationId xmlns:p14="http://schemas.microsoft.com/office/powerpoint/2010/main" val="1860479288"/>
+        <p14:creationId xmlns:p14="http://schemas.microsoft.com/office/powerpoint/2010/main" val="947047248"/>
       </p:ext>
     </p:extLst>
   </p:cSld>
@@ -11612,7 +11792,7 @@
           <p:cNvPr id="2" name="TextBox 1">
             <a:extLst xmlns:a="http://schemas.openxmlformats.org/drawingml/2006/main">
               <a:ext uri="{FF2B5EF4-FFF2-40B4-BE49-F238E27FC236}">
-                <a16:creationId xmlns:a16="http://schemas.microsoft.com/office/drawing/2014/main" id="{B7387E27-4A24-4432-8A75-C96907F6F3AF}"/>
+                <a16:creationId xmlns:a16="http://schemas.microsoft.com/office/drawing/2014/main" id="{844BB448-8126-4947-B3BA-B20796EFAFCF}"/>
               </a:ext>
             </a:extLst>
           </p:cNvPr>
@@ -11659,7 +11839,7 @@
           <p:cNvPr id="3" name="TextBox 2">
             <a:extLst xmlns:a="http://schemas.openxmlformats.org/drawingml/2006/main">
               <a:ext uri="{FF2B5EF4-FFF2-40B4-BE49-F238E27FC236}">
-                <a16:creationId xmlns:a16="http://schemas.microsoft.com/office/drawing/2014/main" id="{3E6E316A-8C1A-4347-BBFF-EBEE39D45229}"/>
+                <a16:creationId xmlns:a16="http://schemas.microsoft.com/office/drawing/2014/main" id="{74264639-8EBC-4725-9921-58589ED1B78F}"/>
               </a:ext>
             </a:extLst>
           </p:cNvPr>
@@ -11706,7 +11886,7 @@
           <p:cNvPr id="4" name="Rectangle 3">
             <a:extLst xmlns:a="http://schemas.openxmlformats.org/drawingml/2006/main">
               <a:ext uri="{FF2B5EF4-FFF2-40B4-BE49-F238E27FC236}">
-                <a16:creationId xmlns:a16="http://schemas.microsoft.com/office/drawing/2014/main" id="{4A175323-51F6-4D60-9FAD-B55F7EDF2CC4}"/>
+                <a16:creationId xmlns:a16="http://schemas.microsoft.com/office/drawing/2014/main" id="{EE8AA34E-48F1-4C75-98A3-3C64EBA1064D}"/>
               </a:ext>
             </a:extLst>
           </p:cNvPr>
@@ -11761,7 +11941,7 @@
           <p:cNvPr id="5" name="Rectangle 4">
             <a:extLst xmlns:a="http://schemas.openxmlformats.org/drawingml/2006/main">
               <a:ext uri="{FF2B5EF4-FFF2-40B4-BE49-F238E27FC236}">
-                <a16:creationId xmlns:a16="http://schemas.microsoft.com/office/drawing/2014/main" id="{393DE2A9-CC3C-4705-8E01-9254B1BFC94B}"/>
+                <a16:creationId xmlns:a16="http://schemas.microsoft.com/office/drawing/2014/main" id="{EAFA68EE-F686-4AB9-A4AE-4B42CD2EED41}"/>
               </a:ext>
             </a:extLst>
           </p:cNvPr>
@@ -11816,7 +11996,7 @@
           <p:cNvPr id="6" name="TextBox 5">
             <a:extLst xmlns:a="http://schemas.openxmlformats.org/drawingml/2006/main">
               <a:ext uri="{FF2B5EF4-FFF2-40B4-BE49-F238E27FC236}">
-                <a16:creationId xmlns:a16="http://schemas.microsoft.com/office/drawing/2014/main" id="{16BC7E6B-47A7-432B-B48D-9D55A493F887}"/>
+                <a16:creationId xmlns:a16="http://schemas.microsoft.com/office/drawing/2014/main" id="{7924D173-1A25-450B-AD02-E1693AAF0178}"/>
               </a:ext>
             </a:extLst>
           </p:cNvPr>
@@ -11853,7 +12033,7 @@
                 <a:ea typeface="Aptos"/>
                 <a:cs typeface="Aptos"/>
               </a:rPr>
-              <a:t>Julkinen riippumaton evidenssikooste · 2026.07.24-18 · 2026-07-24 · Lähteet: Market-values; FTC; IMARC; GVR; Fortune; European Commission</a:t>
+              <a:t>Julkinen riippumaton evidenssikooste · 2026.07.24-19 · 2026-07-24 · Lähteet: Statistics Canada; Market-values; FTC; IMARC; GVR; Fortune; European Commission</a:t>
             </a:r>
           </a:p>
         </p:txBody>
@@ -11863,7 +12043,7 @@
           <p:cNvPr id="7" name="TextBox 6">
             <a:extLst xmlns:a="http://schemas.openxmlformats.org/drawingml/2006/main">
               <a:ext uri="{FF2B5EF4-FFF2-40B4-BE49-F238E27FC236}">
-                <a16:creationId xmlns:a16="http://schemas.microsoft.com/office/drawing/2014/main" id="{6A55D910-A3E1-4246-B03C-63CB49899510}"/>
+                <a16:creationId xmlns:a16="http://schemas.microsoft.com/office/drawing/2014/main" id="{780A1FCE-8A0B-4B26-8E2E-ABD4FC9E214F}"/>
               </a:ext>
             </a:extLst>
           </p:cNvPr>
@@ -11910,7 +12090,7 @@
           <p:cNvPr id="8" name="Rounded Rectangle 7">
             <a:extLst xmlns:a="http://schemas.openxmlformats.org/drawingml/2006/main">
               <a:ext uri="{FF2B5EF4-FFF2-40B4-BE49-F238E27FC236}">
-                <a16:creationId xmlns:a16="http://schemas.microsoft.com/office/drawing/2014/main" id="{1AEE4A86-5FB7-41E4-84F7-2700EAA7A730}"/>
+                <a16:creationId xmlns:a16="http://schemas.microsoft.com/office/drawing/2014/main" id="{8B0F5195-B21D-4431-BAB7-761BD026EE99}"/>
               </a:ext>
             </a:extLst>
           </p:cNvPr>
@@ -11967,7 +12147,7 @@
           <p:cNvPr id="9" name="TextBox 8">
             <a:extLst xmlns:a="http://schemas.openxmlformats.org/drawingml/2006/main">
               <a:ext uri="{FF2B5EF4-FFF2-40B4-BE49-F238E27FC236}">
-                <a16:creationId xmlns:a16="http://schemas.microsoft.com/office/drawing/2014/main" id="{70199648-2E9E-49A5-84E1-8863036C00D3}"/>
+                <a16:creationId xmlns:a16="http://schemas.microsoft.com/office/drawing/2014/main" id="{A957C10F-5147-4376-8C95-461A313F839E}"/>
               </a:ext>
             </a:extLst>
           </p:cNvPr>
@@ -12004,7 +12184,7 @@
                 <a:ea typeface="Aptos"/>
                 <a:cs typeface="Aptos"/>
               </a:rPr>
-              <a:t>27</a:t>
+              <a:t>34</a:t>
             </a:r>
           </a:p>
         </p:txBody>
@@ -12014,7 +12194,7 @@
           <p:cNvPr id="10" name="TextBox 9">
             <a:extLst xmlns:a="http://schemas.openxmlformats.org/drawingml/2006/main">
               <a:ext uri="{FF2B5EF4-FFF2-40B4-BE49-F238E27FC236}">
-                <a16:creationId xmlns:a16="http://schemas.microsoft.com/office/drawing/2014/main" id="{2651A928-B064-4E1F-A129-7185E1441229}"/>
+                <a16:creationId xmlns:a16="http://schemas.microsoft.com/office/drawing/2014/main" id="{BFFF4857-71F6-4C95-9E56-03D4C4C5CA4F}"/>
               </a:ext>
             </a:extLst>
           </p:cNvPr>
@@ -12061,7 +12241,7 @@
           <p:cNvPr id="11" name="Rounded Rectangle 10">
             <a:extLst xmlns:a="http://schemas.openxmlformats.org/drawingml/2006/main">
               <a:ext uri="{FF2B5EF4-FFF2-40B4-BE49-F238E27FC236}">
-                <a16:creationId xmlns:a16="http://schemas.microsoft.com/office/drawing/2014/main" id="{602F9560-C701-44F4-B88A-6452D0B13E59}"/>
+                <a16:creationId xmlns:a16="http://schemas.microsoft.com/office/drawing/2014/main" id="{B752D796-AB0F-40B9-A476-878DF60E80A9}"/>
               </a:ext>
             </a:extLst>
           </p:cNvPr>
@@ -12118,7 +12298,7 @@
           <p:cNvPr id="12" name="TextBox 11">
             <a:extLst xmlns:a="http://schemas.openxmlformats.org/drawingml/2006/main">
               <a:ext uri="{FF2B5EF4-FFF2-40B4-BE49-F238E27FC236}">
-                <a16:creationId xmlns:a16="http://schemas.microsoft.com/office/drawing/2014/main" id="{E81CB890-44F4-4051-9962-5DBE9DE80601}"/>
+                <a16:creationId xmlns:a16="http://schemas.microsoft.com/office/drawing/2014/main" id="{D72AADBD-ED2A-4DBE-8016-2D1F46A98CF7}"/>
               </a:ext>
             </a:extLst>
           </p:cNvPr>
@@ -12165,7 +12345,7 @@
           <p:cNvPr id="13" name="TextBox 12">
             <a:extLst xmlns:a="http://schemas.openxmlformats.org/drawingml/2006/main">
               <a:ext uri="{FF2B5EF4-FFF2-40B4-BE49-F238E27FC236}">
-                <a16:creationId xmlns:a16="http://schemas.microsoft.com/office/drawing/2014/main" id="{8D98FAB4-D0E1-4DEB-929E-B085EC5961E0}"/>
+                <a16:creationId xmlns:a16="http://schemas.microsoft.com/office/drawing/2014/main" id="{1494BA03-B065-4F9C-8D0D-D3AC0F41E3CA}"/>
               </a:ext>
             </a:extLst>
           </p:cNvPr>
@@ -12212,7 +12392,7 @@
           <p:cNvPr id="14" name="Rounded Rectangle 13">
             <a:extLst xmlns:a="http://schemas.openxmlformats.org/drawingml/2006/main">
               <a:ext uri="{FF2B5EF4-FFF2-40B4-BE49-F238E27FC236}">
-                <a16:creationId xmlns:a16="http://schemas.microsoft.com/office/drawing/2014/main" id="{87C9BA7F-009C-4ABC-9394-66DEB809CC48}"/>
+                <a16:creationId xmlns:a16="http://schemas.microsoft.com/office/drawing/2014/main" id="{377866D6-6C4A-44E5-B4CD-D770B74BF904}"/>
               </a:ext>
             </a:extLst>
           </p:cNvPr>
@@ -12269,7 +12449,7 @@
           <p:cNvPr id="15" name="TextBox 14">
             <a:extLst xmlns:a="http://schemas.openxmlformats.org/drawingml/2006/main">
               <a:ext uri="{FF2B5EF4-FFF2-40B4-BE49-F238E27FC236}">
-                <a16:creationId xmlns:a16="http://schemas.microsoft.com/office/drawing/2014/main" id="{006FE7C5-1276-4E6D-A9BA-88447479D94F}"/>
+                <a16:creationId xmlns:a16="http://schemas.microsoft.com/office/drawing/2014/main" id="{C3048A90-BACB-4EAD-BDA3-615FCBFF3AAD}"/>
               </a:ext>
             </a:extLst>
           </p:cNvPr>
@@ -12316,7 +12496,7 @@
           <p:cNvPr id="16" name="TextBox 15">
             <a:extLst xmlns:a="http://schemas.openxmlformats.org/drawingml/2006/main">
               <a:ext uri="{FF2B5EF4-FFF2-40B4-BE49-F238E27FC236}">
-                <a16:creationId xmlns:a16="http://schemas.microsoft.com/office/drawing/2014/main" id="{FB9E0270-0790-4D2B-89AA-ED39251CBA95}"/>
+                <a16:creationId xmlns:a16="http://schemas.microsoft.com/office/drawing/2014/main" id="{497A8620-AD3B-4E93-989D-6CD62FA32355}"/>
               </a:ext>
             </a:extLst>
           </p:cNvPr>
@@ -12363,7 +12543,7 @@
           <p:cNvPr id="17" name="TextBox 16">
             <a:extLst xmlns:a="http://schemas.openxmlformats.org/drawingml/2006/main">
               <a:ext uri="{FF2B5EF4-FFF2-40B4-BE49-F238E27FC236}">
-                <a16:creationId xmlns:a16="http://schemas.microsoft.com/office/drawing/2014/main" id="{B91CE4A0-B902-476A-B06E-E7937FB4E6BC}"/>
+                <a16:creationId xmlns:a16="http://schemas.microsoft.com/office/drawing/2014/main" id="{06C83593-58F8-4522-8B0C-8987424F1AE2}"/>
               </a:ext>
             </a:extLst>
           </p:cNvPr>
@@ -12410,7 +12590,7 @@
           <p:cNvPr id="18" name="Rounded Rectangle 17">
             <a:extLst xmlns:a="http://schemas.openxmlformats.org/drawingml/2006/main">
               <a:ext uri="{FF2B5EF4-FFF2-40B4-BE49-F238E27FC236}">
-                <a16:creationId xmlns:a16="http://schemas.microsoft.com/office/drawing/2014/main" id="{6262BC94-4364-4928-A7B3-E7BB0FC688FF}"/>
+                <a16:creationId xmlns:a16="http://schemas.microsoft.com/office/drawing/2014/main" id="{9FDB78CF-3C32-4870-A0BE-3AD03A7685F3}"/>
               </a:ext>
             </a:extLst>
           </p:cNvPr>
@@ -12467,7 +12647,7 @@
           <p:cNvPr id="19" name="TextBox 18">
             <a:extLst xmlns:a="http://schemas.openxmlformats.org/drawingml/2006/main">
               <a:ext uri="{FF2B5EF4-FFF2-40B4-BE49-F238E27FC236}">
-                <a16:creationId xmlns:a16="http://schemas.microsoft.com/office/drawing/2014/main" id="{45D8EA56-259C-4D29-80AE-65F707B837EE}"/>
+                <a16:creationId xmlns:a16="http://schemas.microsoft.com/office/drawing/2014/main" id="{E3E4916D-3AC4-4140-8634-1EF7D5D7AB94}"/>
               </a:ext>
             </a:extLst>
           </p:cNvPr>
@@ -12514,7 +12694,7 @@
           <p:cNvPr id="20" name="TextBox 19">
             <a:extLst xmlns:a="http://schemas.openxmlformats.org/drawingml/2006/main">
               <a:ext uri="{FF2B5EF4-FFF2-40B4-BE49-F238E27FC236}">
-                <a16:creationId xmlns:a16="http://schemas.microsoft.com/office/drawing/2014/main" id="{FA8EF04D-A055-4567-8AC4-ECD8AE11D5AE}"/>
+                <a16:creationId xmlns:a16="http://schemas.microsoft.com/office/drawing/2014/main" id="{FD1779B9-2B9A-4B1F-AB44-41ACB8764A1E}"/>
               </a:ext>
             </a:extLst>
           </p:cNvPr>
@@ -12526,7 +12706,7 @@
         <p:spPr>
           <a:xfrm xmlns:a="http://schemas.openxmlformats.org/drawingml/2006/main">
             <a:off x="731520" y="5038344"/>
-            <a:ext cx="10597896" cy="530352"/>
+            <a:ext cx="10597896" cy="758952"/>
           </a:xfrm>
           <a:prstGeom xmlns:a="http://schemas.openxmlformats.org/drawingml/2006/main" prst="rect">
             <a:avLst/>
@@ -12543,7 +12723,7 @@
               <a:buNone/>
             </a:pPr>
             <a:r>
-              <a:rPr sz="1500" b="0">
+              <a:rPr sz="1350" b="0">
                 <a:solidFill>
                   <a:srgbClr val="182935"/>
                 </a:solidFill>
@@ -12551,7 +12731,7 @@
                 <a:ea typeface="Aptos"/>
                 <a:cs typeface="Aptos"/>
               </a:rPr>
-              <a:t>NZ 2024: 533,7–731,2 milj. NZD (≈298,5–408,9 milj. EUR; ECB 2024) on tuettu malli. FTC 2021: 2,763 mrd USD (≈2,336 mrd EUR; ECB 2021) on valmistajaraportointia. EU- ja kaupallisia lukuja ei summata.</a:t>
+              <a:t>Kanada 2024: retail 1,219 mrd CAD (≈822,6 milj. EUR; ECB 2024); toimitukset 1,161 mrd CAD (≈783,2 milj. EUR; ECB 2024); kaikki retail-neljännekset E-laatua ja silta avoin. FTC 2021 2,763 mrd USD (≈2,336 mrd EUR; ECB 2021) on valmistajaraportointia. Reittejä ei summata.</a:t>
             </a:r>
           </a:p>
         </p:txBody>
@@ -12559,7 +12739,7 @@
     </p:spTree>
     <p:extLst>
       <p:ext uri="{BB962C8B-B14F-4D97-AF65-F5344CB8AC3E}">
-        <p14:creationId xmlns:p14="http://schemas.microsoft.com/office/powerpoint/2010/main" val="1720140046"/>
+        <p14:creationId xmlns:p14="http://schemas.microsoft.com/office/powerpoint/2010/main" val="2027178104"/>
       </p:ext>
     </p:extLst>
   </p:cSld>
@@ -12583,7 +12763,7 @@
           <p:cNvPr id="2" name="TextBox 1">
             <a:extLst xmlns:a="http://schemas.openxmlformats.org/drawingml/2006/main">
               <a:ext uri="{FF2B5EF4-FFF2-40B4-BE49-F238E27FC236}">
-                <a16:creationId xmlns:a16="http://schemas.microsoft.com/office/drawing/2014/main" id="{014B087D-B0FA-4F3A-BC6D-31755CC6937E}"/>
+                <a16:creationId xmlns:a16="http://schemas.microsoft.com/office/drawing/2014/main" id="{FB29A366-894C-4225-A79E-19ECD3F68DAB}"/>
               </a:ext>
             </a:extLst>
           </p:cNvPr>
@@ -12630,7 +12810,7 @@
           <p:cNvPr id="3" name="TextBox 2">
             <a:extLst xmlns:a="http://schemas.openxmlformats.org/drawingml/2006/main">
               <a:ext uri="{FF2B5EF4-FFF2-40B4-BE49-F238E27FC236}">
-                <a16:creationId xmlns:a16="http://schemas.microsoft.com/office/drawing/2014/main" id="{23461F0F-C30B-4AFD-B2B3-FB382B96A8B1}"/>
+                <a16:creationId xmlns:a16="http://schemas.microsoft.com/office/drawing/2014/main" id="{8508E7B1-DEB4-4919-BD64-F8AC39264F2C}"/>
               </a:ext>
             </a:extLst>
           </p:cNvPr>
@@ -12642,7 +12822,7 @@
         <p:spPr>
           <a:xfrm xmlns:a="http://schemas.openxmlformats.org/drawingml/2006/main">
             <a:off x="502920" y="621792"/>
-            <a:ext cx="11109960" cy="548640"/>
+            <a:ext cx="11109960" cy="591312"/>
           </a:xfrm>
           <a:prstGeom xmlns:a="http://schemas.openxmlformats.org/drawingml/2006/main" prst="rect">
             <a:avLst/>
@@ -12650,8 +12830,8 @@
           <a:noFill xmlns:a="http://schemas.openxmlformats.org/drawingml/2006/main"/>
         </p:spPr>
         <p:txBody>
-          <a:bodyPr xmlns:a="http://schemas.openxmlformats.org/drawingml/2006/main" wrap="square" lIns="36576" tIns="36576" rIns="36576" bIns="36576" anchor="t">
-            <a:spAutoFit/>
+          <a:bodyPr xmlns:a="http://schemas.openxmlformats.org/drawingml/2006/main" wrap="none" lIns="36576" tIns="36576" rIns="36576" bIns="36576" anchor="t">
+            <a:normAutofit fontScale="100000"/>
           </a:bodyPr>
           <a:lstStyle xmlns:a="http://schemas.openxmlformats.org/drawingml/2006/main"/>
           <a:p xmlns:a="http://schemas.openxmlformats.org/drawingml/2006/main">
@@ -12659,7 +12839,7 @@
               <a:buNone/>
             </a:pPr>
             <a:r>
-              <a:rPr sz="3400" b="1">
+              <a:rPr sz="2400" b="1">
                 <a:solidFill>
                   <a:srgbClr val="071A2B"/>
                 </a:solidFill>
@@ -12667,7 +12847,7 @@
                 <a:ea typeface="Aptos"/>
                 <a:cs typeface="Aptos"/>
               </a:rPr>
-              <a:t>Asiakkuus on vielä validoitava kolmessa eri päätöksentekologiikassa</a:t>
+              <a:t>Asiakkuus vaatii kolmen ostajaryhmän validoinnin</a:t>
             </a:r>
           </a:p>
         </p:txBody>
@@ -12677,7 +12857,7 @@
           <p:cNvPr id="4" name="Rectangle 3">
             <a:extLst xmlns:a="http://schemas.openxmlformats.org/drawingml/2006/main">
               <a:ext uri="{FF2B5EF4-FFF2-40B4-BE49-F238E27FC236}">
-                <a16:creationId xmlns:a16="http://schemas.microsoft.com/office/drawing/2014/main" id="{4E1969C7-34BC-417B-9AE4-A39C3719A2AE}"/>
+                <a16:creationId xmlns:a16="http://schemas.microsoft.com/office/drawing/2014/main" id="{8F872EFA-2D00-4C95-B17A-94885609FDD3}"/>
               </a:ext>
             </a:extLst>
           </p:cNvPr>
@@ -12732,7 +12912,7 @@
           <p:cNvPr id="5" name="Rectangle 4">
             <a:extLst xmlns:a="http://schemas.openxmlformats.org/drawingml/2006/main">
               <a:ext uri="{FF2B5EF4-FFF2-40B4-BE49-F238E27FC236}">
-                <a16:creationId xmlns:a16="http://schemas.microsoft.com/office/drawing/2014/main" id="{7D7F3400-26A3-4E27-AC5A-106D465577A3}"/>
+                <a16:creationId xmlns:a16="http://schemas.microsoft.com/office/drawing/2014/main" id="{61626148-1FB3-465C-A013-0C1481D155BC}"/>
               </a:ext>
             </a:extLst>
           </p:cNvPr>
@@ -12787,7 +12967,7 @@
           <p:cNvPr id="6" name="TextBox 5">
             <a:extLst xmlns:a="http://schemas.openxmlformats.org/drawingml/2006/main">
               <a:ext uri="{FF2B5EF4-FFF2-40B4-BE49-F238E27FC236}">
-                <a16:creationId xmlns:a16="http://schemas.microsoft.com/office/drawing/2014/main" id="{9E28E1E5-F38F-4DB5-BDE1-D2B8D3D9E5DA}"/>
+                <a16:creationId xmlns:a16="http://schemas.microsoft.com/office/drawing/2014/main" id="{F8F9231D-BF25-4AD3-9ACE-B9216F6BA492}"/>
               </a:ext>
             </a:extLst>
           </p:cNvPr>
@@ -12824,7 +13004,7 @@
                 <a:ea typeface="Aptos"/>
                 <a:cs typeface="Aptos"/>
               </a:rPr>
-              <a:t>Julkinen riippumaton evidenssikooste · 2026.07.24-18 · 2026-07-24 · Lähteet: WIPO licensing; WIPO IP Finance</a:t>
+              <a:t>Julkinen riippumaton evidenssikooste · 2026.07.24-19 · 2026-07-24 · Lähteet: WIPO licensing; WIPO IP Finance</a:t>
             </a:r>
           </a:p>
         </p:txBody>
@@ -12834,7 +13014,7 @@
           <p:cNvPr id="7" name="TextBox 6">
             <a:extLst xmlns:a="http://schemas.openxmlformats.org/drawingml/2006/main">
               <a:ext uri="{FF2B5EF4-FFF2-40B4-BE49-F238E27FC236}">
-                <a16:creationId xmlns:a16="http://schemas.microsoft.com/office/drawing/2014/main" id="{C43050F1-041D-4615-9371-5CD7EBB96673}"/>
+                <a16:creationId xmlns:a16="http://schemas.microsoft.com/office/drawing/2014/main" id="{9DD079E3-9638-465C-974F-DC03C19481DB}"/>
               </a:ext>
             </a:extLst>
           </p:cNvPr>
@@ -12881,7 +13061,7 @@
           <p:cNvPr id="8" name="TextBox 7">
             <a:extLst xmlns:a="http://schemas.openxmlformats.org/drawingml/2006/main">
               <a:ext uri="{FF2B5EF4-FFF2-40B4-BE49-F238E27FC236}">
-                <a16:creationId xmlns:a16="http://schemas.microsoft.com/office/drawing/2014/main" id="{3BFE7B99-7E6C-4950-85CD-A7B2F5ED2668}"/>
+                <a16:creationId xmlns:a16="http://schemas.microsoft.com/office/drawing/2014/main" id="{8DB000A6-7C91-432F-81EF-A760504B954A}"/>
               </a:ext>
             </a:extLst>
           </p:cNvPr>
@@ -12928,7 +13108,7 @@
           <p:cNvPr id="9" name="TextBox 8">
             <a:extLst xmlns:a="http://schemas.openxmlformats.org/drawingml/2006/main">
               <a:ext uri="{FF2B5EF4-FFF2-40B4-BE49-F238E27FC236}">
-                <a16:creationId xmlns:a16="http://schemas.microsoft.com/office/drawing/2014/main" id="{08B2A4A8-C0CA-4C6A-86E6-DA50B2135ED1}"/>
+                <a16:creationId xmlns:a16="http://schemas.microsoft.com/office/drawing/2014/main" id="{F8B313B7-8918-4FA2-B151-BE7DF6573BF3}"/>
               </a:ext>
             </a:extLst>
           </p:cNvPr>
@@ -13025,7 +13205,7 @@
           <p:cNvPr id="10" name="Rounded Rectangle 9">
             <a:extLst xmlns:a="http://schemas.openxmlformats.org/drawingml/2006/main">
               <a:ext uri="{FF2B5EF4-FFF2-40B4-BE49-F238E27FC236}">
-                <a16:creationId xmlns:a16="http://schemas.microsoft.com/office/drawing/2014/main" id="{A5A790FD-BBFE-404F-A1B9-A8CEE13C1878}"/>
+                <a16:creationId xmlns:a16="http://schemas.microsoft.com/office/drawing/2014/main" id="{45A190D6-A1B3-43CC-9B7D-A295AC7958F5}"/>
               </a:ext>
             </a:extLst>
           </p:cNvPr>
@@ -13082,7 +13262,7 @@
           <p:cNvPr id="11" name="TextBox 10">
             <a:extLst xmlns:a="http://schemas.openxmlformats.org/drawingml/2006/main">
               <a:ext uri="{FF2B5EF4-FFF2-40B4-BE49-F238E27FC236}">
-                <a16:creationId xmlns:a16="http://schemas.microsoft.com/office/drawing/2014/main" id="{7E4DB8AB-CC7E-422F-95A8-CFD79D864A27}"/>
+                <a16:creationId xmlns:a16="http://schemas.microsoft.com/office/drawing/2014/main" id="{2B7DBA53-488B-4D6C-B187-D68D4CA368AE}"/>
               </a:ext>
             </a:extLst>
           </p:cNvPr>
@@ -13129,7 +13309,7 @@
           <p:cNvPr id="12" name="TextBox 11">
             <a:extLst xmlns:a="http://schemas.openxmlformats.org/drawingml/2006/main">
               <a:ext uri="{FF2B5EF4-FFF2-40B4-BE49-F238E27FC236}">
-                <a16:creationId xmlns:a16="http://schemas.microsoft.com/office/drawing/2014/main" id="{E85B8A15-4E8A-4F45-901C-7FBB65E091B4}"/>
+                <a16:creationId xmlns:a16="http://schemas.microsoft.com/office/drawing/2014/main" id="{EBA04DE7-328B-4F39-B19D-DE832DA4C950}"/>
               </a:ext>
             </a:extLst>
           </p:cNvPr>
@@ -13174,7 +13354,7 @@
     </p:spTree>
     <p:extLst>
       <p:ext uri="{BB962C8B-B14F-4D97-AF65-F5344CB8AC3E}">
-        <p14:creationId xmlns:p14="http://schemas.microsoft.com/office/powerpoint/2010/main" val="336748344"/>
+        <p14:creationId xmlns:p14="http://schemas.microsoft.com/office/powerpoint/2010/main" val="1270276117"/>
       </p:ext>
     </p:extLst>
   </p:cSld>
@@ -13198,7 +13378,7 @@
           <p:cNvPr id="2" name="TextBox 1">
             <a:extLst xmlns:a="http://schemas.openxmlformats.org/drawingml/2006/main">
               <a:ext uri="{FF2B5EF4-FFF2-40B4-BE49-F238E27FC236}">
-                <a16:creationId xmlns:a16="http://schemas.microsoft.com/office/drawing/2014/main" id="{A8D10BEA-D6CF-4339-84B2-548401240DD4}"/>
+                <a16:creationId xmlns:a16="http://schemas.microsoft.com/office/drawing/2014/main" id="{83F530CC-58D6-45C7-9B5F-92C06ADA4DAD}"/>
               </a:ext>
             </a:extLst>
           </p:cNvPr>
@@ -13245,7 +13425,7 @@
           <p:cNvPr id="3" name="TextBox 2">
             <a:extLst xmlns:a="http://schemas.openxmlformats.org/drawingml/2006/main">
               <a:ext uri="{FF2B5EF4-FFF2-40B4-BE49-F238E27FC236}">
-                <a16:creationId xmlns:a16="http://schemas.microsoft.com/office/drawing/2014/main" id="{4E0E3204-18C5-4C81-BE44-7750720A4E2F}"/>
+                <a16:creationId xmlns:a16="http://schemas.microsoft.com/office/drawing/2014/main" id="{93783E83-783E-461A-818A-CE6FCD209303}"/>
               </a:ext>
             </a:extLst>
           </p:cNvPr>
@@ -13292,7 +13472,7 @@
           <p:cNvPr id="4" name="Rectangle 3">
             <a:extLst xmlns:a="http://schemas.openxmlformats.org/drawingml/2006/main">
               <a:ext uri="{FF2B5EF4-FFF2-40B4-BE49-F238E27FC236}">
-                <a16:creationId xmlns:a16="http://schemas.microsoft.com/office/drawing/2014/main" id="{BE835EBF-BD16-416F-B3F7-E8EBF4D950DA}"/>
+                <a16:creationId xmlns:a16="http://schemas.microsoft.com/office/drawing/2014/main" id="{B09108D1-E833-49DB-B374-6FAAD00D7533}"/>
               </a:ext>
             </a:extLst>
           </p:cNvPr>
@@ -13347,7 +13527,7 @@
           <p:cNvPr id="5" name="Rectangle 4">
             <a:extLst xmlns:a="http://schemas.openxmlformats.org/drawingml/2006/main">
               <a:ext uri="{FF2B5EF4-FFF2-40B4-BE49-F238E27FC236}">
-                <a16:creationId xmlns:a16="http://schemas.microsoft.com/office/drawing/2014/main" id="{E2F6E0DB-E08C-45E4-9E98-982821414C92}"/>
+                <a16:creationId xmlns:a16="http://schemas.microsoft.com/office/drawing/2014/main" id="{BB385568-886D-487F-8A63-28EB597E7632}"/>
               </a:ext>
             </a:extLst>
           </p:cNvPr>
@@ -13402,7 +13582,7 @@
           <p:cNvPr id="6" name="TextBox 5">
             <a:extLst xmlns:a="http://schemas.openxmlformats.org/drawingml/2006/main">
               <a:ext uri="{FF2B5EF4-FFF2-40B4-BE49-F238E27FC236}">
-                <a16:creationId xmlns:a16="http://schemas.microsoft.com/office/drawing/2014/main" id="{68294979-4DCE-492D-8736-5C19FF51C66E}"/>
+                <a16:creationId xmlns:a16="http://schemas.microsoft.com/office/drawing/2014/main" id="{C38129B3-A4DE-4700-9A52-D3C0BC1539BE}"/>
               </a:ext>
             </a:extLst>
           </p:cNvPr>
@@ -13439,7 +13619,7 @@
                 <a:ea typeface="Aptos"/>
                 <a:cs typeface="Aptos"/>
               </a:rPr>
-              <a:t>Julkinen riippumaton evidenssikooste · 2026.07.24-18 · 2026-07-24 · Lähteet: Evidence Register; EPO; WIPO</a:t>
+              <a:t>Julkinen riippumaton evidenssikooste · 2026.07.24-19 · 2026-07-24 · Lähteet: Evidence Register; EPO; WIPO</a:t>
             </a:r>
           </a:p>
         </p:txBody>
@@ -13449,7 +13629,7 @@
           <p:cNvPr id="7" name="TextBox 6">
             <a:extLst xmlns:a="http://schemas.openxmlformats.org/drawingml/2006/main">
               <a:ext uri="{FF2B5EF4-FFF2-40B4-BE49-F238E27FC236}">
-                <a16:creationId xmlns:a16="http://schemas.microsoft.com/office/drawing/2014/main" id="{55BD60E6-4022-4F38-950C-75DC5009D3A2}"/>
+                <a16:creationId xmlns:a16="http://schemas.microsoft.com/office/drawing/2014/main" id="{E44F136E-51B0-4B7E-9A91-99185A0082F1}"/>
               </a:ext>
             </a:extLst>
           </p:cNvPr>
@@ -13936,7 +14116,7 @@
           <p:cNvPr id="9" name="TextBox 8">
             <a:extLst xmlns:a="http://schemas.openxmlformats.org/drawingml/2006/main">
               <a:ext uri="{FF2B5EF4-FFF2-40B4-BE49-F238E27FC236}">
-                <a16:creationId xmlns:a16="http://schemas.microsoft.com/office/drawing/2014/main" id="{44187122-CA23-4A55-953A-0995033431BD}"/>
+                <a16:creationId xmlns:a16="http://schemas.microsoft.com/office/drawing/2014/main" id="{FC11C7D4-4C0C-468E-9F24-4C33A260BA1C}"/>
               </a:ext>
             </a:extLst>
           </p:cNvPr>
@@ -13981,7 +14161,7 @@
     </p:spTree>
     <p:extLst>
       <p:ext uri="{BB962C8B-B14F-4D97-AF65-F5344CB8AC3E}">
-        <p14:creationId xmlns:p14="http://schemas.microsoft.com/office/powerpoint/2010/main" val="506069465"/>
+        <p14:creationId xmlns:p14="http://schemas.microsoft.com/office/powerpoint/2010/main" val="664253481"/>
       </p:ext>
     </p:extLst>
   </p:cSld>
@@ -14005,7 +14185,7 @@
           <p:cNvPr id="2" name="TextBox 1">
             <a:extLst xmlns:a="http://schemas.openxmlformats.org/drawingml/2006/main">
               <a:ext uri="{FF2B5EF4-FFF2-40B4-BE49-F238E27FC236}">
-                <a16:creationId xmlns:a16="http://schemas.microsoft.com/office/drawing/2014/main" id="{448837C1-E368-4ED1-9BEE-4D12E875BFE2}"/>
+                <a16:creationId xmlns:a16="http://schemas.microsoft.com/office/drawing/2014/main" id="{ED61D05D-F9E3-4EEE-B693-646FB0E21F71}"/>
               </a:ext>
             </a:extLst>
           </p:cNvPr>
@@ -14052,7 +14232,7 @@
           <p:cNvPr id="3" name="TextBox 2">
             <a:extLst xmlns:a="http://schemas.openxmlformats.org/drawingml/2006/main">
               <a:ext uri="{FF2B5EF4-FFF2-40B4-BE49-F238E27FC236}">
-                <a16:creationId xmlns:a16="http://schemas.microsoft.com/office/drawing/2014/main" id="{5C1478B2-67B0-40DF-9528-69C2BCE9F125}"/>
+                <a16:creationId xmlns:a16="http://schemas.microsoft.com/office/drawing/2014/main" id="{75CB4BA6-0809-4758-8118-1D4D2D014E38}"/>
               </a:ext>
             </a:extLst>
           </p:cNvPr>
@@ -14099,7 +14279,7 @@
           <p:cNvPr id="4" name="Rectangle 3">
             <a:extLst xmlns:a="http://schemas.openxmlformats.org/drawingml/2006/main">
               <a:ext uri="{FF2B5EF4-FFF2-40B4-BE49-F238E27FC236}">
-                <a16:creationId xmlns:a16="http://schemas.microsoft.com/office/drawing/2014/main" id="{164B03A0-1C4C-4AF8-94A6-483E55315D23}"/>
+                <a16:creationId xmlns:a16="http://schemas.microsoft.com/office/drawing/2014/main" id="{229F0FE9-64D2-4FA9-AD69-17B9CB96DD04}"/>
               </a:ext>
             </a:extLst>
           </p:cNvPr>
@@ -14154,7 +14334,7 @@
           <p:cNvPr id="5" name="Rectangle 4">
             <a:extLst xmlns:a="http://schemas.openxmlformats.org/drawingml/2006/main">
               <a:ext uri="{FF2B5EF4-FFF2-40B4-BE49-F238E27FC236}">
-                <a16:creationId xmlns:a16="http://schemas.microsoft.com/office/drawing/2014/main" id="{7EB47F30-1DAE-4F9D-B7E9-C0C6353F60E9}"/>
+                <a16:creationId xmlns:a16="http://schemas.microsoft.com/office/drawing/2014/main" id="{E3135269-9811-489F-9CFE-C3B017DC548B}"/>
               </a:ext>
             </a:extLst>
           </p:cNvPr>
@@ -14209,7 +14389,7 @@
           <p:cNvPr id="6" name="TextBox 5">
             <a:extLst xmlns:a="http://schemas.openxmlformats.org/drawingml/2006/main">
               <a:ext uri="{FF2B5EF4-FFF2-40B4-BE49-F238E27FC236}">
-                <a16:creationId xmlns:a16="http://schemas.microsoft.com/office/drawing/2014/main" id="{1C768295-73E6-4A82-B02A-2AD60D0D38BE}"/>
+                <a16:creationId xmlns:a16="http://schemas.microsoft.com/office/drawing/2014/main" id="{F2F6C0D8-C4CC-4E02-A58A-74CECF26F702}"/>
               </a:ext>
             </a:extLst>
           </p:cNvPr>
@@ -14246,7 +14426,7 @@
                 <a:ea typeface="Aptos"/>
                 <a:cs typeface="Aptos"/>
               </a:rPr>
-              <a:t>Julkinen riippumaton evidenssikooste · 2026.07.24-18 · 2026-07-24 · Lähteet: Evidence Register</a:t>
+              <a:t>Julkinen riippumaton evidenssikooste · 2026.07.24-19 · 2026-07-24 · Lähteet: Evidence Register</a:t>
             </a:r>
           </a:p>
         </p:txBody>
@@ -14256,7 +14436,7 @@
           <p:cNvPr id="7" name="TextBox 6">
             <a:extLst xmlns:a="http://schemas.openxmlformats.org/drawingml/2006/main">
               <a:ext uri="{FF2B5EF4-FFF2-40B4-BE49-F238E27FC236}">
-                <a16:creationId xmlns:a16="http://schemas.microsoft.com/office/drawing/2014/main" id="{7854F394-01AB-4D38-888B-A0F5FCEBCD0E}"/>
+                <a16:creationId xmlns:a16="http://schemas.microsoft.com/office/drawing/2014/main" id="{73BAD063-B8B2-428F-9888-AB3C4C740D6E}"/>
               </a:ext>
             </a:extLst>
           </p:cNvPr>
@@ -14989,7 +15169,7 @@
           <p:cNvPr id="9" name="TextBox 8">
             <a:extLst xmlns:a="http://schemas.openxmlformats.org/drawingml/2006/main">
               <a:ext uri="{FF2B5EF4-FFF2-40B4-BE49-F238E27FC236}">
-                <a16:creationId xmlns:a16="http://schemas.microsoft.com/office/drawing/2014/main" id="{B4656E35-DE85-4446-8BC2-E0F5A46A0BD3}"/>
+                <a16:creationId xmlns:a16="http://schemas.microsoft.com/office/drawing/2014/main" id="{CD72E982-26A8-4B14-9A0F-0B7AF839E155}"/>
               </a:ext>
             </a:extLst>
           </p:cNvPr>
@@ -15034,7 +15214,7 @@
     </p:spTree>
     <p:extLst>
       <p:ext uri="{BB962C8B-B14F-4D97-AF65-F5344CB8AC3E}">
-        <p14:creationId xmlns:p14="http://schemas.microsoft.com/office/powerpoint/2010/main" val="1852485831"/>
+        <p14:creationId xmlns:p14="http://schemas.microsoft.com/office/powerpoint/2010/main" val="620796817"/>
       </p:ext>
     </p:extLst>
   </p:cSld>

--- a/site/downloads/pixan-bank-deck-medium-fi.pptx
+++ b/site/downloads/pixan-bank-deck-medium-fi.pptx
@@ -2,24 +2,24 @@
 <file path=ppt/presentation.xml><?xml version="1.0" encoding="utf-8"?>
 <p:presentation xmlns:p="http://schemas.openxmlformats.org/presentationml/2006/main">
   <p:sldMasterIdLst>
-    <p:sldMasterId xmlns:r="http://schemas.openxmlformats.org/officeDocument/2006/relationships" id="2147483648" r:id="Rf3f7121d0b3340d2"/>
+    <p:sldMasterId xmlns:r="http://schemas.openxmlformats.org/officeDocument/2006/relationships" id="2147483648" r:id="R0b8ad08e06bb43fb"/>
   </p:sldMasterIdLst>
   <p:notesMasterIdLst>
-    <p:notesMasterId xmlns:r="http://schemas.openxmlformats.org/officeDocument/2006/relationships" r:id="Rdb8e5a3f73c24f24"/>
+    <p:notesMasterId xmlns:r="http://schemas.openxmlformats.org/officeDocument/2006/relationships" r:id="Rb2746156e999404b"/>
   </p:notesMasterIdLst>
   <p:sldIdLst>
-    <p:sldId xmlns:r="http://schemas.openxmlformats.org/officeDocument/2006/relationships" id="256" r:id="R169dd20462d44617"/>
-    <p:sldId xmlns:r="http://schemas.openxmlformats.org/officeDocument/2006/relationships" id="257" r:id="R49ac1b24b2624ed9"/>
-    <p:sldId xmlns:r="http://schemas.openxmlformats.org/officeDocument/2006/relationships" id="258" r:id="Rf59b3fa4b78e471a"/>
-    <p:sldId xmlns:r="http://schemas.openxmlformats.org/officeDocument/2006/relationships" id="259" r:id="Rc7be289f3fef4cce"/>
-    <p:sldId xmlns:r="http://schemas.openxmlformats.org/officeDocument/2006/relationships" id="260" r:id="R1c072db8df0e4ae3"/>
-    <p:sldId xmlns:r="http://schemas.openxmlformats.org/officeDocument/2006/relationships" id="261" r:id="R767c39c0429d4e44"/>
-    <p:sldId xmlns:r="http://schemas.openxmlformats.org/officeDocument/2006/relationships" id="262" r:id="R0a072b797b4146fa"/>
-    <p:sldId xmlns:r="http://schemas.openxmlformats.org/officeDocument/2006/relationships" id="263" r:id="R1e3598d24cfe4c6e"/>
-    <p:sldId xmlns:r="http://schemas.openxmlformats.org/officeDocument/2006/relationships" id="264" r:id="Rce0f60a53dd44e50"/>
-    <p:sldId xmlns:r="http://schemas.openxmlformats.org/officeDocument/2006/relationships" id="265" r:id="R6b9cbb3c6db24772"/>
-    <p:sldId xmlns:r="http://schemas.openxmlformats.org/officeDocument/2006/relationships" id="266" r:id="R62700f83d44d4c37"/>
-    <p:sldId xmlns:r="http://schemas.openxmlformats.org/officeDocument/2006/relationships" id="267" r:id="Re1cee33ef5b94b66"/>
+    <p:sldId xmlns:r="http://schemas.openxmlformats.org/officeDocument/2006/relationships" id="256" r:id="Rc4720e88250e48da"/>
+    <p:sldId xmlns:r="http://schemas.openxmlformats.org/officeDocument/2006/relationships" id="257" r:id="Ra922a2f6e4904f00"/>
+    <p:sldId xmlns:r="http://schemas.openxmlformats.org/officeDocument/2006/relationships" id="258" r:id="Re3dd3c25f4564ca3"/>
+    <p:sldId xmlns:r="http://schemas.openxmlformats.org/officeDocument/2006/relationships" id="259" r:id="R2a36c549817f4f3c"/>
+    <p:sldId xmlns:r="http://schemas.openxmlformats.org/officeDocument/2006/relationships" id="260" r:id="R9c57fa0dbc184704"/>
+    <p:sldId xmlns:r="http://schemas.openxmlformats.org/officeDocument/2006/relationships" id="261" r:id="Ra8e12e8b22b84846"/>
+    <p:sldId xmlns:r="http://schemas.openxmlformats.org/officeDocument/2006/relationships" id="262" r:id="R27e521a053d943ff"/>
+    <p:sldId xmlns:r="http://schemas.openxmlformats.org/officeDocument/2006/relationships" id="263" r:id="Raf73e9f8490944a2"/>
+    <p:sldId xmlns:r="http://schemas.openxmlformats.org/officeDocument/2006/relationships" id="264" r:id="R32ad4225d823460f"/>
+    <p:sldId xmlns:r="http://schemas.openxmlformats.org/officeDocument/2006/relationships" id="265" r:id="R29cd04a6b43e4e62"/>
+    <p:sldId xmlns:r="http://schemas.openxmlformats.org/officeDocument/2006/relationships" id="266" r:id="R4751266b8800403f"/>
+    <p:sldId xmlns:r="http://schemas.openxmlformats.org/officeDocument/2006/relationships" id="267" r:id="R9fabe1ddb93643ef"/>
   </p:sldIdLst>
   <p:sldSz cx="12191999" cy="6858000"/>
   <p:notesSz cx="6858000" cy="9144000"/>
@@ -2493,7 +2493,7 @@
           <p:cNvPr id="2" name="Title 1">
             <a:extLst xmlns:a="http://schemas.openxmlformats.org/drawingml/2006/main">
               <a:ext uri="{FF2B5EF4-FFF2-40B4-BE49-F238E27FC236}">
-                <a16:creationId xmlns:a16="http://schemas.microsoft.com/office/drawing/2014/main" id="{15DAB6E5-907E-411D-9FA4-947154F1282E}"/>
+                <a16:creationId xmlns:a16="http://schemas.microsoft.com/office/drawing/2014/main" id="{A2689E84-5036-4407-9AF6-7D3CA356CC8D}"/>
               </a:ext>
             </a:extLst>
           </p:cNvPr>
@@ -2525,7 +2525,7 @@
           <p:cNvPr id="3" name="Subtitle 2">
             <a:extLst xmlns:a="http://schemas.openxmlformats.org/drawingml/2006/main">
               <a:ext uri="{FF2B5EF4-FFF2-40B4-BE49-F238E27FC236}">
-                <a16:creationId xmlns:a16="http://schemas.microsoft.com/office/drawing/2014/main" id="{6CEA4B3B-70E7-4C67-BB6E-0CFA84B29887}"/>
+                <a16:creationId xmlns:a16="http://schemas.microsoft.com/office/drawing/2014/main" id="{83F7E2B3-985B-405E-8806-EF5AB795A666}"/>
               </a:ext>
             </a:extLst>
           </p:cNvPr>
@@ -2648,7 +2648,7 @@
           <p:cNvPr id="4" name="Date Placeholder 3">
             <a:extLst xmlns:a="http://schemas.openxmlformats.org/drawingml/2006/main">
               <a:ext uri="{FF2B5EF4-FFF2-40B4-BE49-F238E27FC236}">
-                <a16:creationId xmlns:a16="http://schemas.microsoft.com/office/drawing/2014/main" id="{0E0E2D9E-8AC8-4838-81B8-3C55D1DBE258}"/>
+                <a16:creationId xmlns:a16="http://schemas.microsoft.com/office/drawing/2014/main" id="{B972A244-A17F-4276-98D9-259C21599A58}"/>
               </a:ext>
             </a:extLst>
           </p:cNvPr>
@@ -2675,7 +2675,7 @@
           <p:cNvPr id="5" name="Footer Placeholder 4">
             <a:extLst xmlns:a="http://schemas.openxmlformats.org/drawingml/2006/main">
               <a:ext uri="{FF2B5EF4-FFF2-40B4-BE49-F238E27FC236}">
-                <a16:creationId xmlns:a16="http://schemas.microsoft.com/office/drawing/2014/main" id="{A17D8D6D-E3F9-46D8-AFA7-A0E29F9EB217}"/>
+                <a16:creationId xmlns:a16="http://schemas.microsoft.com/office/drawing/2014/main" id="{3BAF9556-3A89-46A0-9AD0-8B5EE7E8F0E4}"/>
               </a:ext>
             </a:extLst>
           </p:cNvPr>
@@ -2698,7 +2698,7 @@
           <p:cNvPr id="6" name="Slide Number Placeholder 5">
             <a:extLst xmlns:a="http://schemas.openxmlformats.org/drawingml/2006/main">
               <a:ext uri="{FF2B5EF4-FFF2-40B4-BE49-F238E27FC236}">
-                <a16:creationId xmlns:a16="http://schemas.microsoft.com/office/drawing/2014/main" id="{18BB375F-49BA-46DC-A0AC-46D0D2F096F9}"/>
+                <a16:creationId xmlns:a16="http://schemas.microsoft.com/office/drawing/2014/main" id="{98458718-4496-469D-8535-459614F8436F}"/>
               </a:ext>
             </a:extLst>
           </p:cNvPr>
@@ -2742,7 +2742,7 @@
           <p:cNvPr id="2" name="Title 1">
             <a:extLst xmlns:a="http://schemas.openxmlformats.org/drawingml/2006/main">
               <a:ext uri="{FF2B5EF4-FFF2-40B4-BE49-F238E27FC236}">
-                <a16:creationId xmlns:a16="http://schemas.microsoft.com/office/drawing/2014/main" id="{46DD337B-C46C-444F-9B62-AE975C32F89B}"/>
+                <a16:creationId xmlns:a16="http://schemas.microsoft.com/office/drawing/2014/main" id="{D156FBF7-5384-4B16-A5F5-2CB5ACC74724}"/>
               </a:ext>
             </a:extLst>
           </p:cNvPr>
@@ -2769,7 +2769,7 @@
           <p:cNvPr id="3" name="Vertical Text Placeholder 2">
             <a:extLst xmlns:a="http://schemas.openxmlformats.org/drawingml/2006/main">
               <a:ext uri="{FF2B5EF4-FFF2-40B4-BE49-F238E27FC236}">
-                <a16:creationId xmlns:a16="http://schemas.microsoft.com/office/drawing/2014/main" id="{59299474-E96B-4680-B3EC-0E396F43BE1F}"/>
+                <a16:creationId xmlns:a16="http://schemas.microsoft.com/office/drawing/2014/main" id="{B7B0ABAF-A9CE-4DBE-A7BD-82DF1ED967FE}"/>
               </a:ext>
             </a:extLst>
           </p:cNvPr>
@@ -2831,7 +2831,7 @@
           <p:cNvPr id="4" name="Date Placeholder 3">
             <a:extLst xmlns:a="http://schemas.openxmlformats.org/drawingml/2006/main">
               <a:ext uri="{FF2B5EF4-FFF2-40B4-BE49-F238E27FC236}">
-                <a16:creationId xmlns:a16="http://schemas.microsoft.com/office/drawing/2014/main" id="{03617643-0F82-479F-8F21-1826724423E0}"/>
+                <a16:creationId xmlns:a16="http://schemas.microsoft.com/office/drawing/2014/main" id="{E6CC3C96-7175-4A55-A25C-31F72FC8A114}"/>
               </a:ext>
             </a:extLst>
           </p:cNvPr>
@@ -2858,7 +2858,7 @@
           <p:cNvPr id="5" name="Footer Placeholder 4">
             <a:extLst xmlns:a="http://schemas.openxmlformats.org/drawingml/2006/main">
               <a:ext uri="{FF2B5EF4-FFF2-40B4-BE49-F238E27FC236}">
-                <a16:creationId xmlns:a16="http://schemas.microsoft.com/office/drawing/2014/main" id="{5E28B5CB-B853-494D-A3BE-91C7A1637CA4}"/>
+                <a16:creationId xmlns:a16="http://schemas.microsoft.com/office/drawing/2014/main" id="{11B638A9-D837-441C-8DF7-BA478202F0E2}"/>
               </a:ext>
             </a:extLst>
           </p:cNvPr>
@@ -2881,7 +2881,7 @@
           <p:cNvPr id="6" name="Slide Number Placeholder 5">
             <a:extLst xmlns:a="http://schemas.openxmlformats.org/drawingml/2006/main">
               <a:ext uri="{FF2B5EF4-FFF2-40B4-BE49-F238E27FC236}">
-                <a16:creationId xmlns:a16="http://schemas.microsoft.com/office/drawing/2014/main" id="{098D2226-60CA-4314-84AE-D823BDA378BB}"/>
+                <a16:creationId xmlns:a16="http://schemas.microsoft.com/office/drawing/2014/main" id="{0D1D2313-A96D-4CA8-BEF0-FCD9498D5FE8}"/>
               </a:ext>
             </a:extLst>
           </p:cNvPr>
@@ -2925,7 +2925,7 @@
           <p:cNvPr id="2" name="Vertical Title 1">
             <a:extLst xmlns:a="http://schemas.openxmlformats.org/drawingml/2006/main">
               <a:ext uri="{FF2B5EF4-FFF2-40B4-BE49-F238E27FC236}">
-                <a16:creationId xmlns:a16="http://schemas.microsoft.com/office/drawing/2014/main" id="{EB09D50A-7456-41F2-B6AD-32978CA7B1C2}"/>
+                <a16:creationId xmlns:a16="http://schemas.microsoft.com/office/drawing/2014/main" id="{152C473C-E4A3-4E61-B260-92D9208097B4}"/>
               </a:ext>
             </a:extLst>
           </p:cNvPr>
@@ -2957,7 +2957,7 @@
           <p:cNvPr id="3" name="Vertical Text Placeholder 2">
             <a:extLst xmlns:a="http://schemas.openxmlformats.org/drawingml/2006/main">
               <a:ext uri="{FF2B5EF4-FFF2-40B4-BE49-F238E27FC236}">
-                <a16:creationId xmlns:a16="http://schemas.microsoft.com/office/drawing/2014/main" id="{53CC1859-BB0C-4F91-8CC1-8ED50B03AC63}"/>
+                <a16:creationId xmlns:a16="http://schemas.microsoft.com/office/drawing/2014/main" id="{D96C7255-609F-4415-9E96-0AA8A224FEB2}"/>
               </a:ext>
             </a:extLst>
           </p:cNvPr>
@@ -3024,7 +3024,7 @@
           <p:cNvPr id="4" name="Date Placeholder 3">
             <a:extLst xmlns:a="http://schemas.openxmlformats.org/drawingml/2006/main">
               <a:ext uri="{FF2B5EF4-FFF2-40B4-BE49-F238E27FC236}">
-                <a16:creationId xmlns:a16="http://schemas.microsoft.com/office/drawing/2014/main" id="{EB5B887B-1AF3-4F27-B5CD-791713502548}"/>
+                <a16:creationId xmlns:a16="http://schemas.microsoft.com/office/drawing/2014/main" id="{1C4F6CEF-CA2D-40F0-9AE6-AD52E9C2F65A}"/>
               </a:ext>
             </a:extLst>
           </p:cNvPr>
@@ -3051,7 +3051,7 @@
           <p:cNvPr id="5" name="Footer Placeholder 4">
             <a:extLst xmlns:a="http://schemas.openxmlformats.org/drawingml/2006/main">
               <a:ext uri="{FF2B5EF4-FFF2-40B4-BE49-F238E27FC236}">
-                <a16:creationId xmlns:a16="http://schemas.microsoft.com/office/drawing/2014/main" id="{1B007154-71B5-4FBA-B931-A8E3236E476F}"/>
+                <a16:creationId xmlns:a16="http://schemas.microsoft.com/office/drawing/2014/main" id="{2C4E97E7-3634-46ED-A54F-2E9CA2E64267}"/>
               </a:ext>
             </a:extLst>
           </p:cNvPr>
@@ -3074,7 +3074,7 @@
           <p:cNvPr id="6" name="Slide Number Placeholder 5">
             <a:extLst xmlns:a="http://schemas.openxmlformats.org/drawingml/2006/main">
               <a:ext uri="{FF2B5EF4-FFF2-40B4-BE49-F238E27FC236}">
-                <a16:creationId xmlns:a16="http://schemas.microsoft.com/office/drawing/2014/main" id="{E0FC5CF6-9933-48A4-90F6-BFD6D6077A48}"/>
+                <a16:creationId xmlns:a16="http://schemas.microsoft.com/office/drawing/2014/main" id="{DF77FFA8-674F-4F9F-A188-5313CF7287A3}"/>
               </a:ext>
             </a:extLst>
           </p:cNvPr>
@@ -3118,7 +3118,7 @@
           <p:cNvPr id="2" name="Title 1">
             <a:extLst xmlns:a="http://schemas.openxmlformats.org/drawingml/2006/main">
               <a:ext uri="{FF2B5EF4-FFF2-40B4-BE49-F238E27FC236}">
-                <a16:creationId xmlns:a16="http://schemas.microsoft.com/office/drawing/2014/main" id="{594D6D7B-DD58-4F54-9933-02F2FED82463}"/>
+                <a16:creationId xmlns:a16="http://schemas.microsoft.com/office/drawing/2014/main" id="{2C7F0E79-FD9F-429E-A264-22AFC112B5E0}"/>
               </a:ext>
             </a:extLst>
           </p:cNvPr>
@@ -3145,7 +3145,7 @@
           <p:cNvPr id="3" name="Content Placeholder 2">
             <a:extLst xmlns:a="http://schemas.openxmlformats.org/drawingml/2006/main">
               <a:ext uri="{FF2B5EF4-FFF2-40B4-BE49-F238E27FC236}">
-                <a16:creationId xmlns:a16="http://schemas.microsoft.com/office/drawing/2014/main" id="{A73FBEE8-E7A9-40F6-9C8E-50177005E726}"/>
+                <a16:creationId xmlns:a16="http://schemas.microsoft.com/office/drawing/2014/main" id="{8B57D0DD-D8C3-428F-BD3B-C172BCAF16DF}"/>
               </a:ext>
             </a:extLst>
           </p:cNvPr>
@@ -3207,7 +3207,7 @@
           <p:cNvPr id="4" name="Date Placeholder 3">
             <a:extLst xmlns:a="http://schemas.openxmlformats.org/drawingml/2006/main">
               <a:ext uri="{FF2B5EF4-FFF2-40B4-BE49-F238E27FC236}">
-                <a16:creationId xmlns:a16="http://schemas.microsoft.com/office/drawing/2014/main" id="{0104886C-9971-4283-8F84-AF5BFF031E76}"/>
+                <a16:creationId xmlns:a16="http://schemas.microsoft.com/office/drawing/2014/main" id="{CAE52E2F-30C0-4540-B535-AD4069704B72}"/>
               </a:ext>
             </a:extLst>
           </p:cNvPr>
@@ -3234,7 +3234,7 @@
           <p:cNvPr id="5" name="Footer Placeholder 4">
             <a:extLst xmlns:a="http://schemas.openxmlformats.org/drawingml/2006/main">
               <a:ext uri="{FF2B5EF4-FFF2-40B4-BE49-F238E27FC236}">
-                <a16:creationId xmlns:a16="http://schemas.microsoft.com/office/drawing/2014/main" id="{C035AF33-E04A-4378-8D6F-492AE3989AC1}"/>
+                <a16:creationId xmlns:a16="http://schemas.microsoft.com/office/drawing/2014/main" id="{61A645B4-2425-441E-AD95-5969254B1FBB}"/>
               </a:ext>
             </a:extLst>
           </p:cNvPr>
@@ -3257,7 +3257,7 @@
           <p:cNvPr id="6" name="Slide Number Placeholder 5">
             <a:extLst xmlns:a="http://schemas.openxmlformats.org/drawingml/2006/main">
               <a:ext uri="{FF2B5EF4-FFF2-40B4-BE49-F238E27FC236}">
-                <a16:creationId xmlns:a16="http://schemas.microsoft.com/office/drawing/2014/main" id="{0B536A6B-6E65-4CED-9E59-8A5844EE78C9}"/>
+                <a16:creationId xmlns:a16="http://schemas.microsoft.com/office/drawing/2014/main" id="{AE90B14B-DC36-4182-9EEA-B047F91AC4B5}"/>
               </a:ext>
             </a:extLst>
           </p:cNvPr>
@@ -3301,7 +3301,7 @@
           <p:cNvPr id="2" name="Title 1">
             <a:extLst xmlns:a="http://schemas.openxmlformats.org/drawingml/2006/main">
               <a:ext uri="{FF2B5EF4-FFF2-40B4-BE49-F238E27FC236}">
-                <a16:creationId xmlns:a16="http://schemas.microsoft.com/office/drawing/2014/main" id="{927D73D5-910E-4097-8DB6-91FAA4D3E49D}"/>
+                <a16:creationId xmlns:a16="http://schemas.microsoft.com/office/drawing/2014/main" id="{0819951F-5378-4A9E-BA04-EFE94E88299B}"/>
               </a:ext>
             </a:extLst>
           </p:cNvPr>
@@ -3338,7 +3338,7 @@
           <p:cNvPr id="3" name="Text Placeholder 2">
             <a:extLst xmlns:a="http://schemas.openxmlformats.org/drawingml/2006/main">
               <a:ext uri="{FF2B5EF4-FFF2-40B4-BE49-F238E27FC236}">
-                <a16:creationId xmlns:a16="http://schemas.microsoft.com/office/drawing/2014/main" id="{E7A9AD68-3693-46E7-99A4-7A731E602593}"/>
+                <a16:creationId xmlns:a16="http://schemas.microsoft.com/office/drawing/2014/main" id="{ADA6F41C-915B-4482-9EB9-3587905FB49F}"/>
               </a:ext>
             </a:extLst>
           </p:cNvPr>
@@ -3464,7 +3464,7 @@
           <p:cNvPr id="4" name="Date Placeholder 3">
             <a:extLst xmlns:a="http://schemas.openxmlformats.org/drawingml/2006/main">
               <a:ext uri="{FF2B5EF4-FFF2-40B4-BE49-F238E27FC236}">
-                <a16:creationId xmlns:a16="http://schemas.microsoft.com/office/drawing/2014/main" id="{F41D7BFE-93DB-41C9-871E-5852158FF52C}"/>
+                <a16:creationId xmlns:a16="http://schemas.microsoft.com/office/drawing/2014/main" id="{5E79E92C-BA4C-49E7-9D07-8FC7C48BA64E}"/>
               </a:ext>
             </a:extLst>
           </p:cNvPr>
@@ -3491,7 +3491,7 @@
           <p:cNvPr id="5" name="Footer Placeholder 4">
             <a:extLst xmlns:a="http://schemas.openxmlformats.org/drawingml/2006/main">
               <a:ext uri="{FF2B5EF4-FFF2-40B4-BE49-F238E27FC236}">
-                <a16:creationId xmlns:a16="http://schemas.microsoft.com/office/drawing/2014/main" id="{B750B963-44C1-4110-8F83-9D34D885311A}"/>
+                <a16:creationId xmlns:a16="http://schemas.microsoft.com/office/drawing/2014/main" id="{E467E155-BBE9-4F87-90CC-54276CBA482E}"/>
               </a:ext>
             </a:extLst>
           </p:cNvPr>
@@ -3514,7 +3514,7 @@
           <p:cNvPr id="6" name="Slide Number Placeholder 5">
             <a:extLst xmlns:a="http://schemas.openxmlformats.org/drawingml/2006/main">
               <a:ext uri="{FF2B5EF4-FFF2-40B4-BE49-F238E27FC236}">
-                <a16:creationId xmlns:a16="http://schemas.microsoft.com/office/drawing/2014/main" id="{8A3CE8C1-F867-4F9D-B7BF-21EF37351C5A}"/>
+                <a16:creationId xmlns:a16="http://schemas.microsoft.com/office/drawing/2014/main" id="{CE62EEBE-0E72-4385-B89C-3FF911AEA8F1}"/>
               </a:ext>
             </a:extLst>
           </p:cNvPr>
@@ -3558,7 +3558,7 @@
           <p:cNvPr id="2" name="Title 1">
             <a:extLst xmlns:a="http://schemas.openxmlformats.org/drawingml/2006/main">
               <a:ext uri="{FF2B5EF4-FFF2-40B4-BE49-F238E27FC236}">
-                <a16:creationId xmlns:a16="http://schemas.microsoft.com/office/drawing/2014/main" id="{7119EDA0-7C4F-4275-9048-C0C456E7E8BF}"/>
+                <a16:creationId xmlns:a16="http://schemas.microsoft.com/office/drawing/2014/main" id="{AE350802-B729-49DB-98C7-40F918E6A9FA}"/>
               </a:ext>
             </a:extLst>
           </p:cNvPr>
@@ -3585,7 +3585,7 @@
           <p:cNvPr id="3" name="Content Placeholder 2">
             <a:extLst xmlns:a="http://schemas.openxmlformats.org/drawingml/2006/main">
               <a:ext uri="{FF2B5EF4-FFF2-40B4-BE49-F238E27FC236}">
-                <a16:creationId xmlns:a16="http://schemas.microsoft.com/office/drawing/2014/main" id="{791AB51B-92A6-47BA-94F9-3319F31676C7}"/>
+                <a16:creationId xmlns:a16="http://schemas.microsoft.com/office/drawing/2014/main" id="{85A0DAFA-994D-4259-AA42-D3B23D5A37D2}"/>
               </a:ext>
             </a:extLst>
           </p:cNvPr>
@@ -3689,7 +3689,7 @@
           <p:cNvPr id="4" name="Content Placeholder 3">
             <a:extLst xmlns:a="http://schemas.openxmlformats.org/drawingml/2006/main">
               <a:ext uri="{FF2B5EF4-FFF2-40B4-BE49-F238E27FC236}">
-                <a16:creationId xmlns:a16="http://schemas.microsoft.com/office/drawing/2014/main" id="{22172674-4601-4E96-BAB2-C7E8BECC9E78}"/>
+                <a16:creationId xmlns:a16="http://schemas.microsoft.com/office/drawing/2014/main" id="{556E0175-3C67-4931-B6F3-2C11C88B556C}"/>
               </a:ext>
             </a:extLst>
           </p:cNvPr>
@@ -3793,7 +3793,7 @@
           <p:cNvPr id="5" name="Date Placeholder 4">
             <a:extLst xmlns:a="http://schemas.openxmlformats.org/drawingml/2006/main">
               <a:ext uri="{FF2B5EF4-FFF2-40B4-BE49-F238E27FC236}">
-                <a16:creationId xmlns:a16="http://schemas.microsoft.com/office/drawing/2014/main" id="{192D3AEB-1C0B-42C7-A217-E7DC85542197}"/>
+                <a16:creationId xmlns:a16="http://schemas.microsoft.com/office/drawing/2014/main" id="{BA10199F-0D37-4F45-AE8F-E3F38416555A}"/>
               </a:ext>
             </a:extLst>
           </p:cNvPr>
@@ -3820,7 +3820,7 @@
           <p:cNvPr id="6" name="Footer Placeholder 5">
             <a:extLst xmlns:a="http://schemas.openxmlformats.org/drawingml/2006/main">
               <a:ext uri="{FF2B5EF4-FFF2-40B4-BE49-F238E27FC236}">
-                <a16:creationId xmlns:a16="http://schemas.microsoft.com/office/drawing/2014/main" id="{AFBEFD68-C091-484C-B4EA-EFE778227BB2}"/>
+                <a16:creationId xmlns:a16="http://schemas.microsoft.com/office/drawing/2014/main" id="{93F732CC-22EB-46CE-9C03-74A0CABD1299}"/>
               </a:ext>
             </a:extLst>
           </p:cNvPr>
@@ -3843,7 +3843,7 @@
           <p:cNvPr id="7" name="Slide Number Placeholder 6">
             <a:extLst xmlns:a="http://schemas.openxmlformats.org/drawingml/2006/main">
               <a:ext uri="{FF2B5EF4-FFF2-40B4-BE49-F238E27FC236}">
-                <a16:creationId xmlns:a16="http://schemas.microsoft.com/office/drawing/2014/main" id="{22A161F1-D265-4132-B12B-F58BCB2E82B5}"/>
+                <a16:creationId xmlns:a16="http://schemas.microsoft.com/office/drawing/2014/main" id="{8CB5A888-3A27-41A5-9B2A-CA230F23B8D2}"/>
               </a:ext>
             </a:extLst>
           </p:cNvPr>
@@ -3887,7 +3887,7 @@
           <p:cNvPr id="2" name="Title 1">
             <a:extLst xmlns:a="http://schemas.openxmlformats.org/drawingml/2006/main">
               <a:ext uri="{FF2B5EF4-FFF2-40B4-BE49-F238E27FC236}">
-                <a16:creationId xmlns:a16="http://schemas.microsoft.com/office/drawing/2014/main" id="{54C61F18-93CD-4001-8869-839E1475B6FC}"/>
+                <a16:creationId xmlns:a16="http://schemas.microsoft.com/office/drawing/2014/main" id="{E6546FE2-82C9-46EC-9685-B79F13668E9C}"/>
               </a:ext>
             </a:extLst>
           </p:cNvPr>
@@ -3919,7 +3919,7 @@
           <p:cNvPr id="3" name="Text Placeholder 2">
             <a:extLst xmlns:a="http://schemas.openxmlformats.org/drawingml/2006/main">
               <a:ext uri="{FF2B5EF4-FFF2-40B4-BE49-F238E27FC236}">
-                <a16:creationId xmlns:a16="http://schemas.microsoft.com/office/drawing/2014/main" id="{12ACB7F8-5947-4D25-9D29-F225553EDC5F}"/>
+                <a16:creationId xmlns:a16="http://schemas.microsoft.com/office/drawing/2014/main" id="{57B6D358-8A73-4D17-AFC2-3B59E5CAD9CB}"/>
               </a:ext>
             </a:extLst>
           </p:cNvPr>
@@ -3991,7 +3991,7 @@
           <p:cNvPr id="4" name="Content Placeholder 3">
             <a:extLst xmlns:a="http://schemas.openxmlformats.org/drawingml/2006/main">
               <a:ext uri="{FF2B5EF4-FFF2-40B4-BE49-F238E27FC236}">
-                <a16:creationId xmlns:a16="http://schemas.microsoft.com/office/drawing/2014/main" id="{7FDFEAEC-6512-4CAA-B3B5-FF16FADBE564}"/>
+                <a16:creationId xmlns:a16="http://schemas.microsoft.com/office/drawing/2014/main" id="{ACD1474B-0DFF-49D8-B9DA-5A4CB08E7F63}"/>
               </a:ext>
             </a:extLst>
           </p:cNvPr>
@@ -4095,7 +4095,7 @@
           <p:cNvPr id="5" name="Text Placeholder 4">
             <a:extLst xmlns:a="http://schemas.openxmlformats.org/drawingml/2006/main">
               <a:ext uri="{FF2B5EF4-FFF2-40B4-BE49-F238E27FC236}">
-                <a16:creationId xmlns:a16="http://schemas.microsoft.com/office/drawing/2014/main" id="{8F53036C-7399-44B4-80E9-032DDF35F8DE}"/>
+                <a16:creationId xmlns:a16="http://schemas.microsoft.com/office/drawing/2014/main" id="{FE24EBF3-B7F6-454A-BBDC-368A32DF7452}"/>
               </a:ext>
             </a:extLst>
           </p:cNvPr>
@@ -4167,7 +4167,7 @@
           <p:cNvPr id="6" name="Content Placeholder 5">
             <a:extLst xmlns:a="http://schemas.openxmlformats.org/drawingml/2006/main">
               <a:ext uri="{FF2B5EF4-FFF2-40B4-BE49-F238E27FC236}">
-                <a16:creationId xmlns:a16="http://schemas.microsoft.com/office/drawing/2014/main" id="{32240855-BD86-4508-81AE-E22EB947251A}"/>
+                <a16:creationId xmlns:a16="http://schemas.microsoft.com/office/drawing/2014/main" id="{38F48996-FFE9-4F84-A312-FF61A8D2973E}"/>
               </a:ext>
             </a:extLst>
           </p:cNvPr>
@@ -4271,7 +4271,7 @@
           <p:cNvPr id="7" name="Date Placeholder 6">
             <a:extLst xmlns:a="http://schemas.openxmlformats.org/drawingml/2006/main">
               <a:ext uri="{FF2B5EF4-FFF2-40B4-BE49-F238E27FC236}">
-                <a16:creationId xmlns:a16="http://schemas.microsoft.com/office/drawing/2014/main" id="{78ADD114-C7E3-4580-A288-F17932FD4EAC}"/>
+                <a16:creationId xmlns:a16="http://schemas.microsoft.com/office/drawing/2014/main" id="{BD7AE254-3BFF-4ABC-ACFB-908B79FD5785}"/>
               </a:ext>
             </a:extLst>
           </p:cNvPr>
@@ -4298,7 +4298,7 @@
           <p:cNvPr id="8" name="Footer Placeholder 7">
             <a:extLst xmlns:a="http://schemas.openxmlformats.org/drawingml/2006/main">
               <a:ext uri="{FF2B5EF4-FFF2-40B4-BE49-F238E27FC236}">
-                <a16:creationId xmlns:a16="http://schemas.microsoft.com/office/drawing/2014/main" id="{1C3D1889-B9F5-4077-B426-96236232D950}"/>
+                <a16:creationId xmlns:a16="http://schemas.microsoft.com/office/drawing/2014/main" id="{F33168AC-81E1-4E06-A5B7-761C17F5A6DC}"/>
               </a:ext>
             </a:extLst>
           </p:cNvPr>
@@ -4321,7 +4321,7 @@
           <p:cNvPr id="9" name="Slide Number Placeholder 8">
             <a:extLst xmlns:a="http://schemas.openxmlformats.org/drawingml/2006/main">
               <a:ext uri="{FF2B5EF4-FFF2-40B4-BE49-F238E27FC236}">
-                <a16:creationId xmlns:a16="http://schemas.microsoft.com/office/drawing/2014/main" id="{C4BC1CDB-1785-4265-8C0B-CC8C2768A92B}"/>
+                <a16:creationId xmlns:a16="http://schemas.microsoft.com/office/drawing/2014/main" id="{9DDC2F81-5390-4DA1-93B0-9DBB3B59DCCD}"/>
               </a:ext>
             </a:extLst>
           </p:cNvPr>
@@ -4365,7 +4365,7 @@
           <p:cNvPr id="2" name="Title 1">
             <a:extLst xmlns:a="http://schemas.openxmlformats.org/drawingml/2006/main">
               <a:ext uri="{FF2B5EF4-FFF2-40B4-BE49-F238E27FC236}">
-                <a16:creationId xmlns:a16="http://schemas.microsoft.com/office/drawing/2014/main" id="{100E5616-B205-42D1-97E7-9AF314A75D8A}"/>
+                <a16:creationId xmlns:a16="http://schemas.microsoft.com/office/drawing/2014/main" id="{D26FE3FE-A44C-4B30-81E2-80E11A9B699E}"/>
               </a:ext>
             </a:extLst>
           </p:cNvPr>
@@ -4392,7 +4392,7 @@
           <p:cNvPr id="3" name="Date Placeholder 2">
             <a:extLst xmlns:a="http://schemas.openxmlformats.org/drawingml/2006/main">
               <a:ext uri="{FF2B5EF4-FFF2-40B4-BE49-F238E27FC236}">
-                <a16:creationId xmlns:a16="http://schemas.microsoft.com/office/drawing/2014/main" id="{32B6E38E-B59C-47D4-B30F-410BD0A8B1AF}"/>
+                <a16:creationId xmlns:a16="http://schemas.microsoft.com/office/drawing/2014/main" id="{532DD679-2B7D-4FED-9CA7-265819B5BA58}"/>
               </a:ext>
             </a:extLst>
           </p:cNvPr>
@@ -4419,7 +4419,7 @@
           <p:cNvPr id="4" name="Footer Placeholder 3">
             <a:extLst xmlns:a="http://schemas.openxmlformats.org/drawingml/2006/main">
               <a:ext uri="{FF2B5EF4-FFF2-40B4-BE49-F238E27FC236}">
-                <a16:creationId xmlns:a16="http://schemas.microsoft.com/office/drawing/2014/main" id="{DF483516-CEF5-49E8-82FE-59C462DFFB66}"/>
+                <a16:creationId xmlns:a16="http://schemas.microsoft.com/office/drawing/2014/main" id="{959BF307-372D-46D6-9C03-4CD4C0C1E98C}"/>
               </a:ext>
             </a:extLst>
           </p:cNvPr>
@@ -4442,7 +4442,7 @@
           <p:cNvPr id="5" name="Slide Number Placeholder 4">
             <a:extLst xmlns:a="http://schemas.openxmlformats.org/drawingml/2006/main">
               <a:ext uri="{FF2B5EF4-FFF2-40B4-BE49-F238E27FC236}">
-                <a16:creationId xmlns:a16="http://schemas.microsoft.com/office/drawing/2014/main" id="{C317C193-66A4-403B-9750-B5543A48DC42}"/>
+                <a16:creationId xmlns:a16="http://schemas.microsoft.com/office/drawing/2014/main" id="{CC19F408-3827-4CD4-B86A-53863ED09763}"/>
               </a:ext>
             </a:extLst>
           </p:cNvPr>
@@ -4486,7 +4486,7 @@
           <p:cNvPr id="2" name="Date Placeholder 1">
             <a:extLst xmlns:a="http://schemas.openxmlformats.org/drawingml/2006/main">
               <a:ext uri="{FF2B5EF4-FFF2-40B4-BE49-F238E27FC236}">
-                <a16:creationId xmlns:a16="http://schemas.microsoft.com/office/drawing/2014/main" id="{D3B53D39-7AE2-4812-8B41-FC74CE5031EA}"/>
+                <a16:creationId xmlns:a16="http://schemas.microsoft.com/office/drawing/2014/main" id="{A4DD6890-294C-426E-843A-51D63AF8E71B}"/>
               </a:ext>
             </a:extLst>
           </p:cNvPr>
@@ -4513,7 +4513,7 @@
           <p:cNvPr id="3" name="Footer Placeholder 2">
             <a:extLst xmlns:a="http://schemas.openxmlformats.org/drawingml/2006/main">
               <a:ext uri="{FF2B5EF4-FFF2-40B4-BE49-F238E27FC236}">
-                <a16:creationId xmlns:a16="http://schemas.microsoft.com/office/drawing/2014/main" id="{5308F087-2D31-4BFA-B683-039CD6077F5D}"/>
+                <a16:creationId xmlns:a16="http://schemas.microsoft.com/office/drawing/2014/main" id="{9349743E-C524-4CCE-8AB0-3B1826ADC3BA}"/>
               </a:ext>
             </a:extLst>
           </p:cNvPr>
@@ -4536,7 +4536,7 @@
           <p:cNvPr id="4" name="Slide Number Placeholder 3">
             <a:extLst xmlns:a="http://schemas.openxmlformats.org/drawingml/2006/main">
               <a:ext uri="{FF2B5EF4-FFF2-40B4-BE49-F238E27FC236}">
-                <a16:creationId xmlns:a16="http://schemas.microsoft.com/office/drawing/2014/main" id="{654CF787-9F6E-48C7-A2F5-CAD6B080363E}"/>
+                <a16:creationId xmlns:a16="http://schemas.microsoft.com/office/drawing/2014/main" id="{CFD7ECC6-2C6C-48E5-BD35-15034E712D05}"/>
               </a:ext>
             </a:extLst>
           </p:cNvPr>
@@ -4580,7 +4580,7 @@
           <p:cNvPr id="2" name="Title 1">
             <a:extLst xmlns:a="http://schemas.openxmlformats.org/drawingml/2006/main">
               <a:ext uri="{FF2B5EF4-FFF2-40B4-BE49-F238E27FC236}">
-                <a16:creationId xmlns:a16="http://schemas.microsoft.com/office/drawing/2014/main" id="{858F6DC6-7D7D-4A1C-9194-560049A179B2}"/>
+                <a16:creationId xmlns:a16="http://schemas.microsoft.com/office/drawing/2014/main" id="{ACDDEEDE-2000-41CC-B4C7-BC9FEA28BA74}"/>
               </a:ext>
             </a:extLst>
           </p:cNvPr>
@@ -4617,7 +4617,7 @@
           <p:cNvPr id="3" name="Content Placeholder 2">
             <a:extLst xmlns:a="http://schemas.openxmlformats.org/drawingml/2006/main">
               <a:ext uri="{FF2B5EF4-FFF2-40B4-BE49-F238E27FC236}">
-                <a16:creationId xmlns:a16="http://schemas.microsoft.com/office/drawing/2014/main" id="{3BE5A593-33CA-4213-9CDB-41D84536886D}"/>
+                <a16:creationId xmlns:a16="http://schemas.microsoft.com/office/drawing/2014/main" id="{668A4FFD-E61B-4841-84B2-723BE1D156BB}"/>
               </a:ext>
             </a:extLst>
           </p:cNvPr>
@@ -4721,7 +4721,7 @@
           <p:cNvPr id="4" name="Text Placeholder 3">
             <a:extLst xmlns:a="http://schemas.openxmlformats.org/drawingml/2006/main">
               <a:ext uri="{FF2B5EF4-FFF2-40B4-BE49-F238E27FC236}">
-                <a16:creationId xmlns:a16="http://schemas.microsoft.com/office/drawing/2014/main" id="{3032118F-9296-4330-ADCF-53F3180457BC}"/>
+                <a16:creationId xmlns:a16="http://schemas.microsoft.com/office/drawing/2014/main" id="{AC3445DE-1297-4D99-BFB9-B25DB07F03D0}"/>
               </a:ext>
             </a:extLst>
           </p:cNvPr>
@@ -4793,7 +4793,7 @@
           <p:cNvPr id="5" name="Date Placeholder 4">
             <a:extLst xmlns:a="http://schemas.openxmlformats.org/drawingml/2006/main">
               <a:ext uri="{FF2B5EF4-FFF2-40B4-BE49-F238E27FC236}">
-                <a16:creationId xmlns:a16="http://schemas.microsoft.com/office/drawing/2014/main" id="{8509072D-7658-41AE-B9B2-F830AA9AA3D5}"/>
+                <a16:creationId xmlns:a16="http://schemas.microsoft.com/office/drawing/2014/main" id="{E7FD2D9D-E012-4B4B-8C4C-2F21AB0F22A3}"/>
               </a:ext>
             </a:extLst>
           </p:cNvPr>
@@ -4820,7 +4820,7 @@
           <p:cNvPr id="6" name="Footer Placeholder 5">
             <a:extLst xmlns:a="http://schemas.openxmlformats.org/drawingml/2006/main">
               <a:ext uri="{FF2B5EF4-FFF2-40B4-BE49-F238E27FC236}">
-                <a16:creationId xmlns:a16="http://schemas.microsoft.com/office/drawing/2014/main" id="{DA596687-403B-4C23-81C6-B85A25D44F7D}"/>
+                <a16:creationId xmlns:a16="http://schemas.microsoft.com/office/drawing/2014/main" id="{35C3C34C-A4F3-4B10-B00F-ACB93FCAA129}"/>
               </a:ext>
             </a:extLst>
           </p:cNvPr>
@@ -4843,7 +4843,7 @@
           <p:cNvPr id="7" name="Slide Number Placeholder 6">
             <a:extLst xmlns:a="http://schemas.openxmlformats.org/drawingml/2006/main">
               <a:ext uri="{FF2B5EF4-FFF2-40B4-BE49-F238E27FC236}">
-                <a16:creationId xmlns:a16="http://schemas.microsoft.com/office/drawing/2014/main" id="{4C8740FB-A871-41BE-8F1E-9E6D49B50682}"/>
+                <a16:creationId xmlns:a16="http://schemas.microsoft.com/office/drawing/2014/main" id="{E2D51C05-B6EC-40A8-BBD3-3F7F1FB6FA9A}"/>
               </a:ext>
             </a:extLst>
           </p:cNvPr>
@@ -4887,7 +4887,7 @@
           <p:cNvPr id="2" name="Title 1">
             <a:extLst xmlns:a="http://schemas.openxmlformats.org/drawingml/2006/main">
               <a:ext uri="{FF2B5EF4-FFF2-40B4-BE49-F238E27FC236}">
-                <a16:creationId xmlns:a16="http://schemas.microsoft.com/office/drawing/2014/main" id="{6951B2A4-EB5D-437D-8FBC-38181A8F33A1}"/>
+                <a16:creationId xmlns:a16="http://schemas.microsoft.com/office/drawing/2014/main" id="{A5042971-9020-4EB9-B0D3-4ED672A977B5}"/>
               </a:ext>
             </a:extLst>
           </p:cNvPr>
@@ -4924,7 +4924,7 @@
           <p:cNvPr id="3" name="Picture Placeholder 2">
             <a:extLst xmlns:a="http://schemas.openxmlformats.org/drawingml/2006/main">
               <a:ext uri="{FF2B5EF4-FFF2-40B4-BE49-F238E27FC236}">
-                <a16:creationId xmlns:a16="http://schemas.microsoft.com/office/drawing/2014/main" id="{735C33CA-4A5A-4413-8F2E-74EC8DA09EB5}"/>
+                <a16:creationId xmlns:a16="http://schemas.microsoft.com/office/drawing/2014/main" id="{8F98E5F7-4B98-47A8-9CD0-4D180076F09B}"/>
               </a:ext>
             </a:extLst>
           </p:cNvPr>
@@ -4989,7 +4989,7 @@
           <p:cNvPr id="4" name="Text Placeholder 3">
             <a:extLst xmlns:a="http://schemas.openxmlformats.org/drawingml/2006/main">
               <a:ext uri="{FF2B5EF4-FFF2-40B4-BE49-F238E27FC236}">
-                <a16:creationId xmlns:a16="http://schemas.microsoft.com/office/drawing/2014/main" id="{9EB5B42C-08EA-48DA-8A3F-763B1AB357B0}"/>
+                <a16:creationId xmlns:a16="http://schemas.microsoft.com/office/drawing/2014/main" id="{B696736D-122E-4CB9-AF20-1C4D0A21F7A4}"/>
               </a:ext>
             </a:extLst>
           </p:cNvPr>
@@ -5061,7 +5061,7 @@
           <p:cNvPr id="5" name="Date Placeholder 4">
             <a:extLst xmlns:a="http://schemas.openxmlformats.org/drawingml/2006/main">
               <a:ext uri="{FF2B5EF4-FFF2-40B4-BE49-F238E27FC236}">
-                <a16:creationId xmlns:a16="http://schemas.microsoft.com/office/drawing/2014/main" id="{29343385-179B-4A61-89B1-CCD04434F0EF}"/>
+                <a16:creationId xmlns:a16="http://schemas.microsoft.com/office/drawing/2014/main" id="{06DBD040-7444-4E30-ACD5-F0A8F59B3605}"/>
               </a:ext>
             </a:extLst>
           </p:cNvPr>
@@ -5088,7 +5088,7 @@
           <p:cNvPr id="6" name="Footer Placeholder 5">
             <a:extLst xmlns:a="http://schemas.openxmlformats.org/drawingml/2006/main">
               <a:ext uri="{FF2B5EF4-FFF2-40B4-BE49-F238E27FC236}">
-                <a16:creationId xmlns:a16="http://schemas.microsoft.com/office/drawing/2014/main" id="{B89E8517-DD2E-4CEF-9F27-910C9E685CBC}"/>
+                <a16:creationId xmlns:a16="http://schemas.microsoft.com/office/drawing/2014/main" id="{D6187241-083E-45E0-AEFE-F40CCD7C7A7E}"/>
               </a:ext>
             </a:extLst>
           </p:cNvPr>
@@ -5111,7 +5111,7 @@
           <p:cNvPr id="7" name="Slide Number Placeholder 6">
             <a:extLst xmlns:a="http://schemas.openxmlformats.org/drawingml/2006/main">
               <a:ext uri="{FF2B5EF4-FFF2-40B4-BE49-F238E27FC236}">
-                <a16:creationId xmlns:a16="http://schemas.microsoft.com/office/drawing/2014/main" id="{743BDD9C-F989-4310-8F1B-828C4B27EEB6}"/>
+                <a16:creationId xmlns:a16="http://schemas.microsoft.com/office/drawing/2014/main" id="{5CEAA597-9EB4-4CC1-9C36-353046B6A0D6}"/>
               </a:ext>
             </a:extLst>
           </p:cNvPr>
@@ -5160,7 +5160,7 @@
           <p:cNvPr id="2" name="Title Placeholder 1">
             <a:extLst xmlns:a="http://schemas.openxmlformats.org/drawingml/2006/main">
               <a:ext uri="{FF2B5EF4-FFF2-40B4-BE49-F238E27FC236}">
-                <a16:creationId xmlns:a16="http://schemas.microsoft.com/office/drawing/2014/main" id="{BCD45043-624D-4134-83E9-EF8ECE30E881}"/>
+                <a16:creationId xmlns:a16="http://schemas.microsoft.com/office/drawing/2014/main" id="{4C384342-6234-415C-B619-E34C6CE6D6E0}"/>
               </a:ext>
             </a:extLst>
           </p:cNvPr>
@@ -5197,7 +5197,7 @@
           <p:cNvPr id="3" name="Text Placeholder 2">
             <a:extLst xmlns:a="http://schemas.openxmlformats.org/drawingml/2006/main">
               <a:ext uri="{FF2B5EF4-FFF2-40B4-BE49-F238E27FC236}">
-                <a16:creationId xmlns:a16="http://schemas.microsoft.com/office/drawing/2014/main" id="{F19450BE-7F72-4DF3-8CEF-053948EF6DC5}"/>
+                <a16:creationId xmlns:a16="http://schemas.microsoft.com/office/drawing/2014/main" id="{76C759CA-182A-49B0-9674-824B8BA61D5B}"/>
               </a:ext>
             </a:extLst>
           </p:cNvPr>
@@ -5269,7 +5269,7 @@
           <p:cNvPr id="4" name="Date Placeholder 3">
             <a:extLst xmlns:a="http://schemas.openxmlformats.org/drawingml/2006/main">
               <a:ext uri="{FF2B5EF4-FFF2-40B4-BE49-F238E27FC236}">
-                <a16:creationId xmlns:a16="http://schemas.microsoft.com/office/drawing/2014/main" id="{852194C8-BE47-4089-9A2D-3E1DD7C14886}"/>
+                <a16:creationId xmlns:a16="http://schemas.microsoft.com/office/drawing/2014/main" id="{4A748D8C-2F3A-49B4-BEE8-130A361E1D27}"/>
               </a:ext>
             </a:extLst>
           </p:cNvPr>
@@ -5315,7 +5315,7 @@
           <p:cNvPr id="5" name="Footer Placeholder 4">
             <a:extLst xmlns:a="http://schemas.openxmlformats.org/drawingml/2006/main">
               <a:ext uri="{FF2B5EF4-FFF2-40B4-BE49-F238E27FC236}">
-                <a16:creationId xmlns:a16="http://schemas.microsoft.com/office/drawing/2014/main" id="{4ECC2920-88F2-41BA-950A-ED0D0BD0BE97}"/>
+                <a16:creationId xmlns:a16="http://schemas.microsoft.com/office/drawing/2014/main" id="{24C86139-6CF0-4AF1-9C71-C6A96F22DEDA}"/>
               </a:ext>
             </a:extLst>
           </p:cNvPr>
@@ -5357,7 +5357,7 @@
           <p:cNvPr id="6" name="Slide Number Placeholder 5">
             <a:extLst xmlns:a="http://schemas.openxmlformats.org/drawingml/2006/main">
               <a:ext uri="{FF2B5EF4-FFF2-40B4-BE49-F238E27FC236}">
-                <a16:creationId xmlns:a16="http://schemas.microsoft.com/office/drawing/2014/main" id="{B5F5A9E4-0685-4AE1-8AC4-680BF660A7BF}"/>
+                <a16:creationId xmlns:a16="http://schemas.microsoft.com/office/drawing/2014/main" id="{D049E3C2-540F-4754-B644-C3D70A7FE044}"/>
               </a:ext>
             </a:extLst>
           </p:cNvPr>
@@ -5402,17 +5402,17 @@
   </p:cSld>
   <p:clrMap bg1="lt1" tx1="dk1" bg2="lt2" tx2="dk2" accent1="accent1" accent2="accent2" accent3="accent3" accent4="accent4" accent5="accent5" accent6="accent6" hlink="hlink" folHlink="folHlink"/>
   <p:sldLayoutIdLst>
-    <p:sldLayoutId xmlns:r="http://schemas.openxmlformats.org/officeDocument/2006/relationships" id="2147483649" r:id="Rfd4910a4dd8f4f93"/>
-    <p:sldLayoutId xmlns:r="http://schemas.openxmlformats.org/officeDocument/2006/relationships" id="2147483650" r:id="R314a477a0cb04ae5"/>
-    <p:sldLayoutId xmlns:r="http://schemas.openxmlformats.org/officeDocument/2006/relationships" id="2147483651" r:id="R7374ac7ada9949b2"/>
-    <p:sldLayoutId xmlns:r="http://schemas.openxmlformats.org/officeDocument/2006/relationships" id="2147483652" r:id="R4176e67858a54b87"/>
-    <p:sldLayoutId xmlns:r="http://schemas.openxmlformats.org/officeDocument/2006/relationships" id="2147483653" r:id="R4a0ef159e27b4eaa"/>
-    <p:sldLayoutId xmlns:r="http://schemas.openxmlformats.org/officeDocument/2006/relationships" id="2147483654" r:id="R823a982437d0482a"/>
-    <p:sldLayoutId xmlns:r="http://schemas.openxmlformats.org/officeDocument/2006/relationships" id="2147483655" r:id="R9da1b0202a284606"/>
-    <p:sldLayoutId xmlns:r="http://schemas.openxmlformats.org/officeDocument/2006/relationships" id="2147483656" r:id="R928d7785d7bd4d21"/>
-    <p:sldLayoutId xmlns:r="http://schemas.openxmlformats.org/officeDocument/2006/relationships" id="2147483657" r:id="R95f435bb8aad4c83"/>
-    <p:sldLayoutId xmlns:r="http://schemas.openxmlformats.org/officeDocument/2006/relationships" id="2147483658" r:id="R8ccbcc27175e4072"/>
-    <p:sldLayoutId xmlns:r="http://schemas.openxmlformats.org/officeDocument/2006/relationships" id="2147483659" r:id="R9129885c422a40ed"/>
+    <p:sldLayoutId xmlns:r="http://schemas.openxmlformats.org/officeDocument/2006/relationships" id="2147483649" r:id="R291ddebb3bed49f3"/>
+    <p:sldLayoutId xmlns:r="http://schemas.openxmlformats.org/officeDocument/2006/relationships" id="2147483650" r:id="R4c9d395716ef4c5c"/>
+    <p:sldLayoutId xmlns:r="http://schemas.openxmlformats.org/officeDocument/2006/relationships" id="2147483651" r:id="Re8ad8a72c9a34e70"/>
+    <p:sldLayoutId xmlns:r="http://schemas.openxmlformats.org/officeDocument/2006/relationships" id="2147483652" r:id="R9ec4fecbc77545b3"/>
+    <p:sldLayoutId xmlns:r="http://schemas.openxmlformats.org/officeDocument/2006/relationships" id="2147483653" r:id="R86e2f14e5bb04172"/>
+    <p:sldLayoutId xmlns:r="http://schemas.openxmlformats.org/officeDocument/2006/relationships" id="2147483654" r:id="R9eeb2937c93c41d7"/>
+    <p:sldLayoutId xmlns:r="http://schemas.openxmlformats.org/officeDocument/2006/relationships" id="2147483655" r:id="R0c306871ddff4a6f"/>
+    <p:sldLayoutId xmlns:r="http://schemas.openxmlformats.org/officeDocument/2006/relationships" id="2147483656" r:id="R5562f513a9844664"/>
+    <p:sldLayoutId xmlns:r="http://schemas.openxmlformats.org/officeDocument/2006/relationships" id="2147483657" r:id="Rf38867b578c9435a"/>
+    <p:sldLayoutId xmlns:r="http://schemas.openxmlformats.org/officeDocument/2006/relationships" id="2147483658" r:id="Rddad1026b6eb4078"/>
+    <p:sldLayoutId xmlns:r="http://schemas.openxmlformats.org/officeDocument/2006/relationships" id="2147483659" r:id="R070085cf34804a6e"/>
   </p:sldLayoutIdLst>
   <p:txStyles>
     <p:titleStyle>
@@ -5965,7 +5965,7 @@
           <p:cNvPr id="2" name="Rectangle 1">
             <a:extLst xmlns:a="http://schemas.openxmlformats.org/drawingml/2006/main">
               <a:ext uri="{FF2B5EF4-FFF2-40B4-BE49-F238E27FC236}">
-                <a16:creationId xmlns:a16="http://schemas.microsoft.com/office/drawing/2014/main" id="{A491A51A-2B2B-40FF-BE97-BFD5E0F9001B}"/>
+                <a16:creationId xmlns:a16="http://schemas.microsoft.com/office/drawing/2014/main" id="{1E79EF10-3A32-4428-9E51-BEC93AD241EB}"/>
               </a:ext>
             </a:extLst>
           </p:cNvPr>
@@ -6020,7 +6020,7 @@
           <p:cNvPr id="3" name="TextBox 2">
             <a:extLst xmlns:a="http://schemas.openxmlformats.org/drawingml/2006/main">
               <a:ext uri="{FF2B5EF4-FFF2-40B4-BE49-F238E27FC236}">
-                <a16:creationId xmlns:a16="http://schemas.microsoft.com/office/drawing/2014/main" id="{E8E1EF4A-2A43-46E3-9638-71C76EC4F9AC}"/>
+                <a16:creationId xmlns:a16="http://schemas.microsoft.com/office/drawing/2014/main" id="{0D8C067B-3BB5-4550-9B69-3B5ABDB43A37}"/>
               </a:ext>
             </a:extLst>
           </p:cNvPr>
@@ -6067,7 +6067,7 @@
           <p:cNvPr id="4" name="TextBox 3">
             <a:extLst xmlns:a="http://schemas.openxmlformats.org/drawingml/2006/main">
               <a:ext uri="{FF2B5EF4-FFF2-40B4-BE49-F238E27FC236}">
-                <a16:creationId xmlns:a16="http://schemas.microsoft.com/office/drawing/2014/main" id="{F0DDC594-8B6E-48F7-AE20-D193E8D4F809}"/>
+                <a16:creationId xmlns:a16="http://schemas.microsoft.com/office/drawing/2014/main" id="{729351B3-9F72-444E-9F5B-F5709D0B3428}"/>
               </a:ext>
             </a:extLst>
           </p:cNvPr>
@@ -6115,7 +6115,7 @@
           <p:cNvPr id="5" name="TextBox 4">
             <a:extLst xmlns:a="http://schemas.openxmlformats.org/drawingml/2006/main">
               <a:ext uri="{FF2B5EF4-FFF2-40B4-BE49-F238E27FC236}">
-                <a16:creationId xmlns:a16="http://schemas.microsoft.com/office/drawing/2014/main" id="{0A8A771D-4A64-46C8-B67B-2D3B5CEE203D}"/>
+                <a16:creationId xmlns:a16="http://schemas.microsoft.com/office/drawing/2014/main" id="{FC4A383F-0153-4A30-BB37-A637676C0567}"/>
               </a:ext>
             </a:extLst>
           </p:cNvPr>
@@ -6162,7 +6162,7 @@
           <p:cNvPr id="6" name="Rectangle 5">
             <a:extLst xmlns:a="http://schemas.openxmlformats.org/drawingml/2006/main">
               <a:ext uri="{FF2B5EF4-FFF2-40B4-BE49-F238E27FC236}">
-                <a16:creationId xmlns:a16="http://schemas.microsoft.com/office/drawing/2014/main" id="{C5014030-F40E-447B-A7D0-A6DF7CB5933E}"/>
+                <a16:creationId xmlns:a16="http://schemas.microsoft.com/office/drawing/2014/main" id="{88EC7CF2-7AC7-43F6-BE0F-0433A5EDE922}"/>
               </a:ext>
             </a:extLst>
           </p:cNvPr>
@@ -6217,7 +6217,7 @@
           <p:cNvPr id="7" name="TextBox 6">
             <a:extLst xmlns:a="http://schemas.openxmlformats.org/drawingml/2006/main">
               <a:ext uri="{FF2B5EF4-FFF2-40B4-BE49-F238E27FC236}">
-                <a16:creationId xmlns:a16="http://schemas.microsoft.com/office/drawing/2014/main" id="{04962486-A390-4B31-84EE-FDCDBB06B7E6}"/>
+                <a16:creationId xmlns:a16="http://schemas.microsoft.com/office/drawing/2014/main" id="{0A97B801-9A45-4C39-B9B0-AA7F9F2FE18A}"/>
               </a:ext>
             </a:extLst>
           </p:cNvPr>
@@ -6264,7 +6264,7 @@
           <p:cNvPr id="8" name="TextBox 7">
             <a:extLst xmlns:a="http://schemas.openxmlformats.org/drawingml/2006/main">
               <a:ext uri="{FF2B5EF4-FFF2-40B4-BE49-F238E27FC236}">
-                <a16:creationId xmlns:a16="http://schemas.microsoft.com/office/drawing/2014/main" id="{18382014-FDC2-4EB5-9338-9BEF53DD35FE}"/>
+                <a16:creationId xmlns:a16="http://schemas.microsoft.com/office/drawing/2014/main" id="{2B3F5127-39EA-4EBE-B3EC-13A3DE2D3AB3}"/>
               </a:ext>
             </a:extLst>
           </p:cNvPr>
@@ -6301,7 +6301,7 @@
                 <a:ea typeface="Aptos"/>
                 <a:cs typeface="Aptos"/>
               </a:rPr>
-              <a:t>2026.07.24-19</a:t>
+              <a:t>2026.07.24-20</a:t>
             </a:r>
           </a:p>
         </p:txBody>
@@ -6311,7 +6311,7 @@
           <p:cNvPr id="9" name="TextBox 8">
             <a:extLst xmlns:a="http://schemas.openxmlformats.org/drawingml/2006/main">
               <a:ext uri="{FF2B5EF4-FFF2-40B4-BE49-F238E27FC236}">
-                <a16:creationId xmlns:a16="http://schemas.microsoft.com/office/drawing/2014/main" id="{6B4EDC56-3539-4EC3-9DC2-38FE855134C3}"/>
+                <a16:creationId xmlns:a16="http://schemas.microsoft.com/office/drawing/2014/main" id="{8F9F4DB6-A9FA-488B-B7D1-E7454C16B560}"/>
               </a:ext>
             </a:extLst>
           </p:cNvPr>
@@ -6359,7 +6359,7 @@
           <p:cNvPr id="10" name="TextBox 9">
             <a:extLst xmlns:a="http://schemas.openxmlformats.org/drawingml/2006/main">
               <a:ext uri="{FF2B5EF4-FFF2-40B4-BE49-F238E27FC236}">
-                <a16:creationId xmlns:a16="http://schemas.microsoft.com/office/drawing/2014/main" id="{A16E284B-C6FD-4DED-9190-20DC4D8D60BA}"/>
+                <a16:creationId xmlns:a16="http://schemas.microsoft.com/office/drawing/2014/main" id="{16D5C030-EE4A-45C0-A310-F9E3AB372BA6}"/>
               </a:ext>
             </a:extLst>
           </p:cNvPr>
@@ -6406,7 +6406,7 @@
           <p:cNvPr id="11" name="TextBox 10">
             <a:extLst xmlns:a="http://schemas.openxmlformats.org/drawingml/2006/main">
               <a:ext uri="{FF2B5EF4-FFF2-40B4-BE49-F238E27FC236}">
-                <a16:creationId xmlns:a16="http://schemas.microsoft.com/office/drawing/2014/main" id="{B3D2979F-56B9-4D5F-982C-09EBCC756F35}"/>
+                <a16:creationId xmlns:a16="http://schemas.microsoft.com/office/drawing/2014/main" id="{32E00FB2-1A0A-48AB-9588-D76AFDE1E495}"/>
               </a:ext>
             </a:extLst>
           </p:cNvPr>
@@ -6453,7 +6453,7 @@
           <p:cNvPr id="12" name="TextBox 11">
             <a:extLst xmlns:a="http://schemas.openxmlformats.org/drawingml/2006/main">
               <a:ext uri="{FF2B5EF4-FFF2-40B4-BE49-F238E27FC236}">
-                <a16:creationId xmlns:a16="http://schemas.microsoft.com/office/drawing/2014/main" id="{534D502D-4838-43AC-AB3B-392D5E247FC7}"/>
+                <a16:creationId xmlns:a16="http://schemas.microsoft.com/office/drawing/2014/main" id="{D0F93232-E3A0-4603-A473-103058E5DE5A}"/>
               </a:ext>
             </a:extLst>
           </p:cNvPr>
@@ -6500,7 +6500,7 @@
           <p:cNvPr id="13" name="TextBox 12">
             <a:extLst xmlns:a="http://schemas.openxmlformats.org/drawingml/2006/main">
               <a:ext uri="{FF2B5EF4-FFF2-40B4-BE49-F238E27FC236}">
-                <a16:creationId xmlns:a16="http://schemas.microsoft.com/office/drawing/2014/main" id="{68121853-2DEC-49D1-A988-553A44308DCB}"/>
+                <a16:creationId xmlns:a16="http://schemas.microsoft.com/office/drawing/2014/main" id="{C6A214FA-1B54-4EC0-A1FB-00447B418882}"/>
               </a:ext>
             </a:extLst>
           </p:cNvPr>
@@ -6545,7 +6545,7 @@
     </p:spTree>
     <p:extLst>
       <p:ext uri="{BB962C8B-B14F-4D97-AF65-F5344CB8AC3E}">
-        <p14:creationId xmlns:p14="http://schemas.microsoft.com/office/powerpoint/2010/main" val="768706212"/>
+        <p14:creationId xmlns:p14="http://schemas.microsoft.com/office/powerpoint/2010/main" val="1471576342"/>
       </p:ext>
     </p:extLst>
   </p:cSld>
@@ -6569,7 +6569,7 @@
           <p:cNvPr id="2" name="TextBox 1">
             <a:extLst xmlns:a="http://schemas.openxmlformats.org/drawingml/2006/main">
               <a:ext uri="{FF2B5EF4-FFF2-40B4-BE49-F238E27FC236}">
-                <a16:creationId xmlns:a16="http://schemas.microsoft.com/office/drawing/2014/main" id="{9155C3C5-B0B4-4755-932D-E6274B75BC77}"/>
+                <a16:creationId xmlns:a16="http://schemas.microsoft.com/office/drawing/2014/main" id="{1A104782-C470-48BF-9A79-7AB56D4726DF}"/>
               </a:ext>
             </a:extLst>
           </p:cNvPr>
@@ -6616,7 +6616,7 @@
           <p:cNvPr id="3" name="TextBox 2">
             <a:extLst xmlns:a="http://schemas.openxmlformats.org/drawingml/2006/main">
               <a:ext uri="{FF2B5EF4-FFF2-40B4-BE49-F238E27FC236}">
-                <a16:creationId xmlns:a16="http://schemas.microsoft.com/office/drawing/2014/main" id="{6FA7B210-17A4-4FA9-ACFC-187EF27DFF0B}"/>
+                <a16:creationId xmlns:a16="http://schemas.microsoft.com/office/drawing/2014/main" id="{B7BB011E-71D6-41FD-8745-0C3A7EC01A15}"/>
               </a:ext>
             </a:extLst>
           </p:cNvPr>
@@ -6663,7 +6663,7 @@
           <p:cNvPr id="4" name="Rectangle 3">
             <a:extLst xmlns:a="http://schemas.openxmlformats.org/drawingml/2006/main">
               <a:ext uri="{FF2B5EF4-FFF2-40B4-BE49-F238E27FC236}">
-                <a16:creationId xmlns:a16="http://schemas.microsoft.com/office/drawing/2014/main" id="{12D1C097-AF0D-4B0C-A8EA-F519C85F4E42}"/>
+                <a16:creationId xmlns:a16="http://schemas.microsoft.com/office/drawing/2014/main" id="{9F170D33-D7F8-4591-9612-53AC6131253A}"/>
               </a:ext>
             </a:extLst>
           </p:cNvPr>
@@ -6718,7 +6718,7 @@
           <p:cNvPr id="5" name="Rectangle 4">
             <a:extLst xmlns:a="http://schemas.openxmlformats.org/drawingml/2006/main">
               <a:ext uri="{FF2B5EF4-FFF2-40B4-BE49-F238E27FC236}">
-                <a16:creationId xmlns:a16="http://schemas.microsoft.com/office/drawing/2014/main" id="{9AA830B8-2470-4545-965B-156FF2F89114}"/>
+                <a16:creationId xmlns:a16="http://schemas.microsoft.com/office/drawing/2014/main" id="{3F250A08-A9F8-4576-B8A5-F72FA9CFE8F9}"/>
               </a:ext>
             </a:extLst>
           </p:cNvPr>
@@ -6773,7 +6773,7 @@
           <p:cNvPr id="6" name="TextBox 5">
             <a:extLst xmlns:a="http://schemas.openxmlformats.org/drawingml/2006/main">
               <a:ext uri="{FF2B5EF4-FFF2-40B4-BE49-F238E27FC236}">
-                <a16:creationId xmlns:a16="http://schemas.microsoft.com/office/drawing/2014/main" id="{76F9BF21-777F-42F7-9BF8-21EC179278BB}"/>
+                <a16:creationId xmlns:a16="http://schemas.microsoft.com/office/drawing/2014/main" id="{2241A276-C6EC-4870-AA36-514C837706FC}"/>
               </a:ext>
             </a:extLst>
           </p:cNvPr>
@@ -6810,7 +6810,7 @@
                 <a:ea typeface="Aptos"/>
                 <a:cs typeface="Aptos"/>
               </a:rPr>
-              <a:t>Julkinen riippumaton evidenssikooste · 2026.07.24-19 · 2026-07-24 · Lähteet: WIPO licensing; dispute resolution; IPscore</a:t>
+              <a:t>Julkinen riippumaton evidenssikooste · 2026.07.24-20 · 2026-07-24 · Lähteet: WIPO licensing; dispute resolution; IPscore</a:t>
             </a:r>
           </a:p>
         </p:txBody>
@@ -6820,7 +6820,7 @@
           <p:cNvPr id="7" name="TextBox 6">
             <a:extLst xmlns:a="http://schemas.openxmlformats.org/drawingml/2006/main">
               <a:ext uri="{FF2B5EF4-FFF2-40B4-BE49-F238E27FC236}">
-                <a16:creationId xmlns:a16="http://schemas.microsoft.com/office/drawing/2014/main" id="{BB474620-03FC-4BEA-B0A2-FB8F08681F56}"/>
+                <a16:creationId xmlns:a16="http://schemas.microsoft.com/office/drawing/2014/main" id="{416B744E-7C64-45E4-9BC1-7F22B1548313}"/>
               </a:ext>
             </a:extLst>
           </p:cNvPr>
@@ -6867,7 +6867,7 @@
           <p:cNvPr id="8" name="Rounded Rectangle 7">
             <a:extLst xmlns:a="http://schemas.openxmlformats.org/drawingml/2006/main">
               <a:ext uri="{FF2B5EF4-FFF2-40B4-BE49-F238E27FC236}">
-                <a16:creationId xmlns:a16="http://schemas.microsoft.com/office/drawing/2014/main" id="{FC8D5AC4-D135-47AC-8881-9133AFC2CF37}"/>
+                <a16:creationId xmlns:a16="http://schemas.microsoft.com/office/drawing/2014/main" id="{F90E1E07-9E05-4A94-A05B-836FC6BF3FD7}"/>
               </a:ext>
             </a:extLst>
           </p:cNvPr>
@@ -6924,7 +6924,7 @@
           <p:cNvPr id="9" name="TextBox 8">
             <a:extLst xmlns:a="http://schemas.openxmlformats.org/drawingml/2006/main">
               <a:ext uri="{FF2B5EF4-FFF2-40B4-BE49-F238E27FC236}">
-                <a16:creationId xmlns:a16="http://schemas.microsoft.com/office/drawing/2014/main" id="{9627F357-88C5-4D85-A62D-63921F55CFA6}"/>
+                <a16:creationId xmlns:a16="http://schemas.microsoft.com/office/drawing/2014/main" id="{8640BA9B-CD68-42B7-B359-115EDF363DA8}"/>
               </a:ext>
             </a:extLst>
           </p:cNvPr>
@@ -6971,7 +6971,7 @@
           <p:cNvPr id="10" name="TextBox 9">
             <a:extLst xmlns:a="http://schemas.openxmlformats.org/drawingml/2006/main">
               <a:ext uri="{FF2B5EF4-FFF2-40B4-BE49-F238E27FC236}">
-                <a16:creationId xmlns:a16="http://schemas.microsoft.com/office/drawing/2014/main" id="{B7C74545-38C3-4C75-9ECE-FBD341F2F44C}"/>
+                <a16:creationId xmlns:a16="http://schemas.microsoft.com/office/drawing/2014/main" id="{F7A03461-6541-47AA-9CD6-4DF96F12E758}"/>
               </a:ext>
             </a:extLst>
           </p:cNvPr>
@@ -7018,7 +7018,7 @@
           <p:cNvPr id="11" name="TextBox 10">
             <a:extLst xmlns:a="http://schemas.openxmlformats.org/drawingml/2006/main">
               <a:ext uri="{FF2B5EF4-FFF2-40B4-BE49-F238E27FC236}">
-                <a16:creationId xmlns:a16="http://schemas.microsoft.com/office/drawing/2014/main" id="{06DCA7F9-CECA-4682-882C-41110BDAA33D}"/>
+                <a16:creationId xmlns:a16="http://schemas.microsoft.com/office/drawing/2014/main" id="{1081D82B-2A97-44DB-8C25-9D6D58EF6F16}"/>
               </a:ext>
             </a:extLst>
           </p:cNvPr>
@@ -7065,7 +7065,7 @@
           <p:cNvPr id="12" name="Rounded Rectangle 11">
             <a:extLst xmlns:a="http://schemas.openxmlformats.org/drawingml/2006/main">
               <a:ext uri="{FF2B5EF4-FFF2-40B4-BE49-F238E27FC236}">
-                <a16:creationId xmlns:a16="http://schemas.microsoft.com/office/drawing/2014/main" id="{B639B614-8878-4E85-A12A-61E3F8888401}"/>
+                <a16:creationId xmlns:a16="http://schemas.microsoft.com/office/drawing/2014/main" id="{4C5A2EB2-3BAE-417D-8CFB-7874DC2EC3EB}"/>
               </a:ext>
             </a:extLst>
           </p:cNvPr>
@@ -7122,7 +7122,7 @@
           <p:cNvPr id="13" name="TextBox 12">
             <a:extLst xmlns:a="http://schemas.openxmlformats.org/drawingml/2006/main">
               <a:ext uri="{FF2B5EF4-FFF2-40B4-BE49-F238E27FC236}">
-                <a16:creationId xmlns:a16="http://schemas.microsoft.com/office/drawing/2014/main" id="{891C9C3F-9C9D-49C5-8139-D92AAC7E931D}"/>
+                <a16:creationId xmlns:a16="http://schemas.microsoft.com/office/drawing/2014/main" id="{119F1579-6F1E-4BE9-A569-19D030BFE4EC}"/>
               </a:ext>
             </a:extLst>
           </p:cNvPr>
@@ -7169,7 +7169,7 @@
           <p:cNvPr id="14" name="TextBox 13">
             <a:extLst xmlns:a="http://schemas.openxmlformats.org/drawingml/2006/main">
               <a:ext uri="{FF2B5EF4-FFF2-40B4-BE49-F238E27FC236}">
-                <a16:creationId xmlns:a16="http://schemas.microsoft.com/office/drawing/2014/main" id="{2CDA2A9B-58F5-4F1A-B3F6-DD5B8FE7813A}"/>
+                <a16:creationId xmlns:a16="http://schemas.microsoft.com/office/drawing/2014/main" id="{6CE07C7D-F2D8-495A-928C-680FCCD96491}"/>
               </a:ext>
             </a:extLst>
           </p:cNvPr>
@@ -7216,7 +7216,7 @@
           <p:cNvPr id="15" name="TextBox 14">
             <a:extLst xmlns:a="http://schemas.openxmlformats.org/drawingml/2006/main">
               <a:ext uri="{FF2B5EF4-FFF2-40B4-BE49-F238E27FC236}">
-                <a16:creationId xmlns:a16="http://schemas.microsoft.com/office/drawing/2014/main" id="{E352FEC9-5502-4A2F-BA7E-D9F8491B518F}"/>
+                <a16:creationId xmlns:a16="http://schemas.microsoft.com/office/drawing/2014/main" id="{1F279A80-DCE8-483C-9909-C2846D9D3172}"/>
               </a:ext>
             </a:extLst>
           </p:cNvPr>
@@ -7263,7 +7263,7 @@
           <p:cNvPr id="16" name="Rounded Rectangle 15">
             <a:extLst xmlns:a="http://schemas.openxmlformats.org/drawingml/2006/main">
               <a:ext uri="{FF2B5EF4-FFF2-40B4-BE49-F238E27FC236}">
-                <a16:creationId xmlns:a16="http://schemas.microsoft.com/office/drawing/2014/main" id="{21BFC533-3ECF-4A23-8A05-59B9F5C700E8}"/>
+                <a16:creationId xmlns:a16="http://schemas.microsoft.com/office/drawing/2014/main" id="{72228F51-22CF-47F9-BCEF-35F3E983A1C8}"/>
               </a:ext>
             </a:extLst>
           </p:cNvPr>
@@ -7320,7 +7320,7 @@
           <p:cNvPr id="17" name="TextBox 16">
             <a:extLst xmlns:a="http://schemas.openxmlformats.org/drawingml/2006/main">
               <a:ext uri="{FF2B5EF4-FFF2-40B4-BE49-F238E27FC236}">
-                <a16:creationId xmlns:a16="http://schemas.microsoft.com/office/drawing/2014/main" id="{1ED369A5-C143-4120-87D8-F4D9BB750FAB}"/>
+                <a16:creationId xmlns:a16="http://schemas.microsoft.com/office/drawing/2014/main" id="{27FC902E-44D6-4970-8BE2-89431CBFC75B}"/>
               </a:ext>
             </a:extLst>
           </p:cNvPr>
@@ -7367,7 +7367,7 @@
           <p:cNvPr id="18" name="TextBox 17">
             <a:extLst xmlns:a="http://schemas.openxmlformats.org/drawingml/2006/main">
               <a:ext uri="{FF2B5EF4-FFF2-40B4-BE49-F238E27FC236}">
-                <a16:creationId xmlns:a16="http://schemas.microsoft.com/office/drawing/2014/main" id="{759011D4-1005-45BC-BB8A-D53D8AF92CBC}"/>
+                <a16:creationId xmlns:a16="http://schemas.microsoft.com/office/drawing/2014/main" id="{B5507FC2-76CF-4C62-A0F1-769038200BBC}"/>
               </a:ext>
             </a:extLst>
           </p:cNvPr>
@@ -7414,7 +7414,7 @@
           <p:cNvPr id="19" name="TextBox 18">
             <a:extLst xmlns:a="http://schemas.openxmlformats.org/drawingml/2006/main">
               <a:ext uri="{FF2B5EF4-FFF2-40B4-BE49-F238E27FC236}">
-                <a16:creationId xmlns:a16="http://schemas.microsoft.com/office/drawing/2014/main" id="{D76F008E-3325-4FDC-B08C-801FEED8E44E}"/>
+                <a16:creationId xmlns:a16="http://schemas.microsoft.com/office/drawing/2014/main" id="{5F6AA1FF-ED09-426C-B86A-A86AE05D753F}"/>
               </a:ext>
             </a:extLst>
           </p:cNvPr>
@@ -7461,7 +7461,7 @@
           <p:cNvPr id="20" name="Rounded Rectangle 19">
             <a:extLst xmlns:a="http://schemas.openxmlformats.org/drawingml/2006/main">
               <a:ext uri="{FF2B5EF4-FFF2-40B4-BE49-F238E27FC236}">
-                <a16:creationId xmlns:a16="http://schemas.microsoft.com/office/drawing/2014/main" id="{2EEF270E-4E1D-4D47-9882-1ADBD56CDD5C}"/>
+                <a16:creationId xmlns:a16="http://schemas.microsoft.com/office/drawing/2014/main" id="{6B1C309F-B6A9-4593-81B5-F28D27DB641B}"/>
               </a:ext>
             </a:extLst>
           </p:cNvPr>
@@ -7518,7 +7518,7 @@
           <p:cNvPr id="21" name="TextBox 20">
             <a:extLst xmlns:a="http://schemas.openxmlformats.org/drawingml/2006/main">
               <a:ext uri="{FF2B5EF4-FFF2-40B4-BE49-F238E27FC236}">
-                <a16:creationId xmlns:a16="http://schemas.microsoft.com/office/drawing/2014/main" id="{3CE81F42-4B9B-4C53-BEC4-534322F9DB19}"/>
+                <a16:creationId xmlns:a16="http://schemas.microsoft.com/office/drawing/2014/main" id="{4B39D2A2-804F-4BDB-B348-E4E2A9950ADA}"/>
               </a:ext>
             </a:extLst>
           </p:cNvPr>
@@ -7565,7 +7565,7 @@
           <p:cNvPr id="22" name="TextBox 21">
             <a:extLst xmlns:a="http://schemas.openxmlformats.org/drawingml/2006/main">
               <a:ext uri="{FF2B5EF4-FFF2-40B4-BE49-F238E27FC236}">
-                <a16:creationId xmlns:a16="http://schemas.microsoft.com/office/drawing/2014/main" id="{FF3A6044-06C5-44C8-9EC4-0DBD9A45303B}"/>
+                <a16:creationId xmlns:a16="http://schemas.microsoft.com/office/drawing/2014/main" id="{9534F423-7792-4537-9F01-933D5228071A}"/>
               </a:ext>
             </a:extLst>
           </p:cNvPr>
@@ -7612,7 +7612,7 @@
           <p:cNvPr id="23" name="TextBox 22">
             <a:extLst xmlns:a="http://schemas.openxmlformats.org/drawingml/2006/main">
               <a:ext uri="{FF2B5EF4-FFF2-40B4-BE49-F238E27FC236}">
-                <a16:creationId xmlns:a16="http://schemas.microsoft.com/office/drawing/2014/main" id="{8954A087-FEAD-4256-89B8-24F438762215}"/>
+                <a16:creationId xmlns:a16="http://schemas.microsoft.com/office/drawing/2014/main" id="{822B1ADC-D18F-4165-BE67-BA5C7856C0A7}"/>
               </a:ext>
             </a:extLst>
           </p:cNvPr>
@@ -7659,7 +7659,7 @@
           <p:cNvPr id="24" name="TextBox 23">
             <a:extLst xmlns:a="http://schemas.openxmlformats.org/drawingml/2006/main">
               <a:ext uri="{FF2B5EF4-FFF2-40B4-BE49-F238E27FC236}">
-                <a16:creationId xmlns:a16="http://schemas.microsoft.com/office/drawing/2014/main" id="{CB4A2568-8830-4A29-AB0B-748DD0FD027B}"/>
+                <a16:creationId xmlns:a16="http://schemas.microsoft.com/office/drawing/2014/main" id="{A4714266-CC1C-4FF9-9417-40FCEA52AC01}"/>
               </a:ext>
             </a:extLst>
           </p:cNvPr>
@@ -7704,7 +7704,7 @@
     </p:spTree>
     <p:extLst>
       <p:ext uri="{BB962C8B-B14F-4D97-AF65-F5344CB8AC3E}">
-        <p14:creationId xmlns:p14="http://schemas.microsoft.com/office/powerpoint/2010/main" val="1665325916"/>
+        <p14:creationId xmlns:p14="http://schemas.microsoft.com/office/powerpoint/2010/main" val="1205313060"/>
       </p:ext>
     </p:extLst>
   </p:cSld>
@@ -7728,7 +7728,7 @@
           <p:cNvPr id="2" name="TextBox 1">
             <a:extLst xmlns:a="http://schemas.openxmlformats.org/drawingml/2006/main">
               <a:ext uri="{FF2B5EF4-FFF2-40B4-BE49-F238E27FC236}">
-                <a16:creationId xmlns:a16="http://schemas.microsoft.com/office/drawing/2014/main" id="{0160EEC1-1CB6-4B04-A8F0-833901596611}"/>
+                <a16:creationId xmlns:a16="http://schemas.microsoft.com/office/drawing/2014/main" id="{3B6F0249-95C0-42FB-B724-5D75B3937EC7}"/>
               </a:ext>
             </a:extLst>
           </p:cNvPr>
@@ -7775,7 +7775,7 @@
           <p:cNvPr id="3" name="TextBox 2">
             <a:extLst xmlns:a="http://schemas.openxmlformats.org/drawingml/2006/main">
               <a:ext uri="{FF2B5EF4-FFF2-40B4-BE49-F238E27FC236}">
-                <a16:creationId xmlns:a16="http://schemas.microsoft.com/office/drawing/2014/main" id="{CDC2FA44-1393-4D50-975F-A95BD44D3276}"/>
+                <a16:creationId xmlns:a16="http://schemas.microsoft.com/office/drawing/2014/main" id="{CC2655B9-4FD5-40D4-96E5-014C3FD101CB}"/>
               </a:ext>
             </a:extLst>
           </p:cNvPr>
@@ -7822,7 +7822,7 @@
           <p:cNvPr id="4" name="Rectangle 3">
             <a:extLst xmlns:a="http://schemas.openxmlformats.org/drawingml/2006/main">
               <a:ext uri="{FF2B5EF4-FFF2-40B4-BE49-F238E27FC236}">
-                <a16:creationId xmlns:a16="http://schemas.microsoft.com/office/drawing/2014/main" id="{86BD743C-DCD6-4ACB-B935-E6CF6DC4BD17}"/>
+                <a16:creationId xmlns:a16="http://schemas.microsoft.com/office/drawing/2014/main" id="{DF6F35BA-9A58-4424-91F8-C7F759A7DCF5}"/>
               </a:ext>
             </a:extLst>
           </p:cNvPr>
@@ -7877,7 +7877,7 @@
           <p:cNvPr id="5" name="Rectangle 4">
             <a:extLst xmlns:a="http://schemas.openxmlformats.org/drawingml/2006/main">
               <a:ext uri="{FF2B5EF4-FFF2-40B4-BE49-F238E27FC236}">
-                <a16:creationId xmlns:a16="http://schemas.microsoft.com/office/drawing/2014/main" id="{0E38E830-5406-4A24-A8A6-CDF8AA377DB1}"/>
+                <a16:creationId xmlns:a16="http://schemas.microsoft.com/office/drawing/2014/main" id="{6E290752-CEA7-4B5E-867B-930822036CBC}"/>
               </a:ext>
             </a:extLst>
           </p:cNvPr>
@@ -7932,7 +7932,7 @@
           <p:cNvPr id="6" name="TextBox 5">
             <a:extLst xmlns:a="http://schemas.openxmlformats.org/drawingml/2006/main">
               <a:ext uri="{FF2B5EF4-FFF2-40B4-BE49-F238E27FC236}">
-                <a16:creationId xmlns:a16="http://schemas.microsoft.com/office/drawing/2014/main" id="{22A286C8-56C0-45B3-BD63-F99EBF116888}"/>
+                <a16:creationId xmlns:a16="http://schemas.microsoft.com/office/drawing/2014/main" id="{91B5EDA9-F873-40AA-83DF-2328419DDE55}"/>
               </a:ext>
             </a:extLst>
           </p:cNvPr>
@@ -7969,7 +7969,7 @@
                 <a:ea typeface="Aptos"/>
                 <a:cs typeface="Aptos"/>
               </a:rPr>
-              <a:t>Julkinen riippumaton evidenssikooste · 2026.07.24-19 · 2026-07-24 · Lähteet: WIPO IP valuation; Market-values</a:t>
+              <a:t>Julkinen riippumaton evidenssikooste · 2026.07.24-20 · 2026-07-24 · Lähteet: WIPO IP valuation; Market-values</a:t>
             </a:r>
           </a:p>
         </p:txBody>
@@ -7979,7 +7979,7 @@
           <p:cNvPr id="7" name="TextBox 6">
             <a:extLst xmlns:a="http://schemas.openxmlformats.org/drawingml/2006/main">
               <a:ext uri="{FF2B5EF4-FFF2-40B4-BE49-F238E27FC236}">
-                <a16:creationId xmlns:a16="http://schemas.microsoft.com/office/drawing/2014/main" id="{5E519554-98CE-4B56-8084-FCBE3CCAC4D1}"/>
+                <a16:creationId xmlns:a16="http://schemas.microsoft.com/office/drawing/2014/main" id="{42C5FE7F-E2F4-4535-9618-5830DC3EA027}"/>
               </a:ext>
             </a:extLst>
           </p:cNvPr>
@@ -8549,7 +8549,7 @@
           <p:cNvPr id="9" name="TextBox 8">
             <a:extLst xmlns:a="http://schemas.openxmlformats.org/drawingml/2006/main">
               <a:ext uri="{FF2B5EF4-FFF2-40B4-BE49-F238E27FC236}">
-                <a16:creationId xmlns:a16="http://schemas.microsoft.com/office/drawing/2014/main" id="{0689D57B-AD57-4FF1-A251-44C28BD4353E}"/>
+                <a16:creationId xmlns:a16="http://schemas.microsoft.com/office/drawing/2014/main" id="{DD918DA4-251F-4877-896A-D239CDAB2ADC}"/>
               </a:ext>
             </a:extLst>
           </p:cNvPr>
@@ -8594,7 +8594,7 @@
     </p:spTree>
     <p:extLst>
       <p:ext uri="{BB962C8B-B14F-4D97-AF65-F5344CB8AC3E}">
-        <p14:creationId xmlns:p14="http://schemas.microsoft.com/office/powerpoint/2010/main" val="1492757109"/>
+        <p14:creationId xmlns:p14="http://schemas.microsoft.com/office/powerpoint/2010/main" val="781543788"/>
       </p:ext>
     </p:extLst>
   </p:cSld>
@@ -8625,7 +8625,7 @@
           <p:cNvPr id="2" name="TextBox 1">
             <a:extLst xmlns:a="http://schemas.openxmlformats.org/drawingml/2006/main">
               <a:ext uri="{FF2B5EF4-FFF2-40B4-BE49-F238E27FC236}">
-                <a16:creationId xmlns:a16="http://schemas.microsoft.com/office/drawing/2014/main" id="{C69BB9E9-8B18-4DC4-B2FF-FE82B9A859ED}"/>
+                <a16:creationId xmlns:a16="http://schemas.microsoft.com/office/drawing/2014/main" id="{A31E2C39-C986-4657-89C8-196B391F26DD}"/>
               </a:ext>
             </a:extLst>
           </p:cNvPr>
@@ -8672,7 +8672,7 @@
           <p:cNvPr id="3" name="TextBox 2">
             <a:extLst xmlns:a="http://schemas.openxmlformats.org/drawingml/2006/main">
               <a:ext uri="{FF2B5EF4-FFF2-40B4-BE49-F238E27FC236}">
-                <a16:creationId xmlns:a16="http://schemas.microsoft.com/office/drawing/2014/main" id="{EE18C452-8267-4066-B470-6F620CD25CDF}"/>
+                <a16:creationId xmlns:a16="http://schemas.microsoft.com/office/drawing/2014/main" id="{66F675B7-4C86-40DE-BF86-5DBF25F96640}"/>
               </a:ext>
             </a:extLst>
           </p:cNvPr>
@@ -8719,7 +8719,7 @@
           <p:cNvPr id="4" name="TextBox 3">
             <a:extLst xmlns:a="http://schemas.openxmlformats.org/drawingml/2006/main">
               <a:ext uri="{FF2B5EF4-FFF2-40B4-BE49-F238E27FC236}">
-                <a16:creationId xmlns:a16="http://schemas.microsoft.com/office/drawing/2014/main" id="{659C6BAE-AE3F-432B-B2B0-DB3F2A66F440}"/>
+                <a16:creationId xmlns:a16="http://schemas.microsoft.com/office/drawing/2014/main" id="{496EA88E-51B4-4E0A-9238-F5287E801A69}"/>
               </a:ext>
             </a:extLst>
           </p:cNvPr>
@@ -8860,7 +8860,7 @@
           <p:cNvPr id="5" name="TextBox 4">
             <a:extLst xmlns:a="http://schemas.openxmlformats.org/drawingml/2006/main">
               <a:ext uri="{FF2B5EF4-FFF2-40B4-BE49-F238E27FC236}">
-                <a16:creationId xmlns:a16="http://schemas.microsoft.com/office/drawing/2014/main" id="{19431EC9-EF20-46D7-B931-8F6861DC7224}"/>
+                <a16:creationId xmlns:a16="http://schemas.microsoft.com/office/drawing/2014/main" id="{4FC7C349-0612-48B3-ADEC-0F08CCD1C261}"/>
               </a:ext>
             </a:extLst>
           </p:cNvPr>
@@ -8897,7 +8897,7 @@
                 <a:ea typeface="Aptos"/>
                 <a:cs typeface="Aptos"/>
               </a:rPr>
-              <a:t>Versio 2026.07.24-19 · 2026-07-24 · 12 / 12</a:t>
+              <a:t>Versio 2026.07.24-20 · 2026-07-24 · 12 / 12</a:t>
             </a:r>
           </a:p>
         </p:txBody>
@@ -8907,7 +8907,7 @@
           <p:cNvPr id="6" name="TextBox 5">
             <a:extLst xmlns:a="http://schemas.openxmlformats.org/drawingml/2006/main">
               <a:ext uri="{FF2B5EF4-FFF2-40B4-BE49-F238E27FC236}">
-                <a16:creationId xmlns:a16="http://schemas.microsoft.com/office/drawing/2014/main" id="{5D142969-3527-4283-8C89-40EF37855945}"/>
+                <a16:creationId xmlns:a16="http://schemas.microsoft.com/office/drawing/2014/main" id="{728B4680-D33A-47F0-B345-F06B76F39E23}"/>
               </a:ext>
             </a:extLst>
           </p:cNvPr>
@@ -8952,7 +8952,7 @@
     </p:spTree>
     <p:extLst>
       <p:ext uri="{BB962C8B-B14F-4D97-AF65-F5344CB8AC3E}">
-        <p14:creationId xmlns:p14="http://schemas.microsoft.com/office/powerpoint/2010/main" val="1451591129"/>
+        <p14:creationId xmlns:p14="http://schemas.microsoft.com/office/powerpoint/2010/main" val="1935803443"/>
       </p:ext>
     </p:extLst>
   </p:cSld>
@@ -8976,7 +8976,7 @@
           <p:cNvPr id="2" name="TextBox 1">
             <a:extLst xmlns:a="http://schemas.openxmlformats.org/drawingml/2006/main">
               <a:ext uri="{FF2B5EF4-FFF2-40B4-BE49-F238E27FC236}">
-                <a16:creationId xmlns:a16="http://schemas.microsoft.com/office/drawing/2014/main" id="{F4EBB72F-DD85-4868-A412-863AB856535E}"/>
+                <a16:creationId xmlns:a16="http://schemas.microsoft.com/office/drawing/2014/main" id="{67B9DDC1-0BF3-406C-A09D-D31491A02161}"/>
               </a:ext>
             </a:extLst>
           </p:cNvPr>
@@ -9023,7 +9023,7 @@
           <p:cNvPr id="3" name="TextBox 2">
             <a:extLst xmlns:a="http://schemas.openxmlformats.org/drawingml/2006/main">
               <a:ext uri="{FF2B5EF4-FFF2-40B4-BE49-F238E27FC236}">
-                <a16:creationId xmlns:a16="http://schemas.microsoft.com/office/drawing/2014/main" id="{AEA0F0E4-E5B2-4837-96FF-A302393DDEF6}"/>
+                <a16:creationId xmlns:a16="http://schemas.microsoft.com/office/drawing/2014/main" id="{55EE53D8-BEEA-453B-B5D7-08DBD1E14A5B}"/>
               </a:ext>
             </a:extLst>
           </p:cNvPr>
@@ -9070,7 +9070,7 @@
           <p:cNvPr id="4" name="Rectangle 3">
             <a:extLst xmlns:a="http://schemas.openxmlformats.org/drawingml/2006/main">
               <a:ext uri="{FF2B5EF4-FFF2-40B4-BE49-F238E27FC236}">
-                <a16:creationId xmlns:a16="http://schemas.microsoft.com/office/drawing/2014/main" id="{7C4C7F52-8F88-47A8-9F8C-3A8A210C782E}"/>
+                <a16:creationId xmlns:a16="http://schemas.microsoft.com/office/drawing/2014/main" id="{576A6C41-2C27-406C-A864-AFB47457E1CC}"/>
               </a:ext>
             </a:extLst>
           </p:cNvPr>
@@ -9125,7 +9125,7 @@
           <p:cNvPr id="5" name="Rectangle 4">
             <a:extLst xmlns:a="http://schemas.openxmlformats.org/drawingml/2006/main">
               <a:ext uri="{FF2B5EF4-FFF2-40B4-BE49-F238E27FC236}">
-                <a16:creationId xmlns:a16="http://schemas.microsoft.com/office/drawing/2014/main" id="{515655D1-531B-4649-BD3F-8982D12B6219}"/>
+                <a16:creationId xmlns:a16="http://schemas.microsoft.com/office/drawing/2014/main" id="{01E86DFD-F4BA-440C-B79E-AE4B93FBE219}"/>
               </a:ext>
             </a:extLst>
           </p:cNvPr>
@@ -9180,7 +9180,7 @@
           <p:cNvPr id="6" name="TextBox 5">
             <a:extLst xmlns:a="http://schemas.openxmlformats.org/drawingml/2006/main">
               <a:ext uri="{FF2B5EF4-FFF2-40B4-BE49-F238E27FC236}">
-                <a16:creationId xmlns:a16="http://schemas.microsoft.com/office/drawing/2014/main" id="{9AC33421-B17A-4E57-AF17-25B45739BDF3}"/>
+                <a16:creationId xmlns:a16="http://schemas.microsoft.com/office/drawing/2014/main" id="{CEE17D64-4FBD-4305-B8E9-C665E00DF381}"/>
               </a:ext>
             </a:extLst>
           </p:cNvPr>
@@ -9217,7 +9217,7 @@
                 <a:ea typeface="Aptos"/>
                 <a:cs typeface="Aptos"/>
               </a:rPr>
-              <a:t>Julkinen riippumaton evidenssikooste · 2026.07.24-19 · 2026-07-24 · Lähteet: Atlas readiness; WIPO</a:t>
+              <a:t>Julkinen riippumaton evidenssikooste · 2026.07.24-20 · 2026-07-24 · Lähteet: Atlas readiness; WIPO</a:t>
             </a:r>
           </a:p>
         </p:txBody>
@@ -9227,7 +9227,7 @@
           <p:cNvPr id="7" name="TextBox 6">
             <a:extLst xmlns:a="http://schemas.openxmlformats.org/drawingml/2006/main">
               <a:ext uri="{FF2B5EF4-FFF2-40B4-BE49-F238E27FC236}">
-                <a16:creationId xmlns:a16="http://schemas.microsoft.com/office/drawing/2014/main" id="{82993244-A276-43DD-A560-06C0AF88CE2F}"/>
+                <a16:creationId xmlns:a16="http://schemas.microsoft.com/office/drawing/2014/main" id="{1C25A16E-D6A7-43C5-9F77-468C6F30BC54}"/>
               </a:ext>
             </a:extLst>
           </p:cNvPr>
@@ -9274,7 +9274,7 @@
           <p:cNvPr id="8" name="TextBox 7">
             <a:extLst xmlns:a="http://schemas.openxmlformats.org/drawingml/2006/main">
               <a:ext uri="{FF2B5EF4-FFF2-40B4-BE49-F238E27FC236}">
-                <a16:creationId xmlns:a16="http://schemas.microsoft.com/office/drawing/2014/main" id="{E6EAEBF5-E566-487C-874D-D27931AD1E0F}"/>
+                <a16:creationId xmlns:a16="http://schemas.microsoft.com/office/drawing/2014/main" id="{4A6602E9-BB91-40E8-A4C7-1926C14140D6}"/>
               </a:ext>
             </a:extLst>
           </p:cNvPr>
@@ -9321,7 +9321,7 @@
           <p:cNvPr id="9" name="TextBox 8">
             <a:extLst xmlns:a="http://schemas.openxmlformats.org/drawingml/2006/main">
               <a:ext uri="{FF2B5EF4-FFF2-40B4-BE49-F238E27FC236}">
-                <a16:creationId xmlns:a16="http://schemas.microsoft.com/office/drawing/2014/main" id="{AE5395B4-3DE7-4E35-A16C-3D2A28799541}"/>
+                <a16:creationId xmlns:a16="http://schemas.microsoft.com/office/drawing/2014/main" id="{CFB2AEA9-55A2-455D-BB92-9B6AE5302FDA}"/>
               </a:ext>
             </a:extLst>
           </p:cNvPr>
@@ -9418,7 +9418,7 @@
           <p:cNvPr id="10" name="Rounded Rectangle 9">
             <a:extLst xmlns:a="http://schemas.openxmlformats.org/drawingml/2006/main">
               <a:ext uri="{FF2B5EF4-FFF2-40B4-BE49-F238E27FC236}">
-                <a16:creationId xmlns:a16="http://schemas.microsoft.com/office/drawing/2014/main" id="{4A12F4FB-E5AE-4FAB-A08E-50A6D7382802}"/>
+                <a16:creationId xmlns:a16="http://schemas.microsoft.com/office/drawing/2014/main" id="{96E76E7D-18CD-4900-8735-513F06E8AD6C}"/>
               </a:ext>
             </a:extLst>
           </p:cNvPr>
@@ -9475,7 +9475,7 @@
           <p:cNvPr id="11" name="TextBox 10">
             <a:extLst xmlns:a="http://schemas.openxmlformats.org/drawingml/2006/main">
               <a:ext uri="{FF2B5EF4-FFF2-40B4-BE49-F238E27FC236}">
-                <a16:creationId xmlns:a16="http://schemas.microsoft.com/office/drawing/2014/main" id="{6473916E-6AB3-4C9F-9F2E-70CC4B1E62B0}"/>
+                <a16:creationId xmlns:a16="http://schemas.microsoft.com/office/drawing/2014/main" id="{F056DA9A-084B-4DB2-867C-03AE043203E9}"/>
               </a:ext>
             </a:extLst>
           </p:cNvPr>
@@ -9522,7 +9522,7 @@
           <p:cNvPr id="12" name="TextBox 11">
             <a:extLst xmlns:a="http://schemas.openxmlformats.org/drawingml/2006/main">
               <a:ext uri="{FF2B5EF4-FFF2-40B4-BE49-F238E27FC236}">
-                <a16:creationId xmlns:a16="http://schemas.microsoft.com/office/drawing/2014/main" id="{F2BBD832-AA33-47BB-997C-8152505DAB3A}"/>
+                <a16:creationId xmlns:a16="http://schemas.microsoft.com/office/drawing/2014/main" id="{3A071810-FB40-4163-9B18-F35332D314DE}"/>
               </a:ext>
             </a:extLst>
           </p:cNvPr>
@@ -9567,7 +9567,7 @@
     </p:spTree>
     <p:extLst>
       <p:ext uri="{BB962C8B-B14F-4D97-AF65-F5344CB8AC3E}">
-        <p14:creationId xmlns:p14="http://schemas.microsoft.com/office/powerpoint/2010/main" val="1324756831"/>
+        <p14:creationId xmlns:p14="http://schemas.microsoft.com/office/powerpoint/2010/main" val="300023397"/>
       </p:ext>
     </p:extLst>
   </p:cSld>
@@ -9591,7 +9591,7 @@
           <p:cNvPr id="2" name="TextBox 1">
             <a:extLst xmlns:a="http://schemas.openxmlformats.org/drawingml/2006/main">
               <a:ext uri="{FF2B5EF4-FFF2-40B4-BE49-F238E27FC236}">
-                <a16:creationId xmlns:a16="http://schemas.microsoft.com/office/drawing/2014/main" id="{CAD93E1D-43C9-4CB1-86EC-F0B150A6773A}"/>
+                <a16:creationId xmlns:a16="http://schemas.microsoft.com/office/drawing/2014/main" id="{F0207B3B-66B5-4123-83C9-FA4ECA827AB3}"/>
               </a:ext>
             </a:extLst>
           </p:cNvPr>
@@ -9638,7 +9638,7 @@
           <p:cNvPr id="3" name="TextBox 2">
             <a:extLst xmlns:a="http://schemas.openxmlformats.org/drawingml/2006/main">
               <a:ext uri="{FF2B5EF4-FFF2-40B4-BE49-F238E27FC236}">
-                <a16:creationId xmlns:a16="http://schemas.microsoft.com/office/drawing/2014/main" id="{968878CD-7B6D-400A-A748-B4BF728D1CA7}"/>
+                <a16:creationId xmlns:a16="http://schemas.microsoft.com/office/drawing/2014/main" id="{6AAD5E98-A393-4C9D-9EAB-2951181F9AC9}"/>
               </a:ext>
             </a:extLst>
           </p:cNvPr>
@@ -9685,7 +9685,7 @@
           <p:cNvPr id="4" name="Rectangle 3">
             <a:extLst xmlns:a="http://schemas.openxmlformats.org/drawingml/2006/main">
               <a:ext uri="{FF2B5EF4-FFF2-40B4-BE49-F238E27FC236}">
-                <a16:creationId xmlns:a16="http://schemas.microsoft.com/office/drawing/2014/main" id="{C13969FB-FD4D-4967-BD7F-969A4C65813C}"/>
+                <a16:creationId xmlns:a16="http://schemas.microsoft.com/office/drawing/2014/main" id="{F59AE26F-83AD-468B-AD70-FCFE77B98677}"/>
               </a:ext>
             </a:extLst>
           </p:cNvPr>
@@ -9740,7 +9740,7 @@
           <p:cNvPr id="5" name="Rectangle 4">
             <a:extLst xmlns:a="http://schemas.openxmlformats.org/drawingml/2006/main">
               <a:ext uri="{FF2B5EF4-FFF2-40B4-BE49-F238E27FC236}">
-                <a16:creationId xmlns:a16="http://schemas.microsoft.com/office/drawing/2014/main" id="{FBF166F1-8E54-4E68-B7F2-3CF183087948}"/>
+                <a16:creationId xmlns:a16="http://schemas.microsoft.com/office/drawing/2014/main" id="{45466E78-ED42-402E-B181-FC341E7484D4}"/>
               </a:ext>
             </a:extLst>
           </p:cNvPr>
@@ -9795,7 +9795,7 @@
           <p:cNvPr id="6" name="TextBox 5">
             <a:extLst xmlns:a="http://schemas.openxmlformats.org/drawingml/2006/main">
               <a:ext uri="{FF2B5EF4-FFF2-40B4-BE49-F238E27FC236}">
-                <a16:creationId xmlns:a16="http://schemas.microsoft.com/office/drawing/2014/main" id="{C028A101-5667-4B74-BE65-46B1F3D25638}"/>
+                <a16:creationId xmlns:a16="http://schemas.microsoft.com/office/drawing/2014/main" id="{EF965CF3-AFCC-4BA6-8C85-9BC19EE8E582}"/>
               </a:ext>
             </a:extLst>
           </p:cNvPr>
@@ -9832,7 +9832,7 @@
                 <a:ea typeface="Aptos"/>
                 <a:cs typeface="Aptos"/>
               </a:rPr>
-              <a:t>Julkinen riippumaton evidenssikooste · 2026.07.24-19 · 2026-07-24 · Lähteet: EP3032975B2</a:t>
+              <a:t>Julkinen riippumaton evidenssikooste · 2026.07.24-20 · 2026-07-24 · Lähteet: EP3032975B2</a:t>
             </a:r>
           </a:p>
         </p:txBody>
@@ -9842,7 +9842,7 @@
           <p:cNvPr id="7" name="TextBox 6">
             <a:extLst xmlns:a="http://schemas.openxmlformats.org/drawingml/2006/main">
               <a:ext uri="{FF2B5EF4-FFF2-40B4-BE49-F238E27FC236}">
-                <a16:creationId xmlns:a16="http://schemas.microsoft.com/office/drawing/2014/main" id="{CFD1805F-4E04-4118-B77A-6BC76C0A35B0}"/>
+                <a16:creationId xmlns:a16="http://schemas.microsoft.com/office/drawing/2014/main" id="{19D269AC-EF04-47E1-8EC6-1999561E649A}"/>
               </a:ext>
             </a:extLst>
           </p:cNvPr>
@@ -9889,7 +9889,7 @@
           <p:cNvPr id="8" name="TextBox 7">
             <a:extLst xmlns:a="http://schemas.openxmlformats.org/drawingml/2006/main">
               <a:ext uri="{FF2B5EF4-FFF2-40B4-BE49-F238E27FC236}">
-                <a16:creationId xmlns:a16="http://schemas.microsoft.com/office/drawing/2014/main" id="{A3010DFA-6D3A-4CF0-B8A0-4AD4E0B7A0B1}"/>
+                <a16:creationId xmlns:a16="http://schemas.microsoft.com/office/drawing/2014/main" id="{390938EB-C1F2-4388-AF13-0BF190D99A5E}"/>
               </a:ext>
             </a:extLst>
           </p:cNvPr>
@@ -9936,7 +9936,7 @@
           <p:cNvPr id="9" name="TextBox 8">
             <a:extLst xmlns:a="http://schemas.openxmlformats.org/drawingml/2006/main">
               <a:ext uri="{FF2B5EF4-FFF2-40B4-BE49-F238E27FC236}">
-                <a16:creationId xmlns:a16="http://schemas.microsoft.com/office/drawing/2014/main" id="{1F254CF7-3A03-45A7-ACF5-CA5E410E11F9}"/>
+                <a16:creationId xmlns:a16="http://schemas.microsoft.com/office/drawing/2014/main" id="{9213578C-A846-47A5-A178-FDC98F60EDCC}"/>
               </a:ext>
             </a:extLst>
           </p:cNvPr>
@@ -10033,7 +10033,7 @@
           <p:cNvPr id="10" name="Rounded Rectangle 9">
             <a:extLst xmlns:a="http://schemas.openxmlformats.org/drawingml/2006/main">
               <a:ext uri="{FF2B5EF4-FFF2-40B4-BE49-F238E27FC236}">
-                <a16:creationId xmlns:a16="http://schemas.microsoft.com/office/drawing/2014/main" id="{DC827F76-B509-40A2-BCE5-3DDAA760372C}"/>
+                <a16:creationId xmlns:a16="http://schemas.microsoft.com/office/drawing/2014/main" id="{42255E42-A660-491B-B8EB-C78D7E819F3D}"/>
               </a:ext>
             </a:extLst>
           </p:cNvPr>
@@ -10090,7 +10090,7 @@
           <p:cNvPr id="11" name="TextBox 10">
             <a:extLst xmlns:a="http://schemas.openxmlformats.org/drawingml/2006/main">
               <a:ext uri="{FF2B5EF4-FFF2-40B4-BE49-F238E27FC236}">
-                <a16:creationId xmlns:a16="http://schemas.microsoft.com/office/drawing/2014/main" id="{9D51C04A-D3A7-4142-9BE7-40BF9C6AC8C8}"/>
+                <a16:creationId xmlns:a16="http://schemas.microsoft.com/office/drawing/2014/main" id="{09E8F8C4-C1E0-4D2F-9178-4E03CE64BBE6}"/>
               </a:ext>
             </a:extLst>
           </p:cNvPr>
@@ -10137,7 +10137,7 @@
           <p:cNvPr id="12" name="TextBox 11">
             <a:extLst xmlns:a="http://schemas.openxmlformats.org/drawingml/2006/main">
               <a:ext uri="{FF2B5EF4-FFF2-40B4-BE49-F238E27FC236}">
-                <a16:creationId xmlns:a16="http://schemas.microsoft.com/office/drawing/2014/main" id="{4D1CC7BA-DDFA-4572-BEFB-D02963A70656}"/>
+                <a16:creationId xmlns:a16="http://schemas.microsoft.com/office/drawing/2014/main" id="{724F3CE6-630F-48E4-88F3-130B1956A66C}"/>
               </a:ext>
             </a:extLst>
           </p:cNvPr>
@@ -10182,7 +10182,7 @@
     </p:spTree>
     <p:extLst>
       <p:ext uri="{BB962C8B-B14F-4D97-AF65-F5344CB8AC3E}">
-        <p14:creationId xmlns:p14="http://schemas.microsoft.com/office/powerpoint/2010/main" val="1812476189"/>
+        <p14:creationId xmlns:p14="http://schemas.microsoft.com/office/powerpoint/2010/main" val="729067737"/>
       </p:ext>
     </p:extLst>
   </p:cSld>
@@ -10206,7 +10206,7 @@
           <p:cNvPr id="2" name="TextBox 1">
             <a:extLst xmlns:a="http://schemas.openxmlformats.org/drawingml/2006/main">
               <a:ext uri="{FF2B5EF4-FFF2-40B4-BE49-F238E27FC236}">
-                <a16:creationId xmlns:a16="http://schemas.microsoft.com/office/drawing/2014/main" id="{D9051D42-C879-4DB0-A86D-75889F875A85}"/>
+                <a16:creationId xmlns:a16="http://schemas.microsoft.com/office/drawing/2014/main" id="{CF8BBDD1-8EB0-4BF8-9474-C3FDC9561A0E}"/>
               </a:ext>
             </a:extLst>
           </p:cNvPr>
@@ -10253,7 +10253,7 @@
           <p:cNvPr id="3" name="TextBox 2">
             <a:extLst xmlns:a="http://schemas.openxmlformats.org/drawingml/2006/main">
               <a:ext uri="{FF2B5EF4-FFF2-40B4-BE49-F238E27FC236}">
-                <a16:creationId xmlns:a16="http://schemas.microsoft.com/office/drawing/2014/main" id="{094E9004-007B-45E9-B32F-799C16EC4D6F}"/>
+                <a16:creationId xmlns:a16="http://schemas.microsoft.com/office/drawing/2014/main" id="{3259E63C-E163-42D6-B928-A6272C11EE97}"/>
               </a:ext>
             </a:extLst>
           </p:cNvPr>
@@ -10300,7 +10300,7 @@
           <p:cNvPr id="4" name="Rectangle 3">
             <a:extLst xmlns:a="http://schemas.openxmlformats.org/drawingml/2006/main">
               <a:ext uri="{FF2B5EF4-FFF2-40B4-BE49-F238E27FC236}">
-                <a16:creationId xmlns:a16="http://schemas.microsoft.com/office/drawing/2014/main" id="{CB2347AB-2A8E-4056-A895-C93F7F55A377}"/>
+                <a16:creationId xmlns:a16="http://schemas.microsoft.com/office/drawing/2014/main" id="{5355ECE6-D789-4957-BD97-02D7552AFB6C}"/>
               </a:ext>
             </a:extLst>
           </p:cNvPr>
@@ -10355,7 +10355,7 @@
           <p:cNvPr id="5" name="Rectangle 4">
             <a:extLst xmlns:a="http://schemas.openxmlformats.org/drawingml/2006/main">
               <a:ext uri="{FF2B5EF4-FFF2-40B4-BE49-F238E27FC236}">
-                <a16:creationId xmlns:a16="http://schemas.microsoft.com/office/drawing/2014/main" id="{F7FD1A55-7592-486E-8736-7A6CF16B38F4}"/>
+                <a16:creationId xmlns:a16="http://schemas.microsoft.com/office/drawing/2014/main" id="{D0C32EC8-EF79-48B1-A230-B36233913973}"/>
               </a:ext>
             </a:extLst>
           </p:cNvPr>
@@ -10410,7 +10410,7 @@
           <p:cNvPr id="6" name="TextBox 5">
             <a:extLst xmlns:a="http://schemas.openxmlformats.org/drawingml/2006/main">
               <a:ext uri="{FF2B5EF4-FFF2-40B4-BE49-F238E27FC236}">
-                <a16:creationId xmlns:a16="http://schemas.microsoft.com/office/drawing/2014/main" id="{2A03E4E2-4BAF-46B0-B555-420AFBE385D2}"/>
+                <a16:creationId xmlns:a16="http://schemas.microsoft.com/office/drawing/2014/main" id="{3284EC9E-6562-43DA-9C49-B6E57A6A97EB}"/>
               </a:ext>
             </a:extLst>
           </p:cNvPr>
@@ -10447,7 +10447,7 @@
                 <a:ea typeface="Aptos"/>
                 <a:cs typeface="Aptos"/>
               </a:rPr>
-              <a:t>Julkinen riippumaton evidenssikooste · 2026.07.24-19 · 2026-07-24 · Lähteet: EPO Register; EP3032975B2</a:t>
+              <a:t>Julkinen riippumaton evidenssikooste · 2026.07.24-20 · 2026-07-24 · Lähteet: EPO Register; EP3032975B2</a:t>
             </a:r>
           </a:p>
         </p:txBody>
@@ -10457,7 +10457,7 @@
           <p:cNvPr id="7" name="TextBox 6">
             <a:extLst xmlns:a="http://schemas.openxmlformats.org/drawingml/2006/main">
               <a:ext uri="{FF2B5EF4-FFF2-40B4-BE49-F238E27FC236}">
-                <a16:creationId xmlns:a16="http://schemas.microsoft.com/office/drawing/2014/main" id="{61D78ABC-F41F-407C-9015-70D50336DE03}"/>
+                <a16:creationId xmlns:a16="http://schemas.microsoft.com/office/drawing/2014/main" id="{8AEEAA0B-A39F-4ADC-ACE5-F7E9D601E92D}"/>
               </a:ext>
             </a:extLst>
           </p:cNvPr>
@@ -10504,7 +10504,7 @@
           <p:cNvPr id="8" name="Rounded Rectangle 7">
             <a:extLst xmlns:a="http://schemas.openxmlformats.org/drawingml/2006/main">
               <a:ext uri="{FF2B5EF4-FFF2-40B4-BE49-F238E27FC236}">
-                <a16:creationId xmlns:a16="http://schemas.microsoft.com/office/drawing/2014/main" id="{80EFC1D3-D8AB-45B0-85CB-B7BE0D1ABA49}"/>
+                <a16:creationId xmlns:a16="http://schemas.microsoft.com/office/drawing/2014/main" id="{E2988FCC-3CE2-4F8F-B8EC-13509213398E}"/>
               </a:ext>
             </a:extLst>
           </p:cNvPr>
@@ -10561,7 +10561,7 @@
           <p:cNvPr id="9" name="TextBox 8">
             <a:extLst xmlns:a="http://schemas.openxmlformats.org/drawingml/2006/main">
               <a:ext uri="{FF2B5EF4-FFF2-40B4-BE49-F238E27FC236}">
-                <a16:creationId xmlns:a16="http://schemas.microsoft.com/office/drawing/2014/main" id="{CF5BB20B-9653-4471-86BA-446E6A7C3C4D}"/>
+                <a16:creationId xmlns:a16="http://schemas.microsoft.com/office/drawing/2014/main" id="{B20C3384-B0C2-439E-90A7-82F490C89605}"/>
               </a:ext>
             </a:extLst>
           </p:cNvPr>
@@ -10608,7 +10608,7 @@
           <p:cNvPr id="10" name="TextBox 9">
             <a:extLst xmlns:a="http://schemas.openxmlformats.org/drawingml/2006/main">
               <a:ext uri="{FF2B5EF4-FFF2-40B4-BE49-F238E27FC236}">
-                <a16:creationId xmlns:a16="http://schemas.microsoft.com/office/drawing/2014/main" id="{1C4A48CC-55AD-4F51-87BE-35A03C5BFC58}"/>
+                <a16:creationId xmlns:a16="http://schemas.microsoft.com/office/drawing/2014/main" id="{6434E04E-BBBC-40C2-BA82-23E4A195506C}"/>
               </a:ext>
             </a:extLst>
           </p:cNvPr>
@@ -10655,7 +10655,7 @@
           <p:cNvPr id="11" name="Rounded Rectangle 10">
             <a:extLst xmlns:a="http://schemas.openxmlformats.org/drawingml/2006/main">
               <a:ext uri="{FF2B5EF4-FFF2-40B4-BE49-F238E27FC236}">
-                <a16:creationId xmlns:a16="http://schemas.microsoft.com/office/drawing/2014/main" id="{CA4BE9A7-24DB-43D1-B641-9A6480FA992B}"/>
+                <a16:creationId xmlns:a16="http://schemas.microsoft.com/office/drawing/2014/main" id="{1780F182-C134-4B04-914B-B2FE91F18475}"/>
               </a:ext>
             </a:extLst>
           </p:cNvPr>
@@ -10712,7 +10712,7 @@
           <p:cNvPr id="12" name="TextBox 11">
             <a:extLst xmlns:a="http://schemas.openxmlformats.org/drawingml/2006/main">
               <a:ext uri="{FF2B5EF4-FFF2-40B4-BE49-F238E27FC236}">
-                <a16:creationId xmlns:a16="http://schemas.microsoft.com/office/drawing/2014/main" id="{BE337DA7-101C-4409-88A6-AB03078A7C1D}"/>
+                <a16:creationId xmlns:a16="http://schemas.microsoft.com/office/drawing/2014/main" id="{49875A32-F092-4779-9053-2C8005124DB8}"/>
               </a:ext>
             </a:extLst>
           </p:cNvPr>
@@ -10759,7 +10759,7 @@
           <p:cNvPr id="13" name="TextBox 12">
             <a:extLst xmlns:a="http://schemas.openxmlformats.org/drawingml/2006/main">
               <a:ext uri="{FF2B5EF4-FFF2-40B4-BE49-F238E27FC236}">
-                <a16:creationId xmlns:a16="http://schemas.microsoft.com/office/drawing/2014/main" id="{93361235-CF82-4EAC-A12F-4B5C3C94EDB7}"/>
+                <a16:creationId xmlns:a16="http://schemas.microsoft.com/office/drawing/2014/main" id="{15C0C3C0-B63F-46CF-BE50-906296617D4B}"/>
               </a:ext>
             </a:extLst>
           </p:cNvPr>
@@ -10806,7 +10806,7 @@
           <p:cNvPr id="14" name="Rounded Rectangle 13">
             <a:extLst xmlns:a="http://schemas.openxmlformats.org/drawingml/2006/main">
               <a:ext uri="{FF2B5EF4-FFF2-40B4-BE49-F238E27FC236}">
-                <a16:creationId xmlns:a16="http://schemas.microsoft.com/office/drawing/2014/main" id="{4D778509-BBDC-4000-BD43-137FA8FB246B}"/>
+                <a16:creationId xmlns:a16="http://schemas.microsoft.com/office/drawing/2014/main" id="{D7F2B36B-9455-4385-8958-34232B723145}"/>
               </a:ext>
             </a:extLst>
           </p:cNvPr>
@@ -10863,7 +10863,7 @@
           <p:cNvPr id="15" name="TextBox 14">
             <a:extLst xmlns:a="http://schemas.openxmlformats.org/drawingml/2006/main">
               <a:ext uri="{FF2B5EF4-FFF2-40B4-BE49-F238E27FC236}">
-                <a16:creationId xmlns:a16="http://schemas.microsoft.com/office/drawing/2014/main" id="{42B8FD22-29BF-4320-BBC3-0E77072A827C}"/>
+                <a16:creationId xmlns:a16="http://schemas.microsoft.com/office/drawing/2014/main" id="{B731B153-5B41-408A-9A19-5FAA73CB7B43}"/>
               </a:ext>
             </a:extLst>
           </p:cNvPr>
@@ -10910,7 +10910,7 @@
           <p:cNvPr id="16" name="TextBox 15">
             <a:extLst xmlns:a="http://schemas.openxmlformats.org/drawingml/2006/main">
               <a:ext uri="{FF2B5EF4-FFF2-40B4-BE49-F238E27FC236}">
-                <a16:creationId xmlns:a16="http://schemas.microsoft.com/office/drawing/2014/main" id="{7BCE00AA-8669-4E54-953E-2B066E9511C2}"/>
+                <a16:creationId xmlns:a16="http://schemas.microsoft.com/office/drawing/2014/main" id="{3B7930A0-5BB5-4292-BCF3-7038F313859F}"/>
               </a:ext>
             </a:extLst>
           </p:cNvPr>
@@ -10957,7 +10957,7 @@
           <p:cNvPr id="17" name="TextBox 16">
             <a:extLst xmlns:a="http://schemas.openxmlformats.org/drawingml/2006/main">
               <a:ext uri="{FF2B5EF4-FFF2-40B4-BE49-F238E27FC236}">
-                <a16:creationId xmlns:a16="http://schemas.microsoft.com/office/drawing/2014/main" id="{058AC2E2-DBB9-40EC-A418-832736A6DF50}"/>
+                <a16:creationId xmlns:a16="http://schemas.microsoft.com/office/drawing/2014/main" id="{F37E77D4-185C-4E3A-B654-7EEEAFC8856F}"/>
               </a:ext>
             </a:extLst>
           </p:cNvPr>
@@ -11004,7 +11004,7 @@
           <p:cNvPr id="18" name="Rounded Rectangle 17">
             <a:extLst xmlns:a="http://schemas.openxmlformats.org/drawingml/2006/main">
               <a:ext uri="{FF2B5EF4-FFF2-40B4-BE49-F238E27FC236}">
-                <a16:creationId xmlns:a16="http://schemas.microsoft.com/office/drawing/2014/main" id="{8C65E008-F4AF-4762-8F2C-076DA623FE4B}"/>
+                <a16:creationId xmlns:a16="http://schemas.microsoft.com/office/drawing/2014/main" id="{D6F7C618-BDB0-487B-AB45-A2442D16E427}"/>
               </a:ext>
             </a:extLst>
           </p:cNvPr>
@@ -11061,7 +11061,7 @@
           <p:cNvPr id="19" name="TextBox 18">
             <a:extLst xmlns:a="http://schemas.openxmlformats.org/drawingml/2006/main">
               <a:ext uri="{FF2B5EF4-FFF2-40B4-BE49-F238E27FC236}">
-                <a16:creationId xmlns:a16="http://schemas.microsoft.com/office/drawing/2014/main" id="{38EA6086-007F-4248-A845-A66B2D86A667}"/>
+                <a16:creationId xmlns:a16="http://schemas.microsoft.com/office/drawing/2014/main" id="{3DEAD413-77C7-4D3D-8F5E-62DB3E5E1F3D}"/>
               </a:ext>
             </a:extLst>
           </p:cNvPr>
@@ -11108,7 +11108,7 @@
           <p:cNvPr id="20" name="TextBox 19">
             <a:extLst xmlns:a="http://schemas.openxmlformats.org/drawingml/2006/main">
               <a:ext uri="{FF2B5EF4-FFF2-40B4-BE49-F238E27FC236}">
-                <a16:creationId xmlns:a16="http://schemas.microsoft.com/office/drawing/2014/main" id="{4E3E90BA-D1CE-468A-8B44-9497DB1A85BE}"/>
+                <a16:creationId xmlns:a16="http://schemas.microsoft.com/office/drawing/2014/main" id="{63646AAD-E83B-4B01-B6F7-31345CDF5406}"/>
               </a:ext>
             </a:extLst>
           </p:cNvPr>
@@ -11153,7 +11153,7 @@
     </p:spTree>
     <p:extLst>
       <p:ext uri="{BB962C8B-B14F-4D97-AF65-F5344CB8AC3E}">
-        <p14:creationId xmlns:p14="http://schemas.microsoft.com/office/powerpoint/2010/main" val="2094598331"/>
+        <p14:creationId xmlns:p14="http://schemas.microsoft.com/office/powerpoint/2010/main" val="67606909"/>
       </p:ext>
     </p:extLst>
   </p:cSld>
@@ -11177,7 +11177,7 @@
           <p:cNvPr id="2" name="TextBox 1">
             <a:extLst xmlns:a="http://schemas.openxmlformats.org/drawingml/2006/main">
               <a:ext uri="{FF2B5EF4-FFF2-40B4-BE49-F238E27FC236}">
-                <a16:creationId xmlns:a16="http://schemas.microsoft.com/office/drawing/2014/main" id="{63BFABCC-856E-4D21-AD24-DFBF1C71748C}"/>
+                <a16:creationId xmlns:a16="http://schemas.microsoft.com/office/drawing/2014/main" id="{EBA127DC-CCC6-4B89-B3FA-BA36A26B526A}"/>
               </a:ext>
             </a:extLst>
           </p:cNvPr>
@@ -11224,7 +11224,7 @@
           <p:cNvPr id="3" name="TextBox 2">
             <a:extLst xmlns:a="http://schemas.openxmlformats.org/drawingml/2006/main">
               <a:ext uri="{FF2B5EF4-FFF2-40B4-BE49-F238E27FC236}">
-                <a16:creationId xmlns:a16="http://schemas.microsoft.com/office/drawing/2014/main" id="{06F6D9B1-A8B4-4F8F-804E-D8BD37089B46}"/>
+                <a16:creationId xmlns:a16="http://schemas.microsoft.com/office/drawing/2014/main" id="{D4C0DA67-B9E2-4886-BABA-274CFCAA1609}"/>
               </a:ext>
             </a:extLst>
           </p:cNvPr>
@@ -11271,7 +11271,7 @@
           <p:cNvPr id="4" name="Rectangle 3">
             <a:extLst xmlns:a="http://schemas.openxmlformats.org/drawingml/2006/main">
               <a:ext uri="{FF2B5EF4-FFF2-40B4-BE49-F238E27FC236}">
-                <a16:creationId xmlns:a16="http://schemas.microsoft.com/office/drawing/2014/main" id="{4DD42E6C-B07E-45E0-80BF-BFAC5062F396}"/>
+                <a16:creationId xmlns:a16="http://schemas.microsoft.com/office/drawing/2014/main" id="{5ED60616-AE7C-4C9E-96E9-D8D9328B6EFD}"/>
               </a:ext>
             </a:extLst>
           </p:cNvPr>
@@ -11326,7 +11326,7 @@
           <p:cNvPr id="5" name="Rectangle 4">
             <a:extLst xmlns:a="http://schemas.openxmlformats.org/drawingml/2006/main">
               <a:ext uri="{FF2B5EF4-FFF2-40B4-BE49-F238E27FC236}">
-                <a16:creationId xmlns:a16="http://schemas.microsoft.com/office/drawing/2014/main" id="{10AE60EB-849D-45DA-87E5-E295D037D277}"/>
+                <a16:creationId xmlns:a16="http://schemas.microsoft.com/office/drawing/2014/main" id="{0C7AE156-3B82-48BE-9AB3-5E37CD6C5BE1}"/>
               </a:ext>
             </a:extLst>
           </p:cNvPr>
@@ -11381,7 +11381,7 @@
           <p:cNvPr id="6" name="TextBox 5">
             <a:extLst xmlns:a="http://schemas.openxmlformats.org/drawingml/2006/main">
               <a:ext uri="{FF2B5EF4-FFF2-40B4-BE49-F238E27FC236}">
-                <a16:creationId xmlns:a16="http://schemas.microsoft.com/office/drawing/2014/main" id="{036EF38A-DF5D-48B5-8120-1F7F066343CF}"/>
+                <a16:creationId xmlns:a16="http://schemas.microsoft.com/office/drawing/2014/main" id="{8BE29089-2F22-4B44-B51E-4EF1FB47CBA3}"/>
               </a:ext>
             </a:extLst>
           </p:cNvPr>
@@ -11418,7 +11418,7 @@
                 <a:ea typeface="Aptos"/>
                 <a:cs typeface="Aptos"/>
               </a:rPr>
-              <a:t>Julkinen riippumaton evidenssikooste · 2026.07.24-19 · 2026-07-24 · Lähteet: EP3032975B2; 7 O 3341/24</a:t>
+              <a:t>Julkinen riippumaton evidenssikooste · 2026.07.24-20 · 2026-07-24 · Lähteet: EP3032975B2; 7 O 3341/24</a:t>
             </a:r>
           </a:p>
         </p:txBody>
@@ -11428,7 +11428,7 @@
           <p:cNvPr id="7" name="TextBox 6">
             <a:extLst xmlns:a="http://schemas.openxmlformats.org/drawingml/2006/main">
               <a:ext uri="{FF2B5EF4-FFF2-40B4-BE49-F238E27FC236}">
-                <a16:creationId xmlns:a16="http://schemas.microsoft.com/office/drawing/2014/main" id="{FDAB5260-3981-4047-AA7D-F101102A7CD8}"/>
+                <a16:creationId xmlns:a16="http://schemas.microsoft.com/office/drawing/2014/main" id="{122D3E35-27C9-4B61-976C-93C17B3394AA}"/>
               </a:ext>
             </a:extLst>
           </p:cNvPr>
@@ -11475,7 +11475,7 @@
           <p:cNvPr id="8" name="TextBox 7">
             <a:extLst xmlns:a="http://schemas.openxmlformats.org/drawingml/2006/main">
               <a:ext uri="{FF2B5EF4-FFF2-40B4-BE49-F238E27FC236}">
-                <a16:creationId xmlns:a16="http://schemas.microsoft.com/office/drawing/2014/main" id="{3213B528-EDB5-4BE0-A2FF-2C96F72AA137}"/>
+                <a16:creationId xmlns:a16="http://schemas.microsoft.com/office/drawing/2014/main" id="{AA96A108-8757-4F8F-884B-CB996D83228C}"/>
               </a:ext>
             </a:extLst>
           </p:cNvPr>
@@ -11522,7 +11522,7 @@
           <p:cNvPr id="9" name="TextBox 8">
             <a:extLst xmlns:a="http://schemas.openxmlformats.org/drawingml/2006/main">
               <a:ext uri="{FF2B5EF4-FFF2-40B4-BE49-F238E27FC236}">
-                <a16:creationId xmlns:a16="http://schemas.microsoft.com/office/drawing/2014/main" id="{59DB0B5F-E986-4107-A95C-87FC3837F85B}"/>
+                <a16:creationId xmlns:a16="http://schemas.microsoft.com/office/drawing/2014/main" id="{6BE39970-A158-42CC-9751-2114F0E00562}"/>
               </a:ext>
             </a:extLst>
           </p:cNvPr>
@@ -11619,7 +11619,7 @@
           <p:cNvPr id="10" name="Rounded Rectangle 9">
             <a:extLst xmlns:a="http://schemas.openxmlformats.org/drawingml/2006/main">
               <a:ext uri="{FF2B5EF4-FFF2-40B4-BE49-F238E27FC236}">
-                <a16:creationId xmlns:a16="http://schemas.microsoft.com/office/drawing/2014/main" id="{60132A45-92BF-42C8-B901-93519BE9A2A8}"/>
+                <a16:creationId xmlns:a16="http://schemas.microsoft.com/office/drawing/2014/main" id="{C4577280-8984-4D5E-9FA5-7296C76146CA}"/>
               </a:ext>
             </a:extLst>
           </p:cNvPr>
@@ -11676,7 +11676,7 @@
           <p:cNvPr id="11" name="TextBox 10">
             <a:extLst xmlns:a="http://schemas.openxmlformats.org/drawingml/2006/main">
               <a:ext uri="{FF2B5EF4-FFF2-40B4-BE49-F238E27FC236}">
-                <a16:creationId xmlns:a16="http://schemas.microsoft.com/office/drawing/2014/main" id="{458AD612-145A-42D4-AE69-9644B0FEB172}"/>
+                <a16:creationId xmlns:a16="http://schemas.microsoft.com/office/drawing/2014/main" id="{FD0C68EC-57B7-486A-9189-2CFCCC479B87}"/>
               </a:ext>
             </a:extLst>
           </p:cNvPr>
@@ -11723,7 +11723,7 @@
           <p:cNvPr id="12" name="TextBox 11">
             <a:extLst xmlns:a="http://schemas.openxmlformats.org/drawingml/2006/main">
               <a:ext uri="{FF2B5EF4-FFF2-40B4-BE49-F238E27FC236}">
-                <a16:creationId xmlns:a16="http://schemas.microsoft.com/office/drawing/2014/main" id="{A75CF0F5-A289-456B-BB45-9C4A6D44F947}"/>
+                <a16:creationId xmlns:a16="http://schemas.microsoft.com/office/drawing/2014/main" id="{A14A4FFE-92A2-4569-AAA2-1B54F027372F}"/>
               </a:ext>
             </a:extLst>
           </p:cNvPr>
@@ -11768,7 +11768,7 @@
     </p:spTree>
     <p:extLst>
       <p:ext uri="{BB962C8B-B14F-4D97-AF65-F5344CB8AC3E}">
-        <p14:creationId xmlns:p14="http://schemas.microsoft.com/office/powerpoint/2010/main" val="947047248"/>
+        <p14:creationId xmlns:p14="http://schemas.microsoft.com/office/powerpoint/2010/main" val="1244861641"/>
       </p:ext>
     </p:extLst>
   </p:cSld>
@@ -11792,7 +11792,7 @@
           <p:cNvPr id="2" name="TextBox 1">
             <a:extLst xmlns:a="http://schemas.openxmlformats.org/drawingml/2006/main">
               <a:ext uri="{FF2B5EF4-FFF2-40B4-BE49-F238E27FC236}">
-                <a16:creationId xmlns:a16="http://schemas.microsoft.com/office/drawing/2014/main" id="{844BB448-8126-4947-B3BA-B20796EFAFCF}"/>
+                <a16:creationId xmlns:a16="http://schemas.microsoft.com/office/drawing/2014/main" id="{A6BE753B-751D-4796-A47C-6A4FAC4C1D8D}"/>
               </a:ext>
             </a:extLst>
           </p:cNvPr>
@@ -11839,7 +11839,7 @@
           <p:cNvPr id="3" name="TextBox 2">
             <a:extLst xmlns:a="http://schemas.openxmlformats.org/drawingml/2006/main">
               <a:ext uri="{FF2B5EF4-FFF2-40B4-BE49-F238E27FC236}">
-                <a16:creationId xmlns:a16="http://schemas.microsoft.com/office/drawing/2014/main" id="{74264639-8EBC-4725-9921-58589ED1B78F}"/>
+                <a16:creationId xmlns:a16="http://schemas.microsoft.com/office/drawing/2014/main" id="{0C0CF9A3-850F-43A8-A75B-5BE78C1231D6}"/>
               </a:ext>
             </a:extLst>
           </p:cNvPr>
@@ -11886,7 +11886,7 @@
           <p:cNvPr id="4" name="Rectangle 3">
             <a:extLst xmlns:a="http://schemas.openxmlformats.org/drawingml/2006/main">
               <a:ext uri="{FF2B5EF4-FFF2-40B4-BE49-F238E27FC236}">
-                <a16:creationId xmlns:a16="http://schemas.microsoft.com/office/drawing/2014/main" id="{EE8AA34E-48F1-4C75-98A3-3C64EBA1064D}"/>
+                <a16:creationId xmlns:a16="http://schemas.microsoft.com/office/drawing/2014/main" id="{84E6AC59-CCF3-44C0-A42D-D9F5111E70EA}"/>
               </a:ext>
             </a:extLst>
           </p:cNvPr>
@@ -11941,7 +11941,7 @@
           <p:cNvPr id="5" name="Rectangle 4">
             <a:extLst xmlns:a="http://schemas.openxmlformats.org/drawingml/2006/main">
               <a:ext uri="{FF2B5EF4-FFF2-40B4-BE49-F238E27FC236}">
-                <a16:creationId xmlns:a16="http://schemas.microsoft.com/office/drawing/2014/main" id="{EAFA68EE-F686-4AB9-A4AE-4B42CD2EED41}"/>
+                <a16:creationId xmlns:a16="http://schemas.microsoft.com/office/drawing/2014/main" id="{FC3205D3-3253-40D8-93B5-F133347C4437}"/>
               </a:ext>
             </a:extLst>
           </p:cNvPr>
@@ -11996,7 +11996,7 @@
           <p:cNvPr id="6" name="TextBox 5">
             <a:extLst xmlns:a="http://schemas.openxmlformats.org/drawingml/2006/main">
               <a:ext uri="{FF2B5EF4-FFF2-40B4-BE49-F238E27FC236}">
-                <a16:creationId xmlns:a16="http://schemas.microsoft.com/office/drawing/2014/main" id="{7924D173-1A25-450B-AD02-E1693AAF0178}"/>
+                <a16:creationId xmlns:a16="http://schemas.microsoft.com/office/drawing/2014/main" id="{F0B084F5-C865-4E99-A37F-BDAB8B44FF94}"/>
               </a:ext>
             </a:extLst>
           </p:cNvPr>
@@ -12033,7 +12033,7 @@
                 <a:ea typeface="Aptos"/>
                 <a:cs typeface="Aptos"/>
               </a:rPr>
-              <a:t>Julkinen riippumaton evidenssikooste · 2026.07.24-19 · 2026-07-24 · Lähteet: Statistics Canada; Market-values; FTC; IMARC; GVR; Fortune; European Commission</a:t>
+              <a:t>Julkinen riippumaton evidenssikooste · 2026.07.24-20 · 2026-07-24 · Lähteet: Statistics Canada; Market-values; FTC; IMARC; GVR; Fortune; European Commission</a:t>
             </a:r>
           </a:p>
         </p:txBody>
@@ -12043,7 +12043,7 @@
           <p:cNvPr id="7" name="TextBox 6">
             <a:extLst xmlns:a="http://schemas.openxmlformats.org/drawingml/2006/main">
               <a:ext uri="{FF2B5EF4-FFF2-40B4-BE49-F238E27FC236}">
-                <a16:creationId xmlns:a16="http://schemas.microsoft.com/office/drawing/2014/main" id="{780A1FCE-8A0B-4B26-8E2E-ABD4FC9E214F}"/>
+                <a16:creationId xmlns:a16="http://schemas.microsoft.com/office/drawing/2014/main" id="{797C5EF8-035D-419F-A8AA-3FCEF54A70BA}"/>
               </a:ext>
             </a:extLst>
           </p:cNvPr>
@@ -12090,7 +12090,7 @@
           <p:cNvPr id="8" name="Rounded Rectangle 7">
             <a:extLst xmlns:a="http://schemas.openxmlformats.org/drawingml/2006/main">
               <a:ext uri="{FF2B5EF4-FFF2-40B4-BE49-F238E27FC236}">
-                <a16:creationId xmlns:a16="http://schemas.microsoft.com/office/drawing/2014/main" id="{8B0F5195-B21D-4431-BAB7-761BD026EE99}"/>
+                <a16:creationId xmlns:a16="http://schemas.microsoft.com/office/drawing/2014/main" id="{67FBD2B8-5380-49AA-A8AA-0A37B265E5A6}"/>
               </a:ext>
             </a:extLst>
           </p:cNvPr>
@@ -12147,7 +12147,7 @@
           <p:cNvPr id="9" name="TextBox 8">
             <a:extLst xmlns:a="http://schemas.openxmlformats.org/drawingml/2006/main">
               <a:ext uri="{FF2B5EF4-FFF2-40B4-BE49-F238E27FC236}">
-                <a16:creationId xmlns:a16="http://schemas.microsoft.com/office/drawing/2014/main" id="{A957C10F-5147-4376-8C95-461A313F839E}"/>
+                <a16:creationId xmlns:a16="http://schemas.microsoft.com/office/drawing/2014/main" id="{15528538-7D5A-43C6-AE6E-32B8BA6C2DEC}"/>
               </a:ext>
             </a:extLst>
           </p:cNvPr>
@@ -12194,7 +12194,7 @@
           <p:cNvPr id="10" name="TextBox 9">
             <a:extLst xmlns:a="http://schemas.openxmlformats.org/drawingml/2006/main">
               <a:ext uri="{FF2B5EF4-FFF2-40B4-BE49-F238E27FC236}">
-                <a16:creationId xmlns:a16="http://schemas.microsoft.com/office/drawing/2014/main" id="{BFFF4857-71F6-4C95-9E56-03D4C4C5CA4F}"/>
+                <a16:creationId xmlns:a16="http://schemas.microsoft.com/office/drawing/2014/main" id="{3544AE9C-6FB3-4155-84F9-4EA42F4E9EA2}"/>
               </a:ext>
             </a:extLst>
           </p:cNvPr>
@@ -12241,7 +12241,7 @@
           <p:cNvPr id="11" name="Rounded Rectangle 10">
             <a:extLst xmlns:a="http://schemas.openxmlformats.org/drawingml/2006/main">
               <a:ext uri="{FF2B5EF4-FFF2-40B4-BE49-F238E27FC236}">
-                <a16:creationId xmlns:a16="http://schemas.microsoft.com/office/drawing/2014/main" id="{B752D796-AB0F-40B9-A476-878DF60E80A9}"/>
+                <a16:creationId xmlns:a16="http://schemas.microsoft.com/office/drawing/2014/main" id="{962A7B42-0718-40AD-9984-5FF4E0AE7021}"/>
               </a:ext>
             </a:extLst>
           </p:cNvPr>
@@ -12298,7 +12298,7 @@
           <p:cNvPr id="12" name="TextBox 11">
             <a:extLst xmlns:a="http://schemas.openxmlformats.org/drawingml/2006/main">
               <a:ext uri="{FF2B5EF4-FFF2-40B4-BE49-F238E27FC236}">
-                <a16:creationId xmlns:a16="http://schemas.microsoft.com/office/drawing/2014/main" id="{D72AADBD-ED2A-4DBE-8016-2D1F46A98CF7}"/>
+                <a16:creationId xmlns:a16="http://schemas.microsoft.com/office/drawing/2014/main" id="{BCD1922B-E52B-495E-93B5-5958900C797A}"/>
               </a:ext>
             </a:extLst>
           </p:cNvPr>
@@ -12345,7 +12345,7 @@
           <p:cNvPr id="13" name="TextBox 12">
             <a:extLst xmlns:a="http://schemas.openxmlformats.org/drawingml/2006/main">
               <a:ext uri="{FF2B5EF4-FFF2-40B4-BE49-F238E27FC236}">
-                <a16:creationId xmlns:a16="http://schemas.microsoft.com/office/drawing/2014/main" id="{1494BA03-B065-4F9C-8D0D-D3AC0F41E3CA}"/>
+                <a16:creationId xmlns:a16="http://schemas.microsoft.com/office/drawing/2014/main" id="{B8C2246C-71EB-434D-9640-FE2D4E350397}"/>
               </a:ext>
             </a:extLst>
           </p:cNvPr>
@@ -12392,7 +12392,7 @@
           <p:cNvPr id="14" name="Rounded Rectangle 13">
             <a:extLst xmlns:a="http://schemas.openxmlformats.org/drawingml/2006/main">
               <a:ext uri="{FF2B5EF4-FFF2-40B4-BE49-F238E27FC236}">
-                <a16:creationId xmlns:a16="http://schemas.microsoft.com/office/drawing/2014/main" id="{377866D6-6C4A-44E5-B4CD-D770B74BF904}"/>
+                <a16:creationId xmlns:a16="http://schemas.microsoft.com/office/drawing/2014/main" id="{A9C4D120-2932-4BC1-BA88-48EFB11D50FF}"/>
               </a:ext>
             </a:extLst>
           </p:cNvPr>
@@ -12449,7 +12449,7 @@
           <p:cNvPr id="15" name="TextBox 14">
             <a:extLst xmlns:a="http://schemas.openxmlformats.org/drawingml/2006/main">
               <a:ext uri="{FF2B5EF4-FFF2-40B4-BE49-F238E27FC236}">
-                <a16:creationId xmlns:a16="http://schemas.microsoft.com/office/drawing/2014/main" id="{C3048A90-BACB-4EAD-BDA3-615FCBFF3AAD}"/>
+                <a16:creationId xmlns:a16="http://schemas.microsoft.com/office/drawing/2014/main" id="{DF85FA31-15B9-4703-907C-EE8ED65B2C16}"/>
               </a:ext>
             </a:extLst>
           </p:cNvPr>
@@ -12496,7 +12496,7 @@
           <p:cNvPr id="16" name="TextBox 15">
             <a:extLst xmlns:a="http://schemas.openxmlformats.org/drawingml/2006/main">
               <a:ext uri="{FF2B5EF4-FFF2-40B4-BE49-F238E27FC236}">
-                <a16:creationId xmlns:a16="http://schemas.microsoft.com/office/drawing/2014/main" id="{497A8620-AD3B-4E93-989D-6CD62FA32355}"/>
+                <a16:creationId xmlns:a16="http://schemas.microsoft.com/office/drawing/2014/main" id="{5CF704D4-36A6-4E08-857F-F737ECA6F1F8}"/>
               </a:ext>
             </a:extLst>
           </p:cNvPr>
@@ -12543,7 +12543,7 @@
           <p:cNvPr id="17" name="TextBox 16">
             <a:extLst xmlns:a="http://schemas.openxmlformats.org/drawingml/2006/main">
               <a:ext uri="{FF2B5EF4-FFF2-40B4-BE49-F238E27FC236}">
-                <a16:creationId xmlns:a16="http://schemas.microsoft.com/office/drawing/2014/main" id="{06C83593-58F8-4522-8B0C-8987424F1AE2}"/>
+                <a16:creationId xmlns:a16="http://schemas.microsoft.com/office/drawing/2014/main" id="{382AEBE0-0882-4F28-9E7B-7F5F7E82C6C8}"/>
               </a:ext>
             </a:extLst>
           </p:cNvPr>
@@ -12590,7 +12590,7 @@
           <p:cNvPr id="18" name="Rounded Rectangle 17">
             <a:extLst xmlns:a="http://schemas.openxmlformats.org/drawingml/2006/main">
               <a:ext uri="{FF2B5EF4-FFF2-40B4-BE49-F238E27FC236}">
-                <a16:creationId xmlns:a16="http://schemas.microsoft.com/office/drawing/2014/main" id="{9FDB78CF-3C32-4870-A0BE-3AD03A7685F3}"/>
+                <a16:creationId xmlns:a16="http://schemas.microsoft.com/office/drawing/2014/main" id="{7AB1CD4B-A194-47BE-AA3B-0EEBB5908798}"/>
               </a:ext>
             </a:extLst>
           </p:cNvPr>
@@ -12647,7 +12647,7 @@
           <p:cNvPr id="19" name="TextBox 18">
             <a:extLst xmlns:a="http://schemas.openxmlformats.org/drawingml/2006/main">
               <a:ext uri="{FF2B5EF4-FFF2-40B4-BE49-F238E27FC236}">
-                <a16:creationId xmlns:a16="http://schemas.microsoft.com/office/drawing/2014/main" id="{E3E4916D-3AC4-4140-8634-1EF7D5D7AB94}"/>
+                <a16:creationId xmlns:a16="http://schemas.microsoft.com/office/drawing/2014/main" id="{36790649-E834-46C3-BCA1-52BF27CC25CA}"/>
               </a:ext>
             </a:extLst>
           </p:cNvPr>
@@ -12694,7 +12694,7 @@
           <p:cNvPr id="20" name="TextBox 19">
             <a:extLst xmlns:a="http://schemas.openxmlformats.org/drawingml/2006/main">
               <a:ext uri="{FF2B5EF4-FFF2-40B4-BE49-F238E27FC236}">
-                <a16:creationId xmlns:a16="http://schemas.microsoft.com/office/drawing/2014/main" id="{FD1779B9-2B9A-4B1F-AB44-41ACB8764A1E}"/>
+                <a16:creationId xmlns:a16="http://schemas.microsoft.com/office/drawing/2014/main" id="{E9F9FD77-1D5D-4440-8240-FE5EAAF296DA}"/>
               </a:ext>
             </a:extLst>
           </p:cNvPr>
@@ -12739,7 +12739,7 @@
     </p:spTree>
     <p:extLst>
       <p:ext uri="{BB962C8B-B14F-4D97-AF65-F5344CB8AC3E}">
-        <p14:creationId xmlns:p14="http://schemas.microsoft.com/office/powerpoint/2010/main" val="2027178104"/>
+        <p14:creationId xmlns:p14="http://schemas.microsoft.com/office/powerpoint/2010/main" val="411953069"/>
       </p:ext>
     </p:extLst>
   </p:cSld>
@@ -12763,7 +12763,7 @@
           <p:cNvPr id="2" name="TextBox 1">
             <a:extLst xmlns:a="http://schemas.openxmlformats.org/drawingml/2006/main">
               <a:ext uri="{FF2B5EF4-FFF2-40B4-BE49-F238E27FC236}">
-                <a16:creationId xmlns:a16="http://schemas.microsoft.com/office/drawing/2014/main" id="{FB29A366-894C-4225-A79E-19ECD3F68DAB}"/>
+                <a16:creationId xmlns:a16="http://schemas.microsoft.com/office/drawing/2014/main" id="{207E836B-7E03-4265-B9EE-3B78F78DE2B7}"/>
               </a:ext>
             </a:extLst>
           </p:cNvPr>
@@ -12810,7 +12810,7 @@
           <p:cNvPr id="3" name="TextBox 2">
             <a:extLst xmlns:a="http://schemas.openxmlformats.org/drawingml/2006/main">
               <a:ext uri="{FF2B5EF4-FFF2-40B4-BE49-F238E27FC236}">
-                <a16:creationId xmlns:a16="http://schemas.microsoft.com/office/drawing/2014/main" id="{8508E7B1-DEB4-4919-BD64-F8AC39264F2C}"/>
+                <a16:creationId xmlns:a16="http://schemas.microsoft.com/office/drawing/2014/main" id="{ACB84D4B-5841-4A37-819B-27287D6C2C32}"/>
               </a:ext>
             </a:extLst>
           </p:cNvPr>
@@ -12857,7 +12857,7 @@
           <p:cNvPr id="4" name="Rectangle 3">
             <a:extLst xmlns:a="http://schemas.openxmlformats.org/drawingml/2006/main">
               <a:ext uri="{FF2B5EF4-FFF2-40B4-BE49-F238E27FC236}">
-                <a16:creationId xmlns:a16="http://schemas.microsoft.com/office/drawing/2014/main" id="{8F872EFA-2D00-4C95-B17A-94885609FDD3}"/>
+                <a16:creationId xmlns:a16="http://schemas.microsoft.com/office/drawing/2014/main" id="{688B3126-0687-4BB0-B36C-1BF6B786FD65}"/>
               </a:ext>
             </a:extLst>
           </p:cNvPr>
@@ -12912,7 +12912,7 @@
           <p:cNvPr id="5" name="Rectangle 4">
             <a:extLst xmlns:a="http://schemas.openxmlformats.org/drawingml/2006/main">
               <a:ext uri="{FF2B5EF4-FFF2-40B4-BE49-F238E27FC236}">
-                <a16:creationId xmlns:a16="http://schemas.microsoft.com/office/drawing/2014/main" id="{61626148-1FB3-465C-A013-0C1481D155BC}"/>
+                <a16:creationId xmlns:a16="http://schemas.microsoft.com/office/drawing/2014/main" id="{BBF38139-5520-4AA3-9A87-54EA8B34F5C3}"/>
               </a:ext>
             </a:extLst>
           </p:cNvPr>
@@ -12967,7 +12967,7 @@
           <p:cNvPr id="6" name="TextBox 5">
             <a:extLst xmlns:a="http://schemas.openxmlformats.org/drawingml/2006/main">
               <a:ext uri="{FF2B5EF4-FFF2-40B4-BE49-F238E27FC236}">
-                <a16:creationId xmlns:a16="http://schemas.microsoft.com/office/drawing/2014/main" id="{F8F9231D-BF25-4AD3-9ACE-B9216F6BA492}"/>
+                <a16:creationId xmlns:a16="http://schemas.microsoft.com/office/drawing/2014/main" id="{DCD3B5A9-FECE-476C-8BD7-D3DCA176ACB2}"/>
               </a:ext>
             </a:extLst>
           </p:cNvPr>
@@ -13004,7 +13004,7 @@
                 <a:ea typeface="Aptos"/>
                 <a:cs typeface="Aptos"/>
               </a:rPr>
-              <a:t>Julkinen riippumaton evidenssikooste · 2026.07.24-19 · 2026-07-24 · Lähteet: WIPO licensing; WIPO IP Finance</a:t>
+              <a:t>Julkinen riippumaton evidenssikooste · 2026.07.24-20 · 2026-07-24 · Lähteet: WIPO licensing; WIPO IP Finance</a:t>
             </a:r>
           </a:p>
         </p:txBody>
@@ -13014,7 +13014,7 @@
           <p:cNvPr id="7" name="TextBox 6">
             <a:extLst xmlns:a="http://schemas.openxmlformats.org/drawingml/2006/main">
               <a:ext uri="{FF2B5EF4-FFF2-40B4-BE49-F238E27FC236}">
-                <a16:creationId xmlns:a16="http://schemas.microsoft.com/office/drawing/2014/main" id="{9DD079E3-9638-465C-974F-DC03C19481DB}"/>
+                <a16:creationId xmlns:a16="http://schemas.microsoft.com/office/drawing/2014/main" id="{B3A23544-2DB8-4D09-96E9-90ACDA36A094}"/>
               </a:ext>
             </a:extLst>
           </p:cNvPr>
@@ -13061,7 +13061,7 @@
           <p:cNvPr id="8" name="TextBox 7">
             <a:extLst xmlns:a="http://schemas.openxmlformats.org/drawingml/2006/main">
               <a:ext uri="{FF2B5EF4-FFF2-40B4-BE49-F238E27FC236}">
-                <a16:creationId xmlns:a16="http://schemas.microsoft.com/office/drawing/2014/main" id="{8DB000A6-7C91-432F-81EF-A760504B954A}"/>
+                <a16:creationId xmlns:a16="http://schemas.microsoft.com/office/drawing/2014/main" id="{46DF1FDD-B6A8-4034-903A-EC16CE231ABC}"/>
               </a:ext>
             </a:extLst>
           </p:cNvPr>
@@ -13108,7 +13108,7 @@
           <p:cNvPr id="9" name="TextBox 8">
             <a:extLst xmlns:a="http://schemas.openxmlformats.org/drawingml/2006/main">
               <a:ext uri="{FF2B5EF4-FFF2-40B4-BE49-F238E27FC236}">
-                <a16:creationId xmlns:a16="http://schemas.microsoft.com/office/drawing/2014/main" id="{F8B313B7-8918-4FA2-B151-BE7DF6573BF3}"/>
+                <a16:creationId xmlns:a16="http://schemas.microsoft.com/office/drawing/2014/main" id="{CC183BED-A404-45A9-B3C6-2F3F282F6150}"/>
               </a:ext>
             </a:extLst>
           </p:cNvPr>
@@ -13205,7 +13205,7 @@
           <p:cNvPr id="10" name="Rounded Rectangle 9">
             <a:extLst xmlns:a="http://schemas.openxmlformats.org/drawingml/2006/main">
               <a:ext uri="{FF2B5EF4-FFF2-40B4-BE49-F238E27FC236}">
-                <a16:creationId xmlns:a16="http://schemas.microsoft.com/office/drawing/2014/main" id="{45A190D6-A1B3-43CC-9B7D-A295AC7958F5}"/>
+                <a16:creationId xmlns:a16="http://schemas.microsoft.com/office/drawing/2014/main" id="{C93D8357-9891-406A-AD04-F5FE73D8692C}"/>
               </a:ext>
             </a:extLst>
           </p:cNvPr>
@@ -13262,7 +13262,7 @@
           <p:cNvPr id="11" name="TextBox 10">
             <a:extLst xmlns:a="http://schemas.openxmlformats.org/drawingml/2006/main">
               <a:ext uri="{FF2B5EF4-FFF2-40B4-BE49-F238E27FC236}">
-                <a16:creationId xmlns:a16="http://schemas.microsoft.com/office/drawing/2014/main" id="{2B7DBA53-488B-4D6C-B187-D68D4CA368AE}"/>
+                <a16:creationId xmlns:a16="http://schemas.microsoft.com/office/drawing/2014/main" id="{E43EF8C8-9DFD-4501-9302-0D4572E3A5E9}"/>
               </a:ext>
             </a:extLst>
           </p:cNvPr>
@@ -13309,7 +13309,7 @@
           <p:cNvPr id="12" name="TextBox 11">
             <a:extLst xmlns:a="http://schemas.openxmlformats.org/drawingml/2006/main">
               <a:ext uri="{FF2B5EF4-FFF2-40B4-BE49-F238E27FC236}">
-                <a16:creationId xmlns:a16="http://schemas.microsoft.com/office/drawing/2014/main" id="{EBA04DE7-328B-4F39-B19D-DE832DA4C950}"/>
+                <a16:creationId xmlns:a16="http://schemas.microsoft.com/office/drawing/2014/main" id="{2572812C-EA03-44BA-BE72-4EDEC6DE2C75}"/>
               </a:ext>
             </a:extLst>
           </p:cNvPr>
@@ -13354,7 +13354,7 @@
     </p:spTree>
     <p:extLst>
       <p:ext uri="{BB962C8B-B14F-4D97-AF65-F5344CB8AC3E}">
-        <p14:creationId xmlns:p14="http://schemas.microsoft.com/office/powerpoint/2010/main" val="1270276117"/>
+        <p14:creationId xmlns:p14="http://schemas.microsoft.com/office/powerpoint/2010/main" val="52129443"/>
       </p:ext>
     </p:extLst>
   </p:cSld>
@@ -13378,7 +13378,7 @@
           <p:cNvPr id="2" name="TextBox 1">
             <a:extLst xmlns:a="http://schemas.openxmlformats.org/drawingml/2006/main">
               <a:ext uri="{FF2B5EF4-FFF2-40B4-BE49-F238E27FC236}">
-                <a16:creationId xmlns:a16="http://schemas.microsoft.com/office/drawing/2014/main" id="{83F530CC-58D6-45C7-9B5F-92C06ADA4DAD}"/>
+                <a16:creationId xmlns:a16="http://schemas.microsoft.com/office/drawing/2014/main" id="{D4359227-7F88-44AB-9191-D52892ADF882}"/>
               </a:ext>
             </a:extLst>
           </p:cNvPr>
@@ -13425,7 +13425,7 @@
           <p:cNvPr id="3" name="TextBox 2">
             <a:extLst xmlns:a="http://schemas.openxmlformats.org/drawingml/2006/main">
               <a:ext uri="{FF2B5EF4-FFF2-40B4-BE49-F238E27FC236}">
-                <a16:creationId xmlns:a16="http://schemas.microsoft.com/office/drawing/2014/main" id="{93783E83-783E-461A-818A-CE6FCD209303}"/>
+                <a16:creationId xmlns:a16="http://schemas.microsoft.com/office/drawing/2014/main" id="{FE7E0ECB-5698-42F5-B7C9-B92F7646414F}"/>
               </a:ext>
             </a:extLst>
           </p:cNvPr>
@@ -13472,7 +13472,7 @@
           <p:cNvPr id="4" name="Rectangle 3">
             <a:extLst xmlns:a="http://schemas.openxmlformats.org/drawingml/2006/main">
               <a:ext uri="{FF2B5EF4-FFF2-40B4-BE49-F238E27FC236}">
-                <a16:creationId xmlns:a16="http://schemas.microsoft.com/office/drawing/2014/main" id="{B09108D1-E833-49DB-B374-6FAAD00D7533}"/>
+                <a16:creationId xmlns:a16="http://schemas.microsoft.com/office/drawing/2014/main" id="{EB3AE76A-B1B6-4EC2-A56C-765C18DE2625}"/>
               </a:ext>
             </a:extLst>
           </p:cNvPr>
@@ -13527,7 +13527,7 @@
           <p:cNvPr id="5" name="Rectangle 4">
             <a:extLst xmlns:a="http://schemas.openxmlformats.org/drawingml/2006/main">
               <a:ext uri="{FF2B5EF4-FFF2-40B4-BE49-F238E27FC236}">
-                <a16:creationId xmlns:a16="http://schemas.microsoft.com/office/drawing/2014/main" id="{BB385568-886D-487F-8A63-28EB597E7632}"/>
+                <a16:creationId xmlns:a16="http://schemas.microsoft.com/office/drawing/2014/main" id="{D9D1902A-2CF6-4ED0-88AF-01BF0017663A}"/>
               </a:ext>
             </a:extLst>
           </p:cNvPr>
@@ -13582,7 +13582,7 @@
           <p:cNvPr id="6" name="TextBox 5">
             <a:extLst xmlns:a="http://schemas.openxmlformats.org/drawingml/2006/main">
               <a:ext uri="{FF2B5EF4-FFF2-40B4-BE49-F238E27FC236}">
-                <a16:creationId xmlns:a16="http://schemas.microsoft.com/office/drawing/2014/main" id="{C38129B3-A4DE-4700-9A52-D3C0BC1539BE}"/>
+                <a16:creationId xmlns:a16="http://schemas.microsoft.com/office/drawing/2014/main" id="{A970AE88-D496-4AC8-B079-B7626A6D0A34}"/>
               </a:ext>
             </a:extLst>
           </p:cNvPr>
@@ -13619,7 +13619,7 @@
                 <a:ea typeface="Aptos"/>
                 <a:cs typeface="Aptos"/>
               </a:rPr>
-              <a:t>Julkinen riippumaton evidenssikooste · 2026.07.24-19 · 2026-07-24 · Lähteet: Evidence Register; EPO; WIPO</a:t>
+              <a:t>Julkinen riippumaton evidenssikooste · 2026.07.24-20 · 2026-07-24 · Lähteet: Evidence Register; EPO; WIPO</a:t>
             </a:r>
           </a:p>
         </p:txBody>
@@ -13629,7 +13629,7 @@
           <p:cNvPr id="7" name="TextBox 6">
             <a:extLst xmlns:a="http://schemas.openxmlformats.org/drawingml/2006/main">
               <a:ext uri="{FF2B5EF4-FFF2-40B4-BE49-F238E27FC236}">
-                <a16:creationId xmlns:a16="http://schemas.microsoft.com/office/drawing/2014/main" id="{E44F136E-51B0-4B7E-9A91-99185A0082F1}"/>
+                <a16:creationId xmlns:a16="http://schemas.microsoft.com/office/drawing/2014/main" id="{D19C9254-687E-446B-9C76-54409344C9CB}"/>
               </a:ext>
             </a:extLst>
           </p:cNvPr>
@@ -14116,7 +14116,7 @@
           <p:cNvPr id="9" name="TextBox 8">
             <a:extLst xmlns:a="http://schemas.openxmlformats.org/drawingml/2006/main">
               <a:ext uri="{FF2B5EF4-FFF2-40B4-BE49-F238E27FC236}">
-                <a16:creationId xmlns:a16="http://schemas.microsoft.com/office/drawing/2014/main" id="{FC11C7D4-4C0C-468E-9F24-4C33A260BA1C}"/>
+                <a16:creationId xmlns:a16="http://schemas.microsoft.com/office/drawing/2014/main" id="{283615A1-53FE-45B9-9D76-68CE718D582B}"/>
               </a:ext>
             </a:extLst>
           </p:cNvPr>
@@ -14161,7 +14161,7 @@
     </p:spTree>
     <p:extLst>
       <p:ext uri="{BB962C8B-B14F-4D97-AF65-F5344CB8AC3E}">
-        <p14:creationId xmlns:p14="http://schemas.microsoft.com/office/powerpoint/2010/main" val="664253481"/>
+        <p14:creationId xmlns:p14="http://schemas.microsoft.com/office/powerpoint/2010/main" val="1663648240"/>
       </p:ext>
     </p:extLst>
   </p:cSld>
@@ -14185,7 +14185,7 @@
           <p:cNvPr id="2" name="TextBox 1">
             <a:extLst xmlns:a="http://schemas.openxmlformats.org/drawingml/2006/main">
               <a:ext uri="{FF2B5EF4-FFF2-40B4-BE49-F238E27FC236}">
-                <a16:creationId xmlns:a16="http://schemas.microsoft.com/office/drawing/2014/main" id="{ED61D05D-F9E3-4EEE-B693-646FB0E21F71}"/>
+                <a16:creationId xmlns:a16="http://schemas.microsoft.com/office/drawing/2014/main" id="{1F35D10F-3156-4BBD-B7E9-18CFDB5F9BF0}"/>
               </a:ext>
             </a:extLst>
           </p:cNvPr>
@@ -14232,7 +14232,7 @@
           <p:cNvPr id="3" name="TextBox 2">
             <a:extLst xmlns:a="http://schemas.openxmlformats.org/drawingml/2006/main">
               <a:ext uri="{FF2B5EF4-FFF2-40B4-BE49-F238E27FC236}">
-                <a16:creationId xmlns:a16="http://schemas.microsoft.com/office/drawing/2014/main" id="{75CB4BA6-0809-4758-8118-1D4D2D014E38}"/>
+                <a16:creationId xmlns:a16="http://schemas.microsoft.com/office/drawing/2014/main" id="{44CDB67F-EA6F-4B0B-967F-BF51BF8E7B37}"/>
               </a:ext>
             </a:extLst>
           </p:cNvPr>
@@ -14279,7 +14279,7 @@
           <p:cNvPr id="4" name="Rectangle 3">
             <a:extLst xmlns:a="http://schemas.openxmlformats.org/drawingml/2006/main">
               <a:ext uri="{FF2B5EF4-FFF2-40B4-BE49-F238E27FC236}">
-                <a16:creationId xmlns:a16="http://schemas.microsoft.com/office/drawing/2014/main" id="{229F0FE9-64D2-4FA9-AD69-17B9CB96DD04}"/>
+                <a16:creationId xmlns:a16="http://schemas.microsoft.com/office/drawing/2014/main" id="{80636AA9-136A-4FA9-BE87-C06786BB56D7}"/>
               </a:ext>
             </a:extLst>
           </p:cNvPr>
@@ -14334,7 +14334,7 @@
           <p:cNvPr id="5" name="Rectangle 4">
             <a:extLst xmlns:a="http://schemas.openxmlformats.org/drawingml/2006/main">
               <a:ext uri="{FF2B5EF4-FFF2-40B4-BE49-F238E27FC236}">
-                <a16:creationId xmlns:a16="http://schemas.microsoft.com/office/drawing/2014/main" id="{E3135269-9811-489F-9CFE-C3B017DC548B}"/>
+                <a16:creationId xmlns:a16="http://schemas.microsoft.com/office/drawing/2014/main" id="{B9830B18-6EDF-4F50-B1EB-526B0CF716CF}"/>
               </a:ext>
             </a:extLst>
           </p:cNvPr>
@@ -14389,7 +14389,7 @@
           <p:cNvPr id="6" name="TextBox 5">
             <a:extLst xmlns:a="http://schemas.openxmlformats.org/drawingml/2006/main">
               <a:ext uri="{FF2B5EF4-FFF2-40B4-BE49-F238E27FC236}">
-                <a16:creationId xmlns:a16="http://schemas.microsoft.com/office/drawing/2014/main" id="{F2F6C0D8-C4CC-4E02-A58A-74CECF26F702}"/>
+                <a16:creationId xmlns:a16="http://schemas.microsoft.com/office/drawing/2014/main" id="{1D1706E1-0885-458F-BA19-645A7FF185D2}"/>
               </a:ext>
             </a:extLst>
           </p:cNvPr>
@@ -14426,7 +14426,7 @@
                 <a:ea typeface="Aptos"/>
                 <a:cs typeface="Aptos"/>
               </a:rPr>
-              <a:t>Julkinen riippumaton evidenssikooste · 2026.07.24-19 · 2026-07-24 · Lähteet: Evidence Register</a:t>
+              <a:t>Julkinen riippumaton evidenssikooste · 2026.07.24-20 · 2026-07-24 · Lähteet: Evidence Register</a:t>
             </a:r>
           </a:p>
         </p:txBody>
@@ -14436,7 +14436,7 @@
           <p:cNvPr id="7" name="TextBox 6">
             <a:extLst xmlns:a="http://schemas.openxmlformats.org/drawingml/2006/main">
               <a:ext uri="{FF2B5EF4-FFF2-40B4-BE49-F238E27FC236}">
-                <a16:creationId xmlns:a16="http://schemas.microsoft.com/office/drawing/2014/main" id="{73BAD063-B8B2-428F-9888-AB3C4C740D6E}"/>
+                <a16:creationId xmlns:a16="http://schemas.microsoft.com/office/drawing/2014/main" id="{9F8F9EF5-60AD-476B-8AB6-D596EF7D8A4B}"/>
               </a:ext>
             </a:extLst>
           </p:cNvPr>
@@ -15169,7 +15169,7 @@
           <p:cNvPr id="9" name="TextBox 8">
             <a:extLst xmlns:a="http://schemas.openxmlformats.org/drawingml/2006/main">
               <a:ext uri="{FF2B5EF4-FFF2-40B4-BE49-F238E27FC236}">
-                <a16:creationId xmlns:a16="http://schemas.microsoft.com/office/drawing/2014/main" id="{CD72E982-26A8-4B14-9A0F-0B7AF839E155}"/>
+                <a16:creationId xmlns:a16="http://schemas.microsoft.com/office/drawing/2014/main" id="{F551A14A-8061-4F91-9B48-E2D54B03334C}"/>
               </a:ext>
             </a:extLst>
           </p:cNvPr>
@@ -15214,7 +15214,7 @@
     </p:spTree>
     <p:extLst>
       <p:ext uri="{BB962C8B-B14F-4D97-AF65-F5344CB8AC3E}">
-        <p14:creationId xmlns:p14="http://schemas.microsoft.com/office/powerpoint/2010/main" val="620796817"/>
+        <p14:creationId xmlns:p14="http://schemas.microsoft.com/office/powerpoint/2010/main" val="2086974007"/>
       </p:ext>
     </p:extLst>
   </p:cSld>

--- a/site/downloads/pixan-bank-deck-medium-fi.pptx
+++ b/site/downloads/pixan-bank-deck-medium-fi.pptx
@@ -2,24 +2,24 @@
 <file path=ppt/presentation.xml><?xml version="1.0" encoding="utf-8"?>
 <p:presentation xmlns:p="http://schemas.openxmlformats.org/presentationml/2006/main">
   <p:sldMasterIdLst>
-    <p:sldMasterId xmlns:r="http://schemas.openxmlformats.org/officeDocument/2006/relationships" id="2147483648" r:id="R0b8ad08e06bb43fb"/>
+    <p:sldMasterId xmlns:r="http://schemas.openxmlformats.org/officeDocument/2006/relationships" id="2147483648" r:id="Re033cbb5b7354f0a"/>
   </p:sldMasterIdLst>
   <p:notesMasterIdLst>
-    <p:notesMasterId xmlns:r="http://schemas.openxmlformats.org/officeDocument/2006/relationships" r:id="Rb2746156e999404b"/>
+    <p:notesMasterId xmlns:r="http://schemas.openxmlformats.org/officeDocument/2006/relationships" r:id="R1cb2fa62985c40f0"/>
   </p:notesMasterIdLst>
   <p:sldIdLst>
-    <p:sldId xmlns:r="http://schemas.openxmlformats.org/officeDocument/2006/relationships" id="256" r:id="Rc4720e88250e48da"/>
-    <p:sldId xmlns:r="http://schemas.openxmlformats.org/officeDocument/2006/relationships" id="257" r:id="Ra922a2f6e4904f00"/>
-    <p:sldId xmlns:r="http://schemas.openxmlformats.org/officeDocument/2006/relationships" id="258" r:id="Re3dd3c25f4564ca3"/>
-    <p:sldId xmlns:r="http://schemas.openxmlformats.org/officeDocument/2006/relationships" id="259" r:id="R2a36c549817f4f3c"/>
-    <p:sldId xmlns:r="http://schemas.openxmlformats.org/officeDocument/2006/relationships" id="260" r:id="R9c57fa0dbc184704"/>
-    <p:sldId xmlns:r="http://schemas.openxmlformats.org/officeDocument/2006/relationships" id="261" r:id="Ra8e12e8b22b84846"/>
-    <p:sldId xmlns:r="http://schemas.openxmlformats.org/officeDocument/2006/relationships" id="262" r:id="R27e521a053d943ff"/>
-    <p:sldId xmlns:r="http://schemas.openxmlformats.org/officeDocument/2006/relationships" id="263" r:id="Raf73e9f8490944a2"/>
-    <p:sldId xmlns:r="http://schemas.openxmlformats.org/officeDocument/2006/relationships" id="264" r:id="R32ad4225d823460f"/>
-    <p:sldId xmlns:r="http://schemas.openxmlformats.org/officeDocument/2006/relationships" id="265" r:id="R29cd04a6b43e4e62"/>
-    <p:sldId xmlns:r="http://schemas.openxmlformats.org/officeDocument/2006/relationships" id="266" r:id="R4751266b8800403f"/>
-    <p:sldId xmlns:r="http://schemas.openxmlformats.org/officeDocument/2006/relationships" id="267" r:id="R9fabe1ddb93643ef"/>
+    <p:sldId xmlns:r="http://schemas.openxmlformats.org/officeDocument/2006/relationships" id="256" r:id="R28872376d23046a8"/>
+    <p:sldId xmlns:r="http://schemas.openxmlformats.org/officeDocument/2006/relationships" id="257" r:id="R7ff353cf2fa540e0"/>
+    <p:sldId xmlns:r="http://schemas.openxmlformats.org/officeDocument/2006/relationships" id="258" r:id="Rc1ee240b20494843"/>
+    <p:sldId xmlns:r="http://schemas.openxmlformats.org/officeDocument/2006/relationships" id="259" r:id="Re7b57b274b3f4389"/>
+    <p:sldId xmlns:r="http://schemas.openxmlformats.org/officeDocument/2006/relationships" id="260" r:id="Rdc0298afd7ad43ae"/>
+    <p:sldId xmlns:r="http://schemas.openxmlformats.org/officeDocument/2006/relationships" id="261" r:id="R94f72213d1334918"/>
+    <p:sldId xmlns:r="http://schemas.openxmlformats.org/officeDocument/2006/relationships" id="262" r:id="R02decba5ef2a46a6"/>
+    <p:sldId xmlns:r="http://schemas.openxmlformats.org/officeDocument/2006/relationships" id="263" r:id="Rb262b448352340fa"/>
+    <p:sldId xmlns:r="http://schemas.openxmlformats.org/officeDocument/2006/relationships" id="264" r:id="R056924c856c8474e"/>
+    <p:sldId xmlns:r="http://schemas.openxmlformats.org/officeDocument/2006/relationships" id="265" r:id="R791bb61fc5844fb2"/>
+    <p:sldId xmlns:r="http://schemas.openxmlformats.org/officeDocument/2006/relationships" id="266" r:id="R7042f55693ad41a5"/>
+    <p:sldId xmlns:r="http://schemas.openxmlformats.org/officeDocument/2006/relationships" id="267" r:id="R4d37aa09924d4b58"/>
   </p:sldIdLst>
   <p:sldSz cx="12191999" cy="6858000"/>
   <p:notesSz cx="6858000" cy="9144000"/>
@@ -2493,7 +2493,7 @@
           <p:cNvPr id="2" name="Title 1">
             <a:extLst xmlns:a="http://schemas.openxmlformats.org/drawingml/2006/main">
               <a:ext uri="{FF2B5EF4-FFF2-40B4-BE49-F238E27FC236}">
-                <a16:creationId xmlns:a16="http://schemas.microsoft.com/office/drawing/2014/main" id="{A2689E84-5036-4407-9AF6-7D3CA356CC8D}"/>
+                <a16:creationId xmlns:a16="http://schemas.microsoft.com/office/drawing/2014/main" id="{0B759618-E2CC-4756-958B-4640890A7314}"/>
               </a:ext>
             </a:extLst>
           </p:cNvPr>
@@ -2525,7 +2525,7 @@
           <p:cNvPr id="3" name="Subtitle 2">
             <a:extLst xmlns:a="http://schemas.openxmlformats.org/drawingml/2006/main">
               <a:ext uri="{FF2B5EF4-FFF2-40B4-BE49-F238E27FC236}">
-                <a16:creationId xmlns:a16="http://schemas.microsoft.com/office/drawing/2014/main" id="{83F7E2B3-985B-405E-8806-EF5AB795A666}"/>
+                <a16:creationId xmlns:a16="http://schemas.microsoft.com/office/drawing/2014/main" id="{68E42E30-7E3D-4871-BE8C-A23D9FFD0BEA}"/>
               </a:ext>
             </a:extLst>
           </p:cNvPr>
@@ -2648,7 +2648,7 @@
           <p:cNvPr id="4" name="Date Placeholder 3">
             <a:extLst xmlns:a="http://schemas.openxmlformats.org/drawingml/2006/main">
               <a:ext uri="{FF2B5EF4-FFF2-40B4-BE49-F238E27FC236}">
-                <a16:creationId xmlns:a16="http://schemas.microsoft.com/office/drawing/2014/main" id="{B972A244-A17F-4276-98D9-259C21599A58}"/>
+                <a16:creationId xmlns:a16="http://schemas.microsoft.com/office/drawing/2014/main" id="{6B36FA18-A106-4874-B012-AC99F95BF989}"/>
               </a:ext>
             </a:extLst>
           </p:cNvPr>
@@ -2675,7 +2675,7 @@
           <p:cNvPr id="5" name="Footer Placeholder 4">
             <a:extLst xmlns:a="http://schemas.openxmlformats.org/drawingml/2006/main">
               <a:ext uri="{FF2B5EF4-FFF2-40B4-BE49-F238E27FC236}">
-                <a16:creationId xmlns:a16="http://schemas.microsoft.com/office/drawing/2014/main" id="{3BAF9556-3A89-46A0-9AD0-8B5EE7E8F0E4}"/>
+                <a16:creationId xmlns:a16="http://schemas.microsoft.com/office/drawing/2014/main" id="{8B10E282-5847-478B-AB1C-73E31548243F}"/>
               </a:ext>
             </a:extLst>
           </p:cNvPr>
@@ -2698,7 +2698,7 @@
           <p:cNvPr id="6" name="Slide Number Placeholder 5">
             <a:extLst xmlns:a="http://schemas.openxmlformats.org/drawingml/2006/main">
               <a:ext uri="{FF2B5EF4-FFF2-40B4-BE49-F238E27FC236}">
-                <a16:creationId xmlns:a16="http://schemas.microsoft.com/office/drawing/2014/main" id="{98458718-4496-469D-8535-459614F8436F}"/>
+                <a16:creationId xmlns:a16="http://schemas.microsoft.com/office/drawing/2014/main" id="{B410193C-246D-46A8-91AE-A1A4FB49E3D3}"/>
               </a:ext>
             </a:extLst>
           </p:cNvPr>
@@ -2742,7 +2742,7 @@
           <p:cNvPr id="2" name="Title 1">
             <a:extLst xmlns:a="http://schemas.openxmlformats.org/drawingml/2006/main">
               <a:ext uri="{FF2B5EF4-FFF2-40B4-BE49-F238E27FC236}">
-                <a16:creationId xmlns:a16="http://schemas.microsoft.com/office/drawing/2014/main" id="{D156FBF7-5384-4B16-A5F5-2CB5ACC74724}"/>
+                <a16:creationId xmlns:a16="http://schemas.microsoft.com/office/drawing/2014/main" id="{AB697AF8-581A-4545-8581-78372EC679FD}"/>
               </a:ext>
             </a:extLst>
           </p:cNvPr>
@@ -2769,7 +2769,7 @@
           <p:cNvPr id="3" name="Vertical Text Placeholder 2">
             <a:extLst xmlns:a="http://schemas.openxmlformats.org/drawingml/2006/main">
               <a:ext uri="{FF2B5EF4-FFF2-40B4-BE49-F238E27FC236}">
-                <a16:creationId xmlns:a16="http://schemas.microsoft.com/office/drawing/2014/main" id="{B7B0ABAF-A9CE-4DBE-A7BD-82DF1ED967FE}"/>
+                <a16:creationId xmlns:a16="http://schemas.microsoft.com/office/drawing/2014/main" id="{9ACC3317-CCFB-425E-959C-2E9B99349E72}"/>
               </a:ext>
             </a:extLst>
           </p:cNvPr>
@@ -2831,7 +2831,7 @@
           <p:cNvPr id="4" name="Date Placeholder 3">
             <a:extLst xmlns:a="http://schemas.openxmlformats.org/drawingml/2006/main">
               <a:ext uri="{FF2B5EF4-FFF2-40B4-BE49-F238E27FC236}">
-                <a16:creationId xmlns:a16="http://schemas.microsoft.com/office/drawing/2014/main" id="{E6CC3C96-7175-4A55-A25C-31F72FC8A114}"/>
+                <a16:creationId xmlns:a16="http://schemas.microsoft.com/office/drawing/2014/main" id="{8DAE7130-C792-45AD-B694-06601A149B0F}"/>
               </a:ext>
             </a:extLst>
           </p:cNvPr>
@@ -2858,7 +2858,7 @@
           <p:cNvPr id="5" name="Footer Placeholder 4">
             <a:extLst xmlns:a="http://schemas.openxmlformats.org/drawingml/2006/main">
               <a:ext uri="{FF2B5EF4-FFF2-40B4-BE49-F238E27FC236}">
-                <a16:creationId xmlns:a16="http://schemas.microsoft.com/office/drawing/2014/main" id="{11B638A9-D837-441C-8DF7-BA478202F0E2}"/>
+                <a16:creationId xmlns:a16="http://schemas.microsoft.com/office/drawing/2014/main" id="{57D13CCE-34D3-48A0-9BF9-6D124F98AB01}"/>
               </a:ext>
             </a:extLst>
           </p:cNvPr>
@@ -2881,7 +2881,7 @@
           <p:cNvPr id="6" name="Slide Number Placeholder 5">
             <a:extLst xmlns:a="http://schemas.openxmlformats.org/drawingml/2006/main">
               <a:ext uri="{FF2B5EF4-FFF2-40B4-BE49-F238E27FC236}">
-                <a16:creationId xmlns:a16="http://schemas.microsoft.com/office/drawing/2014/main" id="{0D1D2313-A96D-4CA8-BEF0-FCD9498D5FE8}"/>
+                <a16:creationId xmlns:a16="http://schemas.microsoft.com/office/drawing/2014/main" id="{78C78BFB-F290-4EAC-A035-04ABD0AF1201}"/>
               </a:ext>
             </a:extLst>
           </p:cNvPr>
@@ -2925,7 +2925,7 @@
           <p:cNvPr id="2" name="Vertical Title 1">
             <a:extLst xmlns:a="http://schemas.openxmlformats.org/drawingml/2006/main">
               <a:ext uri="{FF2B5EF4-FFF2-40B4-BE49-F238E27FC236}">
-                <a16:creationId xmlns:a16="http://schemas.microsoft.com/office/drawing/2014/main" id="{152C473C-E4A3-4E61-B260-92D9208097B4}"/>
+                <a16:creationId xmlns:a16="http://schemas.microsoft.com/office/drawing/2014/main" id="{73979AD9-FC8C-471A-ACF3-49B499AD8928}"/>
               </a:ext>
             </a:extLst>
           </p:cNvPr>
@@ -2957,7 +2957,7 @@
           <p:cNvPr id="3" name="Vertical Text Placeholder 2">
             <a:extLst xmlns:a="http://schemas.openxmlformats.org/drawingml/2006/main">
               <a:ext uri="{FF2B5EF4-FFF2-40B4-BE49-F238E27FC236}">
-                <a16:creationId xmlns:a16="http://schemas.microsoft.com/office/drawing/2014/main" id="{D96C7255-609F-4415-9E96-0AA8A224FEB2}"/>
+                <a16:creationId xmlns:a16="http://schemas.microsoft.com/office/drawing/2014/main" id="{99FEA836-DB58-4500-BE16-B9B510B1831D}"/>
               </a:ext>
             </a:extLst>
           </p:cNvPr>
@@ -3024,7 +3024,7 @@
           <p:cNvPr id="4" name="Date Placeholder 3">
             <a:extLst xmlns:a="http://schemas.openxmlformats.org/drawingml/2006/main">
               <a:ext uri="{FF2B5EF4-FFF2-40B4-BE49-F238E27FC236}">
-                <a16:creationId xmlns:a16="http://schemas.microsoft.com/office/drawing/2014/main" id="{1C4F6CEF-CA2D-40F0-9AE6-AD52E9C2F65A}"/>
+                <a16:creationId xmlns:a16="http://schemas.microsoft.com/office/drawing/2014/main" id="{8ED49745-DAAA-42FD-8237-5F2D508DCF75}"/>
               </a:ext>
             </a:extLst>
           </p:cNvPr>
@@ -3051,7 +3051,7 @@
           <p:cNvPr id="5" name="Footer Placeholder 4">
             <a:extLst xmlns:a="http://schemas.openxmlformats.org/drawingml/2006/main">
               <a:ext uri="{FF2B5EF4-FFF2-40B4-BE49-F238E27FC236}">
-                <a16:creationId xmlns:a16="http://schemas.microsoft.com/office/drawing/2014/main" id="{2C4E97E7-3634-46ED-A54F-2E9CA2E64267}"/>
+                <a16:creationId xmlns:a16="http://schemas.microsoft.com/office/drawing/2014/main" id="{170C309B-22FB-4A3E-A6A9-ED0B689D8773}"/>
               </a:ext>
             </a:extLst>
           </p:cNvPr>
@@ -3074,7 +3074,7 @@
           <p:cNvPr id="6" name="Slide Number Placeholder 5">
             <a:extLst xmlns:a="http://schemas.openxmlformats.org/drawingml/2006/main">
               <a:ext uri="{FF2B5EF4-FFF2-40B4-BE49-F238E27FC236}">
-                <a16:creationId xmlns:a16="http://schemas.microsoft.com/office/drawing/2014/main" id="{DF77FFA8-674F-4F9F-A188-5313CF7287A3}"/>
+                <a16:creationId xmlns:a16="http://schemas.microsoft.com/office/drawing/2014/main" id="{6633F5D9-9B35-4E7E-ACBA-0B6EFA170A3C}"/>
               </a:ext>
             </a:extLst>
           </p:cNvPr>
@@ -3118,7 +3118,7 @@
           <p:cNvPr id="2" name="Title 1">
             <a:extLst xmlns:a="http://schemas.openxmlformats.org/drawingml/2006/main">
               <a:ext uri="{FF2B5EF4-FFF2-40B4-BE49-F238E27FC236}">
-                <a16:creationId xmlns:a16="http://schemas.microsoft.com/office/drawing/2014/main" id="{2C7F0E79-FD9F-429E-A264-22AFC112B5E0}"/>
+                <a16:creationId xmlns:a16="http://schemas.microsoft.com/office/drawing/2014/main" id="{B69952B5-C42C-4588-8ACD-3EF39D711058}"/>
               </a:ext>
             </a:extLst>
           </p:cNvPr>
@@ -3145,7 +3145,7 @@
           <p:cNvPr id="3" name="Content Placeholder 2">
             <a:extLst xmlns:a="http://schemas.openxmlformats.org/drawingml/2006/main">
               <a:ext uri="{FF2B5EF4-FFF2-40B4-BE49-F238E27FC236}">
-                <a16:creationId xmlns:a16="http://schemas.microsoft.com/office/drawing/2014/main" id="{8B57D0DD-D8C3-428F-BD3B-C172BCAF16DF}"/>
+                <a16:creationId xmlns:a16="http://schemas.microsoft.com/office/drawing/2014/main" id="{1A492CC6-503D-41A1-A64D-AF1CEE78BD86}"/>
               </a:ext>
             </a:extLst>
           </p:cNvPr>
@@ -3207,7 +3207,7 @@
           <p:cNvPr id="4" name="Date Placeholder 3">
             <a:extLst xmlns:a="http://schemas.openxmlformats.org/drawingml/2006/main">
               <a:ext uri="{FF2B5EF4-FFF2-40B4-BE49-F238E27FC236}">
-                <a16:creationId xmlns:a16="http://schemas.microsoft.com/office/drawing/2014/main" id="{CAE52E2F-30C0-4540-B535-AD4069704B72}"/>
+                <a16:creationId xmlns:a16="http://schemas.microsoft.com/office/drawing/2014/main" id="{FF8488CC-9AF5-4A16-BC4F-6BBD4ACF35A1}"/>
               </a:ext>
             </a:extLst>
           </p:cNvPr>
@@ -3234,7 +3234,7 @@
           <p:cNvPr id="5" name="Footer Placeholder 4">
             <a:extLst xmlns:a="http://schemas.openxmlformats.org/drawingml/2006/main">
               <a:ext uri="{FF2B5EF4-FFF2-40B4-BE49-F238E27FC236}">
-                <a16:creationId xmlns:a16="http://schemas.microsoft.com/office/drawing/2014/main" id="{61A645B4-2425-441E-AD95-5969254B1FBB}"/>
+                <a16:creationId xmlns:a16="http://schemas.microsoft.com/office/drawing/2014/main" id="{31A718A4-FDA1-44C4-827F-E5017907B778}"/>
               </a:ext>
             </a:extLst>
           </p:cNvPr>
@@ -3257,7 +3257,7 @@
           <p:cNvPr id="6" name="Slide Number Placeholder 5">
             <a:extLst xmlns:a="http://schemas.openxmlformats.org/drawingml/2006/main">
               <a:ext uri="{FF2B5EF4-FFF2-40B4-BE49-F238E27FC236}">
-                <a16:creationId xmlns:a16="http://schemas.microsoft.com/office/drawing/2014/main" id="{AE90B14B-DC36-4182-9EEA-B047F91AC4B5}"/>
+                <a16:creationId xmlns:a16="http://schemas.microsoft.com/office/drawing/2014/main" id="{639F0812-696C-43C8-97E1-2835980B2661}"/>
               </a:ext>
             </a:extLst>
           </p:cNvPr>
@@ -3301,7 +3301,7 @@
           <p:cNvPr id="2" name="Title 1">
             <a:extLst xmlns:a="http://schemas.openxmlformats.org/drawingml/2006/main">
               <a:ext uri="{FF2B5EF4-FFF2-40B4-BE49-F238E27FC236}">
-                <a16:creationId xmlns:a16="http://schemas.microsoft.com/office/drawing/2014/main" id="{0819951F-5378-4A9E-BA04-EFE94E88299B}"/>
+                <a16:creationId xmlns:a16="http://schemas.microsoft.com/office/drawing/2014/main" id="{6D58CD73-4E8A-44F5-8CE6-0B045306E162}"/>
               </a:ext>
             </a:extLst>
           </p:cNvPr>
@@ -3338,7 +3338,7 @@
           <p:cNvPr id="3" name="Text Placeholder 2">
             <a:extLst xmlns:a="http://schemas.openxmlformats.org/drawingml/2006/main">
               <a:ext uri="{FF2B5EF4-FFF2-40B4-BE49-F238E27FC236}">
-                <a16:creationId xmlns:a16="http://schemas.microsoft.com/office/drawing/2014/main" id="{ADA6F41C-915B-4482-9EB9-3587905FB49F}"/>
+                <a16:creationId xmlns:a16="http://schemas.microsoft.com/office/drawing/2014/main" id="{CFC5DBD6-BC6B-4590-8FD6-ADADC25CA4B0}"/>
               </a:ext>
             </a:extLst>
           </p:cNvPr>
@@ -3464,7 +3464,7 @@
           <p:cNvPr id="4" name="Date Placeholder 3">
             <a:extLst xmlns:a="http://schemas.openxmlformats.org/drawingml/2006/main">
               <a:ext uri="{FF2B5EF4-FFF2-40B4-BE49-F238E27FC236}">
-                <a16:creationId xmlns:a16="http://schemas.microsoft.com/office/drawing/2014/main" id="{5E79E92C-BA4C-49E7-9D07-8FC7C48BA64E}"/>
+                <a16:creationId xmlns:a16="http://schemas.microsoft.com/office/drawing/2014/main" id="{52D13928-F2E4-400F-9155-53861BF19739}"/>
               </a:ext>
             </a:extLst>
           </p:cNvPr>
@@ -3491,7 +3491,7 @@
           <p:cNvPr id="5" name="Footer Placeholder 4">
             <a:extLst xmlns:a="http://schemas.openxmlformats.org/drawingml/2006/main">
               <a:ext uri="{FF2B5EF4-FFF2-40B4-BE49-F238E27FC236}">
-                <a16:creationId xmlns:a16="http://schemas.microsoft.com/office/drawing/2014/main" id="{E467E155-BBE9-4F87-90CC-54276CBA482E}"/>
+                <a16:creationId xmlns:a16="http://schemas.microsoft.com/office/drawing/2014/main" id="{6AC90517-4017-41A8-AC8C-16667BDC4187}"/>
               </a:ext>
             </a:extLst>
           </p:cNvPr>
@@ -3514,7 +3514,7 @@
           <p:cNvPr id="6" name="Slide Number Placeholder 5">
             <a:extLst xmlns:a="http://schemas.openxmlformats.org/drawingml/2006/main">
               <a:ext uri="{FF2B5EF4-FFF2-40B4-BE49-F238E27FC236}">
-                <a16:creationId xmlns:a16="http://schemas.microsoft.com/office/drawing/2014/main" id="{CE62EEBE-0E72-4385-B89C-3FF911AEA8F1}"/>
+                <a16:creationId xmlns:a16="http://schemas.microsoft.com/office/drawing/2014/main" id="{4714949E-520A-4D23-968A-260DA71395E8}"/>
               </a:ext>
             </a:extLst>
           </p:cNvPr>
@@ -3558,7 +3558,7 @@
           <p:cNvPr id="2" name="Title 1">
             <a:extLst xmlns:a="http://schemas.openxmlformats.org/drawingml/2006/main">
               <a:ext uri="{FF2B5EF4-FFF2-40B4-BE49-F238E27FC236}">
-                <a16:creationId xmlns:a16="http://schemas.microsoft.com/office/drawing/2014/main" id="{AE350802-B729-49DB-98C7-40F918E6A9FA}"/>
+                <a16:creationId xmlns:a16="http://schemas.microsoft.com/office/drawing/2014/main" id="{2BD01DA2-2849-4B15-8E82-D6129BC597A2}"/>
               </a:ext>
             </a:extLst>
           </p:cNvPr>
@@ -3585,7 +3585,7 @@
           <p:cNvPr id="3" name="Content Placeholder 2">
             <a:extLst xmlns:a="http://schemas.openxmlformats.org/drawingml/2006/main">
               <a:ext uri="{FF2B5EF4-FFF2-40B4-BE49-F238E27FC236}">
-                <a16:creationId xmlns:a16="http://schemas.microsoft.com/office/drawing/2014/main" id="{85A0DAFA-994D-4259-AA42-D3B23D5A37D2}"/>
+                <a16:creationId xmlns:a16="http://schemas.microsoft.com/office/drawing/2014/main" id="{8866A810-71C7-4498-A173-F9DD9307072F}"/>
               </a:ext>
             </a:extLst>
           </p:cNvPr>
@@ -3689,7 +3689,7 @@
           <p:cNvPr id="4" name="Content Placeholder 3">
             <a:extLst xmlns:a="http://schemas.openxmlformats.org/drawingml/2006/main">
               <a:ext uri="{FF2B5EF4-FFF2-40B4-BE49-F238E27FC236}">
-                <a16:creationId xmlns:a16="http://schemas.microsoft.com/office/drawing/2014/main" id="{556E0175-3C67-4931-B6F3-2C11C88B556C}"/>
+                <a16:creationId xmlns:a16="http://schemas.microsoft.com/office/drawing/2014/main" id="{9C0E814B-0F7C-48B8-BDAF-91DD0206AAEF}"/>
               </a:ext>
             </a:extLst>
           </p:cNvPr>
@@ -3793,7 +3793,7 @@
           <p:cNvPr id="5" name="Date Placeholder 4">
             <a:extLst xmlns:a="http://schemas.openxmlformats.org/drawingml/2006/main">
               <a:ext uri="{FF2B5EF4-FFF2-40B4-BE49-F238E27FC236}">
-                <a16:creationId xmlns:a16="http://schemas.microsoft.com/office/drawing/2014/main" id="{BA10199F-0D37-4F45-AE8F-E3F38416555A}"/>
+                <a16:creationId xmlns:a16="http://schemas.microsoft.com/office/drawing/2014/main" id="{954631A8-6812-4D30-8268-5A6FCD46B22C}"/>
               </a:ext>
             </a:extLst>
           </p:cNvPr>
@@ -3820,7 +3820,7 @@
           <p:cNvPr id="6" name="Footer Placeholder 5">
             <a:extLst xmlns:a="http://schemas.openxmlformats.org/drawingml/2006/main">
               <a:ext uri="{FF2B5EF4-FFF2-40B4-BE49-F238E27FC236}">
-                <a16:creationId xmlns:a16="http://schemas.microsoft.com/office/drawing/2014/main" id="{93F732CC-22EB-46CE-9C03-74A0CABD1299}"/>
+                <a16:creationId xmlns:a16="http://schemas.microsoft.com/office/drawing/2014/main" id="{FE5F35DA-1382-411F-8371-35F122AA657D}"/>
               </a:ext>
             </a:extLst>
           </p:cNvPr>
@@ -3843,7 +3843,7 @@
           <p:cNvPr id="7" name="Slide Number Placeholder 6">
             <a:extLst xmlns:a="http://schemas.openxmlformats.org/drawingml/2006/main">
               <a:ext uri="{FF2B5EF4-FFF2-40B4-BE49-F238E27FC236}">
-                <a16:creationId xmlns:a16="http://schemas.microsoft.com/office/drawing/2014/main" id="{8CB5A888-3A27-41A5-9B2A-CA230F23B8D2}"/>
+                <a16:creationId xmlns:a16="http://schemas.microsoft.com/office/drawing/2014/main" id="{E76D3B81-AD3B-4E51-8EF4-EF17E1DD982F}"/>
               </a:ext>
             </a:extLst>
           </p:cNvPr>
@@ -3887,7 +3887,7 @@
           <p:cNvPr id="2" name="Title 1">
             <a:extLst xmlns:a="http://schemas.openxmlformats.org/drawingml/2006/main">
               <a:ext uri="{FF2B5EF4-FFF2-40B4-BE49-F238E27FC236}">
-                <a16:creationId xmlns:a16="http://schemas.microsoft.com/office/drawing/2014/main" id="{E6546FE2-82C9-46EC-9685-B79F13668E9C}"/>
+                <a16:creationId xmlns:a16="http://schemas.microsoft.com/office/drawing/2014/main" id="{FED8A700-832C-41B6-BA8B-4D348BB31EA3}"/>
               </a:ext>
             </a:extLst>
           </p:cNvPr>
@@ -3919,7 +3919,7 @@
           <p:cNvPr id="3" name="Text Placeholder 2">
             <a:extLst xmlns:a="http://schemas.openxmlformats.org/drawingml/2006/main">
               <a:ext uri="{FF2B5EF4-FFF2-40B4-BE49-F238E27FC236}">
-                <a16:creationId xmlns:a16="http://schemas.microsoft.com/office/drawing/2014/main" id="{57B6D358-8A73-4D17-AFC2-3B59E5CAD9CB}"/>
+                <a16:creationId xmlns:a16="http://schemas.microsoft.com/office/drawing/2014/main" id="{1080AD55-557E-4A91-A0A4-A4BE0934EBF6}"/>
               </a:ext>
             </a:extLst>
           </p:cNvPr>
@@ -3991,7 +3991,7 @@
           <p:cNvPr id="4" name="Content Placeholder 3">
             <a:extLst xmlns:a="http://schemas.openxmlformats.org/drawingml/2006/main">
               <a:ext uri="{FF2B5EF4-FFF2-40B4-BE49-F238E27FC236}">
-                <a16:creationId xmlns:a16="http://schemas.microsoft.com/office/drawing/2014/main" id="{ACD1474B-0DFF-49D8-B9DA-5A4CB08E7F63}"/>
+                <a16:creationId xmlns:a16="http://schemas.microsoft.com/office/drawing/2014/main" id="{19143004-2DDE-444E-A900-1A2793A90217}"/>
               </a:ext>
             </a:extLst>
           </p:cNvPr>
@@ -4095,7 +4095,7 @@
           <p:cNvPr id="5" name="Text Placeholder 4">
             <a:extLst xmlns:a="http://schemas.openxmlformats.org/drawingml/2006/main">
               <a:ext uri="{FF2B5EF4-FFF2-40B4-BE49-F238E27FC236}">
-                <a16:creationId xmlns:a16="http://schemas.microsoft.com/office/drawing/2014/main" id="{FE24EBF3-B7F6-454A-BBDC-368A32DF7452}"/>
+                <a16:creationId xmlns:a16="http://schemas.microsoft.com/office/drawing/2014/main" id="{B5632B2D-D872-4A8C-BD07-11A7081BAEFA}"/>
               </a:ext>
             </a:extLst>
           </p:cNvPr>
@@ -4167,7 +4167,7 @@
           <p:cNvPr id="6" name="Content Placeholder 5">
             <a:extLst xmlns:a="http://schemas.openxmlformats.org/drawingml/2006/main">
               <a:ext uri="{FF2B5EF4-FFF2-40B4-BE49-F238E27FC236}">
-                <a16:creationId xmlns:a16="http://schemas.microsoft.com/office/drawing/2014/main" id="{38F48996-FFE9-4F84-A312-FF61A8D2973E}"/>
+                <a16:creationId xmlns:a16="http://schemas.microsoft.com/office/drawing/2014/main" id="{405C939E-4F63-4073-8695-91020CE6AC1F}"/>
               </a:ext>
             </a:extLst>
           </p:cNvPr>
@@ -4271,7 +4271,7 @@
           <p:cNvPr id="7" name="Date Placeholder 6">
             <a:extLst xmlns:a="http://schemas.openxmlformats.org/drawingml/2006/main">
               <a:ext uri="{FF2B5EF4-FFF2-40B4-BE49-F238E27FC236}">
-                <a16:creationId xmlns:a16="http://schemas.microsoft.com/office/drawing/2014/main" id="{BD7AE254-3BFF-4ABC-ACFB-908B79FD5785}"/>
+                <a16:creationId xmlns:a16="http://schemas.microsoft.com/office/drawing/2014/main" id="{0C93C383-081C-487E-B938-12144BCCC632}"/>
               </a:ext>
             </a:extLst>
           </p:cNvPr>
@@ -4298,7 +4298,7 @@
           <p:cNvPr id="8" name="Footer Placeholder 7">
             <a:extLst xmlns:a="http://schemas.openxmlformats.org/drawingml/2006/main">
               <a:ext uri="{FF2B5EF4-FFF2-40B4-BE49-F238E27FC236}">
-                <a16:creationId xmlns:a16="http://schemas.microsoft.com/office/drawing/2014/main" id="{F33168AC-81E1-4E06-A5B7-761C17F5A6DC}"/>
+                <a16:creationId xmlns:a16="http://schemas.microsoft.com/office/drawing/2014/main" id="{6AEA01E3-2663-4D16-9918-CD8C24A51EAC}"/>
               </a:ext>
             </a:extLst>
           </p:cNvPr>
@@ -4321,7 +4321,7 @@
           <p:cNvPr id="9" name="Slide Number Placeholder 8">
             <a:extLst xmlns:a="http://schemas.openxmlformats.org/drawingml/2006/main">
               <a:ext uri="{FF2B5EF4-FFF2-40B4-BE49-F238E27FC236}">
-                <a16:creationId xmlns:a16="http://schemas.microsoft.com/office/drawing/2014/main" id="{9DDC2F81-5390-4DA1-93B0-9DBB3B59DCCD}"/>
+                <a16:creationId xmlns:a16="http://schemas.microsoft.com/office/drawing/2014/main" id="{7F4DE44A-08BB-4A3A-A0F0-3B73E4F31AAE}"/>
               </a:ext>
             </a:extLst>
           </p:cNvPr>
@@ -4365,7 +4365,7 @@
           <p:cNvPr id="2" name="Title 1">
             <a:extLst xmlns:a="http://schemas.openxmlformats.org/drawingml/2006/main">
               <a:ext uri="{FF2B5EF4-FFF2-40B4-BE49-F238E27FC236}">
-                <a16:creationId xmlns:a16="http://schemas.microsoft.com/office/drawing/2014/main" id="{D26FE3FE-A44C-4B30-81E2-80E11A9B699E}"/>
+                <a16:creationId xmlns:a16="http://schemas.microsoft.com/office/drawing/2014/main" id="{EF8B7220-51DC-4AD6-A7F8-7532F4D4A953}"/>
               </a:ext>
             </a:extLst>
           </p:cNvPr>
@@ -4392,7 +4392,7 @@
           <p:cNvPr id="3" name="Date Placeholder 2">
             <a:extLst xmlns:a="http://schemas.openxmlformats.org/drawingml/2006/main">
               <a:ext uri="{FF2B5EF4-FFF2-40B4-BE49-F238E27FC236}">
-                <a16:creationId xmlns:a16="http://schemas.microsoft.com/office/drawing/2014/main" id="{532DD679-2B7D-4FED-9CA7-265819B5BA58}"/>
+                <a16:creationId xmlns:a16="http://schemas.microsoft.com/office/drawing/2014/main" id="{80D89FAE-BA0F-433B-BFA6-84BD9442DD9E}"/>
               </a:ext>
             </a:extLst>
           </p:cNvPr>
@@ -4419,7 +4419,7 @@
           <p:cNvPr id="4" name="Footer Placeholder 3">
             <a:extLst xmlns:a="http://schemas.openxmlformats.org/drawingml/2006/main">
               <a:ext uri="{FF2B5EF4-FFF2-40B4-BE49-F238E27FC236}">
-                <a16:creationId xmlns:a16="http://schemas.microsoft.com/office/drawing/2014/main" id="{959BF307-372D-46D6-9C03-4CD4C0C1E98C}"/>
+                <a16:creationId xmlns:a16="http://schemas.microsoft.com/office/drawing/2014/main" id="{F623CE01-F900-4FE1-83F8-61C9A984DD14}"/>
               </a:ext>
             </a:extLst>
           </p:cNvPr>
@@ -4442,7 +4442,7 @@
           <p:cNvPr id="5" name="Slide Number Placeholder 4">
             <a:extLst xmlns:a="http://schemas.openxmlformats.org/drawingml/2006/main">
               <a:ext uri="{FF2B5EF4-FFF2-40B4-BE49-F238E27FC236}">
-                <a16:creationId xmlns:a16="http://schemas.microsoft.com/office/drawing/2014/main" id="{CC19F408-3827-4CD4-B86A-53863ED09763}"/>
+                <a16:creationId xmlns:a16="http://schemas.microsoft.com/office/drawing/2014/main" id="{DE897269-4A9D-4E51-A4EB-F9DCC13A7F77}"/>
               </a:ext>
             </a:extLst>
           </p:cNvPr>
@@ -4486,7 +4486,7 @@
           <p:cNvPr id="2" name="Date Placeholder 1">
             <a:extLst xmlns:a="http://schemas.openxmlformats.org/drawingml/2006/main">
               <a:ext uri="{FF2B5EF4-FFF2-40B4-BE49-F238E27FC236}">
-                <a16:creationId xmlns:a16="http://schemas.microsoft.com/office/drawing/2014/main" id="{A4DD6890-294C-426E-843A-51D63AF8E71B}"/>
+                <a16:creationId xmlns:a16="http://schemas.microsoft.com/office/drawing/2014/main" id="{C4C28138-4C03-46DD-9591-8E0BBEE6D80A}"/>
               </a:ext>
             </a:extLst>
           </p:cNvPr>
@@ -4513,7 +4513,7 @@
           <p:cNvPr id="3" name="Footer Placeholder 2">
             <a:extLst xmlns:a="http://schemas.openxmlformats.org/drawingml/2006/main">
               <a:ext uri="{FF2B5EF4-FFF2-40B4-BE49-F238E27FC236}">
-                <a16:creationId xmlns:a16="http://schemas.microsoft.com/office/drawing/2014/main" id="{9349743E-C524-4CCE-8AB0-3B1826ADC3BA}"/>
+                <a16:creationId xmlns:a16="http://schemas.microsoft.com/office/drawing/2014/main" id="{D543B1B5-6A3B-4752-A261-F366A6C8D8D5}"/>
               </a:ext>
             </a:extLst>
           </p:cNvPr>
@@ -4536,7 +4536,7 @@
           <p:cNvPr id="4" name="Slide Number Placeholder 3">
             <a:extLst xmlns:a="http://schemas.openxmlformats.org/drawingml/2006/main">
               <a:ext uri="{FF2B5EF4-FFF2-40B4-BE49-F238E27FC236}">
-                <a16:creationId xmlns:a16="http://schemas.microsoft.com/office/drawing/2014/main" id="{CFD7ECC6-2C6C-48E5-BD35-15034E712D05}"/>
+                <a16:creationId xmlns:a16="http://schemas.microsoft.com/office/drawing/2014/main" id="{A407AF64-EC12-4479-8DC8-933718BE0314}"/>
               </a:ext>
             </a:extLst>
           </p:cNvPr>
@@ -4580,7 +4580,7 @@
           <p:cNvPr id="2" name="Title 1">
             <a:extLst xmlns:a="http://schemas.openxmlformats.org/drawingml/2006/main">
               <a:ext uri="{FF2B5EF4-FFF2-40B4-BE49-F238E27FC236}">
-                <a16:creationId xmlns:a16="http://schemas.microsoft.com/office/drawing/2014/main" id="{ACDDEEDE-2000-41CC-B4C7-BC9FEA28BA74}"/>
+                <a16:creationId xmlns:a16="http://schemas.microsoft.com/office/drawing/2014/main" id="{A8FBAF8A-DC80-4EAF-9061-681220B4327F}"/>
               </a:ext>
             </a:extLst>
           </p:cNvPr>
@@ -4617,7 +4617,7 @@
           <p:cNvPr id="3" name="Content Placeholder 2">
             <a:extLst xmlns:a="http://schemas.openxmlformats.org/drawingml/2006/main">
               <a:ext uri="{FF2B5EF4-FFF2-40B4-BE49-F238E27FC236}">
-                <a16:creationId xmlns:a16="http://schemas.microsoft.com/office/drawing/2014/main" id="{668A4FFD-E61B-4841-84B2-723BE1D156BB}"/>
+                <a16:creationId xmlns:a16="http://schemas.microsoft.com/office/drawing/2014/main" id="{19FE12F8-B199-4F61-8581-29577818840F}"/>
               </a:ext>
             </a:extLst>
           </p:cNvPr>
@@ -4721,7 +4721,7 @@
           <p:cNvPr id="4" name="Text Placeholder 3">
             <a:extLst xmlns:a="http://schemas.openxmlformats.org/drawingml/2006/main">
               <a:ext uri="{FF2B5EF4-FFF2-40B4-BE49-F238E27FC236}">
-                <a16:creationId xmlns:a16="http://schemas.microsoft.com/office/drawing/2014/main" id="{AC3445DE-1297-4D99-BFB9-B25DB07F03D0}"/>
+                <a16:creationId xmlns:a16="http://schemas.microsoft.com/office/drawing/2014/main" id="{AA94F1D2-AF7E-4C8F-8E01-8165F706BAA6}"/>
               </a:ext>
             </a:extLst>
           </p:cNvPr>
@@ -4793,7 +4793,7 @@
           <p:cNvPr id="5" name="Date Placeholder 4">
             <a:extLst xmlns:a="http://schemas.openxmlformats.org/drawingml/2006/main">
               <a:ext uri="{FF2B5EF4-FFF2-40B4-BE49-F238E27FC236}">
-                <a16:creationId xmlns:a16="http://schemas.microsoft.com/office/drawing/2014/main" id="{E7FD2D9D-E012-4B4B-8C4C-2F21AB0F22A3}"/>
+                <a16:creationId xmlns:a16="http://schemas.microsoft.com/office/drawing/2014/main" id="{37FF5B7D-FBD2-470B-8CFB-4D4066EAE0E9}"/>
               </a:ext>
             </a:extLst>
           </p:cNvPr>
@@ -4820,7 +4820,7 @@
           <p:cNvPr id="6" name="Footer Placeholder 5">
             <a:extLst xmlns:a="http://schemas.openxmlformats.org/drawingml/2006/main">
               <a:ext uri="{FF2B5EF4-FFF2-40B4-BE49-F238E27FC236}">
-                <a16:creationId xmlns:a16="http://schemas.microsoft.com/office/drawing/2014/main" id="{35C3C34C-A4F3-4B10-B00F-ACB93FCAA129}"/>
+                <a16:creationId xmlns:a16="http://schemas.microsoft.com/office/drawing/2014/main" id="{AF6AC6ED-FF78-42FD-8B9F-31F2526C5ED7}"/>
               </a:ext>
             </a:extLst>
           </p:cNvPr>
@@ -4843,7 +4843,7 @@
           <p:cNvPr id="7" name="Slide Number Placeholder 6">
             <a:extLst xmlns:a="http://schemas.openxmlformats.org/drawingml/2006/main">
               <a:ext uri="{FF2B5EF4-FFF2-40B4-BE49-F238E27FC236}">
-                <a16:creationId xmlns:a16="http://schemas.microsoft.com/office/drawing/2014/main" id="{E2D51C05-B6EC-40A8-BBD3-3F7F1FB6FA9A}"/>
+                <a16:creationId xmlns:a16="http://schemas.microsoft.com/office/drawing/2014/main" id="{E2C137DA-27AB-44E9-A14C-180D9D4629DE}"/>
               </a:ext>
             </a:extLst>
           </p:cNvPr>
@@ -4887,7 +4887,7 @@
           <p:cNvPr id="2" name="Title 1">
             <a:extLst xmlns:a="http://schemas.openxmlformats.org/drawingml/2006/main">
               <a:ext uri="{FF2B5EF4-FFF2-40B4-BE49-F238E27FC236}">
-                <a16:creationId xmlns:a16="http://schemas.microsoft.com/office/drawing/2014/main" id="{A5042971-9020-4EB9-B0D3-4ED672A977B5}"/>
+                <a16:creationId xmlns:a16="http://schemas.microsoft.com/office/drawing/2014/main" id="{B099F439-59D3-4C70-8E4E-70309377FABC}"/>
               </a:ext>
             </a:extLst>
           </p:cNvPr>
@@ -4924,7 +4924,7 @@
           <p:cNvPr id="3" name="Picture Placeholder 2">
             <a:extLst xmlns:a="http://schemas.openxmlformats.org/drawingml/2006/main">
               <a:ext uri="{FF2B5EF4-FFF2-40B4-BE49-F238E27FC236}">
-                <a16:creationId xmlns:a16="http://schemas.microsoft.com/office/drawing/2014/main" id="{8F98E5F7-4B98-47A8-9CD0-4D180076F09B}"/>
+                <a16:creationId xmlns:a16="http://schemas.microsoft.com/office/drawing/2014/main" id="{26A33B05-0F5F-4436-A201-AC4D42BDD913}"/>
               </a:ext>
             </a:extLst>
           </p:cNvPr>
@@ -4989,7 +4989,7 @@
           <p:cNvPr id="4" name="Text Placeholder 3">
             <a:extLst xmlns:a="http://schemas.openxmlformats.org/drawingml/2006/main">
               <a:ext uri="{FF2B5EF4-FFF2-40B4-BE49-F238E27FC236}">
-                <a16:creationId xmlns:a16="http://schemas.microsoft.com/office/drawing/2014/main" id="{B696736D-122E-4CB9-AF20-1C4D0A21F7A4}"/>
+                <a16:creationId xmlns:a16="http://schemas.microsoft.com/office/drawing/2014/main" id="{3C075238-689D-47DD-B5C0-C100576718A5}"/>
               </a:ext>
             </a:extLst>
           </p:cNvPr>
@@ -5061,7 +5061,7 @@
           <p:cNvPr id="5" name="Date Placeholder 4">
             <a:extLst xmlns:a="http://schemas.openxmlformats.org/drawingml/2006/main">
               <a:ext uri="{FF2B5EF4-FFF2-40B4-BE49-F238E27FC236}">
-                <a16:creationId xmlns:a16="http://schemas.microsoft.com/office/drawing/2014/main" id="{06DBD040-7444-4E30-ACD5-F0A8F59B3605}"/>
+                <a16:creationId xmlns:a16="http://schemas.microsoft.com/office/drawing/2014/main" id="{B778171A-8CA3-4889-B602-2EBE41C60F93}"/>
               </a:ext>
             </a:extLst>
           </p:cNvPr>
@@ -5088,7 +5088,7 @@
           <p:cNvPr id="6" name="Footer Placeholder 5">
             <a:extLst xmlns:a="http://schemas.openxmlformats.org/drawingml/2006/main">
               <a:ext uri="{FF2B5EF4-FFF2-40B4-BE49-F238E27FC236}">
-                <a16:creationId xmlns:a16="http://schemas.microsoft.com/office/drawing/2014/main" id="{D6187241-083E-45E0-AEFE-F40CCD7C7A7E}"/>
+                <a16:creationId xmlns:a16="http://schemas.microsoft.com/office/drawing/2014/main" id="{AB9CBFC9-FF9C-437E-A931-B9AB45593D74}"/>
               </a:ext>
             </a:extLst>
           </p:cNvPr>
@@ -5111,7 +5111,7 @@
           <p:cNvPr id="7" name="Slide Number Placeholder 6">
             <a:extLst xmlns:a="http://schemas.openxmlformats.org/drawingml/2006/main">
               <a:ext uri="{FF2B5EF4-FFF2-40B4-BE49-F238E27FC236}">
-                <a16:creationId xmlns:a16="http://schemas.microsoft.com/office/drawing/2014/main" id="{5CEAA597-9EB4-4CC1-9C36-353046B6A0D6}"/>
+                <a16:creationId xmlns:a16="http://schemas.microsoft.com/office/drawing/2014/main" id="{A3117D1B-FF3F-4827-A627-D76A697AFF29}"/>
               </a:ext>
             </a:extLst>
           </p:cNvPr>
@@ -5160,7 +5160,7 @@
           <p:cNvPr id="2" name="Title Placeholder 1">
             <a:extLst xmlns:a="http://schemas.openxmlformats.org/drawingml/2006/main">
               <a:ext uri="{FF2B5EF4-FFF2-40B4-BE49-F238E27FC236}">
-                <a16:creationId xmlns:a16="http://schemas.microsoft.com/office/drawing/2014/main" id="{4C384342-6234-415C-B619-E34C6CE6D6E0}"/>
+                <a16:creationId xmlns:a16="http://schemas.microsoft.com/office/drawing/2014/main" id="{AA413584-8D3F-452B-98A5-61A4B50DC66A}"/>
               </a:ext>
             </a:extLst>
           </p:cNvPr>
@@ -5197,7 +5197,7 @@
           <p:cNvPr id="3" name="Text Placeholder 2">
             <a:extLst xmlns:a="http://schemas.openxmlformats.org/drawingml/2006/main">
               <a:ext uri="{FF2B5EF4-FFF2-40B4-BE49-F238E27FC236}">
-                <a16:creationId xmlns:a16="http://schemas.microsoft.com/office/drawing/2014/main" id="{76C759CA-182A-49B0-9674-824B8BA61D5B}"/>
+                <a16:creationId xmlns:a16="http://schemas.microsoft.com/office/drawing/2014/main" id="{E2A6E87E-5EAE-4222-B6C2-0F9E7B75F8D0}"/>
               </a:ext>
             </a:extLst>
           </p:cNvPr>
@@ -5269,7 +5269,7 @@
           <p:cNvPr id="4" name="Date Placeholder 3">
             <a:extLst xmlns:a="http://schemas.openxmlformats.org/drawingml/2006/main">
               <a:ext uri="{FF2B5EF4-FFF2-40B4-BE49-F238E27FC236}">
-                <a16:creationId xmlns:a16="http://schemas.microsoft.com/office/drawing/2014/main" id="{4A748D8C-2F3A-49B4-BEE8-130A361E1D27}"/>
+                <a16:creationId xmlns:a16="http://schemas.microsoft.com/office/drawing/2014/main" id="{8D35E4DC-1CA3-4C1F-8932-F608F6CABA55}"/>
               </a:ext>
             </a:extLst>
           </p:cNvPr>
@@ -5315,7 +5315,7 @@
           <p:cNvPr id="5" name="Footer Placeholder 4">
             <a:extLst xmlns:a="http://schemas.openxmlformats.org/drawingml/2006/main">
               <a:ext uri="{FF2B5EF4-FFF2-40B4-BE49-F238E27FC236}">
-                <a16:creationId xmlns:a16="http://schemas.microsoft.com/office/drawing/2014/main" id="{24C86139-6CF0-4AF1-9C71-C6A96F22DEDA}"/>
+                <a16:creationId xmlns:a16="http://schemas.microsoft.com/office/drawing/2014/main" id="{1C5D8045-6D47-4F22-9160-D25CC10FD01C}"/>
               </a:ext>
             </a:extLst>
           </p:cNvPr>
@@ -5357,7 +5357,7 @@
           <p:cNvPr id="6" name="Slide Number Placeholder 5">
             <a:extLst xmlns:a="http://schemas.openxmlformats.org/drawingml/2006/main">
               <a:ext uri="{FF2B5EF4-FFF2-40B4-BE49-F238E27FC236}">
-                <a16:creationId xmlns:a16="http://schemas.microsoft.com/office/drawing/2014/main" id="{D049E3C2-540F-4754-B644-C3D70A7FE044}"/>
+                <a16:creationId xmlns:a16="http://schemas.microsoft.com/office/drawing/2014/main" id="{C6050A4C-3829-4709-865F-46BC7F6E58A0}"/>
               </a:ext>
             </a:extLst>
           </p:cNvPr>
@@ -5402,17 +5402,17 @@
   </p:cSld>
   <p:clrMap bg1="lt1" tx1="dk1" bg2="lt2" tx2="dk2" accent1="accent1" accent2="accent2" accent3="accent3" accent4="accent4" accent5="accent5" accent6="accent6" hlink="hlink" folHlink="folHlink"/>
   <p:sldLayoutIdLst>
-    <p:sldLayoutId xmlns:r="http://schemas.openxmlformats.org/officeDocument/2006/relationships" id="2147483649" r:id="R291ddebb3bed49f3"/>
-    <p:sldLayoutId xmlns:r="http://schemas.openxmlformats.org/officeDocument/2006/relationships" id="2147483650" r:id="R4c9d395716ef4c5c"/>
-    <p:sldLayoutId xmlns:r="http://schemas.openxmlformats.org/officeDocument/2006/relationships" id="2147483651" r:id="Re8ad8a72c9a34e70"/>
-    <p:sldLayoutId xmlns:r="http://schemas.openxmlformats.org/officeDocument/2006/relationships" id="2147483652" r:id="R9ec4fecbc77545b3"/>
-    <p:sldLayoutId xmlns:r="http://schemas.openxmlformats.org/officeDocument/2006/relationships" id="2147483653" r:id="R86e2f14e5bb04172"/>
-    <p:sldLayoutId xmlns:r="http://schemas.openxmlformats.org/officeDocument/2006/relationships" id="2147483654" r:id="R9eeb2937c93c41d7"/>
-    <p:sldLayoutId xmlns:r="http://schemas.openxmlformats.org/officeDocument/2006/relationships" id="2147483655" r:id="R0c306871ddff4a6f"/>
-    <p:sldLayoutId xmlns:r="http://schemas.openxmlformats.org/officeDocument/2006/relationships" id="2147483656" r:id="R5562f513a9844664"/>
-    <p:sldLayoutId xmlns:r="http://schemas.openxmlformats.org/officeDocument/2006/relationships" id="2147483657" r:id="Rf38867b578c9435a"/>
-    <p:sldLayoutId xmlns:r="http://schemas.openxmlformats.org/officeDocument/2006/relationships" id="2147483658" r:id="Rddad1026b6eb4078"/>
-    <p:sldLayoutId xmlns:r="http://schemas.openxmlformats.org/officeDocument/2006/relationships" id="2147483659" r:id="R070085cf34804a6e"/>
+    <p:sldLayoutId xmlns:r="http://schemas.openxmlformats.org/officeDocument/2006/relationships" id="2147483649" r:id="Re918e30a43ca4f63"/>
+    <p:sldLayoutId xmlns:r="http://schemas.openxmlformats.org/officeDocument/2006/relationships" id="2147483650" r:id="R93ecebfb0cb144ec"/>
+    <p:sldLayoutId xmlns:r="http://schemas.openxmlformats.org/officeDocument/2006/relationships" id="2147483651" r:id="R53ac435a9b8c46af"/>
+    <p:sldLayoutId xmlns:r="http://schemas.openxmlformats.org/officeDocument/2006/relationships" id="2147483652" r:id="R9009886b5e3c4b4d"/>
+    <p:sldLayoutId xmlns:r="http://schemas.openxmlformats.org/officeDocument/2006/relationships" id="2147483653" r:id="Rf34c1b0813d04f4f"/>
+    <p:sldLayoutId xmlns:r="http://schemas.openxmlformats.org/officeDocument/2006/relationships" id="2147483654" r:id="R2cf6595e74a44389"/>
+    <p:sldLayoutId xmlns:r="http://schemas.openxmlformats.org/officeDocument/2006/relationships" id="2147483655" r:id="R3509c8a419d04246"/>
+    <p:sldLayoutId xmlns:r="http://schemas.openxmlformats.org/officeDocument/2006/relationships" id="2147483656" r:id="R98be88b8ff504a15"/>
+    <p:sldLayoutId xmlns:r="http://schemas.openxmlformats.org/officeDocument/2006/relationships" id="2147483657" r:id="R2594bc5d17a643ec"/>
+    <p:sldLayoutId xmlns:r="http://schemas.openxmlformats.org/officeDocument/2006/relationships" id="2147483658" r:id="R06e2ac18e6fe4ad5"/>
+    <p:sldLayoutId xmlns:r="http://schemas.openxmlformats.org/officeDocument/2006/relationships" id="2147483659" r:id="R81d9424b1fb04b07"/>
   </p:sldLayoutIdLst>
   <p:txStyles>
     <p:titleStyle>
@@ -5965,7 +5965,7 @@
           <p:cNvPr id="2" name="Rectangle 1">
             <a:extLst xmlns:a="http://schemas.openxmlformats.org/drawingml/2006/main">
               <a:ext uri="{FF2B5EF4-FFF2-40B4-BE49-F238E27FC236}">
-                <a16:creationId xmlns:a16="http://schemas.microsoft.com/office/drawing/2014/main" id="{1E79EF10-3A32-4428-9E51-BEC93AD241EB}"/>
+                <a16:creationId xmlns:a16="http://schemas.microsoft.com/office/drawing/2014/main" id="{A679E046-B654-4C34-8F92-733452C875F5}"/>
               </a:ext>
             </a:extLst>
           </p:cNvPr>
@@ -6020,7 +6020,7 @@
           <p:cNvPr id="3" name="TextBox 2">
             <a:extLst xmlns:a="http://schemas.openxmlformats.org/drawingml/2006/main">
               <a:ext uri="{FF2B5EF4-FFF2-40B4-BE49-F238E27FC236}">
-                <a16:creationId xmlns:a16="http://schemas.microsoft.com/office/drawing/2014/main" id="{0D8C067B-3BB5-4550-9B69-3B5ABDB43A37}"/>
+                <a16:creationId xmlns:a16="http://schemas.microsoft.com/office/drawing/2014/main" id="{C91BE91B-9485-4660-9921-E43822BC901E}"/>
               </a:ext>
             </a:extLst>
           </p:cNvPr>
@@ -6067,7 +6067,7 @@
           <p:cNvPr id="4" name="TextBox 3">
             <a:extLst xmlns:a="http://schemas.openxmlformats.org/drawingml/2006/main">
               <a:ext uri="{FF2B5EF4-FFF2-40B4-BE49-F238E27FC236}">
-                <a16:creationId xmlns:a16="http://schemas.microsoft.com/office/drawing/2014/main" id="{729351B3-9F72-444E-9F5B-F5709D0B3428}"/>
+                <a16:creationId xmlns:a16="http://schemas.microsoft.com/office/drawing/2014/main" id="{6E24C409-824F-4480-A574-66260788CAB9}"/>
               </a:ext>
             </a:extLst>
           </p:cNvPr>
@@ -6115,7 +6115,7 @@
           <p:cNvPr id="5" name="TextBox 4">
             <a:extLst xmlns:a="http://schemas.openxmlformats.org/drawingml/2006/main">
               <a:ext uri="{FF2B5EF4-FFF2-40B4-BE49-F238E27FC236}">
-                <a16:creationId xmlns:a16="http://schemas.microsoft.com/office/drawing/2014/main" id="{FC4A383F-0153-4A30-BB37-A637676C0567}"/>
+                <a16:creationId xmlns:a16="http://schemas.microsoft.com/office/drawing/2014/main" id="{83F02065-4C99-4180-A417-E55C90F11270}"/>
               </a:ext>
             </a:extLst>
           </p:cNvPr>
@@ -6162,7 +6162,7 @@
           <p:cNvPr id="6" name="Rectangle 5">
             <a:extLst xmlns:a="http://schemas.openxmlformats.org/drawingml/2006/main">
               <a:ext uri="{FF2B5EF4-FFF2-40B4-BE49-F238E27FC236}">
-                <a16:creationId xmlns:a16="http://schemas.microsoft.com/office/drawing/2014/main" id="{88EC7CF2-7AC7-43F6-BE0F-0433A5EDE922}"/>
+                <a16:creationId xmlns:a16="http://schemas.microsoft.com/office/drawing/2014/main" id="{80EF9BF2-07F1-4A04-BD07-5D1E6A4B4647}"/>
               </a:ext>
             </a:extLst>
           </p:cNvPr>
@@ -6217,7 +6217,7 @@
           <p:cNvPr id="7" name="TextBox 6">
             <a:extLst xmlns:a="http://schemas.openxmlformats.org/drawingml/2006/main">
               <a:ext uri="{FF2B5EF4-FFF2-40B4-BE49-F238E27FC236}">
-                <a16:creationId xmlns:a16="http://schemas.microsoft.com/office/drawing/2014/main" id="{0A97B801-9A45-4C39-B9B0-AA7F9F2FE18A}"/>
+                <a16:creationId xmlns:a16="http://schemas.microsoft.com/office/drawing/2014/main" id="{C07F06CA-1BE3-4C0E-A49B-76FEAFBCCDE8}"/>
               </a:ext>
             </a:extLst>
           </p:cNvPr>
@@ -6264,7 +6264,7 @@
           <p:cNvPr id="8" name="TextBox 7">
             <a:extLst xmlns:a="http://schemas.openxmlformats.org/drawingml/2006/main">
               <a:ext uri="{FF2B5EF4-FFF2-40B4-BE49-F238E27FC236}">
-                <a16:creationId xmlns:a16="http://schemas.microsoft.com/office/drawing/2014/main" id="{2B3F5127-39EA-4EBE-B3EC-13A3DE2D3AB3}"/>
+                <a16:creationId xmlns:a16="http://schemas.microsoft.com/office/drawing/2014/main" id="{0B67EB56-EE24-4994-93D5-3F1F7FF16306}"/>
               </a:ext>
             </a:extLst>
           </p:cNvPr>
@@ -6301,7 +6301,7 @@
                 <a:ea typeface="Aptos"/>
                 <a:cs typeface="Aptos"/>
               </a:rPr>
-              <a:t>2026.07.24-20</a:t>
+              <a:t>2026.07.24-21</a:t>
             </a:r>
           </a:p>
         </p:txBody>
@@ -6311,7 +6311,7 @@
           <p:cNvPr id="9" name="TextBox 8">
             <a:extLst xmlns:a="http://schemas.openxmlformats.org/drawingml/2006/main">
               <a:ext uri="{FF2B5EF4-FFF2-40B4-BE49-F238E27FC236}">
-                <a16:creationId xmlns:a16="http://schemas.microsoft.com/office/drawing/2014/main" id="{8F9F4DB6-A9FA-488B-B7D1-E7454C16B560}"/>
+                <a16:creationId xmlns:a16="http://schemas.microsoft.com/office/drawing/2014/main" id="{0B4AE504-3814-4A9A-B780-0DD34418FBBF}"/>
               </a:ext>
             </a:extLst>
           </p:cNvPr>
@@ -6359,7 +6359,7 @@
           <p:cNvPr id="10" name="TextBox 9">
             <a:extLst xmlns:a="http://schemas.openxmlformats.org/drawingml/2006/main">
               <a:ext uri="{FF2B5EF4-FFF2-40B4-BE49-F238E27FC236}">
-                <a16:creationId xmlns:a16="http://schemas.microsoft.com/office/drawing/2014/main" id="{16D5C030-EE4A-45C0-A310-F9E3AB372BA6}"/>
+                <a16:creationId xmlns:a16="http://schemas.microsoft.com/office/drawing/2014/main" id="{627CCA15-F3D9-472B-891B-50A764809140}"/>
               </a:ext>
             </a:extLst>
           </p:cNvPr>
@@ -6406,7 +6406,7 @@
           <p:cNvPr id="11" name="TextBox 10">
             <a:extLst xmlns:a="http://schemas.openxmlformats.org/drawingml/2006/main">
               <a:ext uri="{FF2B5EF4-FFF2-40B4-BE49-F238E27FC236}">
-                <a16:creationId xmlns:a16="http://schemas.microsoft.com/office/drawing/2014/main" id="{32E00FB2-1A0A-48AB-9588-D76AFDE1E495}"/>
+                <a16:creationId xmlns:a16="http://schemas.microsoft.com/office/drawing/2014/main" id="{FFFD6009-0086-4248-89B0-B250067EF007}"/>
               </a:ext>
             </a:extLst>
           </p:cNvPr>
@@ -6453,7 +6453,7 @@
           <p:cNvPr id="12" name="TextBox 11">
             <a:extLst xmlns:a="http://schemas.openxmlformats.org/drawingml/2006/main">
               <a:ext uri="{FF2B5EF4-FFF2-40B4-BE49-F238E27FC236}">
-                <a16:creationId xmlns:a16="http://schemas.microsoft.com/office/drawing/2014/main" id="{D0F93232-E3A0-4603-A473-103058E5DE5A}"/>
+                <a16:creationId xmlns:a16="http://schemas.microsoft.com/office/drawing/2014/main" id="{FE4A9623-1BB6-483E-8088-D5A1C1AC815A}"/>
               </a:ext>
             </a:extLst>
           </p:cNvPr>
@@ -6500,7 +6500,7 @@
           <p:cNvPr id="13" name="TextBox 12">
             <a:extLst xmlns:a="http://schemas.openxmlformats.org/drawingml/2006/main">
               <a:ext uri="{FF2B5EF4-FFF2-40B4-BE49-F238E27FC236}">
-                <a16:creationId xmlns:a16="http://schemas.microsoft.com/office/drawing/2014/main" id="{C6A214FA-1B54-4EC0-A1FB-00447B418882}"/>
+                <a16:creationId xmlns:a16="http://schemas.microsoft.com/office/drawing/2014/main" id="{19BF4F56-CCA3-4143-8C64-103C8AFEA6F0}"/>
               </a:ext>
             </a:extLst>
           </p:cNvPr>
@@ -6545,7 +6545,7 @@
     </p:spTree>
     <p:extLst>
       <p:ext uri="{BB962C8B-B14F-4D97-AF65-F5344CB8AC3E}">
-        <p14:creationId xmlns:p14="http://schemas.microsoft.com/office/powerpoint/2010/main" val="1471576342"/>
+        <p14:creationId xmlns:p14="http://schemas.microsoft.com/office/powerpoint/2010/main" val="911228728"/>
       </p:ext>
     </p:extLst>
   </p:cSld>
@@ -6569,7 +6569,7 @@
           <p:cNvPr id="2" name="TextBox 1">
             <a:extLst xmlns:a="http://schemas.openxmlformats.org/drawingml/2006/main">
               <a:ext uri="{FF2B5EF4-FFF2-40B4-BE49-F238E27FC236}">
-                <a16:creationId xmlns:a16="http://schemas.microsoft.com/office/drawing/2014/main" id="{1A104782-C470-48BF-9A79-7AB56D4726DF}"/>
+                <a16:creationId xmlns:a16="http://schemas.microsoft.com/office/drawing/2014/main" id="{8148D6EB-9CDC-435F-91AD-9603BD6846FC}"/>
               </a:ext>
             </a:extLst>
           </p:cNvPr>
@@ -6616,7 +6616,7 @@
           <p:cNvPr id="3" name="TextBox 2">
             <a:extLst xmlns:a="http://schemas.openxmlformats.org/drawingml/2006/main">
               <a:ext uri="{FF2B5EF4-FFF2-40B4-BE49-F238E27FC236}">
-                <a16:creationId xmlns:a16="http://schemas.microsoft.com/office/drawing/2014/main" id="{B7BB011E-71D6-41FD-8745-0C3A7EC01A15}"/>
+                <a16:creationId xmlns:a16="http://schemas.microsoft.com/office/drawing/2014/main" id="{7333558A-A7C6-4ABF-B137-65165930F25E}"/>
               </a:ext>
             </a:extLst>
           </p:cNvPr>
@@ -6663,7 +6663,7 @@
           <p:cNvPr id="4" name="Rectangle 3">
             <a:extLst xmlns:a="http://schemas.openxmlformats.org/drawingml/2006/main">
               <a:ext uri="{FF2B5EF4-FFF2-40B4-BE49-F238E27FC236}">
-                <a16:creationId xmlns:a16="http://schemas.microsoft.com/office/drawing/2014/main" id="{9F170D33-D7F8-4591-9612-53AC6131253A}"/>
+                <a16:creationId xmlns:a16="http://schemas.microsoft.com/office/drawing/2014/main" id="{8D4BAC33-4134-4D4A-BF29-49F203495481}"/>
               </a:ext>
             </a:extLst>
           </p:cNvPr>
@@ -6718,7 +6718,7 @@
           <p:cNvPr id="5" name="Rectangle 4">
             <a:extLst xmlns:a="http://schemas.openxmlformats.org/drawingml/2006/main">
               <a:ext uri="{FF2B5EF4-FFF2-40B4-BE49-F238E27FC236}">
-                <a16:creationId xmlns:a16="http://schemas.microsoft.com/office/drawing/2014/main" id="{3F250A08-A9F8-4576-B8A5-F72FA9CFE8F9}"/>
+                <a16:creationId xmlns:a16="http://schemas.microsoft.com/office/drawing/2014/main" id="{8FF5A734-4E4B-4D42-89B7-E3ED52A44603}"/>
               </a:ext>
             </a:extLst>
           </p:cNvPr>
@@ -6773,7 +6773,7 @@
           <p:cNvPr id="6" name="TextBox 5">
             <a:extLst xmlns:a="http://schemas.openxmlformats.org/drawingml/2006/main">
               <a:ext uri="{FF2B5EF4-FFF2-40B4-BE49-F238E27FC236}">
-                <a16:creationId xmlns:a16="http://schemas.microsoft.com/office/drawing/2014/main" id="{2241A276-C6EC-4870-AA36-514C837706FC}"/>
+                <a16:creationId xmlns:a16="http://schemas.microsoft.com/office/drawing/2014/main" id="{5189639F-78C3-48C5-98A2-2E6917EA6C2A}"/>
               </a:ext>
             </a:extLst>
           </p:cNvPr>
@@ -6810,7 +6810,7 @@
                 <a:ea typeface="Aptos"/>
                 <a:cs typeface="Aptos"/>
               </a:rPr>
-              <a:t>Julkinen riippumaton evidenssikooste · 2026.07.24-20 · 2026-07-24 · Lähteet: WIPO licensing; dispute resolution; IPscore</a:t>
+              <a:t>Julkinen riippumaton evidenssikooste · 2026.07.24-21 · 2026-07-24 · Lähteet: WIPO licensing; dispute resolution; IPscore</a:t>
             </a:r>
           </a:p>
         </p:txBody>
@@ -6820,7 +6820,7 @@
           <p:cNvPr id="7" name="TextBox 6">
             <a:extLst xmlns:a="http://schemas.openxmlformats.org/drawingml/2006/main">
               <a:ext uri="{FF2B5EF4-FFF2-40B4-BE49-F238E27FC236}">
-                <a16:creationId xmlns:a16="http://schemas.microsoft.com/office/drawing/2014/main" id="{416B744E-7C64-45E4-9BC1-7F22B1548313}"/>
+                <a16:creationId xmlns:a16="http://schemas.microsoft.com/office/drawing/2014/main" id="{4CC029BF-FD80-4395-AB20-93803BC70354}"/>
               </a:ext>
             </a:extLst>
           </p:cNvPr>
@@ -6867,7 +6867,7 @@
           <p:cNvPr id="8" name="Rounded Rectangle 7">
             <a:extLst xmlns:a="http://schemas.openxmlformats.org/drawingml/2006/main">
               <a:ext uri="{FF2B5EF4-FFF2-40B4-BE49-F238E27FC236}">
-                <a16:creationId xmlns:a16="http://schemas.microsoft.com/office/drawing/2014/main" id="{F90E1E07-9E05-4A94-A05B-836FC6BF3FD7}"/>
+                <a16:creationId xmlns:a16="http://schemas.microsoft.com/office/drawing/2014/main" id="{97765A43-E720-4A92-988B-683EA7F5F056}"/>
               </a:ext>
             </a:extLst>
           </p:cNvPr>
@@ -6924,7 +6924,7 @@
           <p:cNvPr id="9" name="TextBox 8">
             <a:extLst xmlns:a="http://schemas.openxmlformats.org/drawingml/2006/main">
               <a:ext uri="{FF2B5EF4-FFF2-40B4-BE49-F238E27FC236}">
-                <a16:creationId xmlns:a16="http://schemas.microsoft.com/office/drawing/2014/main" id="{8640BA9B-CD68-42B7-B359-115EDF363DA8}"/>
+                <a16:creationId xmlns:a16="http://schemas.microsoft.com/office/drawing/2014/main" id="{6C8CC3BA-E4A6-4F08-8242-67D9EFF3EFF9}"/>
               </a:ext>
             </a:extLst>
           </p:cNvPr>
@@ -6971,7 +6971,7 @@
           <p:cNvPr id="10" name="TextBox 9">
             <a:extLst xmlns:a="http://schemas.openxmlformats.org/drawingml/2006/main">
               <a:ext uri="{FF2B5EF4-FFF2-40B4-BE49-F238E27FC236}">
-                <a16:creationId xmlns:a16="http://schemas.microsoft.com/office/drawing/2014/main" id="{F7A03461-6541-47AA-9CD6-4DF96F12E758}"/>
+                <a16:creationId xmlns:a16="http://schemas.microsoft.com/office/drawing/2014/main" id="{8C4CFA0E-DFF1-428B-A236-0B49C43DBBCF}"/>
               </a:ext>
             </a:extLst>
           </p:cNvPr>
@@ -7018,7 +7018,7 @@
           <p:cNvPr id="11" name="TextBox 10">
             <a:extLst xmlns:a="http://schemas.openxmlformats.org/drawingml/2006/main">
               <a:ext uri="{FF2B5EF4-FFF2-40B4-BE49-F238E27FC236}">
-                <a16:creationId xmlns:a16="http://schemas.microsoft.com/office/drawing/2014/main" id="{1081D82B-2A97-44DB-8C25-9D6D58EF6F16}"/>
+                <a16:creationId xmlns:a16="http://schemas.microsoft.com/office/drawing/2014/main" id="{E8EB26F4-C8B7-47D1-ABB4-EF67056F333F}"/>
               </a:ext>
             </a:extLst>
           </p:cNvPr>
@@ -7065,7 +7065,7 @@
           <p:cNvPr id="12" name="Rounded Rectangle 11">
             <a:extLst xmlns:a="http://schemas.openxmlformats.org/drawingml/2006/main">
               <a:ext uri="{FF2B5EF4-FFF2-40B4-BE49-F238E27FC236}">
-                <a16:creationId xmlns:a16="http://schemas.microsoft.com/office/drawing/2014/main" id="{4C5A2EB2-3BAE-417D-8CFB-7874DC2EC3EB}"/>
+                <a16:creationId xmlns:a16="http://schemas.microsoft.com/office/drawing/2014/main" id="{6DB9712D-642B-462D-8479-95A656A7849C}"/>
               </a:ext>
             </a:extLst>
           </p:cNvPr>
@@ -7122,7 +7122,7 @@
           <p:cNvPr id="13" name="TextBox 12">
             <a:extLst xmlns:a="http://schemas.openxmlformats.org/drawingml/2006/main">
               <a:ext uri="{FF2B5EF4-FFF2-40B4-BE49-F238E27FC236}">
-                <a16:creationId xmlns:a16="http://schemas.microsoft.com/office/drawing/2014/main" id="{119F1579-6F1E-4BE9-A569-19D030BFE4EC}"/>
+                <a16:creationId xmlns:a16="http://schemas.microsoft.com/office/drawing/2014/main" id="{86011EF9-5EB5-499E-A68C-DFE53259FE68}"/>
               </a:ext>
             </a:extLst>
           </p:cNvPr>
@@ -7169,7 +7169,7 @@
           <p:cNvPr id="14" name="TextBox 13">
             <a:extLst xmlns:a="http://schemas.openxmlformats.org/drawingml/2006/main">
               <a:ext uri="{FF2B5EF4-FFF2-40B4-BE49-F238E27FC236}">
-                <a16:creationId xmlns:a16="http://schemas.microsoft.com/office/drawing/2014/main" id="{6CE07C7D-F2D8-495A-928C-680FCCD96491}"/>
+                <a16:creationId xmlns:a16="http://schemas.microsoft.com/office/drawing/2014/main" id="{1F3616A9-ACC3-40C7-AACC-F40D611CB51F}"/>
               </a:ext>
             </a:extLst>
           </p:cNvPr>
@@ -7216,7 +7216,7 @@
           <p:cNvPr id="15" name="TextBox 14">
             <a:extLst xmlns:a="http://schemas.openxmlformats.org/drawingml/2006/main">
               <a:ext uri="{FF2B5EF4-FFF2-40B4-BE49-F238E27FC236}">
-                <a16:creationId xmlns:a16="http://schemas.microsoft.com/office/drawing/2014/main" id="{1F279A80-DCE8-483C-9909-C2846D9D3172}"/>
+                <a16:creationId xmlns:a16="http://schemas.microsoft.com/office/drawing/2014/main" id="{94FC0B51-CC2B-4D30-8E3E-030DDF213BD2}"/>
               </a:ext>
             </a:extLst>
           </p:cNvPr>
@@ -7263,7 +7263,7 @@
           <p:cNvPr id="16" name="Rounded Rectangle 15">
             <a:extLst xmlns:a="http://schemas.openxmlformats.org/drawingml/2006/main">
               <a:ext uri="{FF2B5EF4-FFF2-40B4-BE49-F238E27FC236}">
-                <a16:creationId xmlns:a16="http://schemas.microsoft.com/office/drawing/2014/main" id="{72228F51-22CF-47F9-BCEF-35F3E983A1C8}"/>
+                <a16:creationId xmlns:a16="http://schemas.microsoft.com/office/drawing/2014/main" id="{CBF95E66-191D-4B67-A11A-E45115F4DBB7}"/>
               </a:ext>
             </a:extLst>
           </p:cNvPr>
@@ -7320,7 +7320,7 @@
           <p:cNvPr id="17" name="TextBox 16">
             <a:extLst xmlns:a="http://schemas.openxmlformats.org/drawingml/2006/main">
               <a:ext uri="{FF2B5EF4-FFF2-40B4-BE49-F238E27FC236}">
-                <a16:creationId xmlns:a16="http://schemas.microsoft.com/office/drawing/2014/main" id="{27FC902E-44D6-4970-8BE2-89431CBFC75B}"/>
+                <a16:creationId xmlns:a16="http://schemas.microsoft.com/office/drawing/2014/main" id="{145C7230-4A5F-464E-9988-F43FE0A2484F}"/>
               </a:ext>
             </a:extLst>
           </p:cNvPr>
@@ -7367,7 +7367,7 @@
           <p:cNvPr id="18" name="TextBox 17">
             <a:extLst xmlns:a="http://schemas.openxmlformats.org/drawingml/2006/main">
               <a:ext uri="{FF2B5EF4-FFF2-40B4-BE49-F238E27FC236}">
-                <a16:creationId xmlns:a16="http://schemas.microsoft.com/office/drawing/2014/main" id="{B5507FC2-76CF-4C62-A0F1-769038200BBC}"/>
+                <a16:creationId xmlns:a16="http://schemas.microsoft.com/office/drawing/2014/main" id="{F3D8A48E-FEC9-4DA6-9F91-35B693919458}"/>
               </a:ext>
             </a:extLst>
           </p:cNvPr>
@@ -7414,7 +7414,7 @@
           <p:cNvPr id="19" name="TextBox 18">
             <a:extLst xmlns:a="http://schemas.openxmlformats.org/drawingml/2006/main">
               <a:ext uri="{FF2B5EF4-FFF2-40B4-BE49-F238E27FC236}">
-                <a16:creationId xmlns:a16="http://schemas.microsoft.com/office/drawing/2014/main" id="{5F6AA1FF-ED09-426C-B86A-A86AE05D753F}"/>
+                <a16:creationId xmlns:a16="http://schemas.microsoft.com/office/drawing/2014/main" id="{1D0C5FA2-A7DF-418C-A6EA-FE1EB358349D}"/>
               </a:ext>
             </a:extLst>
           </p:cNvPr>
@@ -7461,7 +7461,7 @@
           <p:cNvPr id="20" name="Rounded Rectangle 19">
             <a:extLst xmlns:a="http://schemas.openxmlformats.org/drawingml/2006/main">
               <a:ext uri="{FF2B5EF4-FFF2-40B4-BE49-F238E27FC236}">
-                <a16:creationId xmlns:a16="http://schemas.microsoft.com/office/drawing/2014/main" id="{6B1C309F-B6A9-4593-81B5-F28D27DB641B}"/>
+                <a16:creationId xmlns:a16="http://schemas.microsoft.com/office/drawing/2014/main" id="{F7CC420E-78AA-46A4-B2A9-36007309A1C4}"/>
               </a:ext>
             </a:extLst>
           </p:cNvPr>
@@ -7518,7 +7518,7 @@
           <p:cNvPr id="21" name="TextBox 20">
             <a:extLst xmlns:a="http://schemas.openxmlformats.org/drawingml/2006/main">
               <a:ext uri="{FF2B5EF4-FFF2-40B4-BE49-F238E27FC236}">
-                <a16:creationId xmlns:a16="http://schemas.microsoft.com/office/drawing/2014/main" id="{4B39D2A2-804F-4BDB-B348-E4E2A9950ADA}"/>
+                <a16:creationId xmlns:a16="http://schemas.microsoft.com/office/drawing/2014/main" id="{2BB97451-B28B-4550-9928-02F96E6AC19A}"/>
               </a:ext>
             </a:extLst>
           </p:cNvPr>
@@ -7565,7 +7565,7 @@
           <p:cNvPr id="22" name="TextBox 21">
             <a:extLst xmlns:a="http://schemas.openxmlformats.org/drawingml/2006/main">
               <a:ext uri="{FF2B5EF4-FFF2-40B4-BE49-F238E27FC236}">
-                <a16:creationId xmlns:a16="http://schemas.microsoft.com/office/drawing/2014/main" id="{9534F423-7792-4537-9F01-933D5228071A}"/>
+                <a16:creationId xmlns:a16="http://schemas.microsoft.com/office/drawing/2014/main" id="{A125420B-BBA8-47D9-859E-1E24D76BA126}"/>
               </a:ext>
             </a:extLst>
           </p:cNvPr>
@@ -7612,7 +7612,7 @@
           <p:cNvPr id="23" name="TextBox 22">
             <a:extLst xmlns:a="http://schemas.openxmlformats.org/drawingml/2006/main">
               <a:ext uri="{FF2B5EF4-FFF2-40B4-BE49-F238E27FC236}">
-                <a16:creationId xmlns:a16="http://schemas.microsoft.com/office/drawing/2014/main" id="{822B1ADC-D18F-4165-BE67-BA5C7856C0A7}"/>
+                <a16:creationId xmlns:a16="http://schemas.microsoft.com/office/drawing/2014/main" id="{C82737D3-623C-460F-900A-735CB10B638A}"/>
               </a:ext>
             </a:extLst>
           </p:cNvPr>
@@ -7659,7 +7659,7 @@
           <p:cNvPr id="24" name="TextBox 23">
             <a:extLst xmlns:a="http://schemas.openxmlformats.org/drawingml/2006/main">
               <a:ext uri="{FF2B5EF4-FFF2-40B4-BE49-F238E27FC236}">
-                <a16:creationId xmlns:a16="http://schemas.microsoft.com/office/drawing/2014/main" id="{A4714266-CC1C-4FF9-9417-40FCEA52AC01}"/>
+                <a16:creationId xmlns:a16="http://schemas.microsoft.com/office/drawing/2014/main" id="{7F6A6261-803F-4CB6-93B8-E129B0047321}"/>
               </a:ext>
             </a:extLst>
           </p:cNvPr>
@@ -7704,7 +7704,7 @@
     </p:spTree>
     <p:extLst>
       <p:ext uri="{BB962C8B-B14F-4D97-AF65-F5344CB8AC3E}">
-        <p14:creationId xmlns:p14="http://schemas.microsoft.com/office/powerpoint/2010/main" val="1205313060"/>
+        <p14:creationId xmlns:p14="http://schemas.microsoft.com/office/powerpoint/2010/main" val="1794105217"/>
       </p:ext>
     </p:extLst>
   </p:cSld>
@@ -7728,7 +7728,7 @@
           <p:cNvPr id="2" name="TextBox 1">
             <a:extLst xmlns:a="http://schemas.openxmlformats.org/drawingml/2006/main">
               <a:ext uri="{FF2B5EF4-FFF2-40B4-BE49-F238E27FC236}">
-                <a16:creationId xmlns:a16="http://schemas.microsoft.com/office/drawing/2014/main" id="{3B6F0249-95C0-42FB-B724-5D75B3937EC7}"/>
+                <a16:creationId xmlns:a16="http://schemas.microsoft.com/office/drawing/2014/main" id="{A6D3A3F8-5603-49AA-AEC4-CE8F28FAAF94}"/>
               </a:ext>
             </a:extLst>
           </p:cNvPr>
@@ -7775,7 +7775,7 @@
           <p:cNvPr id="3" name="TextBox 2">
             <a:extLst xmlns:a="http://schemas.openxmlformats.org/drawingml/2006/main">
               <a:ext uri="{FF2B5EF4-FFF2-40B4-BE49-F238E27FC236}">
-                <a16:creationId xmlns:a16="http://schemas.microsoft.com/office/drawing/2014/main" id="{CC2655B9-4FD5-40D4-96E5-014C3FD101CB}"/>
+                <a16:creationId xmlns:a16="http://schemas.microsoft.com/office/drawing/2014/main" id="{485AF05D-D47C-4B2A-B16F-C58EC60C3CC7}"/>
               </a:ext>
             </a:extLst>
           </p:cNvPr>
@@ -7822,7 +7822,7 @@
           <p:cNvPr id="4" name="Rectangle 3">
             <a:extLst xmlns:a="http://schemas.openxmlformats.org/drawingml/2006/main">
               <a:ext uri="{FF2B5EF4-FFF2-40B4-BE49-F238E27FC236}">
-                <a16:creationId xmlns:a16="http://schemas.microsoft.com/office/drawing/2014/main" id="{DF6F35BA-9A58-4424-91F8-C7F759A7DCF5}"/>
+                <a16:creationId xmlns:a16="http://schemas.microsoft.com/office/drawing/2014/main" id="{B702470A-4327-4019-B64B-D39E4D63D0C0}"/>
               </a:ext>
             </a:extLst>
           </p:cNvPr>
@@ -7877,7 +7877,7 @@
           <p:cNvPr id="5" name="Rectangle 4">
             <a:extLst xmlns:a="http://schemas.openxmlformats.org/drawingml/2006/main">
               <a:ext uri="{FF2B5EF4-FFF2-40B4-BE49-F238E27FC236}">
-                <a16:creationId xmlns:a16="http://schemas.microsoft.com/office/drawing/2014/main" id="{6E290752-CEA7-4B5E-867B-930822036CBC}"/>
+                <a16:creationId xmlns:a16="http://schemas.microsoft.com/office/drawing/2014/main" id="{D1589AC7-8752-4608-B4E0-3D8578A325B5}"/>
               </a:ext>
             </a:extLst>
           </p:cNvPr>
@@ -7932,7 +7932,7 @@
           <p:cNvPr id="6" name="TextBox 5">
             <a:extLst xmlns:a="http://schemas.openxmlformats.org/drawingml/2006/main">
               <a:ext uri="{FF2B5EF4-FFF2-40B4-BE49-F238E27FC236}">
-                <a16:creationId xmlns:a16="http://schemas.microsoft.com/office/drawing/2014/main" id="{91B5EDA9-F873-40AA-83DF-2328419DDE55}"/>
+                <a16:creationId xmlns:a16="http://schemas.microsoft.com/office/drawing/2014/main" id="{7845627C-6711-4199-AF4B-93C2B3EA5396}"/>
               </a:ext>
             </a:extLst>
           </p:cNvPr>
@@ -7969,7 +7969,7 @@
                 <a:ea typeface="Aptos"/>
                 <a:cs typeface="Aptos"/>
               </a:rPr>
-              <a:t>Julkinen riippumaton evidenssikooste · 2026.07.24-20 · 2026-07-24 · Lähteet: WIPO IP valuation; Market-values</a:t>
+              <a:t>Julkinen riippumaton evidenssikooste · 2026.07.24-21 · 2026-07-24 · Lähteet: WIPO IP valuation; Market-values</a:t>
             </a:r>
           </a:p>
         </p:txBody>
@@ -7979,7 +7979,7 @@
           <p:cNvPr id="7" name="TextBox 6">
             <a:extLst xmlns:a="http://schemas.openxmlformats.org/drawingml/2006/main">
               <a:ext uri="{FF2B5EF4-FFF2-40B4-BE49-F238E27FC236}">
-                <a16:creationId xmlns:a16="http://schemas.microsoft.com/office/drawing/2014/main" id="{42C5FE7F-E2F4-4535-9618-5830DC3EA027}"/>
+                <a16:creationId xmlns:a16="http://schemas.microsoft.com/office/drawing/2014/main" id="{02158353-BED1-4EF1-AB87-911DA68FFA37}"/>
               </a:ext>
             </a:extLst>
           </p:cNvPr>
@@ -8549,7 +8549,7 @@
           <p:cNvPr id="9" name="TextBox 8">
             <a:extLst xmlns:a="http://schemas.openxmlformats.org/drawingml/2006/main">
               <a:ext uri="{FF2B5EF4-FFF2-40B4-BE49-F238E27FC236}">
-                <a16:creationId xmlns:a16="http://schemas.microsoft.com/office/drawing/2014/main" id="{DD918DA4-251F-4877-896A-D239CDAB2ADC}"/>
+                <a16:creationId xmlns:a16="http://schemas.microsoft.com/office/drawing/2014/main" id="{B0877AE0-7C57-4E0E-AB19-CBBAC2589BC1}"/>
               </a:ext>
             </a:extLst>
           </p:cNvPr>
@@ -8594,7 +8594,7 @@
     </p:spTree>
     <p:extLst>
       <p:ext uri="{BB962C8B-B14F-4D97-AF65-F5344CB8AC3E}">
-        <p14:creationId xmlns:p14="http://schemas.microsoft.com/office/powerpoint/2010/main" val="781543788"/>
+        <p14:creationId xmlns:p14="http://schemas.microsoft.com/office/powerpoint/2010/main" val="585861657"/>
       </p:ext>
     </p:extLst>
   </p:cSld>
@@ -8625,7 +8625,7 @@
           <p:cNvPr id="2" name="TextBox 1">
             <a:extLst xmlns:a="http://schemas.openxmlformats.org/drawingml/2006/main">
               <a:ext uri="{FF2B5EF4-FFF2-40B4-BE49-F238E27FC236}">
-                <a16:creationId xmlns:a16="http://schemas.microsoft.com/office/drawing/2014/main" id="{A31E2C39-C986-4657-89C8-196B391F26DD}"/>
+                <a16:creationId xmlns:a16="http://schemas.microsoft.com/office/drawing/2014/main" id="{2F956356-458B-4173-B586-2C918856508A}"/>
               </a:ext>
             </a:extLst>
           </p:cNvPr>
@@ -8672,7 +8672,7 @@
           <p:cNvPr id="3" name="TextBox 2">
             <a:extLst xmlns:a="http://schemas.openxmlformats.org/drawingml/2006/main">
               <a:ext uri="{FF2B5EF4-FFF2-40B4-BE49-F238E27FC236}">
-                <a16:creationId xmlns:a16="http://schemas.microsoft.com/office/drawing/2014/main" id="{66F675B7-4C86-40DE-BF86-5DBF25F96640}"/>
+                <a16:creationId xmlns:a16="http://schemas.microsoft.com/office/drawing/2014/main" id="{490F162F-EE50-434B-8953-834B64C761C0}"/>
               </a:ext>
             </a:extLst>
           </p:cNvPr>
@@ -8719,7 +8719,7 @@
           <p:cNvPr id="4" name="TextBox 3">
             <a:extLst xmlns:a="http://schemas.openxmlformats.org/drawingml/2006/main">
               <a:ext uri="{FF2B5EF4-FFF2-40B4-BE49-F238E27FC236}">
-                <a16:creationId xmlns:a16="http://schemas.microsoft.com/office/drawing/2014/main" id="{496EA88E-51B4-4E0A-9238-F5287E801A69}"/>
+                <a16:creationId xmlns:a16="http://schemas.microsoft.com/office/drawing/2014/main" id="{474EE88A-51AD-44A5-92DE-47E0BFEE5EB2}"/>
               </a:ext>
             </a:extLst>
           </p:cNvPr>
@@ -8860,7 +8860,7 @@
           <p:cNvPr id="5" name="TextBox 4">
             <a:extLst xmlns:a="http://schemas.openxmlformats.org/drawingml/2006/main">
               <a:ext uri="{FF2B5EF4-FFF2-40B4-BE49-F238E27FC236}">
-                <a16:creationId xmlns:a16="http://schemas.microsoft.com/office/drawing/2014/main" id="{4FC7C349-0612-48B3-ADEC-0F08CCD1C261}"/>
+                <a16:creationId xmlns:a16="http://schemas.microsoft.com/office/drawing/2014/main" id="{BA4161BA-5B7B-4A1D-9D8B-F5050335BCF3}"/>
               </a:ext>
             </a:extLst>
           </p:cNvPr>
@@ -8897,7 +8897,7 @@
                 <a:ea typeface="Aptos"/>
                 <a:cs typeface="Aptos"/>
               </a:rPr>
-              <a:t>Versio 2026.07.24-20 · 2026-07-24 · 12 / 12</a:t>
+              <a:t>Versio 2026.07.24-21 · 2026-07-24 · 12 / 12</a:t>
             </a:r>
           </a:p>
         </p:txBody>
@@ -8907,7 +8907,7 @@
           <p:cNvPr id="6" name="TextBox 5">
             <a:extLst xmlns:a="http://schemas.openxmlformats.org/drawingml/2006/main">
               <a:ext uri="{FF2B5EF4-FFF2-40B4-BE49-F238E27FC236}">
-                <a16:creationId xmlns:a16="http://schemas.microsoft.com/office/drawing/2014/main" id="{728B4680-D33A-47F0-B345-F06B76F39E23}"/>
+                <a16:creationId xmlns:a16="http://schemas.microsoft.com/office/drawing/2014/main" id="{C4B500D1-EAA1-42D7-AA15-F203F6435F18}"/>
               </a:ext>
             </a:extLst>
           </p:cNvPr>
@@ -8952,7 +8952,7 @@
     </p:spTree>
     <p:extLst>
       <p:ext uri="{BB962C8B-B14F-4D97-AF65-F5344CB8AC3E}">
-        <p14:creationId xmlns:p14="http://schemas.microsoft.com/office/powerpoint/2010/main" val="1935803443"/>
+        <p14:creationId xmlns:p14="http://schemas.microsoft.com/office/powerpoint/2010/main" val="1138625815"/>
       </p:ext>
     </p:extLst>
   </p:cSld>
@@ -8976,7 +8976,7 @@
           <p:cNvPr id="2" name="TextBox 1">
             <a:extLst xmlns:a="http://schemas.openxmlformats.org/drawingml/2006/main">
               <a:ext uri="{FF2B5EF4-FFF2-40B4-BE49-F238E27FC236}">
-                <a16:creationId xmlns:a16="http://schemas.microsoft.com/office/drawing/2014/main" id="{67B9DDC1-0BF3-406C-A09D-D31491A02161}"/>
+                <a16:creationId xmlns:a16="http://schemas.microsoft.com/office/drawing/2014/main" id="{1FC075F1-335A-4CE2-8D76-D6E772F27773}"/>
               </a:ext>
             </a:extLst>
           </p:cNvPr>
@@ -9023,7 +9023,7 @@
           <p:cNvPr id="3" name="TextBox 2">
             <a:extLst xmlns:a="http://schemas.openxmlformats.org/drawingml/2006/main">
               <a:ext uri="{FF2B5EF4-FFF2-40B4-BE49-F238E27FC236}">
-                <a16:creationId xmlns:a16="http://schemas.microsoft.com/office/drawing/2014/main" id="{55EE53D8-BEEA-453B-B5D7-08DBD1E14A5B}"/>
+                <a16:creationId xmlns:a16="http://schemas.microsoft.com/office/drawing/2014/main" id="{90C6C713-DD62-47D0-AEB7-6D005753AF51}"/>
               </a:ext>
             </a:extLst>
           </p:cNvPr>
@@ -9070,7 +9070,7 @@
           <p:cNvPr id="4" name="Rectangle 3">
             <a:extLst xmlns:a="http://schemas.openxmlformats.org/drawingml/2006/main">
               <a:ext uri="{FF2B5EF4-FFF2-40B4-BE49-F238E27FC236}">
-                <a16:creationId xmlns:a16="http://schemas.microsoft.com/office/drawing/2014/main" id="{576A6C41-2C27-406C-A864-AFB47457E1CC}"/>
+                <a16:creationId xmlns:a16="http://schemas.microsoft.com/office/drawing/2014/main" id="{41C4D225-5960-4252-B4E2-5BF0335CD17C}"/>
               </a:ext>
             </a:extLst>
           </p:cNvPr>
@@ -9125,7 +9125,7 @@
           <p:cNvPr id="5" name="Rectangle 4">
             <a:extLst xmlns:a="http://schemas.openxmlformats.org/drawingml/2006/main">
               <a:ext uri="{FF2B5EF4-FFF2-40B4-BE49-F238E27FC236}">
-                <a16:creationId xmlns:a16="http://schemas.microsoft.com/office/drawing/2014/main" id="{01E86DFD-F4BA-440C-B79E-AE4B93FBE219}"/>
+                <a16:creationId xmlns:a16="http://schemas.microsoft.com/office/drawing/2014/main" id="{4D2C3ACF-96ED-44FD-9E27-50593AF678B3}"/>
               </a:ext>
             </a:extLst>
           </p:cNvPr>
@@ -9180,7 +9180,7 @@
           <p:cNvPr id="6" name="TextBox 5">
             <a:extLst xmlns:a="http://schemas.openxmlformats.org/drawingml/2006/main">
               <a:ext uri="{FF2B5EF4-FFF2-40B4-BE49-F238E27FC236}">
-                <a16:creationId xmlns:a16="http://schemas.microsoft.com/office/drawing/2014/main" id="{CEE17D64-4FBD-4305-B8E9-C665E00DF381}"/>
+                <a16:creationId xmlns:a16="http://schemas.microsoft.com/office/drawing/2014/main" id="{5C776092-A2E1-4F5F-B2F8-409463B1FB8E}"/>
               </a:ext>
             </a:extLst>
           </p:cNvPr>
@@ -9217,7 +9217,7 @@
                 <a:ea typeface="Aptos"/>
                 <a:cs typeface="Aptos"/>
               </a:rPr>
-              <a:t>Julkinen riippumaton evidenssikooste · 2026.07.24-20 · 2026-07-24 · Lähteet: Atlas readiness; WIPO</a:t>
+              <a:t>Julkinen riippumaton evidenssikooste · 2026.07.24-21 · 2026-07-24 · Lähteet: Atlas readiness; WIPO</a:t>
             </a:r>
           </a:p>
         </p:txBody>
@@ -9227,7 +9227,7 @@
           <p:cNvPr id="7" name="TextBox 6">
             <a:extLst xmlns:a="http://schemas.openxmlformats.org/drawingml/2006/main">
               <a:ext uri="{FF2B5EF4-FFF2-40B4-BE49-F238E27FC236}">
-                <a16:creationId xmlns:a16="http://schemas.microsoft.com/office/drawing/2014/main" id="{1C25A16E-D6A7-43C5-9F77-468C6F30BC54}"/>
+                <a16:creationId xmlns:a16="http://schemas.microsoft.com/office/drawing/2014/main" id="{2E689D83-347D-4826-9F40-561B6E7E2255}"/>
               </a:ext>
             </a:extLst>
           </p:cNvPr>
@@ -9274,7 +9274,7 @@
           <p:cNvPr id="8" name="TextBox 7">
             <a:extLst xmlns:a="http://schemas.openxmlformats.org/drawingml/2006/main">
               <a:ext uri="{FF2B5EF4-FFF2-40B4-BE49-F238E27FC236}">
-                <a16:creationId xmlns:a16="http://schemas.microsoft.com/office/drawing/2014/main" id="{4A6602E9-BB91-40E8-A4C7-1926C14140D6}"/>
+                <a16:creationId xmlns:a16="http://schemas.microsoft.com/office/drawing/2014/main" id="{0D1E05EC-443C-43A3-96E6-A650B164D69D}"/>
               </a:ext>
             </a:extLst>
           </p:cNvPr>
@@ -9321,7 +9321,7 @@
           <p:cNvPr id="9" name="TextBox 8">
             <a:extLst xmlns:a="http://schemas.openxmlformats.org/drawingml/2006/main">
               <a:ext uri="{FF2B5EF4-FFF2-40B4-BE49-F238E27FC236}">
-                <a16:creationId xmlns:a16="http://schemas.microsoft.com/office/drawing/2014/main" id="{CFB2AEA9-55A2-455D-BB92-9B6AE5302FDA}"/>
+                <a16:creationId xmlns:a16="http://schemas.microsoft.com/office/drawing/2014/main" id="{3BD4C185-2AD6-4708-9C97-7EABB4943A96}"/>
               </a:ext>
             </a:extLst>
           </p:cNvPr>
@@ -9418,7 +9418,7 @@
           <p:cNvPr id="10" name="Rounded Rectangle 9">
             <a:extLst xmlns:a="http://schemas.openxmlformats.org/drawingml/2006/main">
               <a:ext uri="{FF2B5EF4-FFF2-40B4-BE49-F238E27FC236}">
-                <a16:creationId xmlns:a16="http://schemas.microsoft.com/office/drawing/2014/main" id="{96E76E7D-18CD-4900-8735-513F06E8AD6C}"/>
+                <a16:creationId xmlns:a16="http://schemas.microsoft.com/office/drawing/2014/main" id="{4EC1A6E7-9E2E-422B-BF50-98BE8B848F83}"/>
               </a:ext>
             </a:extLst>
           </p:cNvPr>
@@ -9475,7 +9475,7 @@
           <p:cNvPr id="11" name="TextBox 10">
             <a:extLst xmlns:a="http://schemas.openxmlformats.org/drawingml/2006/main">
               <a:ext uri="{FF2B5EF4-FFF2-40B4-BE49-F238E27FC236}">
-                <a16:creationId xmlns:a16="http://schemas.microsoft.com/office/drawing/2014/main" id="{F056DA9A-084B-4DB2-867C-03AE043203E9}"/>
+                <a16:creationId xmlns:a16="http://schemas.microsoft.com/office/drawing/2014/main" id="{7A8504B4-3479-42A8-BF65-55C66608AC85}"/>
               </a:ext>
             </a:extLst>
           </p:cNvPr>
@@ -9522,7 +9522,7 @@
           <p:cNvPr id="12" name="TextBox 11">
             <a:extLst xmlns:a="http://schemas.openxmlformats.org/drawingml/2006/main">
               <a:ext uri="{FF2B5EF4-FFF2-40B4-BE49-F238E27FC236}">
-                <a16:creationId xmlns:a16="http://schemas.microsoft.com/office/drawing/2014/main" id="{3A071810-FB40-4163-9B18-F35332D314DE}"/>
+                <a16:creationId xmlns:a16="http://schemas.microsoft.com/office/drawing/2014/main" id="{D3BB6523-F592-4D7F-99E0-5F69AE7075D6}"/>
               </a:ext>
             </a:extLst>
           </p:cNvPr>
@@ -9567,7 +9567,7 @@
     </p:spTree>
     <p:extLst>
       <p:ext uri="{BB962C8B-B14F-4D97-AF65-F5344CB8AC3E}">
-        <p14:creationId xmlns:p14="http://schemas.microsoft.com/office/powerpoint/2010/main" val="300023397"/>
+        <p14:creationId xmlns:p14="http://schemas.microsoft.com/office/powerpoint/2010/main" val="1390132391"/>
       </p:ext>
     </p:extLst>
   </p:cSld>
@@ -9591,7 +9591,7 @@
           <p:cNvPr id="2" name="TextBox 1">
             <a:extLst xmlns:a="http://schemas.openxmlformats.org/drawingml/2006/main">
               <a:ext uri="{FF2B5EF4-FFF2-40B4-BE49-F238E27FC236}">
-                <a16:creationId xmlns:a16="http://schemas.microsoft.com/office/drawing/2014/main" id="{F0207B3B-66B5-4123-83C9-FA4ECA827AB3}"/>
+                <a16:creationId xmlns:a16="http://schemas.microsoft.com/office/drawing/2014/main" id="{D9A51BF1-99BE-4B62-9705-B671F174CB54}"/>
               </a:ext>
             </a:extLst>
           </p:cNvPr>
@@ -9638,7 +9638,7 @@
           <p:cNvPr id="3" name="TextBox 2">
             <a:extLst xmlns:a="http://schemas.openxmlformats.org/drawingml/2006/main">
               <a:ext uri="{FF2B5EF4-FFF2-40B4-BE49-F238E27FC236}">
-                <a16:creationId xmlns:a16="http://schemas.microsoft.com/office/drawing/2014/main" id="{6AAD5E98-A393-4C9D-9EAB-2951181F9AC9}"/>
+                <a16:creationId xmlns:a16="http://schemas.microsoft.com/office/drawing/2014/main" id="{CA7BFEC5-4A94-4DA9-9100-220845ECD5B3}"/>
               </a:ext>
             </a:extLst>
           </p:cNvPr>
@@ -9685,7 +9685,7 @@
           <p:cNvPr id="4" name="Rectangle 3">
             <a:extLst xmlns:a="http://schemas.openxmlformats.org/drawingml/2006/main">
               <a:ext uri="{FF2B5EF4-FFF2-40B4-BE49-F238E27FC236}">
-                <a16:creationId xmlns:a16="http://schemas.microsoft.com/office/drawing/2014/main" id="{F59AE26F-83AD-468B-AD70-FCFE77B98677}"/>
+                <a16:creationId xmlns:a16="http://schemas.microsoft.com/office/drawing/2014/main" id="{88C8E74F-D628-441F-A683-D0C7D8992CB1}"/>
               </a:ext>
             </a:extLst>
           </p:cNvPr>
@@ -9740,7 +9740,7 @@
           <p:cNvPr id="5" name="Rectangle 4">
             <a:extLst xmlns:a="http://schemas.openxmlformats.org/drawingml/2006/main">
               <a:ext uri="{FF2B5EF4-FFF2-40B4-BE49-F238E27FC236}">
-                <a16:creationId xmlns:a16="http://schemas.microsoft.com/office/drawing/2014/main" id="{45466E78-ED42-402E-B181-FC341E7484D4}"/>
+                <a16:creationId xmlns:a16="http://schemas.microsoft.com/office/drawing/2014/main" id="{57F15560-5FC7-426B-ABBE-CCF7866AA73F}"/>
               </a:ext>
             </a:extLst>
           </p:cNvPr>
@@ -9795,7 +9795,7 @@
           <p:cNvPr id="6" name="TextBox 5">
             <a:extLst xmlns:a="http://schemas.openxmlformats.org/drawingml/2006/main">
               <a:ext uri="{FF2B5EF4-FFF2-40B4-BE49-F238E27FC236}">
-                <a16:creationId xmlns:a16="http://schemas.microsoft.com/office/drawing/2014/main" id="{EF965CF3-AFCC-4BA6-8C85-9BC19EE8E582}"/>
+                <a16:creationId xmlns:a16="http://schemas.microsoft.com/office/drawing/2014/main" id="{A6F21B4A-F143-42E1-B8BE-AB693A605E3E}"/>
               </a:ext>
             </a:extLst>
           </p:cNvPr>
@@ -9832,7 +9832,7 @@
                 <a:ea typeface="Aptos"/>
                 <a:cs typeface="Aptos"/>
               </a:rPr>
-              <a:t>Julkinen riippumaton evidenssikooste · 2026.07.24-20 · 2026-07-24 · Lähteet: EP3032975B2</a:t>
+              <a:t>Julkinen riippumaton evidenssikooste · 2026.07.24-21 · 2026-07-24 · Lähteet: EP3032975B2</a:t>
             </a:r>
           </a:p>
         </p:txBody>
@@ -9842,7 +9842,7 @@
           <p:cNvPr id="7" name="TextBox 6">
             <a:extLst xmlns:a="http://schemas.openxmlformats.org/drawingml/2006/main">
               <a:ext uri="{FF2B5EF4-FFF2-40B4-BE49-F238E27FC236}">
-                <a16:creationId xmlns:a16="http://schemas.microsoft.com/office/drawing/2014/main" id="{19D269AC-EF04-47E1-8EC6-1999561E649A}"/>
+                <a16:creationId xmlns:a16="http://schemas.microsoft.com/office/drawing/2014/main" id="{5A2DE973-0E3B-48B5-BF2C-0B393D033B2E}"/>
               </a:ext>
             </a:extLst>
           </p:cNvPr>
@@ -9889,7 +9889,7 @@
           <p:cNvPr id="8" name="TextBox 7">
             <a:extLst xmlns:a="http://schemas.openxmlformats.org/drawingml/2006/main">
               <a:ext uri="{FF2B5EF4-FFF2-40B4-BE49-F238E27FC236}">
-                <a16:creationId xmlns:a16="http://schemas.microsoft.com/office/drawing/2014/main" id="{390938EB-C1F2-4388-AF13-0BF190D99A5E}"/>
+                <a16:creationId xmlns:a16="http://schemas.microsoft.com/office/drawing/2014/main" id="{85A28A32-3A81-4BF9-8577-2BEE2BC38D39}"/>
               </a:ext>
             </a:extLst>
           </p:cNvPr>
@@ -9936,7 +9936,7 @@
           <p:cNvPr id="9" name="TextBox 8">
             <a:extLst xmlns:a="http://schemas.openxmlformats.org/drawingml/2006/main">
               <a:ext uri="{FF2B5EF4-FFF2-40B4-BE49-F238E27FC236}">
-                <a16:creationId xmlns:a16="http://schemas.microsoft.com/office/drawing/2014/main" id="{9213578C-A846-47A5-A178-FDC98F60EDCC}"/>
+                <a16:creationId xmlns:a16="http://schemas.microsoft.com/office/drawing/2014/main" id="{3F752B27-8BAE-4543-9F4D-1A43308CE54D}"/>
               </a:ext>
             </a:extLst>
           </p:cNvPr>
@@ -10033,7 +10033,7 @@
           <p:cNvPr id="10" name="Rounded Rectangle 9">
             <a:extLst xmlns:a="http://schemas.openxmlformats.org/drawingml/2006/main">
               <a:ext uri="{FF2B5EF4-FFF2-40B4-BE49-F238E27FC236}">
-                <a16:creationId xmlns:a16="http://schemas.microsoft.com/office/drawing/2014/main" id="{42255E42-A660-491B-B8EB-C78D7E819F3D}"/>
+                <a16:creationId xmlns:a16="http://schemas.microsoft.com/office/drawing/2014/main" id="{3BEA2A59-8546-47B1-A5A0-D96A190E9873}"/>
               </a:ext>
             </a:extLst>
           </p:cNvPr>
@@ -10090,7 +10090,7 @@
           <p:cNvPr id="11" name="TextBox 10">
             <a:extLst xmlns:a="http://schemas.openxmlformats.org/drawingml/2006/main">
               <a:ext uri="{FF2B5EF4-FFF2-40B4-BE49-F238E27FC236}">
-                <a16:creationId xmlns:a16="http://schemas.microsoft.com/office/drawing/2014/main" id="{09E8F8C4-C1E0-4D2F-9178-4E03CE64BBE6}"/>
+                <a16:creationId xmlns:a16="http://schemas.microsoft.com/office/drawing/2014/main" id="{DD24112D-3869-4273-8EE6-E4DB8E01110A}"/>
               </a:ext>
             </a:extLst>
           </p:cNvPr>
@@ -10137,7 +10137,7 @@
           <p:cNvPr id="12" name="TextBox 11">
             <a:extLst xmlns:a="http://schemas.openxmlformats.org/drawingml/2006/main">
               <a:ext uri="{FF2B5EF4-FFF2-40B4-BE49-F238E27FC236}">
-                <a16:creationId xmlns:a16="http://schemas.microsoft.com/office/drawing/2014/main" id="{724F3CE6-630F-48E4-88F3-130B1956A66C}"/>
+                <a16:creationId xmlns:a16="http://schemas.microsoft.com/office/drawing/2014/main" id="{7581D2A0-1006-4A10-92A3-AE8DA8FCBF17}"/>
               </a:ext>
             </a:extLst>
           </p:cNvPr>
@@ -10182,7 +10182,7 @@
     </p:spTree>
     <p:extLst>
       <p:ext uri="{BB962C8B-B14F-4D97-AF65-F5344CB8AC3E}">
-        <p14:creationId xmlns:p14="http://schemas.microsoft.com/office/powerpoint/2010/main" val="729067737"/>
+        <p14:creationId xmlns:p14="http://schemas.microsoft.com/office/powerpoint/2010/main" val="1002074557"/>
       </p:ext>
     </p:extLst>
   </p:cSld>
@@ -10206,7 +10206,7 @@
           <p:cNvPr id="2" name="TextBox 1">
             <a:extLst xmlns:a="http://schemas.openxmlformats.org/drawingml/2006/main">
               <a:ext uri="{FF2B5EF4-FFF2-40B4-BE49-F238E27FC236}">
-                <a16:creationId xmlns:a16="http://schemas.microsoft.com/office/drawing/2014/main" id="{CF8BBDD1-8EB0-4BF8-9474-C3FDC9561A0E}"/>
+                <a16:creationId xmlns:a16="http://schemas.microsoft.com/office/drawing/2014/main" id="{80F590E8-BF52-4B5F-9BC1-8FB155A21821}"/>
               </a:ext>
             </a:extLst>
           </p:cNvPr>
@@ -10253,7 +10253,7 @@
           <p:cNvPr id="3" name="TextBox 2">
             <a:extLst xmlns:a="http://schemas.openxmlformats.org/drawingml/2006/main">
               <a:ext uri="{FF2B5EF4-FFF2-40B4-BE49-F238E27FC236}">
-                <a16:creationId xmlns:a16="http://schemas.microsoft.com/office/drawing/2014/main" id="{3259E63C-E163-42D6-B928-A6272C11EE97}"/>
+                <a16:creationId xmlns:a16="http://schemas.microsoft.com/office/drawing/2014/main" id="{D23A0C99-5E86-418E-BFAE-7E6CD65C79CF}"/>
               </a:ext>
             </a:extLst>
           </p:cNvPr>
@@ -10300,7 +10300,7 @@
           <p:cNvPr id="4" name="Rectangle 3">
             <a:extLst xmlns:a="http://schemas.openxmlformats.org/drawingml/2006/main">
               <a:ext uri="{FF2B5EF4-FFF2-40B4-BE49-F238E27FC236}">
-                <a16:creationId xmlns:a16="http://schemas.microsoft.com/office/drawing/2014/main" id="{5355ECE6-D789-4957-BD97-02D7552AFB6C}"/>
+                <a16:creationId xmlns:a16="http://schemas.microsoft.com/office/drawing/2014/main" id="{B5B145BC-8F50-47C8-88FF-9D3885570FA9}"/>
               </a:ext>
             </a:extLst>
           </p:cNvPr>
@@ -10355,7 +10355,7 @@
           <p:cNvPr id="5" name="Rectangle 4">
             <a:extLst xmlns:a="http://schemas.openxmlformats.org/drawingml/2006/main">
               <a:ext uri="{FF2B5EF4-FFF2-40B4-BE49-F238E27FC236}">
-                <a16:creationId xmlns:a16="http://schemas.microsoft.com/office/drawing/2014/main" id="{D0C32EC8-EF79-48B1-A230-B36233913973}"/>
+                <a16:creationId xmlns:a16="http://schemas.microsoft.com/office/drawing/2014/main" id="{DBF5BB86-BEBF-46C5-8D1B-E1A1DB382E7C}"/>
               </a:ext>
             </a:extLst>
           </p:cNvPr>
@@ -10410,7 +10410,7 @@
           <p:cNvPr id="6" name="TextBox 5">
             <a:extLst xmlns:a="http://schemas.openxmlformats.org/drawingml/2006/main">
               <a:ext uri="{FF2B5EF4-FFF2-40B4-BE49-F238E27FC236}">
-                <a16:creationId xmlns:a16="http://schemas.microsoft.com/office/drawing/2014/main" id="{3284EC9E-6562-43DA-9C49-B6E57A6A97EB}"/>
+                <a16:creationId xmlns:a16="http://schemas.microsoft.com/office/drawing/2014/main" id="{AD885F86-6F81-4602-A31A-B83468403D35}"/>
               </a:ext>
             </a:extLst>
           </p:cNvPr>
@@ -10447,7 +10447,7 @@
                 <a:ea typeface="Aptos"/>
                 <a:cs typeface="Aptos"/>
               </a:rPr>
-              <a:t>Julkinen riippumaton evidenssikooste · 2026.07.24-20 · 2026-07-24 · Lähteet: EPO Register; EP3032975B2</a:t>
+              <a:t>Julkinen riippumaton evidenssikooste · 2026.07.24-21 · 2026-07-24 · Lähteet: EPO Register; EP3032975B2</a:t>
             </a:r>
           </a:p>
         </p:txBody>
@@ -10457,7 +10457,7 @@
           <p:cNvPr id="7" name="TextBox 6">
             <a:extLst xmlns:a="http://schemas.openxmlformats.org/drawingml/2006/main">
               <a:ext uri="{FF2B5EF4-FFF2-40B4-BE49-F238E27FC236}">
-                <a16:creationId xmlns:a16="http://schemas.microsoft.com/office/drawing/2014/main" id="{8AEEAA0B-A39F-4ADC-ACE5-F7E9D601E92D}"/>
+                <a16:creationId xmlns:a16="http://schemas.microsoft.com/office/drawing/2014/main" id="{B6ABC967-70FD-4D9A-9064-961F9E38D97D}"/>
               </a:ext>
             </a:extLst>
           </p:cNvPr>
@@ -10504,7 +10504,7 @@
           <p:cNvPr id="8" name="Rounded Rectangle 7">
             <a:extLst xmlns:a="http://schemas.openxmlformats.org/drawingml/2006/main">
               <a:ext uri="{FF2B5EF4-FFF2-40B4-BE49-F238E27FC236}">
-                <a16:creationId xmlns:a16="http://schemas.microsoft.com/office/drawing/2014/main" id="{E2988FCC-3CE2-4F8F-B8EC-13509213398E}"/>
+                <a16:creationId xmlns:a16="http://schemas.microsoft.com/office/drawing/2014/main" id="{DA5AD471-9845-4042-9482-491DC543B1D2}"/>
               </a:ext>
             </a:extLst>
           </p:cNvPr>
@@ -10561,7 +10561,7 @@
           <p:cNvPr id="9" name="TextBox 8">
             <a:extLst xmlns:a="http://schemas.openxmlformats.org/drawingml/2006/main">
               <a:ext uri="{FF2B5EF4-FFF2-40B4-BE49-F238E27FC236}">
-                <a16:creationId xmlns:a16="http://schemas.microsoft.com/office/drawing/2014/main" id="{B20C3384-B0C2-439E-90A7-82F490C89605}"/>
+                <a16:creationId xmlns:a16="http://schemas.microsoft.com/office/drawing/2014/main" id="{4A5A89F9-3AC0-4384-A692-5FD4416237F3}"/>
               </a:ext>
             </a:extLst>
           </p:cNvPr>
@@ -10608,7 +10608,7 @@
           <p:cNvPr id="10" name="TextBox 9">
             <a:extLst xmlns:a="http://schemas.openxmlformats.org/drawingml/2006/main">
               <a:ext uri="{FF2B5EF4-FFF2-40B4-BE49-F238E27FC236}">
-                <a16:creationId xmlns:a16="http://schemas.microsoft.com/office/drawing/2014/main" id="{6434E04E-BBBC-40C2-BA82-23E4A195506C}"/>
+                <a16:creationId xmlns:a16="http://schemas.microsoft.com/office/drawing/2014/main" id="{AE1EB935-7EC0-4ED7-A07D-F15DC40CA0F8}"/>
               </a:ext>
             </a:extLst>
           </p:cNvPr>
@@ -10655,7 +10655,7 @@
           <p:cNvPr id="11" name="Rounded Rectangle 10">
             <a:extLst xmlns:a="http://schemas.openxmlformats.org/drawingml/2006/main">
               <a:ext uri="{FF2B5EF4-FFF2-40B4-BE49-F238E27FC236}">
-                <a16:creationId xmlns:a16="http://schemas.microsoft.com/office/drawing/2014/main" id="{1780F182-C134-4B04-914B-B2FE91F18475}"/>
+                <a16:creationId xmlns:a16="http://schemas.microsoft.com/office/drawing/2014/main" id="{C3B0331D-7345-4CB4-A1FE-B73D84878DC6}"/>
               </a:ext>
             </a:extLst>
           </p:cNvPr>
@@ -10712,7 +10712,7 @@
           <p:cNvPr id="12" name="TextBox 11">
             <a:extLst xmlns:a="http://schemas.openxmlformats.org/drawingml/2006/main">
               <a:ext uri="{FF2B5EF4-FFF2-40B4-BE49-F238E27FC236}">
-                <a16:creationId xmlns:a16="http://schemas.microsoft.com/office/drawing/2014/main" id="{49875A32-F092-4779-9053-2C8005124DB8}"/>
+                <a16:creationId xmlns:a16="http://schemas.microsoft.com/office/drawing/2014/main" id="{7E8CA153-93C9-41FB-8EA9-0C733DB8E7B1}"/>
               </a:ext>
             </a:extLst>
           </p:cNvPr>
@@ -10759,7 +10759,7 @@
           <p:cNvPr id="13" name="TextBox 12">
             <a:extLst xmlns:a="http://schemas.openxmlformats.org/drawingml/2006/main">
               <a:ext uri="{FF2B5EF4-FFF2-40B4-BE49-F238E27FC236}">
-                <a16:creationId xmlns:a16="http://schemas.microsoft.com/office/drawing/2014/main" id="{15C0C3C0-B63F-46CF-BE50-906296617D4B}"/>
+                <a16:creationId xmlns:a16="http://schemas.microsoft.com/office/drawing/2014/main" id="{7BF86F5E-0838-4D3D-8574-52D20AC72312}"/>
               </a:ext>
             </a:extLst>
           </p:cNvPr>
@@ -10806,7 +10806,7 @@
           <p:cNvPr id="14" name="Rounded Rectangle 13">
             <a:extLst xmlns:a="http://schemas.openxmlformats.org/drawingml/2006/main">
               <a:ext uri="{FF2B5EF4-FFF2-40B4-BE49-F238E27FC236}">
-                <a16:creationId xmlns:a16="http://schemas.microsoft.com/office/drawing/2014/main" id="{D7F2B36B-9455-4385-8958-34232B723145}"/>
+                <a16:creationId xmlns:a16="http://schemas.microsoft.com/office/drawing/2014/main" id="{4240E81F-FE1F-4CC1-8BD1-0858F6EA7DB6}"/>
               </a:ext>
             </a:extLst>
           </p:cNvPr>
@@ -10863,7 +10863,7 @@
           <p:cNvPr id="15" name="TextBox 14">
             <a:extLst xmlns:a="http://schemas.openxmlformats.org/drawingml/2006/main">
               <a:ext uri="{FF2B5EF4-FFF2-40B4-BE49-F238E27FC236}">
-                <a16:creationId xmlns:a16="http://schemas.microsoft.com/office/drawing/2014/main" id="{B731B153-5B41-408A-9A19-5FAA73CB7B43}"/>
+                <a16:creationId xmlns:a16="http://schemas.microsoft.com/office/drawing/2014/main" id="{387963AF-351B-4C03-AA4C-E2DF2A520EB5}"/>
               </a:ext>
             </a:extLst>
           </p:cNvPr>
@@ -10910,7 +10910,7 @@
           <p:cNvPr id="16" name="TextBox 15">
             <a:extLst xmlns:a="http://schemas.openxmlformats.org/drawingml/2006/main">
               <a:ext uri="{FF2B5EF4-FFF2-40B4-BE49-F238E27FC236}">
-                <a16:creationId xmlns:a16="http://schemas.microsoft.com/office/drawing/2014/main" id="{3B7930A0-5BB5-4292-BCF3-7038F313859F}"/>
+                <a16:creationId xmlns:a16="http://schemas.microsoft.com/office/drawing/2014/main" id="{B3C09720-528B-4065-A07E-8E00A6448263}"/>
               </a:ext>
             </a:extLst>
           </p:cNvPr>
@@ -10957,7 +10957,7 @@
           <p:cNvPr id="17" name="TextBox 16">
             <a:extLst xmlns:a="http://schemas.openxmlformats.org/drawingml/2006/main">
               <a:ext uri="{FF2B5EF4-FFF2-40B4-BE49-F238E27FC236}">
-                <a16:creationId xmlns:a16="http://schemas.microsoft.com/office/drawing/2014/main" id="{F37E77D4-185C-4E3A-B654-7EEEAFC8856F}"/>
+                <a16:creationId xmlns:a16="http://schemas.microsoft.com/office/drawing/2014/main" id="{C72F7811-D805-4DD9-BBEA-9F6298E27ED9}"/>
               </a:ext>
             </a:extLst>
           </p:cNvPr>
@@ -11004,7 +11004,7 @@
           <p:cNvPr id="18" name="Rounded Rectangle 17">
             <a:extLst xmlns:a="http://schemas.openxmlformats.org/drawingml/2006/main">
               <a:ext uri="{FF2B5EF4-FFF2-40B4-BE49-F238E27FC236}">
-                <a16:creationId xmlns:a16="http://schemas.microsoft.com/office/drawing/2014/main" id="{D6F7C618-BDB0-487B-AB45-A2442D16E427}"/>
+                <a16:creationId xmlns:a16="http://schemas.microsoft.com/office/drawing/2014/main" id="{8B05C90F-4217-4FFE-B2EA-D7B6F272EB1E}"/>
               </a:ext>
             </a:extLst>
           </p:cNvPr>
@@ -11061,7 +11061,7 @@
           <p:cNvPr id="19" name="TextBox 18">
             <a:extLst xmlns:a="http://schemas.openxmlformats.org/drawingml/2006/main">
               <a:ext uri="{FF2B5EF4-FFF2-40B4-BE49-F238E27FC236}">
-                <a16:creationId xmlns:a16="http://schemas.microsoft.com/office/drawing/2014/main" id="{3DEAD413-77C7-4D3D-8F5E-62DB3E5E1F3D}"/>
+                <a16:creationId xmlns:a16="http://schemas.microsoft.com/office/drawing/2014/main" id="{1302547C-CE50-41FA-8B51-8BFECF116C06}"/>
               </a:ext>
             </a:extLst>
           </p:cNvPr>
@@ -11108,7 +11108,7 @@
           <p:cNvPr id="20" name="TextBox 19">
             <a:extLst xmlns:a="http://schemas.openxmlformats.org/drawingml/2006/main">
               <a:ext uri="{FF2B5EF4-FFF2-40B4-BE49-F238E27FC236}">
-                <a16:creationId xmlns:a16="http://schemas.microsoft.com/office/drawing/2014/main" id="{63646AAD-E83B-4B01-B6F7-31345CDF5406}"/>
+                <a16:creationId xmlns:a16="http://schemas.microsoft.com/office/drawing/2014/main" id="{5EA1A581-5CA7-4AB5-AD0E-8AAA0F6385AB}"/>
               </a:ext>
             </a:extLst>
           </p:cNvPr>
@@ -11153,7 +11153,7 @@
     </p:spTree>
     <p:extLst>
       <p:ext uri="{BB962C8B-B14F-4D97-AF65-F5344CB8AC3E}">
-        <p14:creationId xmlns:p14="http://schemas.microsoft.com/office/powerpoint/2010/main" val="67606909"/>
+        <p14:creationId xmlns:p14="http://schemas.microsoft.com/office/powerpoint/2010/main" val="451672806"/>
       </p:ext>
     </p:extLst>
   </p:cSld>
@@ -11177,7 +11177,7 @@
           <p:cNvPr id="2" name="TextBox 1">
             <a:extLst xmlns:a="http://schemas.openxmlformats.org/drawingml/2006/main">
               <a:ext uri="{FF2B5EF4-FFF2-40B4-BE49-F238E27FC236}">
-                <a16:creationId xmlns:a16="http://schemas.microsoft.com/office/drawing/2014/main" id="{EBA127DC-CCC6-4B89-B3FA-BA36A26B526A}"/>
+                <a16:creationId xmlns:a16="http://schemas.microsoft.com/office/drawing/2014/main" id="{8CA9FD03-AB0D-4F3E-9CF2-3DC2C4BFEAB8}"/>
               </a:ext>
             </a:extLst>
           </p:cNvPr>
@@ -11224,7 +11224,7 @@
           <p:cNvPr id="3" name="TextBox 2">
             <a:extLst xmlns:a="http://schemas.openxmlformats.org/drawingml/2006/main">
               <a:ext uri="{FF2B5EF4-FFF2-40B4-BE49-F238E27FC236}">
-                <a16:creationId xmlns:a16="http://schemas.microsoft.com/office/drawing/2014/main" id="{D4C0DA67-B9E2-4886-BABA-274CFCAA1609}"/>
+                <a16:creationId xmlns:a16="http://schemas.microsoft.com/office/drawing/2014/main" id="{27B2B9FE-ABF1-4B3C-9F20-6555496D93B5}"/>
               </a:ext>
             </a:extLst>
           </p:cNvPr>
@@ -11271,7 +11271,7 @@
           <p:cNvPr id="4" name="Rectangle 3">
             <a:extLst xmlns:a="http://schemas.openxmlformats.org/drawingml/2006/main">
               <a:ext uri="{FF2B5EF4-FFF2-40B4-BE49-F238E27FC236}">
-                <a16:creationId xmlns:a16="http://schemas.microsoft.com/office/drawing/2014/main" id="{5ED60616-AE7C-4C9E-96E9-D8D9328B6EFD}"/>
+                <a16:creationId xmlns:a16="http://schemas.microsoft.com/office/drawing/2014/main" id="{EF1E73A5-C121-4152-B6F9-BA721F83FD67}"/>
               </a:ext>
             </a:extLst>
           </p:cNvPr>
@@ -11326,7 +11326,7 @@
           <p:cNvPr id="5" name="Rectangle 4">
             <a:extLst xmlns:a="http://schemas.openxmlformats.org/drawingml/2006/main">
               <a:ext uri="{FF2B5EF4-FFF2-40B4-BE49-F238E27FC236}">
-                <a16:creationId xmlns:a16="http://schemas.microsoft.com/office/drawing/2014/main" id="{0C7AE156-3B82-48BE-9AB3-5E37CD6C5BE1}"/>
+                <a16:creationId xmlns:a16="http://schemas.microsoft.com/office/drawing/2014/main" id="{094B2CDD-0A28-441C-9A89-9B9B2007850C}"/>
               </a:ext>
             </a:extLst>
           </p:cNvPr>
@@ -11381,7 +11381,7 @@
           <p:cNvPr id="6" name="TextBox 5">
             <a:extLst xmlns:a="http://schemas.openxmlformats.org/drawingml/2006/main">
               <a:ext uri="{FF2B5EF4-FFF2-40B4-BE49-F238E27FC236}">
-                <a16:creationId xmlns:a16="http://schemas.microsoft.com/office/drawing/2014/main" id="{8BE29089-2F22-4B44-B51E-4EF1FB47CBA3}"/>
+                <a16:creationId xmlns:a16="http://schemas.microsoft.com/office/drawing/2014/main" id="{5F8B0F11-86D5-42B3-A1B7-D4903775DAB1}"/>
               </a:ext>
             </a:extLst>
           </p:cNvPr>
@@ -11418,7 +11418,7 @@
                 <a:ea typeface="Aptos"/>
                 <a:cs typeface="Aptos"/>
               </a:rPr>
-              <a:t>Julkinen riippumaton evidenssikooste · 2026.07.24-20 · 2026-07-24 · Lähteet: EP3032975B2; 7 O 3341/24</a:t>
+              <a:t>Julkinen riippumaton evidenssikooste · 2026.07.24-21 · 2026-07-24 · Lähteet: EP3032975B2; 7 O 3341/24</a:t>
             </a:r>
           </a:p>
         </p:txBody>
@@ -11428,7 +11428,7 @@
           <p:cNvPr id="7" name="TextBox 6">
             <a:extLst xmlns:a="http://schemas.openxmlformats.org/drawingml/2006/main">
               <a:ext uri="{FF2B5EF4-FFF2-40B4-BE49-F238E27FC236}">
-                <a16:creationId xmlns:a16="http://schemas.microsoft.com/office/drawing/2014/main" id="{122D3E35-27C9-4B61-976C-93C17B3394AA}"/>
+                <a16:creationId xmlns:a16="http://schemas.microsoft.com/office/drawing/2014/main" id="{5373B313-7002-499B-BE93-C70F99E830F7}"/>
               </a:ext>
             </a:extLst>
           </p:cNvPr>
@@ -11475,7 +11475,7 @@
           <p:cNvPr id="8" name="TextBox 7">
             <a:extLst xmlns:a="http://schemas.openxmlformats.org/drawingml/2006/main">
               <a:ext uri="{FF2B5EF4-FFF2-40B4-BE49-F238E27FC236}">
-                <a16:creationId xmlns:a16="http://schemas.microsoft.com/office/drawing/2014/main" id="{AA96A108-8757-4F8F-884B-CB996D83228C}"/>
+                <a16:creationId xmlns:a16="http://schemas.microsoft.com/office/drawing/2014/main" id="{39D98F81-8CA1-40DD-BD33-A2683A465C82}"/>
               </a:ext>
             </a:extLst>
           </p:cNvPr>
@@ -11522,7 +11522,7 @@
           <p:cNvPr id="9" name="TextBox 8">
             <a:extLst xmlns:a="http://schemas.openxmlformats.org/drawingml/2006/main">
               <a:ext uri="{FF2B5EF4-FFF2-40B4-BE49-F238E27FC236}">
-                <a16:creationId xmlns:a16="http://schemas.microsoft.com/office/drawing/2014/main" id="{6BE39970-A158-42CC-9751-2114F0E00562}"/>
+                <a16:creationId xmlns:a16="http://schemas.microsoft.com/office/drawing/2014/main" id="{946C443B-BDFD-45FD-9A51-AD8160453725}"/>
               </a:ext>
             </a:extLst>
           </p:cNvPr>
@@ -11619,7 +11619,7 @@
           <p:cNvPr id="10" name="Rounded Rectangle 9">
             <a:extLst xmlns:a="http://schemas.openxmlformats.org/drawingml/2006/main">
               <a:ext uri="{FF2B5EF4-FFF2-40B4-BE49-F238E27FC236}">
-                <a16:creationId xmlns:a16="http://schemas.microsoft.com/office/drawing/2014/main" id="{C4577280-8984-4D5E-9FA5-7296C76146CA}"/>
+                <a16:creationId xmlns:a16="http://schemas.microsoft.com/office/drawing/2014/main" id="{24591937-86B6-427B-8DCC-B7C8997ABC52}"/>
               </a:ext>
             </a:extLst>
           </p:cNvPr>
@@ -11676,7 +11676,7 @@
           <p:cNvPr id="11" name="TextBox 10">
             <a:extLst xmlns:a="http://schemas.openxmlformats.org/drawingml/2006/main">
               <a:ext uri="{FF2B5EF4-FFF2-40B4-BE49-F238E27FC236}">
-                <a16:creationId xmlns:a16="http://schemas.microsoft.com/office/drawing/2014/main" id="{FD0C68EC-57B7-486A-9189-2CFCCC479B87}"/>
+                <a16:creationId xmlns:a16="http://schemas.microsoft.com/office/drawing/2014/main" id="{843E7B64-7C6E-4BAE-9A42-18383ED12AF7}"/>
               </a:ext>
             </a:extLst>
           </p:cNvPr>
@@ -11723,7 +11723,7 @@
           <p:cNvPr id="12" name="TextBox 11">
             <a:extLst xmlns:a="http://schemas.openxmlformats.org/drawingml/2006/main">
               <a:ext uri="{FF2B5EF4-FFF2-40B4-BE49-F238E27FC236}">
-                <a16:creationId xmlns:a16="http://schemas.microsoft.com/office/drawing/2014/main" id="{A14A4FFE-92A2-4569-AAA2-1B54F027372F}"/>
+                <a16:creationId xmlns:a16="http://schemas.microsoft.com/office/drawing/2014/main" id="{83AA17E6-281C-4AFF-9F0F-87D5A433D012}"/>
               </a:ext>
             </a:extLst>
           </p:cNvPr>
@@ -11768,7 +11768,7 @@
     </p:spTree>
     <p:extLst>
       <p:ext uri="{BB962C8B-B14F-4D97-AF65-F5344CB8AC3E}">
-        <p14:creationId xmlns:p14="http://schemas.microsoft.com/office/powerpoint/2010/main" val="1244861641"/>
+        <p14:creationId xmlns:p14="http://schemas.microsoft.com/office/powerpoint/2010/main" val="216726107"/>
       </p:ext>
     </p:extLst>
   </p:cSld>
@@ -11792,7 +11792,7 @@
           <p:cNvPr id="2" name="TextBox 1">
             <a:extLst xmlns:a="http://schemas.openxmlformats.org/drawingml/2006/main">
               <a:ext uri="{FF2B5EF4-FFF2-40B4-BE49-F238E27FC236}">
-                <a16:creationId xmlns:a16="http://schemas.microsoft.com/office/drawing/2014/main" id="{A6BE753B-751D-4796-A47C-6A4FAC4C1D8D}"/>
+                <a16:creationId xmlns:a16="http://schemas.microsoft.com/office/drawing/2014/main" id="{A182197F-9E81-4CEE-84F6-1272F31A5FF9}"/>
               </a:ext>
             </a:extLst>
           </p:cNvPr>
@@ -11839,7 +11839,7 @@
           <p:cNvPr id="3" name="TextBox 2">
             <a:extLst xmlns:a="http://schemas.openxmlformats.org/drawingml/2006/main">
               <a:ext uri="{FF2B5EF4-FFF2-40B4-BE49-F238E27FC236}">
-                <a16:creationId xmlns:a16="http://schemas.microsoft.com/office/drawing/2014/main" id="{0C0CF9A3-850F-43A8-A75B-5BE78C1231D6}"/>
+                <a16:creationId xmlns:a16="http://schemas.microsoft.com/office/drawing/2014/main" id="{28C6BDFC-5474-4D66-B631-BE46B1EFE702}"/>
               </a:ext>
             </a:extLst>
           </p:cNvPr>
@@ -11886,7 +11886,7 @@
           <p:cNvPr id="4" name="Rectangle 3">
             <a:extLst xmlns:a="http://schemas.openxmlformats.org/drawingml/2006/main">
               <a:ext uri="{FF2B5EF4-FFF2-40B4-BE49-F238E27FC236}">
-                <a16:creationId xmlns:a16="http://schemas.microsoft.com/office/drawing/2014/main" id="{84E6AC59-CCF3-44C0-A42D-D9F5111E70EA}"/>
+                <a16:creationId xmlns:a16="http://schemas.microsoft.com/office/drawing/2014/main" id="{564C2512-C4F0-48F7-9DAE-4ED7C4316ECD}"/>
               </a:ext>
             </a:extLst>
           </p:cNvPr>
@@ -11941,7 +11941,7 @@
           <p:cNvPr id="5" name="Rectangle 4">
             <a:extLst xmlns:a="http://schemas.openxmlformats.org/drawingml/2006/main">
               <a:ext uri="{FF2B5EF4-FFF2-40B4-BE49-F238E27FC236}">
-                <a16:creationId xmlns:a16="http://schemas.microsoft.com/office/drawing/2014/main" id="{FC3205D3-3253-40D8-93B5-F133347C4437}"/>
+                <a16:creationId xmlns:a16="http://schemas.microsoft.com/office/drawing/2014/main" id="{BE72599C-8362-4049-B787-E335CE4D8C9E}"/>
               </a:ext>
             </a:extLst>
           </p:cNvPr>
@@ -11996,7 +11996,7 @@
           <p:cNvPr id="6" name="TextBox 5">
             <a:extLst xmlns:a="http://schemas.openxmlformats.org/drawingml/2006/main">
               <a:ext uri="{FF2B5EF4-FFF2-40B4-BE49-F238E27FC236}">
-                <a16:creationId xmlns:a16="http://schemas.microsoft.com/office/drawing/2014/main" id="{F0B084F5-C865-4E99-A37F-BDAB8B44FF94}"/>
+                <a16:creationId xmlns:a16="http://schemas.microsoft.com/office/drawing/2014/main" id="{B9E82A88-C214-4339-9BC5-410B00FE3DB9}"/>
               </a:ext>
             </a:extLst>
           </p:cNvPr>
@@ -12033,7 +12033,7 @@
                 <a:ea typeface="Aptos"/>
                 <a:cs typeface="Aptos"/>
               </a:rPr>
-              <a:t>Julkinen riippumaton evidenssikooste · 2026.07.24-20 · 2026-07-24 · Lähteet: Statistics Canada; Market-values; FTC; IMARC; GVR; Fortune; European Commission</a:t>
+              <a:t>Julkinen riippumaton evidenssikooste · 2026.07.24-21 · 2026-07-24 · Lähteet: Statistics Canada; Market-values; FTC; IMARC; GVR; Fortune; European Commission</a:t>
             </a:r>
           </a:p>
         </p:txBody>
@@ -12043,7 +12043,7 @@
           <p:cNvPr id="7" name="TextBox 6">
             <a:extLst xmlns:a="http://schemas.openxmlformats.org/drawingml/2006/main">
               <a:ext uri="{FF2B5EF4-FFF2-40B4-BE49-F238E27FC236}">
-                <a16:creationId xmlns:a16="http://schemas.microsoft.com/office/drawing/2014/main" id="{797C5EF8-035D-419F-A8AA-3FCEF54A70BA}"/>
+                <a16:creationId xmlns:a16="http://schemas.microsoft.com/office/drawing/2014/main" id="{483AC230-D877-4E3A-8AD7-3570C826F73E}"/>
               </a:ext>
             </a:extLst>
           </p:cNvPr>
@@ -12090,7 +12090,7 @@
           <p:cNvPr id="8" name="Rounded Rectangle 7">
             <a:extLst xmlns:a="http://schemas.openxmlformats.org/drawingml/2006/main">
               <a:ext uri="{FF2B5EF4-FFF2-40B4-BE49-F238E27FC236}">
-                <a16:creationId xmlns:a16="http://schemas.microsoft.com/office/drawing/2014/main" id="{67FBD2B8-5380-49AA-A8AA-0A37B265E5A6}"/>
+                <a16:creationId xmlns:a16="http://schemas.microsoft.com/office/drawing/2014/main" id="{8C38D67F-B1CB-4F23-99FA-3E9F366AE162}"/>
               </a:ext>
             </a:extLst>
           </p:cNvPr>
@@ -12147,7 +12147,7 @@
           <p:cNvPr id="9" name="TextBox 8">
             <a:extLst xmlns:a="http://schemas.openxmlformats.org/drawingml/2006/main">
               <a:ext uri="{FF2B5EF4-FFF2-40B4-BE49-F238E27FC236}">
-                <a16:creationId xmlns:a16="http://schemas.microsoft.com/office/drawing/2014/main" id="{15528538-7D5A-43C6-AE6E-32B8BA6C2DEC}"/>
+                <a16:creationId xmlns:a16="http://schemas.microsoft.com/office/drawing/2014/main" id="{6F263299-5C18-4368-827D-3C9A05B363D8}"/>
               </a:ext>
             </a:extLst>
           </p:cNvPr>
@@ -12194,7 +12194,7 @@
           <p:cNvPr id="10" name="TextBox 9">
             <a:extLst xmlns:a="http://schemas.openxmlformats.org/drawingml/2006/main">
               <a:ext uri="{FF2B5EF4-FFF2-40B4-BE49-F238E27FC236}">
-                <a16:creationId xmlns:a16="http://schemas.microsoft.com/office/drawing/2014/main" id="{3544AE9C-6FB3-4155-84F9-4EA42F4E9EA2}"/>
+                <a16:creationId xmlns:a16="http://schemas.microsoft.com/office/drawing/2014/main" id="{F9CD15B8-DC6B-49A4-8804-AC2F08A1F7E4}"/>
               </a:ext>
             </a:extLst>
           </p:cNvPr>
@@ -12241,7 +12241,7 @@
           <p:cNvPr id="11" name="Rounded Rectangle 10">
             <a:extLst xmlns:a="http://schemas.openxmlformats.org/drawingml/2006/main">
               <a:ext uri="{FF2B5EF4-FFF2-40B4-BE49-F238E27FC236}">
-                <a16:creationId xmlns:a16="http://schemas.microsoft.com/office/drawing/2014/main" id="{962A7B42-0718-40AD-9984-5FF4E0AE7021}"/>
+                <a16:creationId xmlns:a16="http://schemas.microsoft.com/office/drawing/2014/main" id="{D752EA50-445B-47D7-ACFB-B90381D03723}"/>
               </a:ext>
             </a:extLst>
           </p:cNvPr>
@@ -12298,7 +12298,7 @@
           <p:cNvPr id="12" name="TextBox 11">
             <a:extLst xmlns:a="http://schemas.openxmlformats.org/drawingml/2006/main">
               <a:ext uri="{FF2B5EF4-FFF2-40B4-BE49-F238E27FC236}">
-                <a16:creationId xmlns:a16="http://schemas.microsoft.com/office/drawing/2014/main" id="{BCD1922B-E52B-495E-93B5-5958900C797A}"/>
+                <a16:creationId xmlns:a16="http://schemas.microsoft.com/office/drawing/2014/main" id="{5C08E0E8-6489-4C61-839A-2634CA8191BC}"/>
               </a:ext>
             </a:extLst>
           </p:cNvPr>
@@ -12345,7 +12345,7 @@
           <p:cNvPr id="13" name="TextBox 12">
             <a:extLst xmlns:a="http://schemas.openxmlformats.org/drawingml/2006/main">
               <a:ext uri="{FF2B5EF4-FFF2-40B4-BE49-F238E27FC236}">
-                <a16:creationId xmlns:a16="http://schemas.microsoft.com/office/drawing/2014/main" id="{B8C2246C-71EB-434D-9640-FE2D4E350397}"/>
+                <a16:creationId xmlns:a16="http://schemas.microsoft.com/office/drawing/2014/main" id="{2054F7CE-970D-4721-9DC3-D3FF40AEC313}"/>
               </a:ext>
             </a:extLst>
           </p:cNvPr>
@@ -12392,7 +12392,7 @@
           <p:cNvPr id="14" name="Rounded Rectangle 13">
             <a:extLst xmlns:a="http://schemas.openxmlformats.org/drawingml/2006/main">
               <a:ext uri="{FF2B5EF4-FFF2-40B4-BE49-F238E27FC236}">
-                <a16:creationId xmlns:a16="http://schemas.microsoft.com/office/drawing/2014/main" id="{A9C4D120-2932-4BC1-BA88-48EFB11D50FF}"/>
+                <a16:creationId xmlns:a16="http://schemas.microsoft.com/office/drawing/2014/main" id="{C9F6CC4F-9D69-4008-8AEE-678336117404}"/>
               </a:ext>
             </a:extLst>
           </p:cNvPr>
@@ -12449,7 +12449,7 @@
           <p:cNvPr id="15" name="TextBox 14">
             <a:extLst xmlns:a="http://schemas.openxmlformats.org/drawingml/2006/main">
               <a:ext uri="{FF2B5EF4-FFF2-40B4-BE49-F238E27FC236}">
-                <a16:creationId xmlns:a16="http://schemas.microsoft.com/office/drawing/2014/main" id="{DF85FA31-15B9-4703-907C-EE8ED65B2C16}"/>
+                <a16:creationId xmlns:a16="http://schemas.microsoft.com/office/drawing/2014/main" id="{75C74991-DEB8-4437-987B-D13AB5EA34B6}"/>
               </a:ext>
             </a:extLst>
           </p:cNvPr>
@@ -12496,7 +12496,7 @@
           <p:cNvPr id="16" name="TextBox 15">
             <a:extLst xmlns:a="http://schemas.openxmlformats.org/drawingml/2006/main">
               <a:ext uri="{FF2B5EF4-FFF2-40B4-BE49-F238E27FC236}">
-                <a16:creationId xmlns:a16="http://schemas.microsoft.com/office/drawing/2014/main" id="{5CF704D4-36A6-4E08-857F-F737ECA6F1F8}"/>
+                <a16:creationId xmlns:a16="http://schemas.microsoft.com/office/drawing/2014/main" id="{5A9DB7D1-D150-4E8B-A709-BCF1861C7FCC}"/>
               </a:ext>
             </a:extLst>
           </p:cNvPr>
@@ -12543,7 +12543,7 @@
           <p:cNvPr id="17" name="TextBox 16">
             <a:extLst xmlns:a="http://schemas.openxmlformats.org/drawingml/2006/main">
               <a:ext uri="{FF2B5EF4-FFF2-40B4-BE49-F238E27FC236}">
-                <a16:creationId xmlns:a16="http://schemas.microsoft.com/office/drawing/2014/main" id="{382AEBE0-0882-4F28-9E7B-7F5F7E82C6C8}"/>
+                <a16:creationId xmlns:a16="http://schemas.microsoft.com/office/drawing/2014/main" id="{45C175A9-1E38-4FC8-822F-0FCB62652BF4}"/>
               </a:ext>
             </a:extLst>
           </p:cNvPr>
@@ -12590,7 +12590,7 @@
           <p:cNvPr id="18" name="Rounded Rectangle 17">
             <a:extLst xmlns:a="http://schemas.openxmlformats.org/drawingml/2006/main">
               <a:ext uri="{FF2B5EF4-FFF2-40B4-BE49-F238E27FC236}">
-                <a16:creationId xmlns:a16="http://schemas.microsoft.com/office/drawing/2014/main" id="{7AB1CD4B-A194-47BE-AA3B-0EEBB5908798}"/>
+                <a16:creationId xmlns:a16="http://schemas.microsoft.com/office/drawing/2014/main" id="{74BA918D-0BC7-4CA8-8299-2EF5F4B015ED}"/>
               </a:ext>
             </a:extLst>
           </p:cNvPr>
@@ -12647,7 +12647,7 @@
           <p:cNvPr id="19" name="TextBox 18">
             <a:extLst xmlns:a="http://schemas.openxmlformats.org/drawingml/2006/main">
               <a:ext uri="{FF2B5EF4-FFF2-40B4-BE49-F238E27FC236}">
-                <a16:creationId xmlns:a16="http://schemas.microsoft.com/office/drawing/2014/main" id="{36790649-E834-46C3-BCA1-52BF27CC25CA}"/>
+                <a16:creationId xmlns:a16="http://schemas.microsoft.com/office/drawing/2014/main" id="{C288A8C2-62C2-485D-BC18-9FED729C1A72}"/>
               </a:ext>
             </a:extLst>
           </p:cNvPr>
@@ -12694,7 +12694,7 @@
           <p:cNvPr id="20" name="TextBox 19">
             <a:extLst xmlns:a="http://schemas.openxmlformats.org/drawingml/2006/main">
               <a:ext uri="{FF2B5EF4-FFF2-40B4-BE49-F238E27FC236}">
-                <a16:creationId xmlns:a16="http://schemas.microsoft.com/office/drawing/2014/main" id="{E9F9FD77-1D5D-4440-8240-FE5EAAF296DA}"/>
+                <a16:creationId xmlns:a16="http://schemas.microsoft.com/office/drawing/2014/main" id="{4A611F69-C6AD-41C0-A3AE-67020162D290}"/>
               </a:ext>
             </a:extLst>
           </p:cNvPr>
@@ -12739,7 +12739,7 @@
     </p:spTree>
     <p:extLst>
       <p:ext uri="{BB962C8B-B14F-4D97-AF65-F5344CB8AC3E}">
-        <p14:creationId xmlns:p14="http://schemas.microsoft.com/office/powerpoint/2010/main" val="411953069"/>
+        <p14:creationId xmlns:p14="http://schemas.microsoft.com/office/powerpoint/2010/main" val="1716705759"/>
       </p:ext>
     </p:extLst>
   </p:cSld>
@@ -12763,7 +12763,7 @@
           <p:cNvPr id="2" name="TextBox 1">
             <a:extLst xmlns:a="http://schemas.openxmlformats.org/drawingml/2006/main">
               <a:ext uri="{FF2B5EF4-FFF2-40B4-BE49-F238E27FC236}">
-                <a16:creationId xmlns:a16="http://schemas.microsoft.com/office/drawing/2014/main" id="{207E836B-7E03-4265-B9EE-3B78F78DE2B7}"/>
+                <a16:creationId xmlns:a16="http://schemas.microsoft.com/office/drawing/2014/main" id="{0E8BF733-5FFC-46D2-B11D-D2E38D987925}"/>
               </a:ext>
             </a:extLst>
           </p:cNvPr>
@@ -12810,7 +12810,7 @@
           <p:cNvPr id="3" name="TextBox 2">
             <a:extLst xmlns:a="http://schemas.openxmlformats.org/drawingml/2006/main">
               <a:ext uri="{FF2B5EF4-FFF2-40B4-BE49-F238E27FC236}">
-                <a16:creationId xmlns:a16="http://schemas.microsoft.com/office/drawing/2014/main" id="{ACB84D4B-5841-4A37-819B-27287D6C2C32}"/>
+                <a16:creationId xmlns:a16="http://schemas.microsoft.com/office/drawing/2014/main" id="{50E529F1-7395-4A57-94D7-4537BDCDDCF5}"/>
               </a:ext>
             </a:extLst>
           </p:cNvPr>
@@ -12857,7 +12857,7 @@
           <p:cNvPr id="4" name="Rectangle 3">
             <a:extLst xmlns:a="http://schemas.openxmlformats.org/drawingml/2006/main">
               <a:ext uri="{FF2B5EF4-FFF2-40B4-BE49-F238E27FC236}">
-                <a16:creationId xmlns:a16="http://schemas.microsoft.com/office/drawing/2014/main" id="{688B3126-0687-4BB0-B36C-1BF6B786FD65}"/>
+                <a16:creationId xmlns:a16="http://schemas.microsoft.com/office/drawing/2014/main" id="{B6E97CBD-F46E-4D66-B738-3BD3832E5C5C}"/>
               </a:ext>
             </a:extLst>
           </p:cNvPr>
@@ -12912,7 +12912,7 @@
           <p:cNvPr id="5" name="Rectangle 4">
             <a:extLst xmlns:a="http://schemas.openxmlformats.org/drawingml/2006/main">
               <a:ext uri="{FF2B5EF4-FFF2-40B4-BE49-F238E27FC236}">
-                <a16:creationId xmlns:a16="http://schemas.microsoft.com/office/drawing/2014/main" id="{BBF38139-5520-4AA3-9A87-54EA8B34F5C3}"/>
+                <a16:creationId xmlns:a16="http://schemas.microsoft.com/office/drawing/2014/main" id="{6FD4692C-33D4-4053-B6C3-7F48CE5B2378}"/>
               </a:ext>
             </a:extLst>
           </p:cNvPr>
@@ -12967,7 +12967,7 @@
           <p:cNvPr id="6" name="TextBox 5">
             <a:extLst xmlns:a="http://schemas.openxmlformats.org/drawingml/2006/main">
               <a:ext uri="{FF2B5EF4-FFF2-40B4-BE49-F238E27FC236}">
-                <a16:creationId xmlns:a16="http://schemas.microsoft.com/office/drawing/2014/main" id="{DCD3B5A9-FECE-476C-8BD7-D3DCA176ACB2}"/>
+                <a16:creationId xmlns:a16="http://schemas.microsoft.com/office/drawing/2014/main" id="{2CF9F566-A525-4EB2-B619-3EB393EB5DC6}"/>
               </a:ext>
             </a:extLst>
           </p:cNvPr>
@@ -13004,7 +13004,7 @@
                 <a:ea typeface="Aptos"/>
                 <a:cs typeface="Aptos"/>
               </a:rPr>
-              <a:t>Julkinen riippumaton evidenssikooste · 2026.07.24-20 · 2026-07-24 · Lähteet: WIPO licensing; WIPO IP Finance</a:t>
+              <a:t>Julkinen riippumaton evidenssikooste · 2026.07.24-21 · 2026-07-24 · Lähteet: WIPO licensing; WIPO IP Finance</a:t>
             </a:r>
           </a:p>
         </p:txBody>
@@ -13014,7 +13014,7 @@
           <p:cNvPr id="7" name="TextBox 6">
             <a:extLst xmlns:a="http://schemas.openxmlformats.org/drawingml/2006/main">
               <a:ext uri="{FF2B5EF4-FFF2-40B4-BE49-F238E27FC236}">
-                <a16:creationId xmlns:a16="http://schemas.microsoft.com/office/drawing/2014/main" id="{B3A23544-2DB8-4D09-96E9-90ACDA36A094}"/>
+                <a16:creationId xmlns:a16="http://schemas.microsoft.com/office/drawing/2014/main" id="{FC917A93-7125-4B45-8CB5-5EBCE30ADB2D}"/>
               </a:ext>
             </a:extLst>
           </p:cNvPr>
@@ -13061,7 +13061,7 @@
           <p:cNvPr id="8" name="TextBox 7">
             <a:extLst xmlns:a="http://schemas.openxmlformats.org/drawingml/2006/main">
               <a:ext uri="{FF2B5EF4-FFF2-40B4-BE49-F238E27FC236}">
-                <a16:creationId xmlns:a16="http://schemas.microsoft.com/office/drawing/2014/main" id="{46DF1FDD-B6A8-4034-903A-EC16CE231ABC}"/>
+                <a16:creationId xmlns:a16="http://schemas.microsoft.com/office/drawing/2014/main" id="{3627016D-D92B-4F88-A64D-35A91978174E}"/>
               </a:ext>
             </a:extLst>
           </p:cNvPr>
@@ -13108,7 +13108,7 @@
           <p:cNvPr id="9" name="TextBox 8">
             <a:extLst xmlns:a="http://schemas.openxmlformats.org/drawingml/2006/main">
               <a:ext uri="{FF2B5EF4-FFF2-40B4-BE49-F238E27FC236}">
-                <a16:creationId xmlns:a16="http://schemas.microsoft.com/office/drawing/2014/main" id="{CC183BED-A404-45A9-B3C6-2F3F282F6150}"/>
+                <a16:creationId xmlns:a16="http://schemas.microsoft.com/office/drawing/2014/main" id="{7C94D4DE-7D09-44EE-835B-392E9A1DF4DC}"/>
               </a:ext>
             </a:extLst>
           </p:cNvPr>
@@ -13205,7 +13205,7 @@
           <p:cNvPr id="10" name="Rounded Rectangle 9">
             <a:extLst xmlns:a="http://schemas.openxmlformats.org/drawingml/2006/main">
               <a:ext uri="{FF2B5EF4-FFF2-40B4-BE49-F238E27FC236}">
-                <a16:creationId xmlns:a16="http://schemas.microsoft.com/office/drawing/2014/main" id="{C93D8357-9891-406A-AD04-F5FE73D8692C}"/>
+                <a16:creationId xmlns:a16="http://schemas.microsoft.com/office/drawing/2014/main" id="{B5DDF4A5-2790-4B8E-94EA-76333FB0F824}"/>
               </a:ext>
             </a:extLst>
           </p:cNvPr>
@@ -13262,7 +13262,7 @@
           <p:cNvPr id="11" name="TextBox 10">
             <a:extLst xmlns:a="http://schemas.openxmlformats.org/drawingml/2006/main">
               <a:ext uri="{FF2B5EF4-FFF2-40B4-BE49-F238E27FC236}">
-                <a16:creationId xmlns:a16="http://schemas.microsoft.com/office/drawing/2014/main" id="{E43EF8C8-9DFD-4501-9302-0D4572E3A5E9}"/>
+                <a16:creationId xmlns:a16="http://schemas.microsoft.com/office/drawing/2014/main" id="{C63B25DD-7111-4263-A111-9CCEE896C376}"/>
               </a:ext>
             </a:extLst>
           </p:cNvPr>
@@ -13309,7 +13309,7 @@
           <p:cNvPr id="12" name="TextBox 11">
             <a:extLst xmlns:a="http://schemas.openxmlformats.org/drawingml/2006/main">
               <a:ext uri="{FF2B5EF4-FFF2-40B4-BE49-F238E27FC236}">
-                <a16:creationId xmlns:a16="http://schemas.microsoft.com/office/drawing/2014/main" id="{2572812C-EA03-44BA-BE72-4EDEC6DE2C75}"/>
+                <a16:creationId xmlns:a16="http://schemas.microsoft.com/office/drawing/2014/main" id="{8A37B54D-E1A1-4BAA-A1C9-8896C095DBA2}"/>
               </a:ext>
             </a:extLst>
           </p:cNvPr>
@@ -13354,7 +13354,7 @@
     </p:spTree>
     <p:extLst>
       <p:ext uri="{BB962C8B-B14F-4D97-AF65-F5344CB8AC3E}">
-        <p14:creationId xmlns:p14="http://schemas.microsoft.com/office/powerpoint/2010/main" val="52129443"/>
+        <p14:creationId xmlns:p14="http://schemas.microsoft.com/office/powerpoint/2010/main" val="1002881442"/>
       </p:ext>
     </p:extLst>
   </p:cSld>
@@ -13378,7 +13378,7 @@
           <p:cNvPr id="2" name="TextBox 1">
             <a:extLst xmlns:a="http://schemas.openxmlformats.org/drawingml/2006/main">
               <a:ext uri="{FF2B5EF4-FFF2-40B4-BE49-F238E27FC236}">
-                <a16:creationId xmlns:a16="http://schemas.microsoft.com/office/drawing/2014/main" id="{D4359227-7F88-44AB-9191-D52892ADF882}"/>
+                <a16:creationId xmlns:a16="http://schemas.microsoft.com/office/drawing/2014/main" id="{1C148498-974C-41C7-AFC3-64F8899B6DD9}"/>
               </a:ext>
             </a:extLst>
           </p:cNvPr>
@@ -13425,7 +13425,7 @@
           <p:cNvPr id="3" name="TextBox 2">
             <a:extLst xmlns:a="http://schemas.openxmlformats.org/drawingml/2006/main">
               <a:ext uri="{FF2B5EF4-FFF2-40B4-BE49-F238E27FC236}">
-                <a16:creationId xmlns:a16="http://schemas.microsoft.com/office/drawing/2014/main" id="{FE7E0ECB-5698-42F5-B7C9-B92F7646414F}"/>
+                <a16:creationId xmlns:a16="http://schemas.microsoft.com/office/drawing/2014/main" id="{09944026-9A5D-4393-8648-DE7248759F03}"/>
               </a:ext>
             </a:extLst>
           </p:cNvPr>
@@ -13472,7 +13472,7 @@
           <p:cNvPr id="4" name="Rectangle 3">
             <a:extLst xmlns:a="http://schemas.openxmlformats.org/drawingml/2006/main">
               <a:ext uri="{FF2B5EF4-FFF2-40B4-BE49-F238E27FC236}">
-                <a16:creationId xmlns:a16="http://schemas.microsoft.com/office/drawing/2014/main" id="{EB3AE76A-B1B6-4EC2-A56C-765C18DE2625}"/>
+                <a16:creationId xmlns:a16="http://schemas.microsoft.com/office/drawing/2014/main" id="{C33F3717-3B77-4FDC-A7E2-A17BAC779107}"/>
               </a:ext>
             </a:extLst>
           </p:cNvPr>
@@ -13527,7 +13527,7 @@
           <p:cNvPr id="5" name="Rectangle 4">
             <a:extLst xmlns:a="http://schemas.openxmlformats.org/drawingml/2006/main">
               <a:ext uri="{FF2B5EF4-FFF2-40B4-BE49-F238E27FC236}">
-                <a16:creationId xmlns:a16="http://schemas.microsoft.com/office/drawing/2014/main" id="{D9D1902A-2CF6-4ED0-88AF-01BF0017663A}"/>
+                <a16:creationId xmlns:a16="http://schemas.microsoft.com/office/drawing/2014/main" id="{65F9CDC2-C464-4CC8-BE7F-64BD7070A37E}"/>
               </a:ext>
             </a:extLst>
           </p:cNvPr>
@@ -13582,7 +13582,7 @@
           <p:cNvPr id="6" name="TextBox 5">
             <a:extLst xmlns:a="http://schemas.openxmlformats.org/drawingml/2006/main">
               <a:ext uri="{FF2B5EF4-FFF2-40B4-BE49-F238E27FC236}">
-                <a16:creationId xmlns:a16="http://schemas.microsoft.com/office/drawing/2014/main" id="{A970AE88-D496-4AC8-B079-B7626A6D0A34}"/>
+                <a16:creationId xmlns:a16="http://schemas.microsoft.com/office/drawing/2014/main" id="{878EAA1A-B204-4DF4-B2B1-1547C4CA5B23}"/>
               </a:ext>
             </a:extLst>
           </p:cNvPr>
@@ -13619,7 +13619,7 @@
                 <a:ea typeface="Aptos"/>
                 <a:cs typeface="Aptos"/>
               </a:rPr>
-              <a:t>Julkinen riippumaton evidenssikooste · 2026.07.24-20 · 2026-07-24 · Lähteet: Evidence Register; EPO; WIPO</a:t>
+              <a:t>Julkinen riippumaton evidenssikooste · 2026.07.24-21 · 2026-07-24 · Lähteet: Evidence Register; EPO; WIPO</a:t>
             </a:r>
           </a:p>
         </p:txBody>
@@ -13629,7 +13629,7 @@
           <p:cNvPr id="7" name="TextBox 6">
             <a:extLst xmlns:a="http://schemas.openxmlformats.org/drawingml/2006/main">
               <a:ext uri="{FF2B5EF4-FFF2-40B4-BE49-F238E27FC236}">
-                <a16:creationId xmlns:a16="http://schemas.microsoft.com/office/drawing/2014/main" id="{D19C9254-687E-446B-9C76-54409344C9CB}"/>
+                <a16:creationId xmlns:a16="http://schemas.microsoft.com/office/drawing/2014/main" id="{94FCB16C-005B-49BB-B070-A34D835F950C}"/>
               </a:ext>
             </a:extLst>
           </p:cNvPr>
@@ -14116,7 +14116,7 @@
           <p:cNvPr id="9" name="TextBox 8">
             <a:extLst xmlns:a="http://schemas.openxmlformats.org/drawingml/2006/main">
               <a:ext uri="{FF2B5EF4-FFF2-40B4-BE49-F238E27FC236}">
-                <a16:creationId xmlns:a16="http://schemas.microsoft.com/office/drawing/2014/main" id="{283615A1-53FE-45B9-9D76-68CE718D582B}"/>
+                <a16:creationId xmlns:a16="http://schemas.microsoft.com/office/drawing/2014/main" id="{06D2EDDE-680F-44D3-8BC1-477B0414EBAC}"/>
               </a:ext>
             </a:extLst>
           </p:cNvPr>
@@ -14161,7 +14161,7 @@
     </p:spTree>
     <p:extLst>
       <p:ext uri="{BB962C8B-B14F-4D97-AF65-F5344CB8AC3E}">
-        <p14:creationId xmlns:p14="http://schemas.microsoft.com/office/powerpoint/2010/main" val="1663648240"/>
+        <p14:creationId xmlns:p14="http://schemas.microsoft.com/office/powerpoint/2010/main" val="1394092572"/>
       </p:ext>
     </p:extLst>
   </p:cSld>
@@ -14185,7 +14185,7 @@
           <p:cNvPr id="2" name="TextBox 1">
             <a:extLst xmlns:a="http://schemas.openxmlformats.org/drawingml/2006/main">
               <a:ext uri="{FF2B5EF4-FFF2-40B4-BE49-F238E27FC236}">
-                <a16:creationId xmlns:a16="http://schemas.microsoft.com/office/drawing/2014/main" id="{1F35D10F-3156-4BBD-B7E9-18CFDB5F9BF0}"/>
+                <a16:creationId xmlns:a16="http://schemas.microsoft.com/office/drawing/2014/main" id="{B07741EF-7F01-4E3B-BB53-85ECD3ECB59E}"/>
               </a:ext>
             </a:extLst>
           </p:cNvPr>
@@ -14232,7 +14232,7 @@
           <p:cNvPr id="3" name="TextBox 2">
             <a:extLst xmlns:a="http://schemas.openxmlformats.org/drawingml/2006/main">
               <a:ext uri="{FF2B5EF4-FFF2-40B4-BE49-F238E27FC236}">
-                <a16:creationId xmlns:a16="http://schemas.microsoft.com/office/drawing/2014/main" id="{44CDB67F-EA6F-4B0B-967F-BF51BF8E7B37}"/>
+                <a16:creationId xmlns:a16="http://schemas.microsoft.com/office/drawing/2014/main" id="{D5E49142-D2D2-4991-8634-79BEB708E474}"/>
               </a:ext>
             </a:extLst>
           </p:cNvPr>
@@ -14279,7 +14279,7 @@
           <p:cNvPr id="4" name="Rectangle 3">
             <a:extLst xmlns:a="http://schemas.openxmlformats.org/drawingml/2006/main">
               <a:ext uri="{FF2B5EF4-FFF2-40B4-BE49-F238E27FC236}">
-                <a16:creationId xmlns:a16="http://schemas.microsoft.com/office/drawing/2014/main" id="{80636AA9-136A-4FA9-BE87-C06786BB56D7}"/>
+                <a16:creationId xmlns:a16="http://schemas.microsoft.com/office/drawing/2014/main" id="{44FA412F-64C3-4643-B313-85958014BA88}"/>
               </a:ext>
             </a:extLst>
           </p:cNvPr>
@@ -14334,7 +14334,7 @@
           <p:cNvPr id="5" name="Rectangle 4">
             <a:extLst xmlns:a="http://schemas.openxmlformats.org/drawingml/2006/main">
               <a:ext uri="{FF2B5EF4-FFF2-40B4-BE49-F238E27FC236}">
-                <a16:creationId xmlns:a16="http://schemas.microsoft.com/office/drawing/2014/main" id="{B9830B18-6EDF-4F50-B1EB-526B0CF716CF}"/>
+                <a16:creationId xmlns:a16="http://schemas.microsoft.com/office/drawing/2014/main" id="{A52A9F84-6724-4869-B0EB-E67DC541B406}"/>
               </a:ext>
             </a:extLst>
           </p:cNvPr>
@@ -14389,7 +14389,7 @@
           <p:cNvPr id="6" name="TextBox 5">
             <a:extLst xmlns:a="http://schemas.openxmlformats.org/drawingml/2006/main">
               <a:ext uri="{FF2B5EF4-FFF2-40B4-BE49-F238E27FC236}">
-                <a16:creationId xmlns:a16="http://schemas.microsoft.com/office/drawing/2014/main" id="{1D1706E1-0885-458F-BA19-645A7FF185D2}"/>
+                <a16:creationId xmlns:a16="http://schemas.microsoft.com/office/drawing/2014/main" id="{090F86A0-92AF-4168-9240-C9929D3FE72F}"/>
               </a:ext>
             </a:extLst>
           </p:cNvPr>
@@ -14426,7 +14426,7 @@
                 <a:ea typeface="Aptos"/>
                 <a:cs typeface="Aptos"/>
               </a:rPr>
-              <a:t>Julkinen riippumaton evidenssikooste · 2026.07.24-20 · 2026-07-24 · Lähteet: Evidence Register</a:t>
+              <a:t>Julkinen riippumaton evidenssikooste · 2026.07.24-21 · 2026-07-24 · Lähteet: Evidence Register</a:t>
             </a:r>
           </a:p>
         </p:txBody>
@@ -14436,7 +14436,7 @@
           <p:cNvPr id="7" name="TextBox 6">
             <a:extLst xmlns:a="http://schemas.openxmlformats.org/drawingml/2006/main">
               <a:ext uri="{FF2B5EF4-FFF2-40B4-BE49-F238E27FC236}">
-                <a16:creationId xmlns:a16="http://schemas.microsoft.com/office/drawing/2014/main" id="{9F8F9EF5-60AD-476B-8AB6-D596EF7D8A4B}"/>
+                <a16:creationId xmlns:a16="http://schemas.microsoft.com/office/drawing/2014/main" id="{A89B2518-8A4C-4CFE-B85D-E112A3D8EDEC}"/>
               </a:ext>
             </a:extLst>
           </p:cNvPr>
@@ -15169,7 +15169,7 @@
           <p:cNvPr id="9" name="TextBox 8">
             <a:extLst xmlns:a="http://schemas.openxmlformats.org/drawingml/2006/main">
               <a:ext uri="{FF2B5EF4-FFF2-40B4-BE49-F238E27FC236}">
-                <a16:creationId xmlns:a16="http://schemas.microsoft.com/office/drawing/2014/main" id="{F551A14A-8061-4F91-9B48-E2D54B03334C}"/>
+                <a16:creationId xmlns:a16="http://schemas.microsoft.com/office/drawing/2014/main" id="{361E772E-B4CF-4F42-8637-FCDBF496C51B}"/>
               </a:ext>
             </a:extLst>
           </p:cNvPr>
@@ -15214,7 +15214,7 @@
     </p:spTree>
     <p:extLst>
       <p:ext uri="{BB962C8B-B14F-4D97-AF65-F5344CB8AC3E}">
-        <p14:creationId xmlns:p14="http://schemas.microsoft.com/office/powerpoint/2010/main" val="2086974007"/>
+        <p14:creationId xmlns:p14="http://schemas.microsoft.com/office/powerpoint/2010/main" val="1093361747"/>
       </p:ext>
     </p:extLst>
   </p:cSld>
